--- a/downloads/presentations/modules/lesson-47-ai-governance-charter-and-operating-model.pptx
+++ b/downloads/presentations/modules/lesson-47-ai-governance-charter-and-operating-model.pptx
@@ -24,9 +24,11 @@
     <p:sldId id="272" r:id="rId18"/>
     <p:sldId id="273" r:id="rId19"/>
     <p:sldId id="274" r:id="rId20"/>
+    <p:sldId id="275" r:id="rId21"/>
+    <p:sldId id="276" r:id="rId22"/>
   </p:sldIdLst>
   <p:notesMasterIdLst>
-    <p:notesMasterId r:id="rId21"/>
+    <p:notesMasterId r:id="rId23"/>
   </p:notesMasterIdLst>
   <p:sldSz cx="12192000" cy="6858000"/>
   <p:notesSz cx="6858000" cy="12192000"/>
@@ -609,8 +611,10 @@
           <a:p>
             <a:r>
               <a:rPr lang="en-US" dirty="0"/>
-              <a:t>Application to AI-Supported Workflows
-Generative AI governance should define approved tools, prohibited data, review expectations, and when outputs may be used externally. Predictive model governance should require validation, subgroup performance review, monitoring, and clear limits on decision use. Agentic AI governance should define allowed actions, approval checkpoints, logging, rollback procedures, and incident triggers. In each case, the charter gives the agency a repeatable way to make and document decisions.</a:t>
+              <a:t>Technical and Governance Deep Dive
+A strong governance charter begins with purpose and scope. Purpose explains why the governance body exists, such as protecting public trust, supporting responsible innovation, aligning AI investments with agency priorities, and managing risk across the AI lifecycle. Scope explains what falls under the governance process. For public health, scope should include internally developed AI tools, vendor AI products, generative AI tools, predictive models, agentic workflows, AI features embedded in existing software, and AI-supported uses of sensitive or operational data.
+The operating model should define roles clearly. An executive sponsor provides authority and connects governance to agency strategy. A governance chair manages the review process. Privacy, legal, cybersecurity, equity, procurement, records, program, data, and informatics representatives bring specialized review perspectives. Technical reviewers assess architecture, validation, interoperability, security, and monitoring. Program owners remain responsible for the public health workflow and for ensuring that AI supports, rather than replaces, appropriate judgment.
+The model should also define the life of an AI use case. Intake captures the proposed use, data involved, intended users, expected benefits, risks, and requested decision. Triage determines the review level. Governance review evaluates authority, data use, privacy, equity, security, accessibility, technical readiness, validation, procurement, and monitoring. Approval should include conditions, documentation requirements, and an owner. Post-approval oversight should review performance, incidents, changes, and whether the use case should continue.</a:t>
             </a:r>
             <a:endParaRPr lang="en-US" dirty="0"/>
           </a:p>
@@ -698,10 +702,9 @@
           <a:p>
             <a:r>
               <a:rPr lang="en-US" dirty="0"/>
-              <a:t>Reflection Questions
-Which current or proposed AI use case in your agency raises this leadership or governance issue most clearly?
-Who currently has authority to make decisions about this issue, and is that authority documented?
-What evidence would governance or leadership need before approving the use case?</a:t>
+              <a:t>Risks, Failure Modes, and Guardrails
+A common failure mode is governance that exists only on paper. A charter may sound strong, but if staff do not know when to submit use cases, who decides, or what evidence is required, AI decisions will still happen informally. A practical guardrail is to create a simple intake form, review rubric, meeting cadence, decision log, and escalation pathway.
+Another failure mode is over-centralization. If every minor use requires extensive review, staff may avoid the process or use unapproved tools. Governance should be tiered so low-risk uses move quickly while high-impact uses receive deeper review. This balance helps the agency support innovation while protecting public health values and obligations.</a:t>
             </a:r>
             <a:endParaRPr lang="en-US" dirty="0"/>
           </a:p>
@@ -789,9 +792,8 @@
           <a:p>
             <a:r>
               <a:rPr lang="en-US" dirty="0"/>
-              <a:t>Reflection Questions
-Which staff, partners, or communities would be affected if this issue were handled poorly?
-What policy, process, or artifact should be created or updated after this module?</a:t>
+              <a:t>Application to AI-Supported Workflows
+Generative AI governance should define approved tools, prohibited data, review expectations, and when outputs may be used externally. Predictive model governance should require validation, subgroup performance review, monitoring, and clear limits on decision use. Agentic AI governance should define allowed actions, approval checkpoints, logging, rollback procedures, and incident triggers. In each case, the charter gives the agency a repeatable way to make and document decisions.</a:t>
             </a:r>
             <a:endParaRPr lang="en-US" dirty="0"/>
           </a:p>
@@ -879,8 +881,10 @@
           <a:p>
             <a:r>
               <a:rPr lang="en-US" dirty="0"/>
-              <a:t>Practical Exercise
-Draft a one-page AI governance charter and a one-page operating model. Include scope, membership, review levels, decision rights, documentation, escalation, monitoring, and meeting cadence.</a:t>
+              <a:t>Reflection Questions
+Which current or proposed AI use case in your agency raises this leadership or governance issue most clearly?
+Who currently has authority to make decisions about this issue, and is that authority documented?
+What evidence would governance or leadership need before approving the use case?</a:t>
             </a:r>
             <a:endParaRPr lang="en-US" dirty="0"/>
           </a:p>
@@ -968,8 +972,9 @@
           <a:p>
             <a:r>
               <a:rPr lang="en-US" dirty="0"/>
-              <a:t>Before You Begin
-Choose a real or realistic public health AI use case. Document assumptions, unresolved questions, and which agency roles would need to review the artifact before it is adopted. The exercise should produce a work product that could support governance review, leadership discussion, implementation planning, or policy development.</a:t>
+              <a:t>Reflection Questions
+Which staff, partners, or communities would be affected if this issue were handled poorly?
+What policy, process, or artifact should be created or updated after this module?</a:t>
             </a:r>
             <a:endParaRPr lang="en-US" dirty="0"/>
           </a:p>
@@ -1057,8 +1062,8 @@
           <a:p>
             <a:r>
               <a:rPr lang="en-US" dirty="0"/>
-              <a:t>Expected Artifact or Evidence
-Draft AI governance charter; governance operating model; intake and decision-flow diagram; list of unresolved policy questions.</a:t>
+              <a:t>Practical Exercise
+Draft a one-page AI governance charter and a one-page operating model. Include scope, membership, review levels, decision rights, documentation, escalation, monitoring, and meeting cadence.</a:t>
             </a:r>
             <a:endParaRPr lang="en-US" dirty="0"/>
           </a:p>
@@ -1146,8 +1151,8 @@
           <a:p>
             <a:r>
               <a:rPr lang="en-US" dirty="0"/>
-              <a:t>Expected Assignment
-Draft AI governance charter; governance operating model; intake and decision-flow diagram; list of unresolved policy questions.</a:t>
+              <a:t>Before You Begin
+Choose a real or realistic public health AI use case. Document assumptions, unresolved questions, and which agency roles would need to review the artifact before it is adopted. The exercise should produce a work product that could support governance review, leadership discussion, implementation planning, or policy development.</a:t>
             </a:r>
             <a:endParaRPr lang="en-US" dirty="0"/>
           </a:p>
@@ -1235,12 +1240,8 @@
           <a:p>
             <a:r>
               <a:rPr lang="en-US" dirty="0"/>
-              <a:t>Knowledge Check
-1. What is the strongest reason this module topic belongs in AI leadership and governance training?
-2. Which practice best supports accountable public health AI governance?
-3. When should an AI use case be escalated for leadership or governance review?
-4. What is weak evidence of completion for a leadership and governance module?
-5. What should leaders do when an AI use case has meaningful benefits but unresolved risks?</a:t>
+              <a:t>Expected Artifact or Evidence
+Draft AI governance charter; governance operating model; intake and decision-flow diagram; list of unresolved policy questions.</a:t>
             </a:r>
             <a:endParaRPr lang="en-US" dirty="0"/>
           </a:p>
@@ -1328,12 +1329,8 @@
           <a:p>
             <a:r>
               <a:rPr lang="en-US" dirty="0"/>
-              <a:t>References and Resources
-NIST Artificial Intelligence Risk Management Framework (AI RMF 1.0): https://www.nist.gov/itl/ai-risk-management-framework
-NIST Generative AI Profile: https://www.nist.gov/publications/artificial-intelligence-risk-management-framework-generative-artificial-intelligence
-NIST Privacy Framework
-CDC Public Health Data Strategy and Data Modernization resources: https://www.cdc.gov/public-health-data-strategy/php/about/index.html
-WHO Ethics and Governance of Artificial Intelligence for Health: https://www.who.int/publications/i/item/9789240029200</a:t>
+              <a:t>Expected Assignment
+Draft AI governance charter; governance operating model; intake and decision-flow diagram; list of unresolved policy questions.</a:t>
             </a:r>
             <a:endParaRPr lang="en-US" dirty="0"/>
           </a:p>
@@ -1421,9 +1418,12 @@
           <a:p>
             <a:r>
               <a:rPr lang="en-US" dirty="0"/>
-              <a:t>References and Resources
-OMB Memorandum M-24-10 on federal AI governance, risk management, and innovation, where relevant to public-sector governance models
-Agency strategic plans, procurement policies, privacy policies, cybersecurity policies, records policies, and equity plans</a:t>
+              <a:t>Knowledge Check
+1. What is the strongest reason this module topic belongs in AI leadership and governance training?
+2. Which practice best supports accountable public health AI governance?
+3. When should an AI use case be escalated for leadership or governance review?
+4. What is weak evidence of completion for a leadership and governance module?
+5. What should leaders do when an AI use case has meaningful benefits but unresolved risks?</a:t>
             </a:r>
             <a:endParaRPr lang="en-US" dirty="0"/>
           </a:p>
@@ -1557,6 +1557,189 @@
 </p:notes>
 </file>
 
+<file path=ppt/notesSlides/notesSlide20.xml><?xml version="1.0" encoding="utf-8"?>
+<p:notes xmlns:a="http://schemas.openxmlformats.org/drawingml/2006/main" xmlns:r="http://schemas.openxmlformats.org/officeDocument/2006/relationships" xmlns:p="http://schemas.openxmlformats.org/presentationml/2006/main">
+  <p:cSld>
+    <p:spTree>
+      <p:nvGrpSpPr>
+        <p:cNvPr id="1" name=""/>
+        <p:cNvGrpSpPr/>
+        <p:nvPr/>
+      </p:nvGrpSpPr>
+      <p:grpSpPr>
+        <a:xfrm>
+          <a:off x="0" y="0"/>
+          <a:ext cx="0" cy="0"/>
+          <a:chOff x="0" y="0"/>
+          <a:chExt cx="0" cy="0"/>
+        </a:xfrm>
+      </p:grpSpPr>
+      <p:sp>
+        <p:nvSpPr>
+          <p:cNvPr id="2" name="Slide Image Placeholder 1"/>
+          <p:cNvSpPr>
+            <a:spLocks noGrp="1" noRot="1" noChangeAspect="1"/>
+          </p:cNvSpPr>
+          <p:nvPr>
+            <p:ph type="sldImg"/>
+          </p:nvPr>
+        </p:nvSpPr>
+        <p:spPr/>
+      </p:sp>
+      <p:sp>
+        <p:nvSpPr>
+          <p:cNvPr id="3" name="Notes Placeholder 2"/>
+          <p:cNvSpPr>
+            <a:spLocks noGrp="1"/>
+          </p:cNvSpPr>
+          <p:nvPr>
+            <p:ph type="body" idx="1"/>
+          </p:nvPr>
+        </p:nvSpPr>
+        <p:spPr/>
+        <p:txBody>
+          <a:bodyPr/>
+          <a:lstStyle/>
+          <a:p>
+            <a:r>
+              <a:rPr lang="en-US" dirty="0"/>
+              <a:t>References and Resources
+NIST Artificial Intelligence Risk Management Framework (AI RMF 1.0): https://www.nist.gov/itl/ai-risk-management-framework
+NIST Generative AI Profile: https://www.nist.gov/publications/artificial-intelligence-risk-management-framework-generative-artificial-intelligence
+NIST Privacy Framework
+CDC Public Health Data Strategy and Data Modernization resources: https://www.cdc.gov/public-health-data-strategy/php/about/index.html
+WHO Ethics and Governance of Artificial Intelligence for Health: https://www.who.int/publications/i/item/9789240029200</a:t>
+            </a:r>
+            <a:endParaRPr lang="en-US" dirty="0"/>
+          </a:p>
+        </p:txBody>
+      </p:sp>
+      <p:sp>
+        <p:nvSpPr>
+          <p:cNvPr id="4" name="Slide Number Placeholder 3"/>
+          <p:cNvSpPr>
+            <a:spLocks noGrp="1"/>
+          </p:cNvSpPr>
+          <p:nvPr>
+            <p:ph type="sldNum" sz="quarter" idx="10"/>
+          </p:nvPr>
+        </p:nvSpPr>
+        <p:spPr/>
+        <p:txBody>
+          <a:bodyPr/>
+          <a:lstStyle/>
+          <a:p>
+            <a:fld id="{F7021451-1387-4CA6-816F-3879F97B5CBC}" type="slidenum">
+              <a:rPr lang="en-US"/>
+              <a:t>20</a:t>
+            </a:fld>
+            <a:endParaRPr lang="en-US"/>
+          </a:p>
+        </p:txBody>
+      </p:sp>
+    </p:spTree>
+    <p:extLst>
+      <p:ext uri="{BB962C8B-B14F-4D97-AF65-F5344CB8AC3E}">
+        <p14:creationId xmlns:p14="http://schemas.microsoft.com/office/powerpoint/2010/main" val="1024086991"/>
+      </p:ext>
+    </p:extLst>
+  </p:cSld>
+  <p:clrMapOvr>
+    <a:masterClrMapping/>
+  </p:clrMapOvr>
+</p:notes>
+</file>
+
+<file path=ppt/notesSlides/notesSlide21.xml><?xml version="1.0" encoding="utf-8"?>
+<p:notes xmlns:a="http://schemas.openxmlformats.org/drawingml/2006/main" xmlns:r="http://schemas.openxmlformats.org/officeDocument/2006/relationships" xmlns:p="http://schemas.openxmlformats.org/presentationml/2006/main">
+  <p:cSld>
+    <p:spTree>
+      <p:nvGrpSpPr>
+        <p:cNvPr id="1" name=""/>
+        <p:cNvGrpSpPr/>
+        <p:nvPr/>
+      </p:nvGrpSpPr>
+      <p:grpSpPr>
+        <a:xfrm>
+          <a:off x="0" y="0"/>
+          <a:ext cx="0" cy="0"/>
+          <a:chOff x="0" y="0"/>
+          <a:chExt cx="0" cy="0"/>
+        </a:xfrm>
+      </p:grpSpPr>
+      <p:sp>
+        <p:nvSpPr>
+          <p:cNvPr id="2" name="Slide Image Placeholder 1"/>
+          <p:cNvSpPr>
+            <a:spLocks noGrp="1" noRot="1" noChangeAspect="1"/>
+          </p:cNvSpPr>
+          <p:nvPr>
+            <p:ph type="sldImg"/>
+          </p:nvPr>
+        </p:nvSpPr>
+        <p:spPr/>
+      </p:sp>
+      <p:sp>
+        <p:nvSpPr>
+          <p:cNvPr id="3" name="Notes Placeholder 2"/>
+          <p:cNvSpPr>
+            <a:spLocks noGrp="1"/>
+          </p:cNvSpPr>
+          <p:nvPr>
+            <p:ph type="body" idx="1"/>
+          </p:nvPr>
+        </p:nvSpPr>
+        <p:spPr/>
+        <p:txBody>
+          <a:bodyPr/>
+          <a:lstStyle/>
+          <a:p>
+            <a:r>
+              <a:rPr lang="en-US" dirty="0"/>
+              <a:t>References and Resources
+OMB Memorandum M-24-10 on federal AI governance, risk management, and innovation, where relevant to public-sector governance models
+Agency strategic plans, procurement policies, privacy policies, cybersecurity policies, records policies, and equity plans</a:t>
+            </a:r>
+            <a:endParaRPr lang="en-US" dirty="0"/>
+          </a:p>
+        </p:txBody>
+      </p:sp>
+      <p:sp>
+        <p:nvSpPr>
+          <p:cNvPr id="4" name="Slide Number Placeholder 3"/>
+          <p:cNvSpPr>
+            <a:spLocks noGrp="1"/>
+          </p:cNvSpPr>
+          <p:nvPr>
+            <p:ph type="sldNum" sz="quarter" idx="10"/>
+          </p:nvPr>
+        </p:nvSpPr>
+        <p:spPr/>
+        <p:txBody>
+          <a:bodyPr/>
+          <a:lstStyle/>
+          <a:p>
+            <a:fld id="{F7021451-1387-4CA6-816F-3879F97B5CBC}" type="slidenum">
+              <a:rPr lang="en-US"/>
+              <a:t>21</a:t>
+            </a:fld>
+            <a:endParaRPr lang="en-US"/>
+          </a:p>
+        </p:txBody>
+      </p:sp>
+    </p:spTree>
+    <p:extLst>
+      <p:ext uri="{BB962C8B-B14F-4D97-AF65-F5344CB8AC3E}">
+        <p14:creationId xmlns:p14="http://schemas.microsoft.com/office/powerpoint/2010/main" val="1024086991"/>
+      </p:ext>
+    </p:extLst>
+  </p:cSld>
+  <p:clrMapOvr>
+    <a:masterClrMapping/>
+  </p:clrMapOvr>
+</p:notes>
+</file>
+
 <file path=ppt/notesSlides/notesSlide3.xml><?xml version="1.0" encoding="utf-8"?>
 <p:notes xmlns:a="http://schemas.openxmlformats.org/drawingml/2006/main" xmlns:r="http://schemas.openxmlformats.org/officeDocument/2006/relationships" xmlns:p="http://schemas.openxmlformats.org/presentationml/2006/main">
   <p:cSld>
@@ -1603,12 +1786,11 @@
           <a:p>
             <a:r>
               <a:rPr lang="en-US" dirty="0"/>
-              <a:t>Learning Objectives
-Define the purpose and minimum contents of an AI governance charter.
-Distinguish between a governance committee, technical review group, executive sponsor, and implementation team.
-Identify which agency functions should participate in AI governance and when their review is required.
-Develop operating procedures for intake, review, approval, monitoring, exceptions, escalation, and retirement of AI use cases.
-Produce a draft AI governance charter or operating model that can be adapted by a public health agency.</a:t>
+              <a:t>Related Playbook Plays
+Play 11: Build and Deploy AI Solutions - This lesson informs Play 11 by helping learners connect the lesson topic to build and deploy ai solutions work in the AI Playbook.
+Play 2: Readiness Assessment - This lesson informs Play 2 by helping learners connect the lesson topic to readiness assessment work in the AI Playbook sequence.
+Play 3: Establish AI Governance - This lesson informs Play 3 by helping learners connect the lesson topic to establish ai governance work in the AI Playbook sequence.
+Play 7: Prioritize Use Cases - This lesson informs Play 7 by helping learners connect the lesson topic to prioritize use cases work in the AI Playbook sequence.</a:t>
             </a:r>
             <a:endParaRPr lang="en-US" dirty="0"/>
           </a:p>
@@ -1696,9 +1878,13 @@
           <a:p>
             <a:r>
               <a:rPr lang="en-US" dirty="0"/>
-              <a:t>Module Overview
-AI governance needs a formal home before an agency begins approving tools, pilots, vendor products, or workflow automation. A governance charter defines the purpose, scope, authority, membership, cadence, decision rules, and documentation expectations for the group that will oversee AI. Without a charter, AI decisions often become scattered across IT, program areas, legal, privacy, procurement, and individual project teams, which can lead to inconsistent standards and unclear accountability.
-This module helps leaders design an AI governance operating model that is practical for a public health agency. The operating model should connect strategy, risk management, technical review, privacy review, equity review, procurement, implementation oversight, and incident response. The goal is not to create another committee for its own sake. The goal is to make sure AI decisions are reviewed consistently, documented clearly, and connected to public health authority, community trust, and operational realities.</a:t>
+              <a:t>Related Toolkit Resources
+Tool 4: AI Policy Landscape Scan (Worksheet) - Use AI Policy Landscape Scan to translate this lesson into a documented public health AI planning, governance, implementation,.
+Tool 5: AI Environmental and Resource Impact Review (Checklist) - Use AI Environmental and Resource Impact Review to translate this lesson into a documented public health AI planning,.
+Tool 6: Human-Centered AI Decision Rule Checklist (Checklist) - Use Human-Centered AI Decision Rule Checklist to translate this lesson into a documented public health AI planning, governance,.
+Tool 8: AI Project Charter (Planning) - Use AI Project Charter to translate this lesson into a documented public health AI planning, governance, implementation, or.
+Tool 9: Data Quality Assessment Checklist (Checklist) - Use this tool to complete or strengthen the practical exercise for the module using fictional, de-identified, or generalized.
+Tool 10: Tiered Data Classification for AI Use (Worksheet) - Use Tiered Data Classification for AI Use to translate this lesson into a documented public health AI planning, governance,.</a:t>
             </a:r>
             <a:endParaRPr lang="en-US" dirty="0"/>
           </a:p>
@@ -1786,8 +1972,12 @@
           <a:p>
             <a:r>
               <a:rPr lang="en-US" dirty="0"/>
-              <a:t>Jurisdiction and Agency Policy Note
-This module provides national-level training guidance for public health agencies and partners. It is not legal advice and does not replace review by agency legal counsel, privacy officers, procurement officials, civil rights staff, records officers, or other authorized decision-makers. Requirements may vary by state, locality, territory, Tribe, agency, funding source, data-sharing agreement, emergency authority, and organizational policy. Learners should use this module to identify the issues that require review and should confirm applicable requirements before approving, procuring, deploying, or publicly communicating about AI-supported work.</a:t>
+              <a:t>Learning Objectives
+Define the purpose and minimum contents of an AI governance charter.
+Distinguish between a governance committee, technical review group, executive sponsor, and implementation team.
+Identify which agency functions should participate in AI governance and when their review is required.
+Develop operating procedures for intake, review, approval, monitoring, exceptions, escalation, and retirement of AI use cases.
+Produce a draft AI governance charter or operating model that can be adapted by a public health agency.</a:t>
             </a:r>
             <a:endParaRPr lang="en-US" dirty="0"/>
           </a:p>
@@ -1875,9 +2065,9 @@
           <a:p>
             <a:r>
               <a:rPr lang="en-US" dirty="0"/>
-              <a:t>Why This Topic Matters for Public Health AI
-Public health agencies operate under legal authorities, public accountability obligations, data-sharing agreements, privacy requirements, procurement rules, and equity commitments. AI governance must therefore be more than a technology review process. It must define how the agency decides which AI uses are acceptable, which safeguards are required, who has authority to approve use, and how concerns are escalated.
-A governance operating model also helps avoid the problem of uneven adoption. One program may use a public AI tool informally, another may procure a vendor product, and a third may build an internal workflow using sensitive data. If these activities are not reviewed through a common process, the agency may create inconsistent privacy practices, duplicative investments, and uneven risk tolerance. Governance makes AI activity visible and manageable.</a:t>
+              <a:t>Module Overview
+AI governance needs a formal home before an agency begins approving tools, pilots, vendor products, or workflow automation. A governance charter defines the purpose, scope, authority, membership, cadence, decision rules, and documentation expectations for the group that will oversee AI. Without a charter, AI decisions often become scattered across IT, program areas, legal, privacy, procurement, and individual project teams, which can lead to inconsistent standards and unclear accountability.
+This module helps leaders design an AI governance operating model that is practical for a public health agency. The operating model should connect strategy, risk management, technical review, privacy review, equity review, procurement, implementation oversight, and incident response. The goal is not to create another committee for its own sake. The goal is to make sure AI decisions are reviewed consistently, documented clearly, and connected to public health authority, community trust, and operational realities.</a:t>
             </a:r>
             <a:endParaRPr lang="en-US" dirty="0"/>
           </a:p>
@@ -1965,9 +2155,8 @@
           <a:p>
             <a:r>
               <a:rPr lang="en-US" dirty="0"/>
-              <a:t>Public Health Example
-A state health department wants to allow staff to use AI tools for program support, document review, code assistance, case summarization, and public-facing communications. Without a governance charter, each program may develop its own rules. The communications office may require human review, the surveillance program may prohibit sensitive data entry, IT may limit tool access, and procurement may approve a vendor product without a clear validation plan.
-A governance operating model brings these decisions into one structured process. The agency can define low-risk uses that require staff training and supervisor approval, moderate-risk uses that require privacy and program review, and high-risk uses that require executive approval, validation evidence, monitoring, and incident response planning. The charter does not eliminate flexibility. It creates a consistent path for responsible flexibility.</a:t>
+              <a:t>Jurisdiction and Agency Policy Note
+This module provides national-level training guidance for public health agencies and partners. It is not legal advice and does not replace review by agency legal counsel, privacy officers, procurement officials, civil rights staff, records officers, or other authorized decision-makers. Requirements may vary by state, locality, territory, Tribe, agency, funding source, data-sharing agreement, emergency authority, and organizational policy. Learners should use this module to identify the issues that require review and should confirm applicable requirements before approving, procuring, deploying, or publicly communicating about AI-supported work.</a:t>
             </a:r>
             <a:endParaRPr lang="en-US" dirty="0"/>
           </a:p>
@@ -2055,10 +2244,9 @@
           <a:p>
             <a:r>
               <a:rPr lang="en-US" dirty="0"/>
-              <a:t>Technical and Governance Deep Dive
-A strong governance charter begins with purpose and scope. Purpose explains why the governance body exists, such as protecting public trust, supporting responsible innovation, aligning AI investments with agency priorities, and managing risk across the AI lifecycle. Scope explains what falls under the governance process. For public health, scope should include internally developed AI tools, vendor AI products, generative AI tools, predictive models, agentic workflows, AI features embedded in existing software, and AI-supported uses of sensitive or operational data.
-The operating model should define roles clearly. An executive sponsor provides authority and connects governance to agency strategy. A governance chair manages the review process. Privacy, legal, cybersecurity, equity, procurement, records, program, data, and informatics representatives bring specialized review perspectives. Technical reviewers assess architecture, validation, interoperability, security, and monitoring. Program owners remain responsible for the public health workflow and for ensuring that AI supports, rather than replaces, appropriate judgment.
-The model should also define the life of an AI use case. Intake captures the proposed use, data involved, intended users, expected benefits, risks, and requested decision. Triage determines the review level. Governance review evaluates authority, data use, privacy, equity, security, accessibility, technical readiness, validation, procurement, and monitoring. Approval should include conditions, documentation requirements, and an owner. Post-approval oversight should review performance, incidents, changes, and whether the use case should continue.</a:t>
+              <a:t>Why This Topic Matters for Public Health AI
+Public health agencies operate under legal authorities, public accountability obligations, data-sharing agreements, privacy requirements, procurement rules, and equity commitments. AI governance must therefore be more than a technology review process. It must define how the agency decides which AI uses are acceptable, which safeguards are required, who has authority to approve use, and how concerns are escalated.
+A governance operating model also helps avoid the problem of uneven adoption. One program may use a public AI tool informally, another may procure a vendor product, and a third may build an internal workflow using sensitive data. If these activities are not reviewed through a common process, the agency may create inconsistent privacy practices, duplicative investments, and uneven risk tolerance. Governance makes AI activity visible and manageable.</a:t>
             </a:r>
             <a:endParaRPr lang="en-US" dirty="0"/>
           </a:p>
@@ -2146,9 +2334,9 @@
           <a:p>
             <a:r>
               <a:rPr lang="en-US" dirty="0"/>
-              <a:t>Risks, Failure Modes, and Guardrails
-A common failure mode is governance that exists only on paper. A charter may sound strong, but if staff do not know when to submit use cases, who decides, or what evidence is required, AI decisions will still happen informally. A practical guardrail is to create a simple intake form, review rubric, meeting cadence, decision log, and escalation pathway.
-Another failure mode is over-centralization. If every minor use requires extensive review, staff may avoid the process or use unapproved tools. Governance should be tiered so low-risk uses move quickly while high-impact uses receive deeper review. This balance helps the agency support innovation while protecting public health values and obligations.</a:t>
+              <a:t>Public Health Example
+A state health department wants to allow staff to use AI tools for program support, document review, code assistance, case summarization, and public-facing communications. Without a governance charter, each program may develop its own rules. The communications office may require human review, the surveillance program may prohibit sensitive data entry, IT may limit tool access, and procurement may approve a vendor product without a clear validation plan.
+A governance operating model brings these decisions into one structured process. The agency can define low-risk uses that require staff training and supervisor approval, moderate-risk uses that require privacy and program review, and high-risk uses that require executive approval, validation evidence, monitoring, and incident response planning. The charter does not eliminate flexibility. It creates a consistent path for responsible flexibility.</a:t>
             </a:r>
             <a:endParaRPr lang="en-US" dirty="0"/>
           </a:p>
@@ -2771,7 +2959,32 @@
       </p:sp>
       <p:sp>
         <p:nvSpPr>
-          <p:cNvPr id="3" name="Text 1"/>
+          <p:cNvPr id="3" name="Shape 1"/>
+          <p:cNvSpPr/>
+          <p:nvPr/>
+        </p:nvSpPr>
+        <p:spPr>
+          <a:xfrm>
+            <a:off x="0" y="164592"/>
+            <a:ext cx="146304" cy="6693408"/>
+          </a:xfrm>
+          <a:prstGeom prst="rect">
+            <a:avLst/>
+          </a:prstGeom>
+          <a:solidFill>
+            <a:srgbClr val="2F8A28"/>
+          </a:solidFill>
+          <a:ln w="12700">
+            <a:solidFill>
+              <a:srgbClr val="2F8A28"/>
+            </a:solidFill>
+            <a:prstDash val="solid"/>
+          </a:ln>
+        </p:spPr>
+      </p:sp>
+      <p:sp>
+        <p:nvSpPr>
+          <p:cNvPr id="4" name="Text 2"/>
           <p:cNvSpPr/>
           <p:nvPr/>
         </p:nvSpPr>
@@ -2810,7 +3023,7 @@
       </p:sp>
       <p:sp>
         <p:nvSpPr>
-          <p:cNvPr id="4" name="Text 2"/>
+          <p:cNvPr id="5" name="Text 3"/>
           <p:cNvSpPr/>
           <p:nvPr/>
         </p:nvSpPr>
@@ -2849,7 +3062,7 @@
       </p:sp>
       <p:sp>
         <p:nvSpPr>
-          <p:cNvPr id="5" name="Text 3"/>
+          <p:cNvPr id="6" name="Text 4"/>
           <p:cNvSpPr/>
           <p:nvPr/>
         </p:nvSpPr>
@@ -2888,13 +3101,77 @@
       </p:sp>
       <p:sp>
         <p:nvSpPr>
-          <p:cNvPr id="6" name="Text 4"/>
+          <p:cNvPr id="7" name="Shape 5"/>
           <p:cNvSpPr/>
           <p:nvPr/>
         </p:nvSpPr>
         <p:spPr>
           <a:xfrm>
             <a:off x="640080" y="658368"/>
+            <a:ext cx="420624" cy="420624"/>
+          </a:xfrm>
+          <a:prstGeom prst="ellipse">
+            <a:avLst/>
+          </a:prstGeom>
+          <a:solidFill>
+            <a:srgbClr val="0068B7"/>
+          </a:solidFill>
+          <a:ln w="12700">
+            <a:solidFill>
+              <a:srgbClr val="0068B7"/>
+            </a:solidFill>
+            <a:prstDash val="solid"/>
+          </a:ln>
+        </p:spPr>
+      </p:sp>
+      <p:sp>
+        <p:nvSpPr>
+          <p:cNvPr id="8" name="Text 6"/>
+          <p:cNvSpPr/>
+          <p:nvPr/>
+        </p:nvSpPr>
+        <p:spPr>
+          <a:xfrm>
+            <a:off x="640080" y="731520"/>
+            <a:ext cx="420624" cy="164592"/>
+          </a:xfrm>
+          <a:prstGeom prst="rect">
+            <a:avLst/>
+          </a:prstGeom>
+          <a:noFill/>
+          <a:ln/>
+        </p:spPr>
+        <p:txBody>
+          <a:bodyPr wrap="square" lIns="0" tIns="0" rIns="0" bIns="0" rtlCol="0" anchor="ctr"/>
+          <a:lstStyle/>
+          <a:p>
+            <a:pPr algn="ctr" indent="0" marL="0">
+              <a:buNone/>
+            </a:pPr>
+            <a:r>
+              <a:rPr lang="en-US" sz="1100" b="1" dirty="0">
+                <a:solidFill>
+                  <a:srgbClr val="FFFFFF"/>
+                </a:solidFill>
+                <a:latin typeface="Aptos" pitchFamily="34" charset="0"/>
+                <a:ea typeface="Aptos" pitchFamily="34" charset="-122"/>
+                <a:cs typeface="Aptos" pitchFamily="34" charset="-120"/>
+              </a:rPr>
+              <a:t>6</a:t>
+            </a:r>
+            <a:endParaRPr lang="en-US" sz="1100" dirty="0"/>
+          </a:p>
+        </p:txBody>
+      </p:sp>
+      <p:sp>
+        <p:nvSpPr>
+          <p:cNvPr id="9" name="Text 7"/>
+          <p:cNvSpPr/>
+          <p:nvPr/>
+        </p:nvSpPr>
+        <p:spPr>
+          <a:xfrm>
+            <a:off x="640080" y="621792"/>
             <a:ext cx="10881360" cy="566928"/>
           </a:xfrm>
           <a:prstGeom prst="rect">
@@ -2921,7 +3198,7 @@
                 <a:ea typeface="Aptos Display" pitchFamily="34" charset="-122"/>
                 <a:cs typeface="Aptos Display" pitchFamily="34" charset="-120"/>
               </a:rPr>
-              <a:t>Application to AI-Supported Workflows</a:t>
+              <a:t>Technical and Governance Deep Dive</a:t>
             </a:r>
             <a:endParaRPr lang="en-US" sz="2700" dirty="0"/>
           </a:p>
@@ -2929,32 +3206,178 @@
       </p:sp>
       <p:sp>
         <p:nvSpPr>
-          <p:cNvPr id="7" name="Text 5"/>
-          <p:cNvSpPr/>
-          <p:nvPr/>
-        </p:nvSpPr>
-        <p:spPr>
-          <a:xfrm>
-            <a:off x="822960" y="1325880"/>
-            <a:ext cx="10378440" cy="4800600"/>
-          </a:xfrm>
-          <a:prstGeom prst="rect">
-            <a:avLst/>
-          </a:prstGeom>
-          <a:noFill/>
-          <a:ln/>
-        </p:spPr>
-        <p:txBody>
-          <a:bodyPr wrap="square" lIns="1016" tIns="1016" rIns="1016" bIns="1016" rtlCol="0" anchor="t">
+          <p:cNvPr id="10" name="Text 8"/>
+          <p:cNvSpPr/>
+          <p:nvPr/>
+        </p:nvSpPr>
+        <p:spPr>
+          <a:xfrm>
+            <a:off x="868680" y="1417320"/>
+            <a:ext cx="6675120" cy="4434840"/>
+          </a:xfrm>
+          <a:prstGeom prst="rect">
+            <a:avLst/>
+          </a:prstGeom>
+          <a:noFill/>
+          <a:ln/>
+        </p:spPr>
+        <p:txBody>
+          <a:bodyPr wrap="square" lIns="635" tIns="635" rIns="635" bIns="635" rtlCol="0" anchor="t">
             <a:normAutofit/>
           </a:bodyPr>
           <a:lstStyle/>
           <a:p>
+            <a:r>
+              <a:rPr lang="en-US" sz="1700" dirty="0">
+                <a:solidFill>
+                  <a:srgbClr val="17364A"/>
+                </a:solidFill>
+                <a:latin typeface="Aptos" pitchFamily="34" charset="0"/>
+                <a:ea typeface="Aptos" pitchFamily="34" charset="-122"/>
+                <a:cs typeface="Aptos" pitchFamily="34" charset="-120"/>
+              </a:rPr>
+              <a:t>A strong governance charter begins with purpose and scope.</a:t>
+            </a:r>
+            <a:endParaRPr lang="en-US" sz="1700" dirty="0"/>
+          </a:p>
+          <a:p>
+            <a:r>
+              <a:rPr lang="en-US" sz="1700" dirty="0">
+                <a:solidFill>
+                  <a:srgbClr val="17364A"/>
+                </a:solidFill>
+                <a:latin typeface="Aptos" pitchFamily="34" charset="0"/>
+                <a:ea typeface="Aptos" pitchFamily="34" charset="-122"/>
+                <a:cs typeface="Aptos" pitchFamily="34" charset="-120"/>
+              </a:rPr>
+              <a:t>Purpose explains why the governance body exists, such as protecting public trust, supporting responsible innovation,.</a:t>
+            </a:r>
+            <a:endParaRPr lang="en-US" sz="1700" dirty="0"/>
+          </a:p>
+          <a:p>
+            <a:r>
+              <a:rPr lang="en-US" sz="1700" dirty="0">
+                <a:solidFill>
+                  <a:srgbClr val="17364A"/>
+                </a:solidFill>
+                <a:latin typeface="Aptos" pitchFamily="34" charset="0"/>
+                <a:ea typeface="Aptos" pitchFamily="34" charset="-122"/>
+                <a:cs typeface="Aptos" pitchFamily="34" charset="-120"/>
+              </a:rPr>
+              <a:t>Scope explains what falls under the governance process.</a:t>
+            </a:r>
+            <a:endParaRPr lang="en-US" sz="1700" dirty="0"/>
+          </a:p>
+          <a:p>
+            <a:r>
+              <a:rPr lang="en-US" sz="1700" dirty="0">
+                <a:solidFill>
+                  <a:srgbClr val="17364A"/>
+                </a:solidFill>
+                <a:latin typeface="Aptos" pitchFamily="34" charset="0"/>
+                <a:ea typeface="Aptos" pitchFamily="34" charset="-122"/>
+                <a:cs typeface="Aptos" pitchFamily="34" charset="-120"/>
+              </a:rPr>
+              <a:t>For public health, scope should include internally developed AI tools, vendor AI products, generative AI tools, predictive.</a:t>
+            </a:r>
+            <a:endParaRPr lang="en-US" sz="1700" dirty="0"/>
+          </a:p>
+        </p:txBody>
+      </p:sp>
+      <p:sp>
+        <p:nvSpPr>
+          <p:cNvPr id="11" name="Shape 9"/>
+          <p:cNvSpPr/>
+          <p:nvPr/>
+        </p:nvSpPr>
+        <p:spPr>
+          <a:xfrm>
+            <a:off x="7909560" y="1417320"/>
+            <a:ext cx="3154680" cy="1828800"/>
+          </a:xfrm>
+          <a:prstGeom prst="roundRect">
+            <a:avLst>
+              <a:gd name="adj" fmla="val 6000"/>
+            </a:avLst>
+          </a:prstGeom>
+          <a:solidFill>
+            <a:srgbClr val="EEF8ED"/>
+          </a:solidFill>
+          <a:ln w="12700">
+            <a:solidFill>
+              <a:srgbClr val="B9D7E6"/>
+            </a:solidFill>
+            <a:prstDash val="solid"/>
+          </a:ln>
+        </p:spPr>
+      </p:sp>
+      <p:sp>
+        <p:nvSpPr>
+          <p:cNvPr id="12" name="Text 10"/>
+          <p:cNvSpPr/>
+          <p:nvPr/>
+        </p:nvSpPr>
+        <p:spPr>
+          <a:xfrm>
+            <a:off x="8074152" y="1563624"/>
+            <a:ext cx="2825496" cy="201168"/>
+          </a:xfrm>
+          <a:prstGeom prst="rect">
+            <a:avLst/>
+          </a:prstGeom>
+          <a:noFill/>
+          <a:ln/>
+        </p:spPr>
+        <p:txBody>
+          <a:bodyPr wrap="square" lIns="0" tIns="0" rIns="0" bIns="0" rtlCol="0" anchor="ctr"/>
+          <a:lstStyle/>
+          <a:p>
             <a:pPr indent="0" marL="0">
               <a:buNone/>
             </a:pPr>
             <a:r>
-              <a:rPr lang="en-US" sz="1420" dirty="0">
+              <a:rPr lang="en-US" sz="950" b="1" dirty="0">
+                <a:solidFill>
+                  <a:srgbClr val="0068B7"/>
+                </a:solidFill>
+                <a:latin typeface="Aptos" pitchFamily="34" charset="0"/>
+                <a:ea typeface="Aptos" pitchFamily="34" charset="-122"/>
+                <a:cs typeface="Aptos" pitchFamily="34" charset="-120"/>
+              </a:rPr>
+              <a:t>Key idea</a:t>
+            </a:r>
+            <a:endParaRPr lang="en-US" sz="950" dirty="0"/>
+          </a:p>
+        </p:txBody>
+      </p:sp>
+      <p:sp>
+        <p:nvSpPr>
+          <p:cNvPr id="13" name="Text 11"/>
+          <p:cNvSpPr/>
+          <p:nvPr/>
+        </p:nvSpPr>
+        <p:spPr>
+          <a:xfrm>
+            <a:off x="8074152" y="1856232"/>
+            <a:ext cx="2825496" cy="1261872"/>
+          </a:xfrm>
+          <a:prstGeom prst="rect">
+            <a:avLst/>
+          </a:prstGeom>
+          <a:noFill/>
+          <a:ln/>
+        </p:spPr>
+        <p:txBody>
+          <a:bodyPr wrap="square" lIns="0" tIns="0" rIns="0" bIns="0" rtlCol="0" anchor="t">
+            <a:normAutofit/>
+          </a:bodyPr>
+          <a:lstStyle/>
+          <a:p>
+            <a:pPr indent="0" marL="0">
+              <a:buNone/>
+            </a:pPr>
+            <a:r>
+              <a:rPr lang="en-US" sz="1250" dirty="0">
                 <a:solidFill>
                   <a:srgbClr val="17364A"/>
                 </a:solidFill>
@@ -2962,9 +3385,116 @@
                 <a:ea typeface="Aptos" pitchFamily="34" charset="-122"/>
                 <a:cs typeface="Aptos" pitchFamily="34" charset="-120"/>
               </a:rPr>
-              <a:t>Generative AI governance should define approved tools, prohibited data, review expectations, and when outputs may be used externally. Predictive model governance should require validation, subgroup performance review, monitoring, and clear limits on decision use. Agentic AI governance should define allowed actions, approval checkpoints, logging, rollback procedures, and incident triggers. In each case, the charter gives the agency a repeatable way to make and document decisions.</a:t>
-            </a:r>
-            <a:endParaRPr lang="en-US" sz="1420" dirty="0"/>
+              <a:t>A strong governance charter begins with purpose and scope.</a:t>
+            </a:r>
+            <a:endParaRPr lang="en-US" sz="1250" dirty="0"/>
+          </a:p>
+        </p:txBody>
+      </p:sp>
+      <p:sp>
+        <p:nvSpPr>
+          <p:cNvPr id="14" name="Shape 12"/>
+          <p:cNvSpPr/>
+          <p:nvPr/>
+        </p:nvSpPr>
+        <p:spPr>
+          <a:xfrm>
+            <a:off x="7909560" y="3520440"/>
+            <a:ext cx="3154680" cy="1737360"/>
+          </a:xfrm>
+          <a:prstGeom prst="roundRect">
+            <a:avLst>
+              <a:gd name="adj" fmla="val 6316"/>
+            </a:avLst>
+          </a:prstGeom>
+          <a:solidFill>
+            <a:srgbClr val="EAF6F8"/>
+          </a:solidFill>
+          <a:ln w="12700">
+            <a:solidFill>
+              <a:srgbClr val="B9D7E6"/>
+            </a:solidFill>
+            <a:prstDash val="solid"/>
+          </a:ln>
+        </p:spPr>
+      </p:sp>
+      <p:sp>
+        <p:nvSpPr>
+          <p:cNvPr id="15" name="Text 13"/>
+          <p:cNvSpPr/>
+          <p:nvPr/>
+        </p:nvSpPr>
+        <p:spPr>
+          <a:xfrm>
+            <a:off x="8074152" y="3666744"/>
+            <a:ext cx="2825496" cy="201168"/>
+          </a:xfrm>
+          <a:prstGeom prst="rect">
+            <a:avLst/>
+          </a:prstGeom>
+          <a:noFill/>
+          <a:ln/>
+        </p:spPr>
+        <p:txBody>
+          <a:bodyPr wrap="square" lIns="0" tIns="0" rIns="0" bIns="0" rtlCol="0" anchor="ctr"/>
+          <a:lstStyle/>
+          <a:p>
+            <a:pPr indent="0" marL="0">
+              <a:buNone/>
+            </a:pPr>
+            <a:r>
+              <a:rPr lang="en-US" sz="950" b="1" dirty="0">
+                <a:solidFill>
+                  <a:srgbClr val="0068B7"/>
+                </a:solidFill>
+                <a:latin typeface="Aptos" pitchFamily="34" charset="0"/>
+                <a:ea typeface="Aptos" pitchFamily="34" charset="-122"/>
+                <a:cs typeface="Aptos" pitchFamily="34" charset="-120"/>
+              </a:rPr>
+              <a:t>Use this for</a:t>
+            </a:r>
+            <a:endParaRPr lang="en-US" sz="950" dirty="0"/>
+          </a:p>
+        </p:txBody>
+      </p:sp>
+      <p:sp>
+        <p:nvSpPr>
+          <p:cNvPr id="16" name="Text 14"/>
+          <p:cNvSpPr/>
+          <p:nvPr/>
+        </p:nvSpPr>
+        <p:spPr>
+          <a:xfrm>
+            <a:off x="8074152" y="3959352"/>
+            <a:ext cx="2825496" cy="1170432"/>
+          </a:xfrm>
+          <a:prstGeom prst="rect">
+            <a:avLst/>
+          </a:prstGeom>
+          <a:noFill/>
+          <a:ln/>
+        </p:spPr>
+        <p:txBody>
+          <a:bodyPr wrap="square" lIns="0" tIns="0" rIns="0" bIns="0" rtlCol="0" anchor="t">
+            <a:normAutofit/>
+          </a:bodyPr>
+          <a:lstStyle/>
+          <a:p>
+            <a:pPr indent="0" marL="0">
+              <a:buNone/>
+            </a:pPr>
+            <a:r>
+              <a:rPr lang="en-US" sz="1250" dirty="0">
+                <a:solidFill>
+                  <a:srgbClr val="17364A"/>
+                </a:solidFill>
+                <a:latin typeface="Aptos" pitchFamily="34" charset="0"/>
+                <a:ea typeface="Aptos" pitchFamily="34" charset="-122"/>
+                <a:cs typeface="Aptos" pitchFamily="34" charset="-120"/>
+              </a:rPr>
+              <a:t>Connect the concept to public health decisions, safeguards, documentation, or implementation work.</a:t>
+            </a:r>
+            <a:endParaRPr lang="en-US" sz="1250" dirty="0"/>
           </a:p>
         </p:txBody>
       </p:sp>
@@ -3027,7 +3557,32 @@
       </p:sp>
       <p:sp>
         <p:nvSpPr>
-          <p:cNvPr id="3" name="Text 1"/>
+          <p:cNvPr id="3" name="Shape 1"/>
+          <p:cNvSpPr/>
+          <p:nvPr/>
+        </p:nvSpPr>
+        <p:spPr>
+          <a:xfrm>
+            <a:off x="0" y="164592"/>
+            <a:ext cx="146304" cy="6693408"/>
+          </a:xfrm>
+          <a:prstGeom prst="rect">
+            <a:avLst/>
+          </a:prstGeom>
+          <a:solidFill>
+            <a:srgbClr val="2F8A28"/>
+          </a:solidFill>
+          <a:ln w="12700">
+            <a:solidFill>
+              <a:srgbClr val="2F8A28"/>
+            </a:solidFill>
+            <a:prstDash val="solid"/>
+          </a:ln>
+        </p:spPr>
+      </p:sp>
+      <p:sp>
+        <p:nvSpPr>
+          <p:cNvPr id="4" name="Text 2"/>
           <p:cNvSpPr/>
           <p:nvPr/>
         </p:nvSpPr>
@@ -3066,7 +3621,7 @@
       </p:sp>
       <p:sp>
         <p:nvSpPr>
-          <p:cNvPr id="4" name="Text 2"/>
+          <p:cNvPr id="5" name="Text 3"/>
           <p:cNvSpPr/>
           <p:nvPr/>
         </p:nvSpPr>
@@ -3105,7 +3660,7 @@
       </p:sp>
       <p:sp>
         <p:nvSpPr>
-          <p:cNvPr id="5" name="Text 3"/>
+          <p:cNvPr id="6" name="Text 4"/>
           <p:cNvSpPr/>
           <p:nvPr/>
         </p:nvSpPr>
@@ -3144,13 +3699,77 @@
       </p:sp>
       <p:sp>
         <p:nvSpPr>
-          <p:cNvPr id="6" name="Text 4"/>
+          <p:cNvPr id="7" name="Shape 5"/>
           <p:cNvSpPr/>
           <p:nvPr/>
         </p:nvSpPr>
         <p:spPr>
           <a:xfrm>
             <a:off x="640080" y="658368"/>
+            <a:ext cx="420624" cy="420624"/>
+          </a:xfrm>
+          <a:prstGeom prst="ellipse">
+            <a:avLst/>
+          </a:prstGeom>
+          <a:solidFill>
+            <a:srgbClr val="0068B7"/>
+          </a:solidFill>
+          <a:ln w="12700">
+            <a:solidFill>
+              <a:srgbClr val="0068B7"/>
+            </a:solidFill>
+            <a:prstDash val="solid"/>
+          </a:ln>
+        </p:spPr>
+      </p:sp>
+      <p:sp>
+        <p:nvSpPr>
+          <p:cNvPr id="8" name="Text 6"/>
+          <p:cNvSpPr/>
+          <p:nvPr/>
+        </p:nvSpPr>
+        <p:spPr>
+          <a:xfrm>
+            <a:off x="640080" y="731520"/>
+            <a:ext cx="420624" cy="164592"/>
+          </a:xfrm>
+          <a:prstGeom prst="rect">
+            <a:avLst/>
+          </a:prstGeom>
+          <a:noFill/>
+          <a:ln/>
+        </p:spPr>
+        <p:txBody>
+          <a:bodyPr wrap="square" lIns="0" tIns="0" rIns="0" bIns="0" rtlCol="0" anchor="ctr"/>
+          <a:lstStyle/>
+          <a:p>
+            <a:pPr algn="ctr" indent="0" marL="0">
+              <a:buNone/>
+            </a:pPr>
+            <a:r>
+              <a:rPr lang="en-US" sz="1100" b="1" dirty="0">
+                <a:solidFill>
+                  <a:srgbClr val="FFFFFF"/>
+                </a:solidFill>
+                <a:latin typeface="Aptos" pitchFamily="34" charset="0"/>
+                <a:ea typeface="Aptos" pitchFamily="34" charset="-122"/>
+                <a:cs typeface="Aptos" pitchFamily="34" charset="-120"/>
+              </a:rPr>
+              <a:t>7</a:t>
+            </a:r>
+            <a:endParaRPr lang="en-US" sz="1100" dirty="0"/>
+          </a:p>
+        </p:txBody>
+      </p:sp>
+      <p:sp>
+        <p:nvSpPr>
+          <p:cNvPr id="9" name="Text 7"/>
+          <p:cNvSpPr/>
+          <p:nvPr/>
+        </p:nvSpPr>
+        <p:spPr>
+          <a:xfrm>
+            <a:off x="640080" y="621792"/>
             <a:ext cx="10881360" cy="566928"/>
           </a:xfrm>
           <a:prstGeom prst="rect">
@@ -3177,7 +3796,7 @@
                 <a:ea typeface="Aptos Display" pitchFamily="34" charset="-122"/>
                 <a:cs typeface="Aptos Display" pitchFamily="34" charset="-120"/>
               </a:rPr>
-              <a:t>Reflection Questions</a:t>
+              <a:t>Risks, Failure Modes, and Guardrails</a:t>
             </a:r>
             <a:endParaRPr lang="en-US" sz="2700" dirty="0"/>
           </a:p>
@@ -3185,32 +3804,178 @@
       </p:sp>
       <p:sp>
         <p:nvSpPr>
-          <p:cNvPr id="7" name="Text 5"/>
-          <p:cNvSpPr/>
-          <p:nvPr/>
-        </p:nvSpPr>
-        <p:spPr>
-          <a:xfrm>
-            <a:off x="822960" y="1325880"/>
-            <a:ext cx="10378440" cy="4800600"/>
-          </a:xfrm>
-          <a:prstGeom prst="rect">
-            <a:avLst/>
-          </a:prstGeom>
-          <a:noFill/>
-          <a:ln/>
-        </p:spPr>
-        <p:txBody>
-          <a:bodyPr wrap="square" lIns="1016" tIns="1016" rIns="1016" bIns="1016" rtlCol="0" anchor="t">
+          <p:cNvPr id="10" name="Text 8"/>
+          <p:cNvSpPr/>
+          <p:nvPr/>
+        </p:nvSpPr>
+        <p:spPr>
+          <a:xfrm>
+            <a:off x="868680" y="1417320"/>
+            <a:ext cx="6675120" cy="4434840"/>
+          </a:xfrm>
+          <a:prstGeom prst="rect">
+            <a:avLst/>
+          </a:prstGeom>
+          <a:noFill/>
+          <a:ln/>
+        </p:spPr>
+        <p:txBody>
+          <a:bodyPr wrap="square" lIns="635" tIns="635" rIns="635" bIns="635" rtlCol="0" anchor="t">
             <a:normAutofit/>
           </a:bodyPr>
           <a:lstStyle/>
           <a:p>
+            <a:r>
+              <a:rPr lang="en-US" sz="1700" dirty="0">
+                <a:solidFill>
+                  <a:srgbClr val="17364A"/>
+                </a:solidFill>
+                <a:latin typeface="Aptos" pitchFamily="34" charset="0"/>
+                <a:ea typeface="Aptos" pitchFamily="34" charset="-122"/>
+                <a:cs typeface="Aptos" pitchFamily="34" charset="-120"/>
+              </a:rPr>
+              <a:t>A common failure mode is governance that exists only on paper.</a:t>
+            </a:r>
+            <a:endParaRPr lang="en-US" sz="1700" dirty="0"/>
+          </a:p>
+          <a:p>
+            <a:r>
+              <a:rPr lang="en-US" sz="1700" dirty="0">
+                <a:solidFill>
+                  <a:srgbClr val="17364A"/>
+                </a:solidFill>
+                <a:latin typeface="Aptos" pitchFamily="34" charset="0"/>
+                <a:ea typeface="Aptos" pitchFamily="34" charset="-122"/>
+                <a:cs typeface="Aptos" pitchFamily="34" charset="-120"/>
+              </a:rPr>
+              <a:t>A charter may sound strong, but if staff do not know when to submit use cases, who decides, or what evidence is required,.</a:t>
+            </a:r>
+            <a:endParaRPr lang="en-US" sz="1700" dirty="0"/>
+          </a:p>
+          <a:p>
+            <a:r>
+              <a:rPr lang="en-US" sz="1700" dirty="0">
+                <a:solidFill>
+                  <a:srgbClr val="17364A"/>
+                </a:solidFill>
+                <a:latin typeface="Aptos" pitchFamily="34" charset="0"/>
+                <a:ea typeface="Aptos" pitchFamily="34" charset="-122"/>
+                <a:cs typeface="Aptos" pitchFamily="34" charset="-120"/>
+              </a:rPr>
+              <a:t>A practical guardrail is to create a simple intake form, review rubric, meeting cadence, decision log, and escalation.</a:t>
+            </a:r>
+            <a:endParaRPr lang="en-US" sz="1700" dirty="0"/>
+          </a:p>
+          <a:p>
+            <a:r>
+              <a:rPr lang="en-US" sz="1700" dirty="0">
+                <a:solidFill>
+                  <a:srgbClr val="17364A"/>
+                </a:solidFill>
+                <a:latin typeface="Aptos" pitchFamily="34" charset="0"/>
+                <a:ea typeface="Aptos" pitchFamily="34" charset="-122"/>
+                <a:cs typeface="Aptos" pitchFamily="34" charset="-120"/>
+              </a:rPr>
+              <a:t>Another failure mode is over-centralization.</a:t>
+            </a:r>
+            <a:endParaRPr lang="en-US" sz="1700" dirty="0"/>
+          </a:p>
+        </p:txBody>
+      </p:sp>
+      <p:sp>
+        <p:nvSpPr>
+          <p:cNvPr id="11" name="Shape 9"/>
+          <p:cNvSpPr/>
+          <p:nvPr/>
+        </p:nvSpPr>
+        <p:spPr>
+          <a:xfrm>
+            <a:off x="7909560" y="1417320"/>
+            <a:ext cx="3154680" cy="1828800"/>
+          </a:xfrm>
+          <a:prstGeom prst="roundRect">
+            <a:avLst>
+              <a:gd name="adj" fmla="val 6000"/>
+            </a:avLst>
+          </a:prstGeom>
+          <a:solidFill>
+            <a:srgbClr val="EEF8ED"/>
+          </a:solidFill>
+          <a:ln w="12700">
+            <a:solidFill>
+              <a:srgbClr val="B9D7E6"/>
+            </a:solidFill>
+            <a:prstDash val="solid"/>
+          </a:ln>
+        </p:spPr>
+      </p:sp>
+      <p:sp>
+        <p:nvSpPr>
+          <p:cNvPr id="12" name="Text 10"/>
+          <p:cNvSpPr/>
+          <p:nvPr/>
+        </p:nvSpPr>
+        <p:spPr>
+          <a:xfrm>
+            <a:off x="8074152" y="1563624"/>
+            <a:ext cx="2825496" cy="201168"/>
+          </a:xfrm>
+          <a:prstGeom prst="rect">
+            <a:avLst/>
+          </a:prstGeom>
+          <a:noFill/>
+          <a:ln/>
+        </p:spPr>
+        <p:txBody>
+          <a:bodyPr wrap="square" lIns="0" tIns="0" rIns="0" bIns="0" rtlCol="0" anchor="ctr"/>
+          <a:lstStyle/>
+          <a:p>
             <a:pPr indent="0" marL="0">
               <a:buNone/>
             </a:pPr>
             <a:r>
-              <a:rPr lang="en-US" sz="1420" dirty="0">
+              <a:rPr lang="en-US" sz="950" b="1" dirty="0">
+                <a:solidFill>
+                  <a:srgbClr val="0068B7"/>
+                </a:solidFill>
+                <a:latin typeface="Aptos" pitchFamily="34" charset="0"/>
+                <a:ea typeface="Aptos" pitchFamily="34" charset="-122"/>
+                <a:cs typeface="Aptos" pitchFamily="34" charset="-120"/>
+              </a:rPr>
+              <a:t>Key idea</a:t>
+            </a:r>
+            <a:endParaRPr lang="en-US" sz="950" dirty="0"/>
+          </a:p>
+        </p:txBody>
+      </p:sp>
+      <p:sp>
+        <p:nvSpPr>
+          <p:cNvPr id="13" name="Text 11"/>
+          <p:cNvSpPr/>
+          <p:nvPr/>
+        </p:nvSpPr>
+        <p:spPr>
+          <a:xfrm>
+            <a:off x="8074152" y="1856232"/>
+            <a:ext cx="2825496" cy="1261872"/>
+          </a:xfrm>
+          <a:prstGeom prst="rect">
+            <a:avLst/>
+          </a:prstGeom>
+          <a:noFill/>
+          <a:ln/>
+        </p:spPr>
+        <p:txBody>
+          <a:bodyPr wrap="square" lIns="0" tIns="0" rIns="0" bIns="0" rtlCol="0" anchor="t">
+            <a:normAutofit/>
+          </a:bodyPr>
+          <a:lstStyle/>
+          <a:p>
+            <a:pPr indent="0" marL="0">
+              <a:buNone/>
+            </a:pPr>
+            <a:r>
+              <a:rPr lang="en-US" sz="1250" dirty="0">
                 <a:solidFill>
                   <a:srgbClr val="17364A"/>
                 </a:solidFill>
@@ -3218,9 +3983,116 @@
                 <a:ea typeface="Aptos" pitchFamily="34" charset="-122"/>
                 <a:cs typeface="Aptos" pitchFamily="34" charset="-120"/>
               </a:rPr>
-              <a:t>Which current or proposed AI use case in your agency raises this leadership or governance issue most clearly? Who currently has authority to make decisions about this issue, and is that authority documented? What evidence would governance or leadership need before approving the use case?</a:t>
-            </a:r>
-            <a:endParaRPr lang="en-US" sz="1420" dirty="0"/>
+              <a:t>A common failure mode is governance that exists only on paper.</a:t>
+            </a:r>
+            <a:endParaRPr lang="en-US" sz="1250" dirty="0"/>
+          </a:p>
+        </p:txBody>
+      </p:sp>
+      <p:sp>
+        <p:nvSpPr>
+          <p:cNvPr id="14" name="Shape 12"/>
+          <p:cNvSpPr/>
+          <p:nvPr/>
+        </p:nvSpPr>
+        <p:spPr>
+          <a:xfrm>
+            <a:off x="7909560" y="3520440"/>
+            <a:ext cx="3154680" cy="1737360"/>
+          </a:xfrm>
+          <a:prstGeom prst="roundRect">
+            <a:avLst>
+              <a:gd name="adj" fmla="val 6316"/>
+            </a:avLst>
+          </a:prstGeom>
+          <a:solidFill>
+            <a:srgbClr val="EAF6F8"/>
+          </a:solidFill>
+          <a:ln w="12700">
+            <a:solidFill>
+              <a:srgbClr val="B9D7E6"/>
+            </a:solidFill>
+            <a:prstDash val="solid"/>
+          </a:ln>
+        </p:spPr>
+      </p:sp>
+      <p:sp>
+        <p:nvSpPr>
+          <p:cNvPr id="15" name="Text 13"/>
+          <p:cNvSpPr/>
+          <p:nvPr/>
+        </p:nvSpPr>
+        <p:spPr>
+          <a:xfrm>
+            <a:off x="8074152" y="3666744"/>
+            <a:ext cx="2825496" cy="201168"/>
+          </a:xfrm>
+          <a:prstGeom prst="rect">
+            <a:avLst/>
+          </a:prstGeom>
+          <a:noFill/>
+          <a:ln/>
+        </p:spPr>
+        <p:txBody>
+          <a:bodyPr wrap="square" lIns="0" tIns="0" rIns="0" bIns="0" rtlCol="0" anchor="ctr"/>
+          <a:lstStyle/>
+          <a:p>
+            <a:pPr indent="0" marL="0">
+              <a:buNone/>
+            </a:pPr>
+            <a:r>
+              <a:rPr lang="en-US" sz="950" b="1" dirty="0">
+                <a:solidFill>
+                  <a:srgbClr val="0068B7"/>
+                </a:solidFill>
+                <a:latin typeface="Aptos" pitchFamily="34" charset="0"/>
+                <a:ea typeface="Aptos" pitchFamily="34" charset="-122"/>
+                <a:cs typeface="Aptos" pitchFamily="34" charset="-120"/>
+              </a:rPr>
+              <a:t>Use this for</a:t>
+            </a:r>
+            <a:endParaRPr lang="en-US" sz="950" dirty="0"/>
+          </a:p>
+        </p:txBody>
+      </p:sp>
+      <p:sp>
+        <p:nvSpPr>
+          <p:cNvPr id="16" name="Text 14"/>
+          <p:cNvSpPr/>
+          <p:nvPr/>
+        </p:nvSpPr>
+        <p:spPr>
+          <a:xfrm>
+            <a:off x="8074152" y="3959352"/>
+            <a:ext cx="2825496" cy="1170432"/>
+          </a:xfrm>
+          <a:prstGeom prst="rect">
+            <a:avLst/>
+          </a:prstGeom>
+          <a:noFill/>
+          <a:ln/>
+        </p:spPr>
+        <p:txBody>
+          <a:bodyPr wrap="square" lIns="0" tIns="0" rIns="0" bIns="0" rtlCol="0" anchor="t">
+            <a:normAutofit/>
+          </a:bodyPr>
+          <a:lstStyle/>
+          <a:p>
+            <a:pPr indent="0" marL="0">
+              <a:buNone/>
+            </a:pPr>
+            <a:r>
+              <a:rPr lang="en-US" sz="1250" dirty="0">
+                <a:solidFill>
+                  <a:srgbClr val="17364A"/>
+                </a:solidFill>
+                <a:latin typeface="Aptos" pitchFamily="34" charset="0"/>
+                <a:ea typeface="Aptos" pitchFamily="34" charset="-122"/>
+                <a:cs typeface="Aptos" pitchFamily="34" charset="-120"/>
+              </a:rPr>
+              <a:t>Connect the concept to public health decisions, safeguards, documentation, or implementation work.</a:t>
+            </a:r>
+            <a:endParaRPr lang="en-US" sz="1250" dirty="0"/>
           </a:p>
         </p:txBody>
       </p:sp>
@@ -3283,7 +4155,32 @@
       </p:sp>
       <p:sp>
         <p:nvSpPr>
-          <p:cNvPr id="3" name="Text 1"/>
+          <p:cNvPr id="3" name="Shape 1"/>
+          <p:cNvSpPr/>
+          <p:nvPr/>
+        </p:nvSpPr>
+        <p:spPr>
+          <a:xfrm>
+            <a:off x="0" y="164592"/>
+            <a:ext cx="146304" cy="6693408"/>
+          </a:xfrm>
+          <a:prstGeom prst="rect">
+            <a:avLst/>
+          </a:prstGeom>
+          <a:solidFill>
+            <a:srgbClr val="2F8A28"/>
+          </a:solidFill>
+          <a:ln w="12700">
+            <a:solidFill>
+              <a:srgbClr val="2F8A28"/>
+            </a:solidFill>
+            <a:prstDash val="solid"/>
+          </a:ln>
+        </p:spPr>
+      </p:sp>
+      <p:sp>
+        <p:nvSpPr>
+          <p:cNvPr id="4" name="Text 2"/>
           <p:cNvSpPr/>
           <p:nvPr/>
         </p:nvSpPr>
@@ -3322,7 +4219,7 @@
       </p:sp>
       <p:sp>
         <p:nvSpPr>
-          <p:cNvPr id="4" name="Text 2"/>
+          <p:cNvPr id="5" name="Text 3"/>
           <p:cNvSpPr/>
           <p:nvPr/>
         </p:nvSpPr>
@@ -3361,7 +4258,7 @@
       </p:sp>
       <p:sp>
         <p:nvSpPr>
-          <p:cNvPr id="5" name="Text 3"/>
+          <p:cNvPr id="6" name="Text 4"/>
           <p:cNvSpPr/>
           <p:nvPr/>
         </p:nvSpPr>
@@ -3400,13 +4297,77 @@
       </p:sp>
       <p:sp>
         <p:nvSpPr>
-          <p:cNvPr id="6" name="Text 4"/>
+          <p:cNvPr id="7" name="Shape 5"/>
           <p:cNvSpPr/>
           <p:nvPr/>
         </p:nvSpPr>
         <p:spPr>
           <a:xfrm>
             <a:off x="640080" y="658368"/>
+            <a:ext cx="420624" cy="420624"/>
+          </a:xfrm>
+          <a:prstGeom prst="ellipse">
+            <a:avLst/>
+          </a:prstGeom>
+          <a:solidFill>
+            <a:srgbClr val="0068B7"/>
+          </a:solidFill>
+          <a:ln w="12700">
+            <a:solidFill>
+              <a:srgbClr val="0068B7"/>
+            </a:solidFill>
+            <a:prstDash val="solid"/>
+          </a:ln>
+        </p:spPr>
+      </p:sp>
+      <p:sp>
+        <p:nvSpPr>
+          <p:cNvPr id="8" name="Text 6"/>
+          <p:cNvSpPr/>
+          <p:nvPr/>
+        </p:nvSpPr>
+        <p:spPr>
+          <a:xfrm>
+            <a:off x="640080" y="731520"/>
+            <a:ext cx="420624" cy="164592"/>
+          </a:xfrm>
+          <a:prstGeom prst="rect">
+            <a:avLst/>
+          </a:prstGeom>
+          <a:noFill/>
+          <a:ln/>
+        </p:spPr>
+        <p:txBody>
+          <a:bodyPr wrap="square" lIns="0" tIns="0" rIns="0" bIns="0" rtlCol="0" anchor="ctr"/>
+          <a:lstStyle/>
+          <a:p>
+            <a:pPr algn="ctr" indent="0" marL="0">
+              <a:buNone/>
+            </a:pPr>
+            <a:r>
+              <a:rPr lang="en-US" sz="1100" b="1" dirty="0">
+                <a:solidFill>
+                  <a:srgbClr val="FFFFFF"/>
+                </a:solidFill>
+                <a:latin typeface="Aptos" pitchFamily="34" charset="0"/>
+                <a:ea typeface="Aptos" pitchFamily="34" charset="-122"/>
+                <a:cs typeface="Aptos" pitchFamily="34" charset="-120"/>
+              </a:rPr>
+              <a:t>8</a:t>
+            </a:r>
+            <a:endParaRPr lang="en-US" sz="1100" dirty="0"/>
+          </a:p>
+        </p:txBody>
+      </p:sp>
+      <p:sp>
+        <p:nvSpPr>
+          <p:cNvPr id="9" name="Text 7"/>
+          <p:cNvSpPr/>
+          <p:nvPr/>
+        </p:nvSpPr>
+        <p:spPr>
+          <a:xfrm>
+            <a:off x="640080" y="621792"/>
             <a:ext cx="10881360" cy="566928"/>
           </a:xfrm>
           <a:prstGeom prst="rect">
@@ -3433,7 +4394,7 @@
                 <a:ea typeface="Aptos Display" pitchFamily="34" charset="-122"/>
                 <a:cs typeface="Aptos Display" pitchFamily="34" charset="-120"/>
               </a:rPr>
-              <a:t>Reflection Questions Continued</a:t>
+              <a:t>Application to AI-Supported Workflows</a:t>
             </a:r>
             <a:endParaRPr lang="en-US" sz="2700" dirty="0"/>
           </a:p>
@@ -3441,32 +4402,178 @@
       </p:sp>
       <p:sp>
         <p:nvSpPr>
-          <p:cNvPr id="7" name="Text 5"/>
-          <p:cNvSpPr/>
-          <p:nvPr/>
-        </p:nvSpPr>
-        <p:spPr>
-          <a:xfrm>
-            <a:off x="822960" y="1325880"/>
-            <a:ext cx="10378440" cy="4800600"/>
-          </a:xfrm>
-          <a:prstGeom prst="rect">
-            <a:avLst/>
-          </a:prstGeom>
-          <a:noFill/>
-          <a:ln/>
-        </p:spPr>
-        <p:txBody>
-          <a:bodyPr wrap="square" lIns="1016" tIns="1016" rIns="1016" bIns="1016" rtlCol="0" anchor="t">
+          <p:cNvPr id="10" name="Text 8"/>
+          <p:cNvSpPr/>
+          <p:nvPr/>
+        </p:nvSpPr>
+        <p:spPr>
+          <a:xfrm>
+            <a:off x="868680" y="1417320"/>
+            <a:ext cx="6675120" cy="4434840"/>
+          </a:xfrm>
+          <a:prstGeom prst="rect">
+            <a:avLst/>
+          </a:prstGeom>
+          <a:noFill/>
+          <a:ln/>
+        </p:spPr>
+        <p:txBody>
+          <a:bodyPr wrap="square" lIns="635" tIns="635" rIns="635" bIns="635" rtlCol="0" anchor="t">
             <a:normAutofit/>
           </a:bodyPr>
           <a:lstStyle/>
           <a:p>
+            <a:r>
+              <a:rPr lang="en-US" sz="1700" dirty="0">
+                <a:solidFill>
+                  <a:srgbClr val="17364A"/>
+                </a:solidFill>
+                <a:latin typeface="Aptos" pitchFamily="34" charset="0"/>
+                <a:ea typeface="Aptos" pitchFamily="34" charset="-122"/>
+                <a:cs typeface="Aptos" pitchFamily="34" charset="-120"/>
+              </a:rPr>
+              <a:t>Generative AI governance should define approved tools, prohibited data, review expectations, and when outputs may be used.</a:t>
+            </a:r>
+            <a:endParaRPr lang="en-US" sz="1700" dirty="0"/>
+          </a:p>
+          <a:p>
+            <a:r>
+              <a:rPr lang="en-US" sz="1700" dirty="0">
+                <a:solidFill>
+                  <a:srgbClr val="17364A"/>
+                </a:solidFill>
+                <a:latin typeface="Aptos" pitchFamily="34" charset="0"/>
+                <a:ea typeface="Aptos" pitchFamily="34" charset="-122"/>
+                <a:cs typeface="Aptos" pitchFamily="34" charset="-120"/>
+              </a:rPr>
+              <a:t>Predictive model governance should require validation, subgroup performance review, monitoring, and clear limits on.</a:t>
+            </a:r>
+            <a:endParaRPr lang="en-US" sz="1700" dirty="0"/>
+          </a:p>
+          <a:p>
+            <a:r>
+              <a:rPr lang="en-US" sz="1700" dirty="0">
+                <a:solidFill>
+                  <a:srgbClr val="17364A"/>
+                </a:solidFill>
+                <a:latin typeface="Aptos" pitchFamily="34" charset="0"/>
+                <a:ea typeface="Aptos" pitchFamily="34" charset="-122"/>
+                <a:cs typeface="Aptos" pitchFamily="34" charset="-120"/>
+              </a:rPr>
+              <a:t>Agentic AI governance should define allowed actions, approval checkpoints, logging, rollback procedures, and incident.</a:t>
+            </a:r>
+            <a:endParaRPr lang="en-US" sz="1700" dirty="0"/>
+          </a:p>
+          <a:p>
+            <a:r>
+              <a:rPr lang="en-US" sz="1700" dirty="0">
+                <a:solidFill>
+                  <a:srgbClr val="17364A"/>
+                </a:solidFill>
+                <a:latin typeface="Aptos" pitchFamily="34" charset="0"/>
+                <a:ea typeface="Aptos" pitchFamily="34" charset="-122"/>
+                <a:cs typeface="Aptos" pitchFamily="34" charset="-120"/>
+              </a:rPr>
+              <a:t>In each case, the charter gives the agency a repeatable way to make and document decisions.</a:t>
+            </a:r>
+            <a:endParaRPr lang="en-US" sz="1700" dirty="0"/>
+          </a:p>
+        </p:txBody>
+      </p:sp>
+      <p:sp>
+        <p:nvSpPr>
+          <p:cNvPr id="11" name="Shape 9"/>
+          <p:cNvSpPr/>
+          <p:nvPr/>
+        </p:nvSpPr>
+        <p:spPr>
+          <a:xfrm>
+            <a:off x="7909560" y="1417320"/>
+            <a:ext cx="3154680" cy="1828800"/>
+          </a:xfrm>
+          <a:prstGeom prst="roundRect">
+            <a:avLst>
+              <a:gd name="adj" fmla="val 6000"/>
+            </a:avLst>
+          </a:prstGeom>
+          <a:solidFill>
+            <a:srgbClr val="EEF8ED"/>
+          </a:solidFill>
+          <a:ln w="12700">
+            <a:solidFill>
+              <a:srgbClr val="B9D7E6"/>
+            </a:solidFill>
+            <a:prstDash val="solid"/>
+          </a:ln>
+        </p:spPr>
+      </p:sp>
+      <p:sp>
+        <p:nvSpPr>
+          <p:cNvPr id="12" name="Text 10"/>
+          <p:cNvSpPr/>
+          <p:nvPr/>
+        </p:nvSpPr>
+        <p:spPr>
+          <a:xfrm>
+            <a:off x="8074152" y="1563624"/>
+            <a:ext cx="2825496" cy="201168"/>
+          </a:xfrm>
+          <a:prstGeom prst="rect">
+            <a:avLst/>
+          </a:prstGeom>
+          <a:noFill/>
+          <a:ln/>
+        </p:spPr>
+        <p:txBody>
+          <a:bodyPr wrap="square" lIns="0" tIns="0" rIns="0" bIns="0" rtlCol="0" anchor="ctr"/>
+          <a:lstStyle/>
+          <a:p>
             <a:pPr indent="0" marL="0">
               <a:buNone/>
             </a:pPr>
             <a:r>
-              <a:rPr lang="en-US" sz="1420" dirty="0">
+              <a:rPr lang="en-US" sz="950" b="1" dirty="0">
+                <a:solidFill>
+                  <a:srgbClr val="0068B7"/>
+                </a:solidFill>
+                <a:latin typeface="Aptos" pitchFamily="34" charset="0"/>
+                <a:ea typeface="Aptos" pitchFamily="34" charset="-122"/>
+                <a:cs typeface="Aptos" pitchFamily="34" charset="-120"/>
+              </a:rPr>
+              <a:t>Key idea</a:t>
+            </a:r>
+            <a:endParaRPr lang="en-US" sz="950" dirty="0"/>
+          </a:p>
+        </p:txBody>
+      </p:sp>
+      <p:sp>
+        <p:nvSpPr>
+          <p:cNvPr id="13" name="Text 11"/>
+          <p:cNvSpPr/>
+          <p:nvPr/>
+        </p:nvSpPr>
+        <p:spPr>
+          <a:xfrm>
+            <a:off x="8074152" y="1856232"/>
+            <a:ext cx="2825496" cy="1261872"/>
+          </a:xfrm>
+          <a:prstGeom prst="rect">
+            <a:avLst/>
+          </a:prstGeom>
+          <a:noFill/>
+          <a:ln/>
+        </p:spPr>
+        <p:txBody>
+          <a:bodyPr wrap="square" lIns="0" tIns="0" rIns="0" bIns="0" rtlCol="0" anchor="t">
+            <a:normAutofit/>
+          </a:bodyPr>
+          <a:lstStyle/>
+          <a:p>
+            <a:pPr indent="0" marL="0">
+              <a:buNone/>
+            </a:pPr>
+            <a:r>
+              <a:rPr lang="en-US" sz="1250" dirty="0">
                 <a:solidFill>
                   <a:srgbClr val="17364A"/>
                 </a:solidFill>
@@ -3474,9 +4581,116 @@
                 <a:ea typeface="Aptos" pitchFamily="34" charset="-122"/>
                 <a:cs typeface="Aptos" pitchFamily="34" charset="-120"/>
               </a:rPr>
-              <a:t>Which staff, partners, or communities would be affected if this issue were handled poorly? What policy, process, or artifact should be created or updated after this module?</a:t>
-            </a:r>
-            <a:endParaRPr lang="en-US" sz="1420" dirty="0"/>
+              <a:t>Generative AI governance should define approved tools, prohibited data, review expectations, and when outputs may be used.</a:t>
+            </a:r>
+            <a:endParaRPr lang="en-US" sz="1250" dirty="0"/>
+          </a:p>
+        </p:txBody>
+      </p:sp>
+      <p:sp>
+        <p:nvSpPr>
+          <p:cNvPr id="14" name="Shape 12"/>
+          <p:cNvSpPr/>
+          <p:nvPr/>
+        </p:nvSpPr>
+        <p:spPr>
+          <a:xfrm>
+            <a:off x="7909560" y="3520440"/>
+            <a:ext cx="3154680" cy="1737360"/>
+          </a:xfrm>
+          <a:prstGeom prst="roundRect">
+            <a:avLst>
+              <a:gd name="adj" fmla="val 6316"/>
+            </a:avLst>
+          </a:prstGeom>
+          <a:solidFill>
+            <a:srgbClr val="EAF6F8"/>
+          </a:solidFill>
+          <a:ln w="12700">
+            <a:solidFill>
+              <a:srgbClr val="B9D7E6"/>
+            </a:solidFill>
+            <a:prstDash val="solid"/>
+          </a:ln>
+        </p:spPr>
+      </p:sp>
+      <p:sp>
+        <p:nvSpPr>
+          <p:cNvPr id="15" name="Text 13"/>
+          <p:cNvSpPr/>
+          <p:nvPr/>
+        </p:nvSpPr>
+        <p:spPr>
+          <a:xfrm>
+            <a:off x="8074152" y="3666744"/>
+            <a:ext cx="2825496" cy="201168"/>
+          </a:xfrm>
+          <a:prstGeom prst="rect">
+            <a:avLst/>
+          </a:prstGeom>
+          <a:noFill/>
+          <a:ln/>
+        </p:spPr>
+        <p:txBody>
+          <a:bodyPr wrap="square" lIns="0" tIns="0" rIns="0" bIns="0" rtlCol="0" anchor="ctr"/>
+          <a:lstStyle/>
+          <a:p>
+            <a:pPr indent="0" marL="0">
+              <a:buNone/>
+            </a:pPr>
+            <a:r>
+              <a:rPr lang="en-US" sz="950" b="1" dirty="0">
+                <a:solidFill>
+                  <a:srgbClr val="0068B7"/>
+                </a:solidFill>
+                <a:latin typeface="Aptos" pitchFamily="34" charset="0"/>
+                <a:ea typeface="Aptos" pitchFamily="34" charset="-122"/>
+                <a:cs typeface="Aptos" pitchFamily="34" charset="-120"/>
+              </a:rPr>
+              <a:t>Use this for</a:t>
+            </a:r>
+            <a:endParaRPr lang="en-US" sz="950" dirty="0"/>
+          </a:p>
+        </p:txBody>
+      </p:sp>
+      <p:sp>
+        <p:nvSpPr>
+          <p:cNvPr id="16" name="Text 14"/>
+          <p:cNvSpPr/>
+          <p:nvPr/>
+        </p:nvSpPr>
+        <p:spPr>
+          <a:xfrm>
+            <a:off x="8074152" y="3959352"/>
+            <a:ext cx="2825496" cy="1170432"/>
+          </a:xfrm>
+          <a:prstGeom prst="rect">
+            <a:avLst/>
+          </a:prstGeom>
+          <a:noFill/>
+          <a:ln/>
+        </p:spPr>
+        <p:txBody>
+          <a:bodyPr wrap="square" lIns="0" tIns="0" rIns="0" bIns="0" rtlCol="0" anchor="t">
+            <a:normAutofit/>
+          </a:bodyPr>
+          <a:lstStyle/>
+          <a:p>
+            <a:pPr indent="0" marL="0">
+              <a:buNone/>
+            </a:pPr>
+            <a:r>
+              <a:rPr lang="en-US" sz="1250" dirty="0">
+                <a:solidFill>
+                  <a:srgbClr val="17364A"/>
+                </a:solidFill>
+                <a:latin typeface="Aptos" pitchFamily="34" charset="0"/>
+                <a:ea typeface="Aptos" pitchFamily="34" charset="-122"/>
+                <a:cs typeface="Aptos" pitchFamily="34" charset="-120"/>
+              </a:rPr>
+              <a:t>Connect the concept to public health decisions, safeguards, documentation, or implementation work.</a:t>
+            </a:r>
+            <a:endParaRPr lang="en-US" sz="1250" dirty="0"/>
           </a:p>
         </p:txBody>
       </p:sp>
@@ -3539,7 +4753,32 @@
       </p:sp>
       <p:sp>
         <p:nvSpPr>
-          <p:cNvPr id="3" name="Text 1"/>
+          <p:cNvPr id="3" name="Shape 1"/>
+          <p:cNvSpPr/>
+          <p:nvPr/>
+        </p:nvSpPr>
+        <p:spPr>
+          <a:xfrm>
+            <a:off x="0" y="164592"/>
+            <a:ext cx="146304" cy="6693408"/>
+          </a:xfrm>
+          <a:prstGeom prst="rect">
+            <a:avLst/>
+          </a:prstGeom>
+          <a:solidFill>
+            <a:srgbClr val="2F8A28"/>
+          </a:solidFill>
+          <a:ln w="12700">
+            <a:solidFill>
+              <a:srgbClr val="2F8A28"/>
+            </a:solidFill>
+            <a:prstDash val="solid"/>
+          </a:ln>
+        </p:spPr>
+      </p:sp>
+      <p:sp>
+        <p:nvSpPr>
+          <p:cNvPr id="4" name="Text 2"/>
           <p:cNvSpPr/>
           <p:nvPr/>
         </p:nvSpPr>
@@ -3578,7 +4817,7 @@
       </p:sp>
       <p:sp>
         <p:nvSpPr>
-          <p:cNvPr id="4" name="Text 2"/>
+          <p:cNvPr id="5" name="Text 3"/>
           <p:cNvSpPr/>
           <p:nvPr/>
         </p:nvSpPr>
@@ -3617,7 +4856,7 @@
       </p:sp>
       <p:sp>
         <p:nvSpPr>
-          <p:cNvPr id="5" name="Text 3"/>
+          <p:cNvPr id="6" name="Text 4"/>
           <p:cNvSpPr/>
           <p:nvPr/>
         </p:nvSpPr>
@@ -3656,13 +4895,77 @@
       </p:sp>
       <p:sp>
         <p:nvSpPr>
-          <p:cNvPr id="6" name="Text 4"/>
+          <p:cNvPr id="7" name="Shape 5"/>
           <p:cNvSpPr/>
           <p:nvPr/>
         </p:nvSpPr>
         <p:spPr>
           <a:xfrm>
             <a:off x="640080" y="658368"/>
+            <a:ext cx="420624" cy="420624"/>
+          </a:xfrm>
+          <a:prstGeom prst="ellipse">
+            <a:avLst/>
+          </a:prstGeom>
+          <a:solidFill>
+            <a:srgbClr val="0068B7"/>
+          </a:solidFill>
+          <a:ln w="12700">
+            <a:solidFill>
+              <a:srgbClr val="0068B7"/>
+            </a:solidFill>
+            <a:prstDash val="solid"/>
+          </a:ln>
+        </p:spPr>
+      </p:sp>
+      <p:sp>
+        <p:nvSpPr>
+          <p:cNvPr id="8" name="Text 6"/>
+          <p:cNvSpPr/>
+          <p:nvPr/>
+        </p:nvSpPr>
+        <p:spPr>
+          <a:xfrm>
+            <a:off x="640080" y="731520"/>
+            <a:ext cx="420624" cy="164592"/>
+          </a:xfrm>
+          <a:prstGeom prst="rect">
+            <a:avLst/>
+          </a:prstGeom>
+          <a:noFill/>
+          <a:ln/>
+        </p:spPr>
+        <p:txBody>
+          <a:bodyPr wrap="square" lIns="0" tIns="0" rIns="0" bIns="0" rtlCol="0" anchor="ctr"/>
+          <a:lstStyle/>
+          <a:p>
+            <a:pPr algn="ctr" indent="0" marL="0">
+              <a:buNone/>
+            </a:pPr>
+            <a:r>
+              <a:rPr lang="en-US" sz="1100" b="1" dirty="0">
+                <a:solidFill>
+                  <a:srgbClr val="FFFFFF"/>
+                </a:solidFill>
+                <a:latin typeface="Aptos" pitchFamily="34" charset="0"/>
+                <a:ea typeface="Aptos" pitchFamily="34" charset="-122"/>
+                <a:cs typeface="Aptos" pitchFamily="34" charset="-120"/>
+              </a:rPr>
+              <a:t>9</a:t>
+            </a:r>
+            <a:endParaRPr lang="en-US" sz="1100" dirty="0"/>
+          </a:p>
+        </p:txBody>
+      </p:sp>
+      <p:sp>
+        <p:nvSpPr>
+          <p:cNvPr id="9" name="Text 7"/>
+          <p:cNvSpPr/>
+          <p:nvPr/>
+        </p:nvSpPr>
+        <p:spPr>
+          <a:xfrm>
+            <a:off x="640080" y="621792"/>
             <a:ext cx="10881360" cy="566928"/>
           </a:xfrm>
           <a:prstGeom prst="rect">
@@ -3689,7 +4992,7 @@
                 <a:ea typeface="Aptos Display" pitchFamily="34" charset="-122"/>
                 <a:cs typeface="Aptos Display" pitchFamily="34" charset="-120"/>
               </a:rPr>
-              <a:t>Practical Exercise</a:t>
+              <a:t>Reflection Questions</a:t>
             </a:r>
             <a:endParaRPr lang="en-US" sz="2700" dirty="0"/>
           </a:p>
@@ -3697,32 +5000,164 @@
       </p:sp>
       <p:sp>
         <p:nvSpPr>
-          <p:cNvPr id="7" name="Text 5"/>
-          <p:cNvSpPr/>
-          <p:nvPr/>
-        </p:nvSpPr>
-        <p:spPr>
-          <a:xfrm>
-            <a:off x="822960" y="1325880"/>
-            <a:ext cx="10378440" cy="4800600"/>
-          </a:xfrm>
-          <a:prstGeom prst="rect">
-            <a:avLst/>
-          </a:prstGeom>
-          <a:noFill/>
-          <a:ln/>
-        </p:spPr>
-        <p:txBody>
-          <a:bodyPr wrap="square" lIns="1016" tIns="1016" rIns="1016" bIns="1016" rtlCol="0" anchor="t">
+          <p:cNvPr id="10" name="Text 8"/>
+          <p:cNvSpPr/>
+          <p:nvPr/>
+        </p:nvSpPr>
+        <p:spPr>
+          <a:xfrm>
+            <a:off x="868680" y="1417320"/>
+            <a:ext cx="6675120" cy="4434840"/>
+          </a:xfrm>
+          <a:prstGeom prst="rect">
+            <a:avLst/>
+          </a:prstGeom>
+          <a:noFill/>
+          <a:ln/>
+        </p:spPr>
+        <p:txBody>
+          <a:bodyPr wrap="square" lIns="635" tIns="635" rIns="635" bIns="635" rtlCol="0" anchor="t">
             <a:normAutofit/>
           </a:bodyPr>
           <a:lstStyle/>
           <a:p>
+            <a:r>
+              <a:rPr lang="en-US" sz="1700" dirty="0">
+                <a:solidFill>
+                  <a:srgbClr val="17364A"/>
+                </a:solidFill>
+                <a:latin typeface="Aptos" pitchFamily="34" charset="0"/>
+                <a:ea typeface="Aptos" pitchFamily="34" charset="-122"/>
+                <a:cs typeface="Aptos" pitchFamily="34" charset="-120"/>
+              </a:rPr>
+              <a:t>Which current or proposed AI use case in your agency raises this leadership or governance issue most clearly?</a:t>
+            </a:r>
+            <a:endParaRPr lang="en-US" sz="1700" dirty="0"/>
+          </a:p>
+          <a:p>
+            <a:r>
+              <a:rPr lang="en-US" sz="1700" dirty="0">
+                <a:solidFill>
+                  <a:srgbClr val="17364A"/>
+                </a:solidFill>
+                <a:latin typeface="Aptos" pitchFamily="34" charset="0"/>
+                <a:ea typeface="Aptos" pitchFamily="34" charset="-122"/>
+                <a:cs typeface="Aptos" pitchFamily="34" charset="-120"/>
+              </a:rPr>
+              <a:t>Who currently has authority to make decisions about this issue, and is that authority documented?</a:t>
+            </a:r>
+            <a:endParaRPr lang="en-US" sz="1700" dirty="0"/>
+          </a:p>
+          <a:p>
+            <a:r>
+              <a:rPr lang="en-US" sz="1700" dirty="0">
+                <a:solidFill>
+                  <a:srgbClr val="17364A"/>
+                </a:solidFill>
+                <a:latin typeface="Aptos" pitchFamily="34" charset="0"/>
+                <a:ea typeface="Aptos" pitchFamily="34" charset="-122"/>
+                <a:cs typeface="Aptos" pitchFamily="34" charset="-120"/>
+              </a:rPr>
+              <a:t>What evidence would governance or leadership need before approving the use case?</a:t>
+            </a:r>
+            <a:endParaRPr lang="en-US" sz="1700" dirty="0"/>
+          </a:p>
+        </p:txBody>
+      </p:sp>
+      <p:sp>
+        <p:nvSpPr>
+          <p:cNvPr id="11" name="Shape 9"/>
+          <p:cNvSpPr/>
+          <p:nvPr/>
+        </p:nvSpPr>
+        <p:spPr>
+          <a:xfrm>
+            <a:off x="7909560" y="1417320"/>
+            <a:ext cx="3154680" cy="1828800"/>
+          </a:xfrm>
+          <a:prstGeom prst="roundRect">
+            <a:avLst>
+              <a:gd name="adj" fmla="val 6000"/>
+            </a:avLst>
+          </a:prstGeom>
+          <a:solidFill>
+            <a:srgbClr val="EEF8ED"/>
+          </a:solidFill>
+          <a:ln w="12700">
+            <a:solidFill>
+              <a:srgbClr val="B9D7E6"/>
+            </a:solidFill>
+            <a:prstDash val="solid"/>
+          </a:ln>
+        </p:spPr>
+      </p:sp>
+      <p:sp>
+        <p:nvSpPr>
+          <p:cNvPr id="12" name="Text 10"/>
+          <p:cNvSpPr/>
+          <p:nvPr/>
+        </p:nvSpPr>
+        <p:spPr>
+          <a:xfrm>
+            <a:off x="8074152" y="1563624"/>
+            <a:ext cx="2825496" cy="201168"/>
+          </a:xfrm>
+          <a:prstGeom prst="rect">
+            <a:avLst/>
+          </a:prstGeom>
+          <a:noFill/>
+          <a:ln/>
+        </p:spPr>
+        <p:txBody>
+          <a:bodyPr wrap="square" lIns="0" tIns="0" rIns="0" bIns="0" rtlCol="0" anchor="ctr"/>
+          <a:lstStyle/>
+          <a:p>
             <a:pPr indent="0" marL="0">
               <a:buNone/>
             </a:pPr>
             <a:r>
-              <a:rPr lang="en-US" sz="1420" dirty="0">
+              <a:rPr lang="en-US" sz="950" b="1" dirty="0">
+                <a:solidFill>
+                  <a:srgbClr val="0068B7"/>
+                </a:solidFill>
+                <a:latin typeface="Aptos" pitchFamily="34" charset="0"/>
+                <a:ea typeface="Aptos" pitchFamily="34" charset="-122"/>
+                <a:cs typeface="Aptos" pitchFamily="34" charset="-120"/>
+              </a:rPr>
+              <a:t>Key idea</a:t>
+            </a:r>
+            <a:endParaRPr lang="en-US" sz="950" dirty="0"/>
+          </a:p>
+        </p:txBody>
+      </p:sp>
+      <p:sp>
+        <p:nvSpPr>
+          <p:cNvPr id="13" name="Text 11"/>
+          <p:cNvSpPr/>
+          <p:nvPr/>
+        </p:nvSpPr>
+        <p:spPr>
+          <a:xfrm>
+            <a:off x="8074152" y="1856232"/>
+            <a:ext cx="2825496" cy="1261872"/>
+          </a:xfrm>
+          <a:prstGeom prst="rect">
+            <a:avLst/>
+          </a:prstGeom>
+          <a:noFill/>
+          <a:ln/>
+        </p:spPr>
+        <p:txBody>
+          <a:bodyPr wrap="square" lIns="0" tIns="0" rIns="0" bIns="0" rtlCol="0" anchor="t">
+            <a:normAutofit/>
+          </a:bodyPr>
+          <a:lstStyle/>
+          <a:p>
+            <a:pPr indent="0" marL="0">
+              <a:buNone/>
+            </a:pPr>
+            <a:r>
+              <a:rPr lang="en-US" sz="1250" dirty="0">
                 <a:solidFill>
                   <a:srgbClr val="17364A"/>
                 </a:solidFill>
@@ -3730,9 +5165,116 @@
                 <a:ea typeface="Aptos" pitchFamily="34" charset="-122"/>
                 <a:cs typeface="Aptos" pitchFamily="34" charset="-120"/>
               </a:rPr>
-              <a:t>Draft a one-page AI governance charter and a one-page operating model. Include scope, membership, review levels, decision rights, documentation, escalation, monitoring, and meeting cadence.</a:t>
-            </a:r>
-            <a:endParaRPr lang="en-US" sz="1420" dirty="0"/>
+              <a:t>Which current or proposed AI use case in your agency raises this leadership or governance issue most clearly?</a:t>
+            </a:r>
+            <a:endParaRPr lang="en-US" sz="1250" dirty="0"/>
+          </a:p>
+        </p:txBody>
+      </p:sp>
+      <p:sp>
+        <p:nvSpPr>
+          <p:cNvPr id="14" name="Shape 12"/>
+          <p:cNvSpPr/>
+          <p:nvPr/>
+        </p:nvSpPr>
+        <p:spPr>
+          <a:xfrm>
+            <a:off x="7909560" y="3520440"/>
+            <a:ext cx="3154680" cy="1737360"/>
+          </a:xfrm>
+          <a:prstGeom prst="roundRect">
+            <a:avLst>
+              <a:gd name="adj" fmla="val 6316"/>
+            </a:avLst>
+          </a:prstGeom>
+          <a:solidFill>
+            <a:srgbClr val="EAF6F8"/>
+          </a:solidFill>
+          <a:ln w="12700">
+            <a:solidFill>
+              <a:srgbClr val="B9D7E6"/>
+            </a:solidFill>
+            <a:prstDash val="solid"/>
+          </a:ln>
+        </p:spPr>
+      </p:sp>
+      <p:sp>
+        <p:nvSpPr>
+          <p:cNvPr id="15" name="Text 13"/>
+          <p:cNvSpPr/>
+          <p:nvPr/>
+        </p:nvSpPr>
+        <p:spPr>
+          <a:xfrm>
+            <a:off x="8074152" y="3666744"/>
+            <a:ext cx="2825496" cy="201168"/>
+          </a:xfrm>
+          <a:prstGeom prst="rect">
+            <a:avLst/>
+          </a:prstGeom>
+          <a:noFill/>
+          <a:ln/>
+        </p:spPr>
+        <p:txBody>
+          <a:bodyPr wrap="square" lIns="0" tIns="0" rIns="0" bIns="0" rtlCol="0" anchor="ctr"/>
+          <a:lstStyle/>
+          <a:p>
+            <a:pPr indent="0" marL="0">
+              <a:buNone/>
+            </a:pPr>
+            <a:r>
+              <a:rPr lang="en-US" sz="950" b="1" dirty="0">
+                <a:solidFill>
+                  <a:srgbClr val="0068B7"/>
+                </a:solidFill>
+                <a:latin typeface="Aptos" pitchFamily="34" charset="0"/>
+                <a:ea typeface="Aptos" pitchFamily="34" charset="-122"/>
+                <a:cs typeface="Aptos" pitchFamily="34" charset="-120"/>
+              </a:rPr>
+              <a:t>Use this for</a:t>
+            </a:r>
+            <a:endParaRPr lang="en-US" sz="950" dirty="0"/>
+          </a:p>
+        </p:txBody>
+      </p:sp>
+      <p:sp>
+        <p:nvSpPr>
+          <p:cNvPr id="16" name="Text 14"/>
+          <p:cNvSpPr/>
+          <p:nvPr/>
+        </p:nvSpPr>
+        <p:spPr>
+          <a:xfrm>
+            <a:off x="8074152" y="3959352"/>
+            <a:ext cx="2825496" cy="1170432"/>
+          </a:xfrm>
+          <a:prstGeom prst="rect">
+            <a:avLst/>
+          </a:prstGeom>
+          <a:noFill/>
+          <a:ln/>
+        </p:spPr>
+        <p:txBody>
+          <a:bodyPr wrap="square" lIns="0" tIns="0" rIns="0" bIns="0" rtlCol="0" anchor="t">
+            <a:normAutofit/>
+          </a:bodyPr>
+          <a:lstStyle/>
+          <a:p>
+            <a:pPr indent="0" marL="0">
+              <a:buNone/>
+            </a:pPr>
+            <a:r>
+              <a:rPr lang="en-US" sz="1250" dirty="0">
+                <a:solidFill>
+                  <a:srgbClr val="17364A"/>
+                </a:solidFill>
+                <a:latin typeface="Aptos" pitchFamily="34" charset="0"/>
+                <a:ea typeface="Aptos" pitchFamily="34" charset="-122"/>
+                <a:cs typeface="Aptos" pitchFamily="34" charset="-120"/>
+              </a:rPr>
+              <a:t>Connect the concept to public health decisions, safeguards, documentation, or implementation work.</a:t>
+            </a:r>
+            <a:endParaRPr lang="en-US" sz="1250" dirty="0"/>
           </a:p>
         </p:txBody>
       </p:sp>
@@ -3795,7 +5337,32 @@
       </p:sp>
       <p:sp>
         <p:nvSpPr>
-          <p:cNvPr id="3" name="Text 1"/>
+          <p:cNvPr id="3" name="Shape 1"/>
+          <p:cNvSpPr/>
+          <p:nvPr/>
+        </p:nvSpPr>
+        <p:spPr>
+          <a:xfrm>
+            <a:off x="0" y="164592"/>
+            <a:ext cx="146304" cy="6693408"/>
+          </a:xfrm>
+          <a:prstGeom prst="rect">
+            <a:avLst/>
+          </a:prstGeom>
+          <a:solidFill>
+            <a:srgbClr val="2F8A28"/>
+          </a:solidFill>
+          <a:ln w="12700">
+            <a:solidFill>
+              <a:srgbClr val="2F8A28"/>
+            </a:solidFill>
+            <a:prstDash val="solid"/>
+          </a:ln>
+        </p:spPr>
+      </p:sp>
+      <p:sp>
+        <p:nvSpPr>
+          <p:cNvPr id="4" name="Text 2"/>
           <p:cNvSpPr/>
           <p:nvPr/>
         </p:nvSpPr>
@@ -3834,7 +5401,7 @@
       </p:sp>
       <p:sp>
         <p:nvSpPr>
-          <p:cNvPr id="4" name="Text 2"/>
+          <p:cNvPr id="5" name="Text 3"/>
           <p:cNvSpPr/>
           <p:nvPr/>
         </p:nvSpPr>
@@ -3873,7 +5440,7 @@
       </p:sp>
       <p:sp>
         <p:nvSpPr>
-          <p:cNvPr id="5" name="Text 3"/>
+          <p:cNvPr id="6" name="Text 4"/>
           <p:cNvSpPr/>
           <p:nvPr/>
         </p:nvSpPr>
@@ -3912,7 +5479,7 @@
       </p:sp>
       <p:sp>
         <p:nvSpPr>
-          <p:cNvPr id="6" name="Text 4"/>
+          <p:cNvPr id="7" name="Text 5"/>
           <p:cNvSpPr/>
           <p:nvPr/>
         </p:nvSpPr>
@@ -3945,7 +5512,7 @@
                 <a:ea typeface="Aptos Display" pitchFamily="34" charset="-122"/>
                 <a:cs typeface="Aptos Display" pitchFamily="34" charset="-120"/>
               </a:rPr>
-              <a:t>Before You Begin</a:t>
+              <a:t>Reflection Questions Continued</a:t>
             </a:r>
             <a:endParaRPr lang="en-US" sz="2700" dirty="0"/>
           </a:p>
@@ -3953,32 +5520,150 @@
       </p:sp>
       <p:sp>
         <p:nvSpPr>
-          <p:cNvPr id="7" name="Text 5"/>
-          <p:cNvSpPr/>
-          <p:nvPr/>
-        </p:nvSpPr>
-        <p:spPr>
-          <a:xfrm>
-            <a:off x="822960" y="1325880"/>
-            <a:ext cx="10378440" cy="4800600"/>
-          </a:xfrm>
-          <a:prstGeom prst="rect">
-            <a:avLst/>
-          </a:prstGeom>
-          <a:noFill/>
-          <a:ln/>
-        </p:spPr>
-        <p:txBody>
-          <a:bodyPr wrap="square" lIns="1016" tIns="1016" rIns="1016" bIns="1016" rtlCol="0" anchor="t">
+          <p:cNvPr id="8" name="Text 6"/>
+          <p:cNvSpPr/>
+          <p:nvPr/>
+        </p:nvSpPr>
+        <p:spPr>
+          <a:xfrm>
+            <a:off x="868680" y="1417320"/>
+            <a:ext cx="6675120" cy="4434840"/>
+          </a:xfrm>
+          <a:prstGeom prst="rect">
+            <a:avLst/>
+          </a:prstGeom>
+          <a:noFill/>
+          <a:ln/>
+        </p:spPr>
+        <p:txBody>
+          <a:bodyPr wrap="square" lIns="635" tIns="635" rIns="635" bIns="635" rtlCol="0" anchor="t">
             <a:normAutofit/>
           </a:bodyPr>
           <a:lstStyle/>
           <a:p>
+            <a:r>
+              <a:rPr lang="en-US" sz="1700" dirty="0">
+                <a:solidFill>
+                  <a:srgbClr val="17364A"/>
+                </a:solidFill>
+                <a:latin typeface="Aptos" pitchFamily="34" charset="0"/>
+                <a:ea typeface="Aptos" pitchFamily="34" charset="-122"/>
+                <a:cs typeface="Aptos" pitchFamily="34" charset="-120"/>
+              </a:rPr>
+              <a:t>Which staff, partners, or communities would be affected if this issue were handled poorly?</a:t>
+            </a:r>
+            <a:endParaRPr lang="en-US" sz="1700" dirty="0"/>
+          </a:p>
+          <a:p>
+            <a:r>
+              <a:rPr lang="en-US" sz="1700" dirty="0">
+                <a:solidFill>
+                  <a:srgbClr val="17364A"/>
+                </a:solidFill>
+                <a:latin typeface="Aptos" pitchFamily="34" charset="0"/>
+                <a:ea typeface="Aptos" pitchFamily="34" charset="-122"/>
+                <a:cs typeface="Aptos" pitchFamily="34" charset="-120"/>
+              </a:rPr>
+              <a:t>What policy, process, or artifact should be created or updated after this module?</a:t>
+            </a:r>
+            <a:endParaRPr lang="en-US" sz="1700" dirty="0"/>
+          </a:p>
+        </p:txBody>
+      </p:sp>
+      <p:sp>
+        <p:nvSpPr>
+          <p:cNvPr id="9" name="Shape 7"/>
+          <p:cNvSpPr/>
+          <p:nvPr/>
+        </p:nvSpPr>
+        <p:spPr>
+          <a:xfrm>
+            <a:off x="7909560" y="1417320"/>
+            <a:ext cx="3154680" cy="1828800"/>
+          </a:xfrm>
+          <a:prstGeom prst="roundRect">
+            <a:avLst>
+              <a:gd name="adj" fmla="val 6000"/>
+            </a:avLst>
+          </a:prstGeom>
+          <a:solidFill>
+            <a:srgbClr val="EEF8ED"/>
+          </a:solidFill>
+          <a:ln w="12700">
+            <a:solidFill>
+              <a:srgbClr val="B9D7E6"/>
+            </a:solidFill>
+            <a:prstDash val="solid"/>
+          </a:ln>
+        </p:spPr>
+      </p:sp>
+      <p:sp>
+        <p:nvSpPr>
+          <p:cNvPr id="10" name="Text 8"/>
+          <p:cNvSpPr/>
+          <p:nvPr/>
+        </p:nvSpPr>
+        <p:spPr>
+          <a:xfrm>
+            <a:off x="8074152" y="1563624"/>
+            <a:ext cx="2825496" cy="201168"/>
+          </a:xfrm>
+          <a:prstGeom prst="rect">
+            <a:avLst/>
+          </a:prstGeom>
+          <a:noFill/>
+          <a:ln/>
+        </p:spPr>
+        <p:txBody>
+          <a:bodyPr wrap="square" lIns="0" tIns="0" rIns="0" bIns="0" rtlCol="0" anchor="ctr"/>
+          <a:lstStyle/>
+          <a:p>
             <a:pPr indent="0" marL="0">
               <a:buNone/>
             </a:pPr>
             <a:r>
-              <a:rPr lang="en-US" sz="1420" dirty="0">
+              <a:rPr lang="en-US" sz="950" b="1" dirty="0">
+                <a:solidFill>
+                  <a:srgbClr val="0068B7"/>
+                </a:solidFill>
+                <a:latin typeface="Aptos" pitchFamily="34" charset="0"/>
+                <a:ea typeface="Aptos" pitchFamily="34" charset="-122"/>
+                <a:cs typeface="Aptos" pitchFamily="34" charset="-120"/>
+              </a:rPr>
+              <a:t>Key idea</a:t>
+            </a:r>
+            <a:endParaRPr lang="en-US" sz="950" dirty="0"/>
+          </a:p>
+        </p:txBody>
+      </p:sp>
+      <p:sp>
+        <p:nvSpPr>
+          <p:cNvPr id="11" name="Text 9"/>
+          <p:cNvSpPr/>
+          <p:nvPr/>
+        </p:nvSpPr>
+        <p:spPr>
+          <a:xfrm>
+            <a:off x="8074152" y="1856232"/>
+            <a:ext cx="2825496" cy="1261872"/>
+          </a:xfrm>
+          <a:prstGeom prst="rect">
+            <a:avLst/>
+          </a:prstGeom>
+          <a:noFill/>
+          <a:ln/>
+        </p:spPr>
+        <p:txBody>
+          <a:bodyPr wrap="square" lIns="0" tIns="0" rIns="0" bIns="0" rtlCol="0" anchor="t">
+            <a:normAutofit/>
+          </a:bodyPr>
+          <a:lstStyle/>
+          <a:p>
+            <a:pPr indent="0" marL="0">
+              <a:buNone/>
+            </a:pPr>
+            <a:r>
+              <a:rPr lang="en-US" sz="1250" dirty="0">
                 <a:solidFill>
                   <a:srgbClr val="17364A"/>
                 </a:solidFill>
@@ -3986,9 +5671,116 @@
                 <a:ea typeface="Aptos" pitchFamily="34" charset="-122"/>
                 <a:cs typeface="Aptos" pitchFamily="34" charset="-120"/>
               </a:rPr>
-              <a:t>Choose a real or realistic public health AI use case. Document assumptions, unresolved questions, and which agency roles would need to review the artifact before it is adopted. The exercise should produce a work product that could support governance review, leadership discussion, implementation planning, or policy development.</a:t>
-            </a:r>
-            <a:endParaRPr lang="en-US" sz="1420" dirty="0"/>
+              <a:t>Which staff, partners, or communities would be affected if this issue were handled poorly?</a:t>
+            </a:r>
+            <a:endParaRPr lang="en-US" sz="1250" dirty="0"/>
+          </a:p>
+        </p:txBody>
+      </p:sp>
+      <p:sp>
+        <p:nvSpPr>
+          <p:cNvPr id="12" name="Shape 10"/>
+          <p:cNvSpPr/>
+          <p:nvPr/>
+        </p:nvSpPr>
+        <p:spPr>
+          <a:xfrm>
+            <a:off x="7909560" y="3520440"/>
+            <a:ext cx="3154680" cy="1737360"/>
+          </a:xfrm>
+          <a:prstGeom prst="roundRect">
+            <a:avLst>
+              <a:gd name="adj" fmla="val 6316"/>
+            </a:avLst>
+          </a:prstGeom>
+          <a:solidFill>
+            <a:srgbClr val="EAF6F8"/>
+          </a:solidFill>
+          <a:ln w="12700">
+            <a:solidFill>
+              <a:srgbClr val="B9D7E6"/>
+            </a:solidFill>
+            <a:prstDash val="solid"/>
+          </a:ln>
+        </p:spPr>
+      </p:sp>
+      <p:sp>
+        <p:nvSpPr>
+          <p:cNvPr id="13" name="Text 11"/>
+          <p:cNvSpPr/>
+          <p:nvPr/>
+        </p:nvSpPr>
+        <p:spPr>
+          <a:xfrm>
+            <a:off x="8074152" y="3666744"/>
+            <a:ext cx="2825496" cy="201168"/>
+          </a:xfrm>
+          <a:prstGeom prst="rect">
+            <a:avLst/>
+          </a:prstGeom>
+          <a:noFill/>
+          <a:ln/>
+        </p:spPr>
+        <p:txBody>
+          <a:bodyPr wrap="square" lIns="0" tIns="0" rIns="0" bIns="0" rtlCol="0" anchor="ctr"/>
+          <a:lstStyle/>
+          <a:p>
+            <a:pPr indent="0" marL="0">
+              <a:buNone/>
+            </a:pPr>
+            <a:r>
+              <a:rPr lang="en-US" sz="950" b="1" dirty="0">
+                <a:solidFill>
+                  <a:srgbClr val="0068B7"/>
+                </a:solidFill>
+                <a:latin typeface="Aptos" pitchFamily="34" charset="0"/>
+                <a:ea typeface="Aptos" pitchFamily="34" charset="-122"/>
+                <a:cs typeface="Aptos" pitchFamily="34" charset="-120"/>
+              </a:rPr>
+              <a:t>Use this for</a:t>
+            </a:r>
+            <a:endParaRPr lang="en-US" sz="950" dirty="0"/>
+          </a:p>
+        </p:txBody>
+      </p:sp>
+      <p:sp>
+        <p:nvSpPr>
+          <p:cNvPr id="14" name="Text 12"/>
+          <p:cNvSpPr/>
+          <p:nvPr/>
+        </p:nvSpPr>
+        <p:spPr>
+          <a:xfrm>
+            <a:off x="8074152" y="3959352"/>
+            <a:ext cx="2825496" cy="1170432"/>
+          </a:xfrm>
+          <a:prstGeom prst="rect">
+            <a:avLst/>
+          </a:prstGeom>
+          <a:noFill/>
+          <a:ln/>
+        </p:spPr>
+        <p:txBody>
+          <a:bodyPr wrap="square" lIns="0" tIns="0" rIns="0" bIns="0" rtlCol="0" anchor="t">
+            <a:normAutofit/>
+          </a:bodyPr>
+          <a:lstStyle/>
+          <a:p>
+            <a:pPr indent="0" marL="0">
+              <a:buNone/>
+            </a:pPr>
+            <a:r>
+              <a:rPr lang="en-US" sz="1250" dirty="0">
+                <a:solidFill>
+                  <a:srgbClr val="17364A"/>
+                </a:solidFill>
+                <a:latin typeface="Aptos" pitchFamily="34" charset="0"/>
+                <a:ea typeface="Aptos" pitchFamily="34" charset="-122"/>
+                <a:cs typeface="Aptos" pitchFamily="34" charset="-120"/>
+              </a:rPr>
+              <a:t>Connect the concept to public health decisions, safeguards, documentation, or implementation work.</a:t>
+            </a:r>
+            <a:endParaRPr lang="en-US" sz="1250" dirty="0"/>
           </a:p>
         </p:txBody>
       </p:sp>
@@ -4051,7 +5843,32 @@
       </p:sp>
       <p:sp>
         <p:nvSpPr>
-          <p:cNvPr id="3" name="Text 1"/>
+          <p:cNvPr id="3" name="Shape 1"/>
+          <p:cNvSpPr/>
+          <p:nvPr/>
+        </p:nvSpPr>
+        <p:spPr>
+          <a:xfrm>
+            <a:off x="0" y="164592"/>
+            <a:ext cx="146304" cy="6693408"/>
+          </a:xfrm>
+          <a:prstGeom prst="rect">
+            <a:avLst/>
+          </a:prstGeom>
+          <a:solidFill>
+            <a:srgbClr val="2F8A28"/>
+          </a:solidFill>
+          <a:ln w="12700">
+            <a:solidFill>
+              <a:srgbClr val="2F8A28"/>
+            </a:solidFill>
+            <a:prstDash val="solid"/>
+          </a:ln>
+        </p:spPr>
+      </p:sp>
+      <p:sp>
+        <p:nvSpPr>
+          <p:cNvPr id="4" name="Text 2"/>
           <p:cNvSpPr/>
           <p:nvPr/>
         </p:nvSpPr>
@@ -4090,7 +5907,7 @@
       </p:sp>
       <p:sp>
         <p:nvSpPr>
-          <p:cNvPr id="4" name="Text 2"/>
+          <p:cNvPr id="5" name="Text 3"/>
           <p:cNvSpPr/>
           <p:nvPr/>
         </p:nvSpPr>
@@ -4129,7 +5946,7 @@
       </p:sp>
       <p:sp>
         <p:nvSpPr>
-          <p:cNvPr id="5" name="Text 3"/>
+          <p:cNvPr id="6" name="Text 4"/>
           <p:cNvSpPr/>
           <p:nvPr/>
         </p:nvSpPr>
@@ -4168,13 +5985,77 @@
       </p:sp>
       <p:sp>
         <p:nvSpPr>
-          <p:cNvPr id="6" name="Text 4"/>
+          <p:cNvPr id="7" name="Shape 5"/>
           <p:cNvSpPr/>
           <p:nvPr/>
         </p:nvSpPr>
         <p:spPr>
           <a:xfrm>
             <a:off x="640080" y="658368"/>
+            <a:ext cx="420624" cy="420624"/>
+          </a:xfrm>
+          <a:prstGeom prst="ellipse">
+            <a:avLst/>
+          </a:prstGeom>
+          <a:solidFill>
+            <a:srgbClr val="0068B7"/>
+          </a:solidFill>
+          <a:ln w="12700">
+            <a:solidFill>
+              <a:srgbClr val="0068B7"/>
+            </a:solidFill>
+            <a:prstDash val="solid"/>
+          </a:ln>
+        </p:spPr>
+      </p:sp>
+      <p:sp>
+        <p:nvSpPr>
+          <p:cNvPr id="8" name="Text 6"/>
+          <p:cNvSpPr/>
+          <p:nvPr/>
+        </p:nvSpPr>
+        <p:spPr>
+          <a:xfrm>
+            <a:off x="640080" y="731520"/>
+            <a:ext cx="420624" cy="164592"/>
+          </a:xfrm>
+          <a:prstGeom prst="rect">
+            <a:avLst/>
+          </a:prstGeom>
+          <a:noFill/>
+          <a:ln/>
+        </p:spPr>
+        <p:txBody>
+          <a:bodyPr wrap="square" lIns="0" tIns="0" rIns="0" bIns="0" rtlCol="0" anchor="ctr"/>
+          <a:lstStyle/>
+          <a:p>
+            <a:pPr algn="ctr" indent="0" marL="0">
+              <a:buNone/>
+            </a:pPr>
+            <a:r>
+              <a:rPr lang="en-US" sz="1100" b="1" dirty="0">
+                <a:solidFill>
+                  <a:srgbClr val="FFFFFF"/>
+                </a:solidFill>
+                <a:latin typeface="Aptos" pitchFamily="34" charset="0"/>
+                <a:ea typeface="Aptos" pitchFamily="34" charset="-122"/>
+                <a:cs typeface="Aptos" pitchFamily="34" charset="-120"/>
+              </a:rPr>
+              <a:t>10</a:t>
+            </a:r>
+            <a:endParaRPr lang="en-US" sz="1100" dirty="0"/>
+          </a:p>
+        </p:txBody>
+      </p:sp>
+      <p:sp>
+        <p:nvSpPr>
+          <p:cNvPr id="9" name="Text 7"/>
+          <p:cNvSpPr/>
+          <p:nvPr/>
+        </p:nvSpPr>
+        <p:spPr>
+          <a:xfrm>
+            <a:off x="640080" y="621792"/>
             <a:ext cx="10881360" cy="566928"/>
           </a:xfrm>
           <a:prstGeom prst="rect">
@@ -4201,7 +6082,7 @@
                 <a:ea typeface="Aptos Display" pitchFamily="34" charset="-122"/>
                 <a:cs typeface="Aptos Display" pitchFamily="34" charset="-120"/>
               </a:rPr>
-              <a:t>Expected Artifact or Evidence</a:t>
+              <a:t>Practical Exercise</a:t>
             </a:r>
             <a:endParaRPr lang="en-US" sz="2700" dirty="0"/>
           </a:p>
@@ -4209,32 +6090,150 @@
       </p:sp>
       <p:sp>
         <p:nvSpPr>
-          <p:cNvPr id="7" name="Text 5"/>
-          <p:cNvSpPr/>
-          <p:nvPr/>
-        </p:nvSpPr>
-        <p:spPr>
-          <a:xfrm>
-            <a:off x="822960" y="1325880"/>
-            <a:ext cx="10378440" cy="4800600"/>
-          </a:xfrm>
-          <a:prstGeom prst="rect">
-            <a:avLst/>
-          </a:prstGeom>
-          <a:noFill/>
-          <a:ln/>
-        </p:spPr>
-        <p:txBody>
-          <a:bodyPr wrap="square" lIns="1016" tIns="1016" rIns="1016" bIns="1016" rtlCol="0" anchor="t">
+          <p:cNvPr id="10" name="Text 8"/>
+          <p:cNvSpPr/>
+          <p:nvPr/>
+        </p:nvSpPr>
+        <p:spPr>
+          <a:xfrm>
+            <a:off x="868680" y="1417320"/>
+            <a:ext cx="6675120" cy="4434840"/>
+          </a:xfrm>
+          <a:prstGeom prst="rect">
+            <a:avLst/>
+          </a:prstGeom>
+          <a:noFill/>
+          <a:ln/>
+        </p:spPr>
+        <p:txBody>
+          <a:bodyPr wrap="square" lIns="635" tIns="635" rIns="635" bIns="635" rtlCol="0" anchor="t">
             <a:normAutofit/>
           </a:bodyPr>
           <a:lstStyle/>
           <a:p>
+            <a:r>
+              <a:rPr lang="en-US" sz="1700" dirty="0">
+                <a:solidFill>
+                  <a:srgbClr val="17364A"/>
+                </a:solidFill>
+                <a:latin typeface="Aptos" pitchFamily="34" charset="0"/>
+                <a:ea typeface="Aptos" pitchFamily="34" charset="-122"/>
+                <a:cs typeface="Aptos" pitchFamily="34" charset="-120"/>
+              </a:rPr>
+              <a:t>Draft a one-page AI governance charter and a one-page operating model.</a:t>
+            </a:r>
+            <a:endParaRPr lang="en-US" sz="1700" dirty="0"/>
+          </a:p>
+          <a:p>
+            <a:r>
+              <a:rPr lang="en-US" sz="1700" dirty="0">
+                <a:solidFill>
+                  <a:srgbClr val="17364A"/>
+                </a:solidFill>
+                <a:latin typeface="Aptos" pitchFamily="34" charset="0"/>
+                <a:ea typeface="Aptos" pitchFamily="34" charset="-122"/>
+                <a:cs typeface="Aptos" pitchFamily="34" charset="-120"/>
+              </a:rPr>
+              <a:t>Include scope, membership, review levels, decision rights, documentation, escalation, monitoring, and meeting cadence.</a:t>
+            </a:r>
+            <a:endParaRPr lang="en-US" sz="1700" dirty="0"/>
+          </a:p>
+        </p:txBody>
+      </p:sp>
+      <p:sp>
+        <p:nvSpPr>
+          <p:cNvPr id="11" name="Shape 9"/>
+          <p:cNvSpPr/>
+          <p:nvPr/>
+        </p:nvSpPr>
+        <p:spPr>
+          <a:xfrm>
+            <a:off x="7909560" y="1417320"/>
+            <a:ext cx="3154680" cy="1828800"/>
+          </a:xfrm>
+          <a:prstGeom prst="roundRect">
+            <a:avLst>
+              <a:gd name="adj" fmla="val 6000"/>
+            </a:avLst>
+          </a:prstGeom>
+          <a:solidFill>
+            <a:srgbClr val="EEF8ED"/>
+          </a:solidFill>
+          <a:ln w="12700">
+            <a:solidFill>
+              <a:srgbClr val="B9D7E6"/>
+            </a:solidFill>
+            <a:prstDash val="solid"/>
+          </a:ln>
+        </p:spPr>
+      </p:sp>
+      <p:sp>
+        <p:nvSpPr>
+          <p:cNvPr id="12" name="Text 10"/>
+          <p:cNvSpPr/>
+          <p:nvPr/>
+        </p:nvSpPr>
+        <p:spPr>
+          <a:xfrm>
+            <a:off x="8074152" y="1563624"/>
+            <a:ext cx="2825496" cy="201168"/>
+          </a:xfrm>
+          <a:prstGeom prst="rect">
+            <a:avLst/>
+          </a:prstGeom>
+          <a:noFill/>
+          <a:ln/>
+        </p:spPr>
+        <p:txBody>
+          <a:bodyPr wrap="square" lIns="0" tIns="0" rIns="0" bIns="0" rtlCol="0" anchor="ctr"/>
+          <a:lstStyle/>
+          <a:p>
             <a:pPr indent="0" marL="0">
               <a:buNone/>
             </a:pPr>
             <a:r>
-              <a:rPr lang="en-US" sz="1420" dirty="0">
+              <a:rPr lang="en-US" sz="950" b="1" dirty="0">
+                <a:solidFill>
+                  <a:srgbClr val="0068B7"/>
+                </a:solidFill>
+                <a:latin typeface="Aptos" pitchFamily="34" charset="0"/>
+                <a:ea typeface="Aptos" pitchFamily="34" charset="-122"/>
+                <a:cs typeface="Aptos" pitchFamily="34" charset="-120"/>
+              </a:rPr>
+              <a:t>Key idea</a:t>
+            </a:r>
+            <a:endParaRPr lang="en-US" sz="950" dirty="0"/>
+          </a:p>
+        </p:txBody>
+      </p:sp>
+      <p:sp>
+        <p:nvSpPr>
+          <p:cNvPr id="13" name="Text 11"/>
+          <p:cNvSpPr/>
+          <p:nvPr/>
+        </p:nvSpPr>
+        <p:spPr>
+          <a:xfrm>
+            <a:off x="8074152" y="1856232"/>
+            <a:ext cx="2825496" cy="1261872"/>
+          </a:xfrm>
+          <a:prstGeom prst="rect">
+            <a:avLst/>
+          </a:prstGeom>
+          <a:noFill/>
+          <a:ln/>
+        </p:spPr>
+        <p:txBody>
+          <a:bodyPr wrap="square" lIns="0" tIns="0" rIns="0" bIns="0" rtlCol="0" anchor="t">
+            <a:normAutofit/>
+          </a:bodyPr>
+          <a:lstStyle/>
+          <a:p>
+            <a:pPr indent="0" marL="0">
+              <a:buNone/>
+            </a:pPr>
+            <a:r>
+              <a:rPr lang="en-US" sz="1250" dirty="0">
                 <a:solidFill>
                   <a:srgbClr val="17364A"/>
                 </a:solidFill>
@@ -4242,9 +6241,116 @@
                 <a:ea typeface="Aptos" pitchFamily="34" charset="-122"/>
                 <a:cs typeface="Aptos" pitchFamily="34" charset="-120"/>
               </a:rPr>
-              <a:t>Draft AI governance charter; governance operating model; intake and decision-flow diagram; list of unresolved policy questions.</a:t>
-            </a:r>
-            <a:endParaRPr lang="en-US" sz="1420" dirty="0"/>
+              <a:t>Draft a one-page AI governance charter and a one-page operating model.</a:t>
+            </a:r>
+            <a:endParaRPr lang="en-US" sz="1250" dirty="0"/>
+          </a:p>
+        </p:txBody>
+      </p:sp>
+      <p:sp>
+        <p:nvSpPr>
+          <p:cNvPr id="14" name="Shape 12"/>
+          <p:cNvSpPr/>
+          <p:nvPr/>
+        </p:nvSpPr>
+        <p:spPr>
+          <a:xfrm>
+            <a:off x="7909560" y="3520440"/>
+            <a:ext cx="3154680" cy="1737360"/>
+          </a:xfrm>
+          <a:prstGeom prst="roundRect">
+            <a:avLst>
+              <a:gd name="adj" fmla="val 6316"/>
+            </a:avLst>
+          </a:prstGeom>
+          <a:solidFill>
+            <a:srgbClr val="EAF6F8"/>
+          </a:solidFill>
+          <a:ln w="12700">
+            <a:solidFill>
+              <a:srgbClr val="B9D7E6"/>
+            </a:solidFill>
+            <a:prstDash val="solid"/>
+          </a:ln>
+        </p:spPr>
+      </p:sp>
+      <p:sp>
+        <p:nvSpPr>
+          <p:cNvPr id="15" name="Text 13"/>
+          <p:cNvSpPr/>
+          <p:nvPr/>
+        </p:nvSpPr>
+        <p:spPr>
+          <a:xfrm>
+            <a:off x="8074152" y="3666744"/>
+            <a:ext cx="2825496" cy="201168"/>
+          </a:xfrm>
+          <a:prstGeom prst="rect">
+            <a:avLst/>
+          </a:prstGeom>
+          <a:noFill/>
+          <a:ln/>
+        </p:spPr>
+        <p:txBody>
+          <a:bodyPr wrap="square" lIns="0" tIns="0" rIns="0" bIns="0" rtlCol="0" anchor="ctr"/>
+          <a:lstStyle/>
+          <a:p>
+            <a:pPr indent="0" marL="0">
+              <a:buNone/>
+            </a:pPr>
+            <a:r>
+              <a:rPr lang="en-US" sz="950" b="1" dirty="0">
+                <a:solidFill>
+                  <a:srgbClr val="0068B7"/>
+                </a:solidFill>
+                <a:latin typeface="Aptos" pitchFamily="34" charset="0"/>
+                <a:ea typeface="Aptos" pitchFamily="34" charset="-122"/>
+                <a:cs typeface="Aptos" pitchFamily="34" charset="-120"/>
+              </a:rPr>
+              <a:t>Use this for</a:t>
+            </a:r>
+            <a:endParaRPr lang="en-US" sz="950" dirty="0"/>
+          </a:p>
+        </p:txBody>
+      </p:sp>
+      <p:sp>
+        <p:nvSpPr>
+          <p:cNvPr id="16" name="Text 14"/>
+          <p:cNvSpPr/>
+          <p:nvPr/>
+        </p:nvSpPr>
+        <p:spPr>
+          <a:xfrm>
+            <a:off x="8074152" y="3959352"/>
+            <a:ext cx="2825496" cy="1170432"/>
+          </a:xfrm>
+          <a:prstGeom prst="rect">
+            <a:avLst/>
+          </a:prstGeom>
+          <a:noFill/>
+          <a:ln/>
+        </p:spPr>
+        <p:txBody>
+          <a:bodyPr wrap="square" lIns="0" tIns="0" rIns="0" bIns="0" rtlCol="0" anchor="t">
+            <a:normAutofit/>
+          </a:bodyPr>
+          <a:lstStyle/>
+          <a:p>
+            <a:pPr indent="0" marL="0">
+              <a:buNone/>
+            </a:pPr>
+            <a:r>
+              <a:rPr lang="en-US" sz="1250" dirty="0">
+                <a:solidFill>
+                  <a:srgbClr val="17364A"/>
+                </a:solidFill>
+                <a:latin typeface="Aptos" pitchFamily="34" charset="0"/>
+                <a:ea typeface="Aptos" pitchFamily="34" charset="-122"/>
+                <a:cs typeface="Aptos" pitchFamily="34" charset="-120"/>
+              </a:rPr>
+              <a:t>Connect the concept to public health decisions, safeguards, documentation, or implementation work.</a:t>
+            </a:r>
+            <a:endParaRPr lang="en-US" sz="1250" dirty="0"/>
           </a:p>
         </p:txBody>
       </p:sp>
@@ -4307,7 +6413,32 @@
       </p:sp>
       <p:sp>
         <p:nvSpPr>
-          <p:cNvPr id="3" name="Text 1"/>
+          <p:cNvPr id="3" name="Shape 1"/>
+          <p:cNvSpPr/>
+          <p:nvPr/>
+        </p:nvSpPr>
+        <p:spPr>
+          <a:xfrm>
+            <a:off x="0" y="164592"/>
+            <a:ext cx="146304" cy="6693408"/>
+          </a:xfrm>
+          <a:prstGeom prst="rect">
+            <a:avLst/>
+          </a:prstGeom>
+          <a:solidFill>
+            <a:srgbClr val="2F8A28"/>
+          </a:solidFill>
+          <a:ln w="12700">
+            <a:solidFill>
+              <a:srgbClr val="2F8A28"/>
+            </a:solidFill>
+            <a:prstDash val="solid"/>
+          </a:ln>
+        </p:spPr>
+      </p:sp>
+      <p:sp>
+        <p:nvSpPr>
+          <p:cNvPr id="4" name="Text 2"/>
           <p:cNvSpPr/>
           <p:nvPr/>
         </p:nvSpPr>
@@ -4346,7 +6477,7 @@
       </p:sp>
       <p:sp>
         <p:nvSpPr>
-          <p:cNvPr id="4" name="Text 2"/>
+          <p:cNvPr id="5" name="Text 3"/>
           <p:cNvSpPr/>
           <p:nvPr/>
         </p:nvSpPr>
@@ -4385,7 +6516,7 @@
       </p:sp>
       <p:sp>
         <p:nvSpPr>
-          <p:cNvPr id="5" name="Text 3"/>
+          <p:cNvPr id="6" name="Text 4"/>
           <p:cNvSpPr/>
           <p:nvPr/>
         </p:nvSpPr>
@@ -4424,13 +6555,77 @@
       </p:sp>
       <p:sp>
         <p:nvSpPr>
-          <p:cNvPr id="6" name="Text 4"/>
+          <p:cNvPr id="7" name="Shape 5"/>
           <p:cNvSpPr/>
           <p:nvPr/>
         </p:nvSpPr>
         <p:spPr>
           <a:xfrm>
             <a:off x="640080" y="658368"/>
+            <a:ext cx="420624" cy="420624"/>
+          </a:xfrm>
+          <a:prstGeom prst="ellipse">
+            <a:avLst/>
+          </a:prstGeom>
+          <a:solidFill>
+            <a:srgbClr val="0068B7"/>
+          </a:solidFill>
+          <a:ln w="12700">
+            <a:solidFill>
+              <a:srgbClr val="0068B7"/>
+            </a:solidFill>
+            <a:prstDash val="solid"/>
+          </a:ln>
+        </p:spPr>
+      </p:sp>
+      <p:sp>
+        <p:nvSpPr>
+          <p:cNvPr id="8" name="Text 6"/>
+          <p:cNvSpPr/>
+          <p:nvPr/>
+        </p:nvSpPr>
+        <p:spPr>
+          <a:xfrm>
+            <a:off x="640080" y="731520"/>
+            <a:ext cx="420624" cy="164592"/>
+          </a:xfrm>
+          <a:prstGeom prst="rect">
+            <a:avLst/>
+          </a:prstGeom>
+          <a:noFill/>
+          <a:ln/>
+        </p:spPr>
+        <p:txBody>
+          <a:bodyPr wrap="square" lIns="0" tIns="0" rIns="0" bIns="0" rtlCol="0" anchor="ctr"/>
+          <a:lstStyle/>
+          <a:p>
+            <a:pPr algn="ctr" indent="0" marL="0">
+              <a:buNone/>
+            </a:pPr>
+            <a:r>
+              <a:rPr lang="en-US" sz="1100" b="1" dirty="0">
+                <a:solidFill>
+                  <a:srgbClr val="FFFFFF"/>
+                </a:solidFill>
+                <a:latin typeface="Aptos" pitchFamily="34" charset="0"/>
+                <a:ea typeface="Aptos" pitchFamily="34" charset="-122"/>
+                <a:cs typeface="Aptos" pitchFamily="34" charset="-120"/>
+              </a:rPr>
+              <a:t>11</a:t>
+            </a:r>
+            <a:endParaRPr lang="en-US" sz="1100" dirty="0"/>
+          </a:p>
+        </p:txBody>
+      </p:sp>
+      <p:sp>
+        <p:nvSpPr>
+          <p:cNvPr id="9" name="Text 7"/>
+          <p:cNvSpPr/>
+          <p:nvPr/>
+        </p:nvSpPr>
+        <p:spPr>
+          <a:xfrm>
+            <a:off x="640080" y="621792"/>
             <a:ext cx="10881360" cy="566928"/>
           </a:xfrm>
           <a:prstGeom prst="rect">
@@ -4457,7 +6652,7 @@
                 <a:ea typeface="Aptos Display" pitchFamily="34" charset="-122"/>
                 <a:cs typeface="Aptos Display" pitchFamily="34" charset="-120"/>
               </a:rPr>
-              <a:t>Expected Assignment</a:t>
+              <a:t>Before You Begin</a:t>
             </a:r>
             <a:endParaRPr lang="en-US" sz="2700" dirty="0"/>
           </a:p>
@@ -4465,14 +6660,14 @@
       </p:sp>
       <p:sp>
         <p:nvSpPr>
-          <p:cNvPr id="7" name="Text 5"/>
-          <p:cNvSpPr/>
-          <p:nvPr/>
-        </p:nvSpPr>
-        <p:spPr>
-          <a:xfrm>
-            <a:off x="822960" y="1325880"/>
-            <a:ext cx="10378440" cy="4800600"/>
+          <p:cNvPr id="10" name="Text 8"/>
+          <p:cNvSpPr/>
+          <p:nvPr/>
+        </p:nvSpPr>
+        <p:spPr>
+          <a:xfrm>
+            <a:off x="868680" y="1417320"/>
+            <a:ext cx="6675120" cy="4434840"/>
           </a:xfrm>
           <a:prstGeom prst="rect">
             <a:avLst/>
@@ -4487,7 +6682,7 @@
           <a:lstStyle/>
           <a:p>
             <a:r>
-              <a:rPr lang="en-US" sz="1450" dirty="0">
+              <a:rPr lang="en-US" sz="1700" dirty="0">
                 <a:solidFill>
                   <a:srgbClr val="17364A"/>
                 </a:solidFill>
@@ -4495,9 +6690,251 @@
                 <a:ea typeface="Aptos" pitchFamily="34" charset="-122"/>
                 <a:cs typeface="Aptos" pitchFamily="34" charset="-120"/>
               </a:rPr>
-              <a:t>Draft AI governance charter; governance operating model; intake and decision-flow diagram; list of unresolved policy questions.</a:t>
-            </a:r>
-            <a:endParaRPr lang="en-US" sz="1450" dirty="0"/>
+              <a:t>Choose a real or realistic public health AI use case.</a:t>
+            </a:r>
+            <a:endParaRPr lang="en-US" sz="1700" dirty="0"/>
+          </a:p>
+          <a:p>
+            <a:r>
+              <a:rPr lang="en-US" sz="1700" dirty="0">
+                <a:solidFill>
+                  <a:srgbClr val="17364A"/>
+                </a:solidFill>
+                <a:latin typeface="Aptos" pitchFamily="34" charset="0"/>
+                <a:ea typeface="Aptos" pitchFamily="34" charset="-122"/>
+                <a:cs typeface="Aptos" pitchFamily="34" charset="-120"/>
+              </a:rPr>
+              <a:t>Document assumptions, unresolved questions, and which agency roles would need to review the artifact before it is adopted.</a:t>
+            </a:r>
+            <a:endParaRPr lang="en-US" sz="1700" dirty="0"/>
+          </a:p>
+          <a:p>
+            <a:r>
+              <a:rPr lang="en-US" sz="1700" dirty="0">
+                <a:solidFill>
+                  <a:srgbClr val="17364A"/>
+                </a:solidFill>
+                <a:latin typeface="Aptos" pitchFamily="34" charset="0"/>
+                <a:ea typeface="Aptos" pitchFamily="34" charset="-122"/>
+                <a:cs typeface="Aptos" pitchFamily="34" charset="-120"/>
+              </a:rPr>
+              <a:t>The exercise should produce a work product that could support governance review, leadership discussion, implementation.</a:t>
+            </a:r>
+            <a:endParaRPr lang="en-US" sz="1700" dirty="0"/>
+          </a:p>
+        </p:txBody>
+      </p:sp>
+      <p:sp>
+        <p:nvSpPr>
+          <p:cNvPr id="11" name="Shape 9"/>
+          <p:cNvSpPr/>
+          <p:nvPr/>
+        </p:nvSpPr>
+        <p:spPr>
+          <a:xfrm>
+            <a:off x="7909560" y="1417320"/>
+            <a:ext cx="3154680" cy="1828800"/>
+          </a:xfrm>
+          <a:prstGeom prst="roundRect">
+            <a:avLst>
+              <a:gd name="adj" fmla="val 6000"/>
+            </a:avLst>
+          </a:prstGeom>
+          <a:solidFill>
+            <a:srgbClr val="EEF8ED"/>
+          </a:solidFill>
+          <a:ln w="12700">
+            <a:solidFill>
+              <a:srgbClr val="B9D7E6"/>
+            </a:solidFill>
+            <a:prstDash val="solid"/>
+          </a:ln>
+        </p:spPr>
+      </p:sp>
+      <p:sp>
+        <p:nvSpPr>
+          <p:cNvPr id="12" name="Text 10"/>
+          <p:cNvSpPr/>
+          <p:nvPr/>
+        </p:nvSpPr>
+        <p:spPr>
+          <a:xfrm>
+            <a:off x="8074152" y="1563624"/>
+            <a:ext cx="2825496" cy="201168"/>
+          </a:xfrm>
+          <a:prstGeom prst="rect">
+            <a:avLst/>
+          </a:prstGeom>
+          <a:noFill/>
+          <a:ln/>
+        </p:spPr>
+        <p:txBody>
+          <a:bodyPr wrap="square" lIns="0" tIns="0" rIns="0" bIns="0" rtlCol="0" anchor="ctr"/>
+          <a:lstStyle/>
+          <a:p>
+            <a:pPr indent="0" marL="0">
+              <a:buNone/>
+            </a:pPr>
+            <a:r>
+              <a:rPr lang="en-US" sz="950" b="1" dirty="0">
+                <a:solidFill>
+                  <a:srgbClr val="0068B7"/>
+                </a:solidFill>
+                <a:latin typeface="Aptos" pitchFamily="34" charset="0"/>
+                <a:ea typeface="Aptos" pitchFamily="34" charset="-122"/>
+                <a:cs typeface="Aptos" pitchFamily="34" charset="-120"/>
+              </a:rPr>
+              <a:t>Key idea</a:t>
+            </a:r>
+            <a:endParaRPr lang="en-US" sz="950" dirty="0"/>
+          </a:p>
+        </p:txBody>
+      </p:sp>
+      <p:sp>
+        <p:nvSpPr>
+          <p:cNvPr id="13" name="Text 11"/>
+          <p:cNvSpPr/>
+          <p:nvPr/>
+        </p:nvSpPr>
+        <p:spPr>
+          <a:xfrm>
+            <a:off x="8074152" y="1856232"/>
+            <a:ext cx="2825496" cy="1261872"/>
+          </a:xfrm>
+          <a:prstGeom prst="rect">
+            <a:avLst/>
+          </a:prstGeom>
+          <a:noFill/>
+          <a:ln/>
+        </p:spPr>
+        <p:txBody>
+          <a:bodyPr wrap="square" lIns="0" tIns="0" rIns="0" bIns="0" rtlCol="0" anchor="t">
+            <a:normAutofit/>
+          </a:bodyPr>
+          <a:lstStyle/>
+          <a:p>
+            <a:pPr indent="0" marL="0">
+              <a:buNone/>
+            </a:pPr>
+            <a:r>
+              <a:rPr lang="en-US" sz="1250" dirty="0">
+                <a:solidFill>
+                  <a:srgbClr val="17364A"/>
+                </a:solidFill>
+                <a:latin typeface="Aptos" pitchFamily="34" charset="0"/>
+                <a:ea typeface="Aptos" pitchFamily="34" charset="-122"/>
+                <a:cs typeface="Aptos" pitchFamily="34" charset="-120"/>
+              </a:rPr>
+              <a:t>Choose a real or realistic public health AI use case.</a:t>
+            </a:r>
+            <a:endParaRPr lang="en-US" sz="1250" dirty="0"/>
+          </a:p>
+        </p:txBody>
+      </p:sp>
+      <p:sp>
+        <p:nvSpPr>
+          <p:cNvPr id="14" name="Shape 12"/>
+          <p:cNvSpPr/>
+          <p:nvPr/>
+        </p:nvSpPr>
+        <p:spPr>
+          <a:xfrm>
+            <a:off x="7909560" y="3520440"/>
+            <a:ext cx="3154680" cy="1737360"/>
+          </a:xfrm>
+          <a:prstGeom prst="roundRect">
+            <a:avLst>
+              <a:gd name="adj" fmla="val 6316"/>
+            </a:avLst>
+          </a:prstGeom>
+          <a:solidFill>
+            <a:srgbClr val="EAF6F8"/>
+          </a:solidFill>
+          <a:ln w="12700">
+            <a:solidFill>
+              <a:srgbClr val="B9D7E6"/>
+            </a:solidFill>
+            <a:prstDash val="solid"/>
+          </a:ln>
+        </p:spPr>
+      </p:sp>
+      <p:sp>
+        <p:nvSpPr>
+          <p:cNvPr id="15" name="Text 13"/>
+          <p:cNvSpPr/>
+          <p:nvPr/>
+        </p:nvSpPr>
+        <p:spPr>
+          <a:xfrm>
+            <a:off x="8074152" y="3666744"/>
+            <a:ext cx="2825496" cy="201168"/>
+          </a:xfrm>
+          <a:prstGeom prst="rect">
+            <a:avLst/>
+          </a:prstGeom>
+          <a:noFill/>
+          <a:ln/>
+        </p:spPr>
+        <p:txBody>
+          <a:bodyPr wrap="square" lIns="0" tIns="0" rIns="0" bIns="0" rtlCol="0" anchor="ctr"/>
+          <a:lstStyle/>
+          <a:p>
+            <a:pPr indent="0" marL="0">
+              <a:buNone/>
+            </a:pPr>
+            <a:r>
+              <a:rPr lang="en-US" sz="950" b="1" dirty="0">
+                <a:solidFill>
+                  <a:srgbClr val="0068B7"/>
+                </a:solidFill>
+                <a:latin typeface="Aptos" pitchFamily="34" charset="0"/>
+                <a:ea typeface="Aptos" pitchFamily="34" charset="-122"/>
+                <a:cs typeface="Aptos" pitchFamily="34" charset="-120"/>
+              </a:rPr>
+              <a:t>Use this for</a:t>
+            </a:r>
+            <a:endParaRPr lang="en-US" sz="950" dirty="0"/>
+          </a:p>
+        </p:txBody>
+      </p:sp>
+      <p:sp>
+        <p:nvSpPr>
+          <p:cNvPr id="16" name="Text 14"/>
+          <p:cNvSpPr/>
+          <p:nvPr/>
+        </p:nvSpPr>
+        <p:spPr>
+          <a:xfrm>
+            <a:off x="8074152" y="3959352"/>
+            <a:ext cx="2825496" cy="1170432"/>
+          </a:xfrm>
+          <a:prstGeom prst="rect">
+            <a:avLst/>
+          </a:prstGeom>
+          <a:noFill/>
+          <a:ln/>
+        </p:spPr>
+        <p:txBody>
+          <a:bodyPr wrap="square" lIns="0" tIns="0" rIns="0" bIns="0" rtlCol="0" anchor="t">
+            <a:normAutofit/>
+          </a:bodyPr>
+          <a:lstStyle/>
+          <a:p>
+            <a:pPr indent="0" marL="0">
+              <a:buNone/>
+            </a:pPr>
+            <a:r>
+              <a:rPr lang="en-US" sz="1250" dirty="0">
+                <a:solidFill>
+                  <a:srgbClr val="17364A"/>
+                </a:solidFill>
+                <a:latin typeface="Aptos" pitchFamily="34" charset="0"/>
+                <a:ea typeface="Aptos" pitchFamily="34" charset="-122"/>
+                <a:cs typeface="Aptos" pitchFamily="34" charset="-120"/>
+              </a:rPr>
+              <a:t>Connect the concept to public health decisions, safeguards, documentation, or implementation work.</a:t>
+            </a:r>
+            <a:endParaRPr lang="en-US" sz="1250" dirty="0"/>
           </a:p>
         </p:txBody>
       </p:sp>
@@ -4560,7 +6997,32 @@
       </p:sp>
       <p:sp>
         <p:nvSpPr>
-          <p:cNvPr id="3" name="Text 1"/>
+          <p:cNvPr id="3" name="Shape 1"/>
+          <p:cNvSpPr/>
+          <p:nvPr/>
+        </p:nvSpPr>
+        <p:spPr>
+          <a:xfrm>
+            <a:off x="0" y="164592"/>
+            <a:ext cx="146304" cy="6693408"/>
+          </a:xfrm>
+          <a:prstGeom prst="rect">
+            <a:avLst/>
+          </a:prstGeom>
+          <a:solidFill>
+            <a:srgbClr val="2F8A28"/>
+          </a:solidFill>
+          <a:ln w="12700">
+            <a:solidFill>
+              <a:srgbClr val="2F8A28"/>
+            </a:solidFill>
+            <a:prstDash val="solid"/>
+          </a:ln>
+        </p:spPr>
+      </p:sp>
+      <p:sp>
+        <p:nvSpPr>
+          <p:cNvPr id="4" name="Text 2"/>
           <p:cNvSpPr/>
           <p:nvPr/>
         </p:nvSpPr>
@@ -4599,7 +7061,7 @@
       </p:sp>
       <p:sp>
         <p:nvSpPr>
-          <p:cNvPr id="4" name="Text 2"/>
+          <p:cNvPr id="5" name="Text 3"/>
           <p:cNvSpPr/>
           <p:nvPr/>
         </p:nvSpPr>
@@ -4638,7 +7100,7 @@
       </p:sp>
       <p:sp>
         <p:nvSpPr>
-          <p:cNvPr id="5" name="Text 3"/>
+          <p:cNvPr id="6" name="Text 4"/>
           <p:cNvSpPr/>
           <p:nvPr/>
         </p:nvSpPr>
@@ -4677,13 +7139,77 @@
       </p:sp>
       <p:sp>
         <p:nvSpPr>
-          <p:cNvPr id="6" name="Text 4"/>
+          <p:cNvPr id="7" name="Shape 5"/>
           <p:cNvSpPr/>
           <p:nvPr/>
         </p:nvSpPr>
         <p:spPr>
           <a:xfrm>
             <a:off x="640080" y="658368"/>
+            <a:ext cx="420624" cy="420624"/>
+          </a:xfrm>
+          <a:prstGeom prst="ellipse">
+            <a:avLst/>
+          </a:prstGeom>
+          <a:solidFill>
+            <a:srgbClr val="0068B7"/>
+          </a:solidFill>
+          <a:ln w="12700">
+            <a:solidFill>
+              <a:srgbClr val="0068B7"/>
+            </a:solidFill>
+            <a:prstDash val="solid"/>
+          </a:ln>
+        </p:spPr>
+      </p:sp>
+      <p:sp>
+        <p:nvSpPr>
+          <p:cNvPr id="8" name="Text 6"/>
+          <p:cNvSpPr/>
+          <p:nvPr/>
+        </p:nvSpPr>
+        <p:spPr>
+          <a:xfrm>
+            <a:off x="640080" y="731520"/>
+            <a:ext cx="420624" cy="164592"/>
+          </a:xfrm>
+          <a:prstGeom prst="rect">
+            <a:avLst/>
+          </a:prstGeom>
+          <a:noFill/>
+          <a:ln/>
+        </p:spPr>
+        <p:txBody>
+          <a:bodyPr wrap="square" lIns="0" tIns="0" rIns="0" bIns="0" rtlCol="0" anchor="ctr"/>
+          <a:lstStyle/>
+          <a:p>
+            <a:pPr algn="ctr" indent="0" marL="0">
+              <a:buNone/>
+            </a:pPr>
+            <a:r>
+              <a:rPr lang="en-US" sz="1100" b="1" dirty="0">
+                <a:solidFill>
+                  <a:srgbClr val="FFFFFF"/>
+                </a:solidFill>
+                <a:latin typeface="Aptos" pitchFamily="34" charset="0"/>
+                <a:ea typeface="Aptos" pitchFamily="34" charset="-122"/>
+                <a:cs typeface="Aptos" pitchFamily="34" charset="-120"/>
+              </a:rPr>
+              <a:t>12</a:t>
+            </a:r>
+            <a:endParaRPr lang="en-US" sz="1100" dirty="0"/>
+          </a:p>
+        </p:txBody>
+      </p:sp>
+      <p:sp>
+        <p:nvSpPr>
+          <p:cNvPr id="9" name="Text 7"/>
+          <p:cNvSpPr/>
+          <p:nvPr/>
+        </p:nvSpPr>
+        <p:spPr>
+          <a:xfrm>
+            <a:off x="640080" y="621792"/>
             <a:ext cx="10881360" cy="566928"/>
           </a:xfrm>
           <a:prstGeom prst="rect">
@@ -4710,7 +7236,7 @@
                 <a:ea typeface="Aptos Display" pitchFamily="34" charset="-122"/>
                 <a:cs typeface="Aptos Display" pitchFamily="34" charset="-120"/>
               </a:rPr>
-              <a:t>Knowledge Check</a:t>
+              <a:t>Expected Artifact or Evidence</a:t>
             </a:r>
             <a:endParaRPr lang="en-US" sz="2700" dirty="0"/>
           </a:p>
@@ -4718,14 +7244,14 @@
       </p:sp>
       <p:sp>
         <p:nvSpPr>
-          <p:cNvPr id="7" name="Text 5"/>
-          <p:cNvSpPr/>
-          <p:nvPr/>
-        </p:nvSpPr>
-        <p:spPr>
-          <a:xfrm>
-            <a:off x="822960" y="1325880"/>
-            <a:ext cx="10378440" cy="4800600"/>
+          <p:cNvPr id="10" name="Text 8"/>
+          <p:cNvSpPr/>
+          <p:nvPr/>
+        </p:nvSpPr>
+        <p:spPr>
+          <a:xfrm>
+            <a:off x="868680" y="1417320"/>
+            <a:ext cx="6675120" cy="4434840"/>
           </a:xfrm>
           <a:prstGeom prst="rect">
             <a:avLst/>
@@ -4740,7 +7266,7 @@
           <a:lstStyle/>
           <a:p>
             <a:r>
-              <a:rPr lang="en-US" sz="1450" dirty="0">
+              <a:rPr lang="en-US" sz="1700" dirty="0">
                 <a:solidFill>
                   <a:srgbClr val="17364A"/>
                 </a:solidFill>
@@ -4748,13 +7274,106 @@
                 <a:ea typeface="Aptos" pitchFamily="34" charset="-122"/>
                 <a:cs typeface="Aptos" pitchFamily="34" charset="-120"/>
               </a:rPr>
-              <a:t>1. What is the strongest reason this module topic belongs in AI leadership and governance training?</a:t>
-            </a:r>
-            <a:endParaRPr lang="en-US" sz="1450" dirty="0"/>
-          </a:p>
-          <a:p>
-            <a:r>
-              <a:rPr lang="en-US" sz="1450" dirty="0">
+              <a:t>Draft AI governance charter; governance operating model; intake and decision-flow diagram; list of unresolved policy.</a:t>
+            </a:r>
+            <a:endParaRPr lang="en-US" sz="1700" dirty="0"/>
+          </a:p>
+        </p:txBody>
+      </p:sp>
+      <p:sp>
+        <p:nvSpPr>
+          <p:cNvPr id="11" name="Shape 9"/>
+          <p:cNvSpPr/>
+          <p:nvPr/>
+        </p:nvSpPr>
+        <p:spPr>
+          <a:xfrm>
+            <a:off x="7909560" y="1417320"/>
+            <a:ext cx="3154680" cy="1828800"/>
+          </a:xfrm>
+          <a:prstGeom prst="roundRect">
+            <a:avLst>
+              <a:gd name="adj" fmla="val 6000"/>
+            </a:avLst>
+          </a:prstGeom>
+          <a:solidFill>
+            <a:srgbClr val="EEF8ED"/>
+          </a:solidFill>
+          <a:ln w="12700">
+            <a:solidFill>
+              <a:srgbClr val="B9D7E6"/>
+            </a:solidFill>
+            <a:prstDash val="solid"/>
+          </a:ln>
+        </p:spPr>
+      </p:sp>
+      <p:sp>
+        <p:nvSpPr>
+          <p:cNvPr id="12" name="Text 10"/>
+          <p:cNvSpPr/>
+          <p:nvPr/>
+        </p:nvSpPr>
+        <p:spPr>
+          <a:xfrm>
+            <a:off x="8074152" y="1563624"/>
+            <a:ext cx="2825496" cy="201168"/>
+          </a:xfrm>
+          <a:prstGeom prst="rect">
+            <a:avLst/>
+          </a:prstGeom>
+          <a:noFill/>
+          <a:ln/>
+        </p:spPr>
+        <p:txBody>
+          <a:bodyPr wrap="square" lIns="0" tIns="0" rIns="0" bIns="0" rtlCol="0" anchor="ctr"/>
+          <a:lstStyle/>
+          <a:p>
+            <a:pPr indent="0" marL="0">
+              <a:buNone/>
+            </a:pPr>
+            <a:r>
+              <a:rPr lang="en-US" sz="950" b="1" dirty="0">
+                <a:solidFill>
+                  <a:srgbClr val="0068B7"/>
+                </a:solidFill>
+                <a:latin typeface="Aptos" pitchFamily="34" charset="0"/>
+                <a:ea typeface="Aptos" pitchFamily="34" charset="-122"/>
+                <a:cs typeface="Aptos" pitchFamily="34" charset="-120"/>
+              </a:rPr>
+              <a:t>Key idea</a:t>
+            </a:r>
+            <a:endParaRPr lang="en-US" sz="950" dirty="0"/>
+          </a:p>
+        </p:txBody>
+      </p:sp>
+      <p:sp>
+        <p:nvSpPr>
+          <p:cNvPr id="13" name="Text 11"/>
+          <p:cNvSpPr/>
+          <p:nvPr/>
+        </p:nvSpPr>
+        <p:spPr>
+          <a:xfrm>
+            <a:off x="8074152" y="1856232"/>
+            <a:ext cx="2825496" cy="1261872"/>
+          </a:xfrm>
+          <a:prstGeom prst="rect">
+            <a:avLst/>
+          </a:prstGeom>
+          <a:noFill/>
+          <a:ln/>
+        </p:spPr>
+        <p:txBody>
+          <a:bodyPr wrap="square" lIns="0" tIns="0" rIns="0" bIns="0" rtlCol="0" anchor="t">
+            <a:normAutofit/>
+          </a:bodyPr>
+          <a:lstStyle/>
+          <a:p>
+            <a:pPr indent="0" marL="0">
+              <a:buNone/>
+            </a:pPr>
+            <a:r>
+              <a:rPr lang="en-US" sz="1250" dirty="0">
                 <a:solidFill>
                   <a:srgbClr val="17364A"/>
                 </a:solidFill>
@@ -4762,13 +7381,106 @@
                 <a:ea typeface="Aptos" pitchFamily="34" charset="-122"/>
                 <a:cs typeface="Aptos" pitchFamily="34" charset="-120"/>
               </a:rPr>
-              <a:t>2. Which practice best supports accountable public health AI governance?</a:t>
-            </a:r>
-            <a:endParaRPr lang="en-US" sz="1450" dirty="0"/>
-          </a:p>
-          <a:p>
-            <a:r>
-              <a:rPr lang="en-US" sz="1450" dirty="0">
+              <a:t>Draft AI governance charter; governance operating model; intake and decision-flow diagram; list of unresolved policy.</a:t>
+            </a:r>
+            <a:endParaRPr lang="en-US" sz="1250" dirty="0"/>
+          </a:p>
+        </p:txBody>
+      </p:sp>
+      <p:sp>
+        <p:nvSpPr>
+          <p:cNvPr id="14" name="Shape 12"/>
+          <p:cNvSpPr/>
+          <p:nvPr/>
+        </p:nvSpPr>
+        <p:spPr>
+          <a:xfrm>
+            <a:off x="7909560" y="3520440"/>
+            <a:ext cx="3154680" cy="1737360"/>
+          </a:xfrm>
+          <a:prstGeom prst="roundRect">
+            <a:avLst>
+              <a:gd name="adj" fmla="val 6316"/>
+            </a:avLst>
+          </a:prstGeom>
+          <a:solidFill>
+            <a:srgbClr val="EAF6F8"/>
+          </a:solidFill>
+          <a:ln w="12700">
+            <a:solidFill>
+              <a:srgbClr val="B9D7E6"/>
+            </a:solidFill>
+            <a:prstDash val="solid"/>
+          </a:ln>
+        </p:spPr>
+      </p:sp>
+      <p:sp>
+        <p:nvSpPr>
+          <p:cNvPr id="15" name="Text 13"/>
+          <p:cNvSpPr/>
+          <p:nvPr/>
+        </p:nvSpPr>
+        <p:spPr>
+          <a:xfrm>
+            <a:off x="8074152" y="3666744"/>
+            <a:ext cx="2825496" cy="201168"/>
+          </a:xfrm>
+          <a:prstGeom prst="rect">
+            <a:avLst/>
+          </a:prstGeom>
+          <a:noFill/>
+          <a:ln/>
+        </p:spPr>
+        <p:txBody>
+          <a:bodyPr wrap="square" lIns="0" tIns="0" rIns="0" bIns="0" rtlCol="0" anchor="ctr"/>
+          <a:lstStyle/>
+          <a:p>
+            <a:pPr indent="0" marL="0">
+              <a:buNone/>
+            </a:pPr>
+            <a:r>
+              <a:rPr lang="en-US" sz="950" b="1" dirty="0">
+                <a:solidFill>
+                  <a:srgbClr val="0068B7"/>
+                </a:solidFill>
+                <a:latin typeface="Aptos" pitchFamily="34" charset="0"/>
+                <a:ea typeface="Aptos" pitchFamily="34" charset="-122"/>
+                <a:cs typeface="Aptos" pitchFamily="34" charset="-120"/>
+              </a:rPr>
+              <a:t>Use this for</a:t>
+            </a:r>
+            <a:endParaRPr lang="en-US" sz="950" dirty="0"/>
+          </a:p>
+        </p:txBody>
+      </p:sp>
+      <p:sp>
+        <p:nvSpPr>
+          <p:cNvPr id="16" name="Text 14"/>
+          <p:cNvSpPr/>
+          <p:nvPr/>
+        </p:nvSpPr>
+        <p:spPr>
+          <a:xfrm>
+            <a:off x="8074152" y="3959352"/>
+            <a:ext cx="2825496" cy="1170432"/>
+          </a:xfrm>
+          <a:prstGeom prst="rect">
+            <a:avLst/>
+          </a:prstGeom>
+          <a:noFill/>
+          <a:ln/>
+        </p:spPr>
+        <p:txBody>
+          <a:bodyPr wrap="square" lIns="0" tIns="0" rIns="0" bIns="0" rtlCol="0" anchor="t">
+            <a:normAutofit/>
+          </a:bodyPr>
+          <a:lstStyle/>
+          <a:p>
+            <a:pPr indent="0" marL="0">
+              <a:buNone/>
+            </a:pPr>
+            <a:r>
+              <a:rPr lang="en-US" sz="1250" dirty="0">
                 <a:solidFill>
                   <a:srgbClr val="17364A"/>
                 </a:solidFill>
@@ -4776,37 +7488,9 @@
                 <a:ea typeface="Aptos" pitchFamily="34" charset="-122"/>
                 <a:cs typeface="Aptos" pitchFamily="34" charset="-120"/>
               </a:rPr>
-              <a:t>3. When should an AI use case be escalated for leadership or governance review?</a:t>
-            </a:r>
-            <a:endParaRPr lang="en-US" sz="1450" dirty="0"/>
-          </a:p>
-          <a:p>
-            <a:r>
-              <a:rPr lang="en-US" sz="1450" dirty="0">
-                <a:solidFill>
-                  <a:srgbClr val="17364A"/>
-                </a:solidFill>
-                <a:latin typeface="Aptos" pitchFamily="34" charset="0"/>
-                <a:ea typeface="Aptos" pitchFamily="34" charset="-122"/>
-                <a:cs typeface="Aptos" pitchFamily="34" charset="-120"/>
-              </a:rPr>
-              <a:t>4. What is weak evidence of completion for a leadership and governance module?</a:t>
-            </a:r>
-            <a:endParaRPr lang="en-US" sz="1450" dirty="0"/>
-          </a:p>
-          <a:p>
-            <a:r>
-              <a:rPr lang="en-US" sz="1450" dirty="0">
-                <a:solidFill>
-                  <a:srgbClr val="17364A"/>
-                </a:solidFill>
-                <a:latin typeface="Aptos" pitchFamily="34" charset="0"/>
-                <a:ea typeface="Aptos" pitchFamily="34" charset="-122"/>
-                <a:cs typeface="Aptos" pitchFamily="34" charset="-120"/>
-              </a:rPr>
-              <a:t>5. What should leaders do when an AI use case has meaningful benefits but unresolved risks?</a:t>
-            </a:r>
-            <a:endParaRPr lang="en-US" sz="1450" dirty="0"/>
+              <a:t>Connect the concept to public health decisions, safeguards, documentation, or implementation work.</a:t>
+            </a:r>
+            <a:endParaRPr lang="en-US" sz="1250" dirty="0"/>
           </a:p>
         </p:txBody>
       </p:sp>
@@ -4869,7 +7553,32 @@
       </p:sp>
       <p:sp>
         <p:nvSpPr>
-          <p:cNvPr id="3" name="Text 1"/>
+          <p:cNvPr id="3" name="Shape 1"/>
+          <p:cNvSpPr/>
+          <p:nvPr/>
+        </p:nvSpPr>
+        <p:spPr>
+          <a:xfrm>
+            <a:off x="0" y="164592"/>
+            <a:ext cx="146304" cy="6693408"/>
+          </a:xfrm>
+          <a:prstGeom prst="rect">
+            <a:avLst/>
+          </a:prstGeom>
+          <a:solidFill>
+            <a:srgbClr val="2F8A28"/>
+          </a:solidFill>
+          <a:ln w="12700">
+            <a:solidFill>
+              <a:srgbClr val="2F8A28"/>
+            </a:solidFill>
+            <a:prstDash val="solid"/>
+          </a:ln>
+        </p:spPr>
+      </p:sp>
+      <p:sp>
+        <p:nvSpPr>
+          <p:cNvPr id="4" name="Text 2"/>
           <p:cNvSpPr/>
           <p:nvPr/>
         </p:nvSpPr>
@@ -4908,7 +7617,7 @@
       </p:sp>
       <p:sp>
         <p:nvSpPr>
-          <p:cNvPr id="4" name="Text 2"/>
+          <p:cNvPr id="5" name="Text 3"/>
           <p:cNvSpPr/>
           <p:nvPr/>
         </p:nvSpPr>
@@ -4947,7 +7656,7 @@
       </p:sp>
       <p:sp>
         <p:nvSpPr>
-          <p:cNvPr id="5" name="Text 3"/>
+          <p:cNvPr id="6" name="Text 4"/>
           <p:cNvSpPr/>
           <p:nvPr/>
         </p:nvSpPr>
@@ -4986,13 +7695,77 @@
       </p:sp>
       <p:sp>
         <p:nvSpPr>
-          <p:cNvPr id="6" name="Text 4"/>
+          <p:cNvPr id="7" name="Shape 5"/>
           <p:cNvSpPr/>
           <p:nvPr/>
         </p:nvSpPr>
         <p:spPr>
           <a:xfrm>
             <a:off x="640080" y="658368"/>
+            <a:ext cx="420624" cy="420624"/>
+          </a:xfrm>
+          <a:prstGeom prst="ellipse">
+            <a:avLst/>
+          </a:prstGeom>
+          <a:solidFill>
+            <a:srgbClr val="0068B7"/>
+          </a:solidFill>
+          <a:ln w="12700">
+            <a:solidFill>
+              <a:srgbClr val="0068B7"/>
+            </a:solidFill>
+            <a:prstDash val="solid"/>
+          </a:ln>
+        </p:spPr>
+      </p:sp>
+      <p:sp>
+        <p:nvSpPr>
+          <p:cNvPr id="8" name="Text 6"/>
+          <p:cNvSpPr/>
+          <p:nvPr/>
+        </p:nvSpPr>
+        <p:spPr>
+          <a:xfrm>
+            <a:off x="640080" y="731520"/>
+            <a:ext cx="420624" cy="164592"/>
+          </a:xfrm>
+          <a:prstGeom prst="rect">
+            <a:avLst/>
+          </a:prstGeom>
+          <a:noFill/>
+          <a:ln/>
+        </p:spPr>
+        <p:txBody>
+          <a:bodyPr wrap="square" lIns="0" tIns="0" rIns="0" bIns="0" rtlCol="0" anchor="ctr"/>
+          <a:lstStyle/>
+          <a:p>
+            <a:pPr algn="ctr" indent="0" marL="0">
+              <a:buNone/>
+            </a:pPr>
+            <a:r>
+              <a:rPr lang="en-US" sz="1100" b="1" dirty="0">
+                <a:solidFill>
+                  <a:srgbClr val="FFFFFF"/>
+                </a:solidFill>
+                <a:latin typeface="Aptos" pitchFamily="34" charset="0"/>
+                <a:ea typeface="Aptos" pitchFamily="34" charset="-122"/>
+                <a:cs typeface="Aptos" pitchFamily="34" charset="-120"/>
+              </a:rPr>
+              <a:t>13</a:t>
+            </a:r>
+            <a:endParaRPr lang="en-US" sz="1100" dirty="0"/>
+          </a:p>
+        </p:txBody>
+      </p:sp>
+      <p:sp>
+        <p:nvSpPr>
+          <p:cNvPr id="9" name="Text 7"/>
+          <p:cNvSpPr/>
+          <p:nvPr/>
+        </p:nvSpPr>
+        <p:spPr>
+          <a:xfrm>
+            <a:off x="640080" y="621792"/>
             <a:ext cx="10881360" cy="566928"/>
           </a:xfrm>
           <a:prstGeom prst="rect">
@@ -5019,7 +7792,7 @@
                 <a:ea typeface="Aptos Display" pitchFamily="34" charset="-122"/>
                 <a:cs typeface="Aptos Display" pitchFamily="34" charset="-120"/>
               </a:rPr>
-              <a:t>References and Resources</a:t>
+              <a:t>Expected Assignment</a:t>
             </a:r>
             <a:endParaRPr lang="en-US" sz="2700" dirty="0"/>
           </a:p>
@@ -5027,14 +7800,14 @@
       </p:sp>
       <p:sp>
         <p:nvSpPr>
-          <p:cNvPr id="7" name="Text 5"/>
-          <p:cNvSpPr/>
-          <p:nvPr/>
-        </p:nvSpPr>
-        <p:spPr>
-          <a:xfrm>
-            <a:off x="822960" y="1325880"/>
-            <a:ext cx="10378440" cy="4800600"/>
+          <p:cNvPr id="10" name="Text 8"/>
+          <p:cNvSpPr/>
+          <p:nvPr/>
+        </p:nvSpPr>
+        <p:spPr>
+          <a:xfrm>
+            <a:off x="868680" y="1417320"/>
+            <a:ext cx="6675120" cy="4434840"/>
           </a:xfrm>
           <a:prstGeom prst="rect">
             <a:avLst/>
@@ -5049,7 +7822,7 @@
           <a:lstStyle/>
           <a:p>
             <a:r>
-              <a:rPr lang="en-US" sz="1450" dirty="0">
+              <a:rPr lang="en-US" sz="1700" dirty="0">
                 <a:solidFill>
                   <a:srgbClr val="17364A"/>
                 </a:solidFill>
@@ -5057,13 +7830,106 @@
                 <a:ea typeface="Aptos" pitchFamily="34" charset="-122"/>
                 <a:cs typeface="Aptos" pitchFamily="34" charset="-120"/>
               </a:rPr>
-              <a:t>NIST Artificial Intelligence Risk Management Framework (AI RMF 1.0): https://www.nist.gov/itl/ai-risk-management-framework</a:t>
-            </a:r>
-            <a:endParaRPr lang="en-US" sz="1450" dirty="0"/>
-          </a:p>
-          <a:p>
-            <a:r>
-              <a:rPr lang="en-US" sz="1450" dirty="0">
+              <a:t>Draft AI governance charter; governance operating model; intake and decision-flow diagram; list of unresolved policy questions.</a:t>
+            </a:r>
+            <a:endParaRPr lang="en-US" sz="1700" dirty="0"/>
+          </a:p>
+        </p:txBody>
+      </p:sp>
+      <p:sp>
+        <p:nvSpPr>
+          <p:cNvPr id="11" name="Shape 9"/>
+          <p:cNvSpPr/>
+          <p:nvPr/>
+        </p:nvSpPr>
+        <p:spPr>
+          <a:xfrm>
+            <a:off x="7909560" y="1417320"/>
+            <a:ext cx="3154680" cy="1828800"/>
+          </a:xfrm>
+          <a:prstGeom prst="roundRect">
+            <a:avLst>
+              <a:gd name="adj" fmla="val 6000"/>
+            </a:avLst>
+          </a:prstGeom>
+          <a:solidFill>
+            <a:srgbClr val="EEF8ED"/>
+          </a:solidFill>
+          <a:ln w="12700">
+            <a:solidFill>
+              <a:srgbClr val="B9D7E6"/>
+            </a:solidFill>
+            <a:prstDash val="solid"/>
+          </a:ln>
+        </p:spPr>
+      </p:sp>
+      <p:sp>
+        <p:nvSpPr>
+          <p:cNvPr id="12" name="Text 10"/>
+          <p:cNvSpPr/>
+          <p:nvPr/>
+        </p:nvSpPr>
+        <p:spPr>
+          <a:xfrm>
+            <a:off x="8074152" y="1563624"/>
+            <a:ext cx="2825496" cy="201168"/>
+          </a:xfrm>
+          <a:prstGeom prst="rect">
+            <a:avLst/>
+          </a:prstGeom>
+          <a:noFill/>
+          <a:ln/>
+        </p:spPr>
+        <p:txBody>
+          <a:bodyPr wrap="square" lIns="0" tIns="0" rIns="0" bIns="0" rtlCol="0" anchor="ctr"/>
+          <a:lstStyle/>
+          <a:p>
+            <a:pPr indent="0" marL="0">
+              <a:buNone/>
+            </a:pPr>
+            <a:r>
+              <a:rPr lang="en-US" sz="950" b="1" dirty="0">
+                <a:solidFill>
+                  <a:srgbClr val="0068B7"/>
+                </a:solidFill>
+                <a:latin typeface="Aptos" pitchFamily="34" charset="0"/>
+                <a:ea typeface="Aptos" pitchFamily="34" charset="-122"/>
+                <a:cs typeface="Aptos" pitchFamily="34" charset="-120"/>
+              </a:rPr>
+              <a:t>Key idea</a:t>
+            </a:r>
+            <a:endParaRPr lang="en-US" sz="950" dirty="0"/>
+          </a:p>
+        </p:txBody>
+      </p:sp>
+      <p:sp>
+        <p:nvSpPr>
+          <p:cNvPr id="13" name="Text 11"/>
+          <p:cNvSpPr/>
+          <p:nvPr/>
+        </p:nvSpPr>
+        <p:spPr>
+          <a:xfrm>
+            <a:off x="8074152" y="1856232"/>
+            <a:ext cx="2825496" cy="1261872"/>
+          </a:xfrm>
+          <a:prstGeom prst="rect">
+            <a:avLst/>
+          </a:prstGeom>
+          <a:noFill/>
+          <a:ln/>
+        </p:spPr>
+        <p:txBody>
+          <a:bodyPr wrap="square" lIns="0" tIns="0" rIns="0" bIns="0" rtlCol="0" anchor="t">
+            <a:normAutofit/>
+          </a:bodyPr>
+          <a:lstStyle/>
+          <a:p>
+            <a:pPr indent="0" marL="0">
+              <a:buNone/>
+            </a:pPr>
+            <a:r>
+              <a:rPr lang="en-US" sz="1250" dirty="0">
                 <a:solidFill>
                   <a:srgbClr val="17364A"/>
                 </a:solidFill>
@@ -5071,13 +7937,106 @@
                 <a:ea typeface="Aptos" pitchFamily="34" charset="-122"/>
                 <a:cs typeface="Aptos" pitchFamily="34" charset="-120"/>
               </a:rPr>
-              <a:t>NIST Generative AI Profile: https://www.nist.gov/publications/artificial-intelligence-risk-management-framework-generative-artificial-intelligence</a:t>
-            </a:r>
-            <a:endParaRPr lang="en-US" sz="1450" dirty="0"/>
-          </a:p>
-          <a:p>
-            <a:r>
-              <a:rPr lang="en-US" sz="1450" dirty="0">
+              <a:t>Draft AI governance charter; governance operating model; intake and decision-flow diagram; list of unresolved policy questions.</a:t>
+            </a:r>
+            <a:endParaRPr lang="en-US" sz="1250" dirty="0"/>
+          </a:p>
+        </p:txBody>
+      </p:sp>
+      <p:sp>
+        <p:nvSpPr>
+          <p:cNvPr id="14" name="Shape 12"/>
+          <p:cNvSpPr/>
+          <p:nvPr/>
+        </p:nvSpPr>
+        <p:spPr>
+          <a:xfrm>
+            <a:off x="7909560" y="3520440"/>
+            <a:ext cx="3154680" cy="1737360"/>
+          </a:xfrm>
+          <a:prstGeom prst="roundRect">
+            <a:avLst>
+              <a:gd name="adj" fmla="val 6316"/>
+            </a:avLst>
+          </a:prstGeom>
+          <a:solidFill>
+            <a:srgbClr val="EAF6F8"/>
+          </a:solidFill>
+          <a:ln w="12700">
+            <a:solidFill>
+              <a:srgbClr val="B9D7E6"/>
+            </a:solidFill>
+            <a:prstDash val="solid"/>
+          </a:ln>
+        </p:spPr>
+      </p:sp>
+      <p:sp>
+        <p:nvSpPr>
+          <p:cNvPr id="15" name="Text 13"/>
+          <p:cNvSpPr/>
+          <p:nvPr/>
+        </p:nvSpPr>
+        <p:spPr>
+          <a:xfrm>
+            <a:off x="8074152" y="3666744"/>
+            <a:ext cx="2825496" cy="201168"/>
+          </a:xfrm>
+          <a:prstGeom prst="rect">
+            <a:avLst/>
+          </a:prstGeom>
+          <a:noFill/>
+          <a:ln/>
+        </p:spPr>
+        <p:txBody>
+          <a:bodyPr wrap="square" lIns="0" tIns="0" rIns="0" bIns="0" rtlCol="0" anchor="ctr"/>
+          <a:lstStyle/>
+          <a:p>
+            <a:pPr indent="0" marL="0">
+              <a:buNone/>
+            </a:pPr>
+            <a:r>
+              <a:rPr lang="en-US" sz="950" b="1" dirty="0">
+                <a:solidFill>
+                  <a:srgbClr val="0068B7"/>
+                </a:solidFill>
+                <a:latin typeface="Aptos" pitchFamily="34" charset="0"/>
+                <a:ea typeface="Aptos" pitchFamily="34" charset="-122"/>
+                <a:cs typeface="Aptos" pitchFamily="34" charset="-120"/>
+              </a:rPr>
+              <a:t>Use this for</a:t>
+            </a:r>
+            <a:endParaRPr lang="en-US" sz="950" dirty="0"/>
+          </a:p>
+        </p:txBody>
+      </p:sp>
+      <p:sp>
+        <p:nvSpPr>
+          <p:cNvPr id="16" name="Text 14"/>
+          <p:cNvSpPr/>
+          <p:nvPr/>
+        </p:nvSpPr>
+        <p:spPr>
+          <a:xfrm>
+            <a:off x="8074152" y="3959352"/>
+            <a:ext cx="2825496" cy="1170432"/>
+          </a:xfrm>
+          <a:prstGeom prst="rect">
+            <a:avLst/>
+          </a:prstGeom>
+          <a:noFill/>
+          <a:ln/>
+        </p:spPr>
+        <p:txBody>
+          <a:bodyPr wrap="square" lIns="0" tIns="0" rIns="0" bIns="0" rtlCol="0" anchor="t">
+            <a:normAutofit/>
+          </a:bodyPr>
+          <a:lstStyle/>
+          <a:p>
+            <a:pPr indent="0" marL="0">
+              <a:buNone/>
+            </a:pPr>
+            <a:r>
+              <a:rPr lang="en-US" sz="1250" dirty="0">
                 <a:solidFill>
                   <a:srgbClr val="17364A"/>
                 </a:solidFill>
@@ -5085,37 +8044,9 @@
                 <a:ea typeface="Aptos" pitchFamily="34" charset="-122"/>
                 <a:cs typeface="Aptos" pitchFamily="34" charset="-120"/>
               </a:rPr>
-              <a:t>NIST Privacy Framework</a:t>
-            </a:r>
-            <a:endParaRPr lang="en-US" sz="1450" dirty="0"/>
-          </a:p>
-          <a:p>
-            <a:r>
-              <a:rPr lang="en-US" sz="1450" dirty="0">
-                <a:solidFill>
-                  <a:srgbClr val="17364A"/>
-                </a:solidFill>
-                <a:latin typeface="Aptos" pitchFamily="34" charset="0"/>
-                <a:ea typeface="Aptos" pitchFamily="34" charset="-122"/>
-                <a:cs typeface="Aptos" pitchFamily="34" charset="-120"/>
-              </a:rPr>
-              <a:t>CDC Public Health Data Strategy and Data Modernization resources: https://www.cdc.gov/public-health-data-strategy/php/about/index.html</a:t>
-            </a:r>
-            <a:endParaRPr lang="en-US" sz="1450" dirty="0"/>
-          </a:p>
-          <a:p>
-            <a:r>
-              <a:rPr lang="en-US" sz="1450" dirty="0">
-                <a:solidFill>
-                  <a:srgbClr val="17364A"/>
-                </a:solidFill>
-                <a:latin typeface="Aptos" pitchFamily="34" charset="0"/>
-                <a:ea typeface="Aptos" pitchFamily="34" charset="-122"/>
-                <a:cs typeface="Aptos" pitchFamily="34" charset="-120"/>
-              </a:rPr>
-              <a:t>WHO Ethics and Governance of Artificial Intelligence for Health: https://www.who.int/publications/i/item/9789240029200</a:t>
-            </a:r>
-            <a:endParaRPr lang="en-US" sz="1450" dirty="0"/>
+              <a:t>Connect the concept to public health decisions, safeguards, documentation, or implementation work.</a:t>
+            </a:r>
+            <a:endParaRPr lang="en-US" sz="1250" dirty="0"/>
           </a:p>
         </p:txBody>
       </p:sp>
@@ -5178,7 +8109,32 @@
       </p:sp>
       <p:sp>
         <p:nvSpPr>
-          <p:cNvPr id="3" name="Text 1"/>
+          <p:cNvPr id="3" name="Shape 1"/>
+          <p:cNvSpPr/>
+          <p:nvPr/>
+        </p:nvSpPr>
+        <p:spPr>
+          <a:xfrm>
+            <a:off x="0" y="164592"/>
+            <a:ext cx="146304" cy="6693408"/>
+          </a:xfrm>
+          <a:prstGeom prst="rect">
+            <a:avLst/>
+          </a:prstGeom>
+          <a:solidFill>
+            <a:srgbClr val="2F8A28"/>
+          </a:solidFill>
+          <a:ln w="12700">
+            <a:solidFill>
+              <a:srgbClr val="2F8A28"/>
+            </a:solidFill>
+            <a:prstDash val="solid"/>
+          </a:ln>
+        </p:spPr>
+      </p:sp>
+      <p:sp>
+        <p:nvSpPr>
+          <p:cNvPr id="4" name="Text 2"/>
           <p:cNvSpPr/>
           <p:nvPr/>
         </p:nvSpPr>
@@ -5217,7 +8173,7 @@
       </p:sp>
       <p:sp>
         <p:nvSpPr>
-          <p:cNvPr id="4" name="Text 2"/>
+          <p:cNvPr id="5" name="Text 3"/>
           <p:cNvSpPr/>
           <p:nvPr/>
         </p:nvSpPr>
@@ -5256,7 +8212,7 @@
       </p:sp>
       <p:sp>
         <p:nvSpPr>
-          <p:cNvPr id="5" name="Text 3"/>
+          <p:cNvPr id="6" name="Text 4"/>
           <p:cNvSpPr/>
           <p:nvPr/>
         </p:nvSpPr>
@@ -5295,13 +8251,77 @@
       </p:sp>
       <p:sp>
         <p:nvSpPr>
-          <p:cNvPr id="6" name="Text 4"/>
+          <p:cNvPr id="7" name="Shape 5"/>
           <p:cNvSpPr/>
           <p:nvPr/>
         </p:nvSpPr>
         <p:spPr>
           <a:xfrm>
             <a:off x="640080" y="658368"/>
+            <a:ext cx="420624" cy="420624"/>
+          </a:xfrm>
+          <a:prstGeom prst="ellipse">
+            <a:avLst/>
+          </a:prstGeom>
+          <a:solidFill>
+            <a:srgbClr val="0068B7"/>
+          </a:solidFill>
+          <a:ln w="12700">
+            <a:solidFill>
+              <a:srgbClr val="0068B7"/>
+            </a:solidFill>
+            <a:prstDash val="solid"/>
+          </a:ln>
+        </p:spPr>
+      </p:sp>
+      <p:sp>
+        <p:nvSpPr>
+          <p:cNvPr id="8" name="Text 6"/>
+          <p:cNvSpPr/>
+          <p:nvPr/>
+        </p:nvSpPr>
+        <p:spPr>
+          <a:xfrm>
+            <a:off x="640080" y="731520"/>
+            <a:ext cx="420624" cy="164592"/>
+          </a:xfrm>
+          <a:prstGeom prst="rect">
+            <a:avLst/>
+          </a:prstGeom>
+          <a:noFill/>
+          <a:ln/>
+        </p:spPr>
+        <p:txBody>
+          <a:bodyPr wrap="square" lIns="0" tIns="0" rIns="0" bIns="0" rtlCol="0" anchor="ctr"/>
+          <a:lstStyle/>
+          <a:p>
+            <a:pPr algn="ctr" indent="0" marL="0">
+              <a:buNone/>
+            </a:pPr>
+            <a:r>
+              <a:rPr lang="en-US" sz="1100" b="1" dirty="0">
+                <a:solidFill>
+                  <a:srgbClr val="FFFFFF"/>
+                </a:solidFill>
+                <a:latin typeface="Aptos" pitchFamily="34" charset="0"/>
+                <a:ea typeface="Aptos" pitchFamily="34" charset="-122"/>
+                <a:cs typeface="Aptos" pitchFamily="34" charset="-120"/>
+              </a:rPr>
+              <a:t>14</a:t>
+            </a:r>
+            <a:endParaRPr lang="en-US" sz="1100" dirty="0"/>
+          </a:p>
+        </p:txBody>
+      </p:sp>
+      <p:sp>
+        <p:nvSpPr>
+          <p:cNvPr id="9" name="Text 7"/>
+          <p:cNvSpPr/>
+          <p:nvPr/>
+        </p:nvSpPr>
+        <p:spPr>
+          <a:xfrm>
+            <a:off x="640080" y="621792"/>
             <a:ext cx="10881360" cy="566928"/>
           </a:xfrm>
           <a:prstGeom prst="rect">
@@ -5328,7 +8348,7 @@
                 <a:ea typeface="Aptos Display" pitchFamily="34" charset="-122"/>
                 <a:cs typeface="Aptos Display" pitchFamily="34" charset="-120"/>
               </a:rPr>
-              <a:t>References and Resources Continued</a:t>
+              <a:t>Knowledge Check</a:t>
             </a:r>
             <a:endParaRPr lang="en-US" sz="2700" dirty="0"/>
           </a:p>
@@ -5336,14 +8356,14 @@
       </p:sp>
       <p:sp>
         <p:nvSpPr>
-          <p:cNvPr id="7" name="Text 5"/>
-          <p:cNvSpPr/>
-          <p:nvPr/>
-        </p:nvSpPr>
-        <p:spPr>
-          <a:xfrm>
-            <a:off x="822960" y="1325880"/>
-            <a:ext cx="10378440" cy="4800600"/>
+          <p:cNvPr id="10" name="Text 8"/>
+          <p:cNvSpPr/>
+          <p:nvPr/>
+        </p:nvSpPr>
+        <p:spPr>
+          <a:xfrm>
+            <a:off x="868680" y="1417320"/>
+            <a:ext cx="6675120" cy="4434840"/>
           </a:xfrm>
           <a:prstGeom prst="rect">
             <a:avLst/>
@@ -5358,7 +8378,7 @@
           <a:lstStyle/>
           <a:p>
             <a:r>
-              <a:rPr lang="en-US" sz="1450" dirty="0">
+              <a:rPr lang="en-US" sz="1700" dirty="0">
                 <a:solidFill>
                   <a:srgbClr val="17364A"/>
                 </a:solidFill>
@@ -5366,13 +8386,13 @@
                 <a:ea typeface="Aptos" pitchFamily="34" charset="-122"/>
                 <a:cs typeface="Aptos" pitchFamily="34" charset="-120"/>
               </a:rPr>
-              <a:t>OMB Memorandum M-24-10 on federal AI governance, risk management, and innovation, where relevant to public-sector governance models</a:t>
-            </a:r>
-            <a:endParaRPr lang="en-US" sz="1450" dirty="0"/>
-          </a:p>
-          <a:p>
-            <a:r>
-              <a:rPr lang="en-US" sz="1450" dirty="0">
+              <a:t>1. What is the strongest reason this module topic belongs in AI leadership and governance training?</a:t>
+            </a:r>
+            <a:endParaRPr lang="en-US" sz="1700" dirty="0"/>
+          </a:p>
+          <a:p>
+            <a:r>
+              <a:rPr lang="en-US" sz="1700" dirty="0">
                 <a:solidFill>
                   <a:srgbClr val="17364A"/>
                 </a:solidFill>
@@ -5380,9 +8400,251 @@
                 <a:ea typeface="Aptos" pitchFamily="34" charset="-122"/>
                 <a:cs typeface="Aptos" pitchFamily="34" charset="-120"/>
               </a:rPr>
-              <a:t>Agency strategic plans, procurement policies, privacy policies, cybersecurity policies, records policies, and equity plans</a:t>
-            </a:r>
-            <a:endParaRPr lang="en-US" sz="1450" dirty="0"/>
+              <a:t>2. Which practice best supports accountable public health AI governance?</a:t>
+            </a:r>
+            <a:endParaRPr lang="en-US" sz="1700" dirty="0"/>
+          </a:p>
+          <a:p>
+            <a:r>
+              <a:rPr lang="en-US" sz="1700" dirty="0">
+                <a:solidFill>
+                  <a:srgbClr val="17364A"/>
+                </a:solidFill>
+                <a:latin typeface="Aptos" pitchFamily="34" charset="0"/>
+                <a:ea typeface="Aptos" pitchFamily="34" charset="-122"/>
+                <a:cs typeface="Aptos" pitchFamily="34" charset="-120"/>
+              </a:rPr>
+              <a:t>3. When should an AI use case be escalated for leadership or governance review?</a:t>
+            </a:r>
+            <a:endParaRPr lang="en-US" sz="1700" dirty="0"/>
+          </a:p>
+          <a:p>
+            <a:r>
+              <a:rPr lang="en-US" sz="1700" dirty="0">
+                <a:solidFill>
+                  <a:srgbClr val="17364A"/>
+                </a:solidFill>
+                <a:latin typeface="Aptos" pitchFamily="34" charset="0"/>
+                <a:ea typeface="Aptos" pitchFamily="34" charset="-122"/>
+                <a:cs typeface="Aptos" pitchFamily="34" charset="-120"/>
+              </a:rPr>
+              <a:t>4. What is weak evidence of completion for a leadership and governance module?</a:t>
+            </a:r>
+            <a:endParaRPr lang="en-US" sz="1700" dirty="0"/>
+          </a:p>
+        </p:txBody>
+      </p:sp>
+      <p:sp>
+        <p:nvSpPr>
+          <p:cNvPr id="11" name="Shape 9"/>
+          <p:cNvSpPr/>
+          <p:nvPr/>
+        </p:nvSpPr>
+        <p:spPr>
+          <a:xfrm>
+            <a:off x="7909560" y="1417320"/>
+            <a:ext cx="3154680" cy="1828800"/>
+          </a:xfrm>
+          <a:prstGeom prst="roundRect">
+            <a:avLst>
+              <a:gd name="adj" fmla="val 6000"/>
+            </a:avLst>
+          </a:prstGeom>
+          <a:solidFill>
+            <a:srgbClr val="EEF8ED"/>
+          </a:solidFill>
+          <a:ln w="12700">
+            <a:solidFill>
+              <a:srgbClr val="B9D7E6"/>
+            </a:solidFill>
+            <a:prstDash val="solid"/>
+          </a:ln>
+        </p:spPr>
+      </p:sp>
+      <p:sp>
+        <p:nvSpPr>
+          <p:cNvPr id="12" name="Text 10"/>
+          <p:cNvSpPr/>
+          <p:nvPr/>
+        </p:nvSpPr>
+        <p:spPr>
+          <a:xfrm>
+            <a:off x="8074152" y="1563624"/>
+            <a:ext cx="2825496" cy="201168"/>
+          </a:xfrm>
+          <a:prstGeom prst="rect">
+            <a:avLst/>
+          </a:prstGeom>
+          <a:noFill/>
+          <a:ln/>
+        </p:spPr>
+        <p:txBody>
+          <a:bodyPr wrap="square" lIns="0" tIns="0" rIns="0" bIns="0" rtlCol="0" anchor="ctr"/>
+          <a:lstStyle/>
+          <a:p>
+            <a:pPr indent="0" marL="0">
+              <a:buNone/>
+            </a:pPr>
+            <a:r>
+              <a:rPr lang="en-US" sz="950" b="1" dirty="0">
+                <a:solidFill>
+                  <a:srgbClr val="0068B7"/>
+                </a:solidFill>
+                <a:latin typeface="Aptos" pitchFamily="34" charset="0"/>
+                <a:ea typeface="Aptos" pitchFamily="34" charset="-122"/>
+                <a:cs typeface="Aptos" pitchFamily="34" charset="-120"/>
+              </a:rPr>
+              <a:t>Key idea</a:t>
+            </a:r>
+            <a:endParaRPr lang="en-US" sz="950" dirty="0"/>
+          </a:p>
+        </p:txBody>
+      </p:sp>
+      <p:sp>
+        <p:nvSpPr>
+          <p:cNvPr id="13" name="Text 11"/>
+          <p:cNvSpPr/>
+          <p:nvPr/>
+        </p:nvSpPr>
+        <p:spPr>
+          <a:xfrm>
+            <a:off x="8074152" y="1856232"/>
+            <a:ext cx="2825496" cy="1261872"/>
+          </a:xfrm>
+          <a:prstGeom prst="rect">
+            <a:avLst/>
+          </a:prstGeom>
+          <a:noFill/>
+          <a:ln/>
+        </p:spPr>
+        <p:txBody>
+          <a:bodyPr wrap="square" lIns="0" tIns="0" rIns="0" bIns="0" rtlCol="0" anchor="t">
+            <a:normAutofit/>
+          </a:bodyPr>
+          <a:lstStyle/>
+          <a:p>
+            <a:pPr indent="0" marL="0">
+              <a:buNone/>
+            </a:pPr>
+            <a:r>
+              <a:rPr lang="en-US" sz="1250" dirty="0">
+                <a:solidFill>
+                  <a:srgbClr val="17364A"/>
+                </a:solidFill>
+                <a:latin typeface="Aptos" pitchFamily="34" charset="0"/>
+                <a:ea typeface="Aptos" pitchFamily="34" charset="-122"/>
+                <a:cs typeface="Aptos" pitchFamily="34" charset="-120"/>
+              </a:rPr>
+              <a:t>1. What is the strongest reason this module topic belongs in AI leadership and governance training?</a:t>
+            </a:r>
+            <a:endParaRPr lang="en-US" sz="1250" dirty="0"/>
+          </a:p>
+        </p:txBody>
+      </p:sp>
+      <p:sp>
+        <p:nvSpPr>
+          <p:cNvPr id="14" name="Shape 12"/>
+          <p:cNvSpPr/>
+          <p:nvPr/>
+        </p:nvSpPr>
+        <p:spPr>
+          <a:xfrm>
+            <a:off x="7909560" y="3520440"/>
+            <a:ext cx="3154680" cy="1737360"/>
+          </a:xfrm>
+          <a:prstGeom prst="roundRect">
+            <a:avLst>
+              <a:gd name="adj" fmla="val 6316"/>
+            </a:avLst>
+          </a:prstGeom>
+          <a:solidFill>
+            <a:srgbClr val="EAF6F8"/>
+          </a:solidFill>
+          <a:ln w="12700">
+            <a:solidFill>
+              <a:srgbClr val="B9D7E6"/>
+            </a:solidFill>
+            <a:prstDash val="solid"/>
+          </a:ln>
+        </p:spPr>
+      </p:sp>
+      <p:sp>
+        <p:nvSpPr>
+          <p:cNvPr id="15" name="Text 13"/>
+          <p:cNvSpPr/>
+          <p:nvPr/>
+        </p:nvSpPr>
+        <p:spPr>
+          <a:xfrm>
+            <a:off x="8074152" y="3666744"/>
+            <a:ext cx="2825496" cy="201168"/>
+          </a:xfrm>
+          <a:prstGeom prst="rect">
+            <a:avLst/>
+          </a:prstGeom>
+          <a:noFill/>
+          <a:ln/>
+        </p:spPr>
+        <p:txBody>
+          <a:bodyPr wrap="square" lIns="0" tIns="0" rIns="0" bIns="0" rtlCol="0" anchor="ctr"/>
+          <a:lstStyle/>
+          <a:p>
+            <a:pPr indent="0" marL="0">
+              <a:buNone/>
+            </a:pPr>
+            <a:r>
+              <a:rPr lang="en-US" sz="950" b="1" dirty="0">
+                <a:solidFill>
+                  <a:srgbClr val="0068B7"/>
+                </a:solidFill>
+                <a:latin typeface="Aptos" pitchFamily="34" charset="0"/>
+                <a:ea typeface="Aptos" pitchFamily="34" charset="-122"/>
+                <a:cs typeface="Aptos" pitchFamily="34" charset="-120"/>
+              </a:rPr>
+              <a:t>Use this for</a:t>
+            </a:r>
+            <a:endParaRPr lang="en-US" sz="950" dirty="0"/>
+          </a:p>
+        </p:txBody>
+      </p:sp>
+      <p:sp>
+        <p:nvSpPr>
+          <p:cNvPr id="16" name="Text 14"/>
+          <p:cNvSpPr/>
+          <p:nvPr/>
+        </p:nvSpPr>
+        <p:spPr>
+          <a:xfrm>
+            <a:off x="8074152" y="3959352"/>
+            <a:ext cx="2825496" cy="1170432"/>
+          </a:xfrm>
+          <a:prstGeom prst="rect">
+            <a:avLst/>
+          </a:prstGeom>
+          <a:noFill/>
+          <a:ln/>
+        </p:spPr>
+        <p:txBody>
+          <a:bodyPr wrap="square" lIns="0" tIns="0" rIns="0" bIns="0" rtlCol="0" anchor="t">
+            <a:normAutofit/>
+          </a:bodyPr>
+          <a:lstStyle/>
+          <a:p>
+            <a:pPr indent="0" marL="0">
+              <a:buNone/>
+            </a:pPr>
+            <a:r>
+              <a:rPr lang="en-US" sz="1250" dirty="0">
+                <a:solidFill>
+                  <a:srgbClr val="17364A"/>
+                </a:solidFill>
+                <a:latin typeface="Aptos" pitchFamily="34" charset="0"/>
+                <a:ea typeface="Aptos" pitchFamily="34" charset="-122"/>
+                <a:cs typeface="Aptos" pitchFamily="34" charset="-120"/>
+              </a:rPr>
+              <a:t>Connect the concept to public health decisions, safeguards, documentation, or implementation work.</a:t>
+            </a:r>
+            <a:endParaRPr lang="en-US" sz="1250" dirty="0"/>
           </a:p>
         </p:txBody>
       </p:sp>
@@ -5445,7 +8707,32 @@
       </p:sp>
       <p:sp>
         <p:nvSpPr>
-          <p:cNvPr id="3" name="Text 1"/>
+          <p:cNvPr id="3" name="Shape 1"/>
+          <p:cNvSpPr/>
+          <p:nvPr/>
+        </p:nvSpPr>
+        <p:spPr>
+          <a:xfrm>
+            <a:off x="0" y="164592"/>
+            <a:ext cx="146304" cy="6693408"/>
+          </a:xfrm>
+          <a:prstGeom prst="rect">
+            <a:avLst/>
+          </a:prstGeom>
+          <a:solidFill>
+            <a:srgbClr val="2F8A28"/>
+          </a:solidFill>
+          <a:ln w="12700">
+            <a:solidFill>
+              <a:srgbClr val="2F8A28"/>
+            </a:solidFill>
+            <a:prstDash val="solid"/>
+          </a:ln>
+        </p:spPr>
+      </p:sp>
+      <p:sp>
+        <p:nvSpPr>
+          <p:cNvPr id="4" name="Text 2"/>
           <p:cNvSpPr/>
           <p:nvPr/>
         </p:nvSpPr>
@@ -5484,7 +8771,7 @@
       </p:sp>
       <p:sp>
         <p:nvSpPr>
-          <p:cNvPr id="4" name="Text 2"/>
+          <p:cNvPr id="5" name="Text 3"/>
           <p:cNvSpPr/>
           <p:nvPr/>
         </p:nvSpPr>
@@ -5523,7 +8810,7 @@
       </p:sp>
       <p:sp>
         <p:nvSpPr>
-          <p:cNvPr id="5" name="Text 3"/>
+          <p:cNvPr id="6" name="Text 4"/>
           <p:cNvSpPr/>
           <p:nvPr/>
         </p:nvSpPr>
@@ -5562,7 +8849,7 @@
       </p:sp>
       <p:sp>
         <p:nvSpPr>
-          <p:cNvPr id="6" name="Text 4"/>
+          <p:cNvPr id="7" name="Text 5"/>
           <p:cNvSpPr/>
           <p:nvPr/>
         </p:nvSpPr>
@@ -5595,7 +8882,7 @@
                 <a:ea typeface="Aptos Display" pitchFamily="34" charset="-122"/>
                 <a:cs typeface="Aptos Display" pitchFamily="34" charset="-120"/>
               </a:rPr>
-              <a:t>Module Context</a:t>
+              <a:t>What this module helps you do</a:t>
             </a:r>
             <a:endParaRPr lang="en-US" sz="2700" dirty="0"/>
           </a:p>
@@ -5603,14 +8890,14 @@
       </p:sp>
       <p:sp>
         <p:nvSpPr>
-          <p:cNvPr id="7" name="Text 5"/>
-          <p:cNvSpPr/>
-          <p:nvPr/>
-        </p:nvSpPr>
-        <p:spPr>
-          <a:xfrm>
-            <a:off x="822960" y="1325880"/>
-            <a:ext cx="10378440" cy="1371600"/>
+          <p:cNvPr id="8" name="Text 6"/>
+          <p:cNvSpPr/>
+          <p:nvPr/>
+        </p:nvSpPr>
+        <p:spPr>
+          <a:xfrm>
+            <a:off x="868680" y="1417320"/>
+            <a:ext cx="6675120" cy="3291840"/>
           </a:xfrm>
           <a:prstGeom prst="rect">
             <a:avLst/>
@@ -5625,7 +8912,7 @@
           <a:lstStyle/>
           <a:p>
             <a:r>
-              <a:rPr lang="en-US" sz="1600" dirty="0">
+              <a:rPr lang="en-US" sz="1700" dirty="0">
                 <a:solidFill>
                   <a:srgbClr val="17364A"/>
                 </a:solidFill>
@@ -5633,13 +8920,13 @@
                 <a:ea typeface="Aptos" pitchFamily="34" charset="-122"/>
                 <a:cs typeface="Aptos" pitchFamily="34" charset="-120"/>
               </a:rPr>
-              <a:t>Level: advanced/leadership</a:t>
-            </a:r>
-            <a:endParaRPr lang="en-US" sz="1600" dirty="0"/>
-          </a:p>
-          <a:p>
-            <a:r>
-              <a:rPr lang="en-US" sz="1600" dirty="0">
+              <a:t>AI governance needs a formal home before an agency begins approving tools, pilots, vendor products, or workflow automation.</a:t>
+            </a:r>
+            <a:endParaRPr lang="en-US" sz="1700" dirty="0"/>
+          </a:p>
+          <a:p>
+            <a:r>
+              <a:rPr lang="en-US" sz="1700" dirty="0">
                 <a:solidFill>
                   <a:srgbClr val="17364A"/>
                 </a:solidFill>
@@ -5647,13 +8934,13 @@
                 <a:ea typeface="Aptos" pitchFamily="34" charset="-122"/>
                 <a:cs typeface="Aptos" pitchFamily="34" charset="-120"/>
               </a:rPr>
-              <a:t>Primary track: Governance and Security Track</a:t>
-            </a:r>
-            <a:endParaRPr lang="en-US" sz="1600" dirty="0"/>
-          </a:p>
-          <a:p>
-            <a:r>
-              <a:rPr lang="en-US" sz="1600" dirty="0">
+              <a:t>A governance charter defines the purpose, scope, authority, membership, cadence, decision rules, and documentation expectations for the group that.</a:t>
+            </a:r>
+            <a:endParaRPr lang="en-US" sz="1700" dirty="0"/>
+          </a:p>
+          <a:p>
+            <a:r>
+              <a:rPr lang="en-US" sz="1700" dirty="0">
                 <a:solidFill>
                   <a:srgbClr val="17364A"/>
                 </a:solidFill>
@@ -5661,31 +8948,111 @@
                 <a:ea typeface="Aptos" pitchFamily="34" charset="-122"/>
                 <a:cs typeface="Aptos" pitchFamily="34" charset="-120"/>
               </a:rPr>
-              <a:t>Appears in tracks: governance-security</a:t>
-            </a:r>
-            <a:endParaRPr lang="en-US" sz="1600" dirty="0"/>
-          </a:p>
-        </p:txBody>
-      </p:sp>
-      <p:sp>
-        <p:nvSpPr>
-          <p:cNvPr id="8" name="Text 6"/>
-          <p:cNvSpPr/>
-          <p:nvPr/>
-        </p:nvSpPr>
-        <p:spPr>
-          <a:xfrm>
-            <a:off x="822960" y="2743200"/>
-            <a:ext cx="10378440" cy="2834640"/>
-          </a:xfrm>
-          <a:prstGeom prst="rect">
-            <a:avLst/>
-          </a:prstGeom>
-          <a:noFill/>
-          <a:ln/>
-        </p:spPr>
-        <p:txBody>
-          <a:bodyPr wrap="square" lIns="1016" tIns="1016" rIns="1016" bIns="1016" rtlCol="0" anchor="t">
+              <a:t>Without a charter, AI decisions often become scattered across IT, program areas, legal, privacy, procurement, and individual project teams, which.</a:t>
+            </a:r>
+            <a:endParaRPr lang="en-US" sz="1700" dirty="0"/>
+          </a:p>
+          <a:p>
+            <a:r>
+              <a:rPr lang="en-US" sz="1700" dirty="0">
+                <a:solidFill>
+                  <a:srgbClr val="17364A"/>
+                </a:solidFill>
+                <a:latin typeface="Aptos" pitchFamily="34" charset="0"/>
+                <a:ea typeface="Aptos" pitchFamily="34" charset="-122"/>
+                <a:cs typeface="Aptos" pitchFamily="34" charset="-120"/>
+              </a:rPr>
+              <a:t>This module helps leaders design an AI governance operating model that is practical for a public health agency.</a:t>
+            </a:r>
+            <a:endParaRPr lang="en-US" sz="1700" dirty="0"/>
+          </a:p>
+        </p:txBody>
+      </p:sp>
+      <p:sp>
+        <p:nvSpPr>
+          <p:cNvPr id="9" name="Shape 7"/>
+          <p:cNvSpPr/>
+          <p:nvPr/>
+        </p:nvSpPr>
+        <p:spPr>
+          <a:xfrm>
+            <a:off x="7909560" y="1417320"/>
+            <a:ext cx="3154680" cy="1920240"/>
+          </a:xfrm>
+          <a:prstGeom prst="roundRect">
+            <a:avLst>
+              <a:gd name="adj" fmla="val 5714"/>
+            </a:avLst>
+          </a:prstGeom>
+          <a:solidFill>
+            <a:srgbClr val="EAF6F8"/>
+          </a:solidFill>
+          <a:ln w="12700">
+            <a:solidFill>
+              <a:srgbClr val="B9D7E6"/>
+            </a:solidFill>
+            <a:prstDash val="solid"/>
+          </a:ln>
+        </p:spPr>
+      </p:sp>
+      <p:sp>
+        <p:nvSpPr>
+          <p:cNvPr id="10" name="Text 8"/>
+          <p:cNvSpPr/>
+          <p:nvPr/>
+        </p:nvSpPr>
+        <p:spPr>
+          <a:xfrm>
+            <a:off x="8074152" y="1563624"/>
+            <a:ext cx="2825496" cy="201168"/>
+          </a:xfrm>
+          <a:prstGeom prst="rect">
+            <a:avLst/>
+          </a:prstGeom>
+          <a:noFill/>
+          <a:ln/>
+        </p:spPr>
+        <p:txBody>
+          <a:bodyPr wrap="square" lIns="0" tIns="0" rIns="0" bIns="0" rtlCol="0" anchor="ctr"/>
+          <a:lstStyle/>
+          <a:p>
+            <a:pPr indent="0" marL="0">
+              <a:buNone/>
+            </a:pPr>
+            <a:r>
+              <a:rPr lang="en-US" sz="950" b="1" dirty="0">
+                <a:solidFill>
+                  <a:srgbClr val="0068B7"/>
+                </a:solidFill>
+                <a:latin typeface="Aptos" pitchFamily="34" charset="0"/>
+                <a:ea typeface="Aptos" pitchFamily="34" charset="-122"/>
+                <a:cs typeface="Aptos" pitchFamily="34" charset="-120"/>
+              </a:rPr>
+              <a:t>Module details</a:t>
+            </a:r>
+            <a:endParaRPr lang="en-US" sz="950" dirty="0"/>
+          </a:p>
+        </p:txBody>
+      </p:sp>
+      <p:sp>
+        <p:nvSpPr>
+          <p:cNvPr id="11" name="Text 9"/>
+          <p:cNvSpPr/>
+          <p:nvPr/>
+        </p:nvSpPr>
+        <p:spPr>
+          <a:xfrm>
+            <a:off x="8074152" y="1856232"/>
+            <a:ext cx="2825496" cy="1353312"/>
+          </a:xfrm>
+          <a:prstGeom prst="rect">
+            <a:avLst/>
+          </a:prstGeom>
+          <a:noFill/>
+          <a:ln/>
+        </p:spPr>
+        <p:txBody>
+          <a:bodyPr wrap="square" lIns="0" tIns="0" rIns="0" bIns="0" rtlCol="0" anchor="t">
             <a:normAutofit/>
           </a:bodyPr>
           <a:lstStyle/>
@@ -5694,7 +9061,7 @@
               <a:buNone/>
             </a:pPr>
             <a:r>
-              <a:rPr lang="en-US" sz="1400" dirty="0">
+              <a:rPr lang="en-US" sz="1250" dirty="0">
                 <a:solidFill>
                   <a:srgbClr val="17364A"/>
                 </a:solidFill>
@@ -5702,9 +9069,1254 @@
                 <a:ea typeface="Aptos" pitchFamily="34" charset="-122"/>
                 <a:cs typeface="Aptos" pitchFamily="34" charset="-120"/>
               </a:rPr>
-              <a:t>AI governance needs a formal home before an agency begins approving tools, pilots, vendor products, or workflow automation. A governance charter defines the purpose, scope, authority, membership, cadence, decision rules, and documentation expectations for the group that will oversee AI. Without a charter, AI decisions often become scattered across IT, program areas, legal, privacy, procurement, and individual project teams, which can lead to inconsistent standards and unclear accountability. This module helps leaders design an AI governance operating model that is practical for a public health agency. The operating model should connect strategy, risk management, technical review, privacy review, equity review, procurement, implementation oversight, and incident response. The goal is not to create another committee for its own sake. The goal is to make sure AI decisions are reviewed consistently, documented clearly, and connected to public health authority, community trust, and operational realities.</a:t>
-            </a:r>
-            <a:endParaRPr lang="en-US" sz="1400" dirty="0"/>
+              <a:t>Level: advanced/leadership</a:t>
+            </a:r>
+            <a:endParaRPr lang="en-US" sz="1250" dirty="0"/>
+          </a:p>
+          <a:p>
+            <a:pPr indent="0" marL="0">
+              <a:buNone/>
+            </a:pPr>
+            <a:r>
+              <a:rPr lang="en-US" sz="1250" dirty="0">
+                <a:solidFill>
+                  <a:srgbClr val="17364A"/>
+                </a:solidFill>
+                <a:latin typeface="Aptos" pitchFamily="34" charset="0"/>
+                <a:ea typeface="Aptos" pitchFamily="34" charset="-122"/>
+                <a:cs typeface="Aptos" pitchFamily="34" charset="-120"/>
+              </a:rPr>
+              <a:t>Primary track: Governance and Security Track</a:t>
+            </a:r>
+            <a:endParaRPr lang="en-US" sz="1250" dirty="0"/>
+          </a:p>
+          <a:p>
+            <a:pPr indent="0" marL="0">
+              <a:buNone/>
+            </a:pPr>
+            <a:r>
+              <a:rPr lang="en-US" sz="1250" dirty="0">
+                <a:solidFill>
+                  <a:srgbClr val="17364A"/>
+                </a:solidFill>
+                <a:latin typeface="Aptos" pitchFamily="34" charset="0"/>
+                <a:ea typeface="Aptos" pitchFamily="34" charset="-122"/>
+                <a:cs typeface="Aptos" pitchFamily="34" charset="-120"/>
+              </a:rPr>
+              <a:t>Appears in tracks: governance-security</a:t>
+            </a:r>
+            <a:endParaRPr lang="en-US" sz="1250" dirty="0"/>
+          </a:p>
+        </p:txBody>
+      </p:sp>
+      <p:sp>
+        <p:nvSpPr>
+          <p:cNvPr id="12" name="Shape 10"/>
+          <p:cNvSpPr/>
+          <p:nvPr/>
+        </p:nvSpPr>
+        <p:spPr>
+          <a:xfrm>
+            <a:off x="7909560" y="3611880"/>
+            <a:ext cx="3154680" cy="1783080"/>
+          </a:xfrm>
+          <a:prstGeom prst="roundRect">
+            <a:avLst>
+              <a:gd name="adj" fmla="val 6154"/>
+            </a:avLst>
+          </a:prstGeom>
+          <a:solidFill>
+            <a:srgbClr val="EEF8ED"/>
+          </a:solidFill>
+          <a:ln w="12700">
+            <a:solidFill>
+              <a:srgbClr val="B9D7E6"/>
+            </a:solidFill>
+            <a:prstDash val="solid"/>
+          </a:ln>
+        </p:spPr>
+      </p:sp>
+      <p:sp>
+        <p:nvSpPr>
+          <p:cNvPr id="13" name="Text 11"/>
+          <p:cNvSpPr/>
+          <p:nvPr/>
+        </p:nvSpPr>
+        <p:spPr>
+          <a:xfrm>
+            <a:off x="8074152" y="3758184"/>
+            <a:ext cx="2825496" cy="201168"/>
+          </a:xfrm>
+          <a:prstGeom prst="rect">
+            <a:avLst/>
+          </a:prstGeom>
+          <a:noFill/>
+          <a:ln/>
+        </p:spPr>
+        <p:txBody>
+          <a:bodyPr wrap="square" lIns="0" tIns="0" rIns="0" bIns="0" rtlCol="0" anchor="ctr"/>
+          <a:lstStyle/>
+          <a:p>
+            <a:pPr indent="0" marL="0">
+              <a:buNone/>
+            </a:pPr>
+            <a:r>
+              <a:rPr lang="en-US" sz="950" b="1" dirty="0">
+                <a:solidFill>
+                  <a:srgbClr val="0068B7"/>
+                </a:solidFill>
+                <a:latin typeface="Aptos" pitchFamily="34" charset="0"/>
+                <a:ea typeface="Aptos" pitchFamily="34" charset="-122"/>
+                <a:cs typeface="Aptos" pitchFamily="34" charset="-120"/>
+              </a:rPr>
+              <a:t>Learning approach</a:t>
+            </a:r>
+            <a:endParaRPr lang="en-US" sz="950" dirty="0"/>
+          </a:p>
+        </p:txBody>
+      </p:sp>
+      <p:sp>
+        <p:nvSpPr>
+          <p:cNvPr id="14" name="Text 12"/>
+          <p:cNvSpPr/>
+          <p:nvPr/>
+        </p:nvSpPr>
+        <p:spPr>
+          <a:xfrm>
+            <a:off x="8074152" y="4050792"/>
+            <a:ext cx="2825496" cy="1216152"/>
+          </a:xfrm>
+          <a:prstGeom prst="rect">
+            <a:avLst/>
+          </a:prstGeom>
+          <a:noFill/>
+          <a:ln/>
+        </p:spPr>
+        <p:txBody>
+          <a:bodyPr wrap="square" lIns="0" tIns="0" rIns="0" bIns="0" rtlCol="0" anchor="t">
+            <a:normAutofit/>
+          </a:bodyPr>
+          <a:lstStyle/>
+          <a:p>
+            <a:pPr indent="0" marL="0">
+              <a:buNone/>
+            </a:pPr>
+            <a:r>
+              <a:rPr lang="en-US" sz="1250" dirty="0">
+                <a:solidFill>
+                  <a:srgbClr val="17364A"/>
+                </a:solidFill>
+                <a:latin typeface="Aptos" pitchFamily="34" charset="0"/>
+                <a:ea typeface="Aptos" pitchFamily="34" charset="-122"/>
+                <a:cs typeface="Aptos" pitchFamily="34" charset="-120"/>
+              </a:rPr>
+              <a:t>Review the core ideas, complete the practical exercise, check your understanding, and use the related plays and tools to apply the lesson.</a:t>
+            </a:r>
+            <a:endParaRPr lang="en-US" sz="1250" dirty="0"/>
+          </a:p>
+        </p:txBody>
+      </p:sp>
+    </p:spTree>
+  </p:cSld>
+  <p:clrMapOvr>
+    <a:masterClrMapping/>
+  </p:clrMapOvr>
+</p:sld>
+</file>
+
+<file path=ppt/slides/slide20.xml><?xml version="1.0" encoding="utf-8"?>
+<p:sld xmlns:a="http://schemas.openxmlformats.org/drawingml/2006/main" xmlns:r="http://schemas.openxmlformats.org/officeDocument/2006/relationships" xmlns:p="http://schemas.openxmlformats.org/presentationml/2006/main">
+  <p:cSld name="Slide 20">
+    <p:bg>
+      <p:bgPr>
+        <a:solidFill>
+          <a:srgbClr val="F7FBFD"/>
+        </a:solidFill>
+      </p:bgPr>
+    </p:bg>
+    <p:spTree>
+      <p:nvGrpSpPr>
+        <p:cNvPr id="1" name=""/>
+        <p:cNvGrpSpPr/>
+        <p:nvPr/>
+      </p:nvGrpSpPr>
+      <p:grpSpPr>
+        <a:xfrm>
+          <a:off x="0" y="0"/>
+          <a:ext cx="0" cy="0"/>
+          <a:chOff x="0" y="0"/>
+          <a:chExt cx="0" cy="0"/>
+        </a:xfrm>
+      </p:grpSpPr>
+      <p:sp>
+        <p:nvSpPr>
+          <p:cNvPr id="2" name="Shape 0"/>
+          <p:cNvSpPr/>
+          <p:nvPr/>
+        </p:nvSpPr>
+        <p:spPr>
+          <a:xfrm>
+            <a:off x="0" y="0"/>
+            <a:ext cx="12191695" cy="164592"/>
+          </a:xfrm>
+          <a:prstGeom prst="rect">
+            <a:avLst/>
+          </a:prstGeom>
+          <a:solidFill>
+            <a:srgbClr val="0068B7"/>
+          </a:solidFill>
+          <a:ln w="12700">
+            <a:solidFill>
+              <a:srgbClr val="0068B7"/>
+            </a:solidFill>
+            <a:prstDash val="solid"/>
+          </a:ln>
+        </p:spPr>
+      </p:sp>
+      <p:sp>
+        <p:nvSpPr>
+          <p:cNvPr id="3" name="Shape 1"/>
+          <p:cNvSpPr/>
+          <p:nvPr/>
+        </p:nvSpPr>
+        <p:spPr>
+          <a:xfrm>
+            <a:off x="0" y="164592"/>
+            <a:ext cx="146304" cy="6693408"/>
+          </a:xfrm>
+          <a:prstGeom prst="rect">
+            <a:avLst/>
+          </a:prstGeom>
+          <a:solidFill>
+            <a:srgbClr val="2F8A28"/>
+          </a:solidFill>
+          <a:ln w="12700">
+            <a:solidFill>
+              <a:srgbClr val="2F8A28"/>
+            </a:solidFill>
+            <a:prstDash val="solid"/>
+          </a:ln>
+        </p:spPr>
+      </p:sp>
+      <p:sp>
+        <p:nvSpPr>
+          <p:cNvPr id="4" name="Text 2"/>
+          <p:cNvSpPr/>
+          <p:nvPr/>
+        </p:nvSpPr>
+        <p:spPr>
+          <a:xfrm>
+            <a:off x="502920" y="292608"/>
+            <a:ext cx="10149840" cy="256032"/>
+          </a:xfrm>
+          <a:prstGeom prst="rect">
+            <a:avLst/>
+          </a:prstGeom>
+          <a:noFill/>
+          <a:ln/>
+        </p:spPr>
+        <p:txBody>
+          <a:bodyPr wrap="square" lIns="0" tIns="0" rIns="0" bIns="0" rtlCol="0" anchor="ctr"/>
+          <a:lstStyle/>
+          <a:p>
+            <a:pPr indent="0" marL="0">
+              <a:buNone/>
+            </a:pPr>
+            <a:r>
+              <a:rPr lang="en-US" sz="900" b="1" dirty="0">
+                <a:solidFill>
+                  <a:srgbClr val="5F7181"/>
+                </a:solidFill>
+                <a:latin typeface="Aptos" pitchFamily="34" charset="0"/>
+                <a:ea typeface="Aptos" pitchFamily="34" charset="-122"/>
+                <a:cs typeface="Aptos" pitchFamily="34" charset="-120"/>
+              </a:rPr>
+              <a:t>AI Governance Charter and Operating Model</a:t>
+            </a:r>
+            <a:endParaRPr lang="en-US" sz="900" dirty="0"/>
+          </a:p>
+        </p:txBody>
+      </p:sp>
+      <p:sp>
+        <p:nvSpPr>
+          <p:cNvPr id="5" name="Text 3"/>
+          <p:cNvSpPr/>
+          <p:nvPr/>
+        </p:nvSpPr>
+        <p:spPr>
+          <a:xfrm>
+            <a:off x="502920" y="6537960"/>
+            <a:ext cx="7772400" cy="201168"/>
+          </a:xfrm>
+          <a:prstGeom prst="rect">
+            <a:avLst/>
+          </a:prstGeom>
+          <a:noFill/>
+          <a:ln/>
+        </p:spPr>
+        <p:txBody>
+          <a:bodyPr wrap="square" lIns="0" tIns="0" rIns="0" bIns="0" rtlCol="0" anchor="ctr"/>
+          <a:lstStyle/>
+          <a:p>
+            <a:pPr indent="0" marL="0">
+              <a:buNone/>
+            </a:pPr>
+            <a:r>
+              <a:rPr lang="en-US" sz="800" dirty="0">
+                <a:solidFill>
+                  <a:srgbClr val="5F7181"/>
+                </a:solidFill>
+                <a:latin typeface="Aptos" pitchFamily="34" charset="0"/>
+                <a:ea typeface="Aptos" pitchFamily="34" charset="-122"/>
+                <a:cs typeface="Aptos" pitchFamily="34" charset="-120"/>
+              </a:rPr>
+              <a:t>AI Playbook and Toolkit for Public Health Departments</a:t>
+            </a:r>
+            <a:endParaRPr lang="en-US" sz="800" dirty="0"/>
+          </a:p>
+        </p:txBody>
+      </p:sp>
+      <p:sp>
+        <p:nvSpPr>
+          <p:cNvPr id="6" name="Text 4"/>
+          <p:cNvSpPr/>
+          <p:nvPr/>
+        </p:nvSpPr>
+        <p:spPr>
+          <a:xfrm>
+            <a:off x="9966960" y="6537960"/>
+            <a:ext cx="1645920" cy="201168"/>
+          </a:xfrm>
+          <a:prstGeom prst="rect">
+            <a:avLst/>
+          </a:prstGeom>
+          <a:noFill/>
+          <a:ln/>
+        </p:spPr>
+        <p:txBody>
+          <a:bodyPr wrap="square" lIns="0" tIns="0" rIns="0" bIns="0" rtlCol="0" anchor="ctr"/>
+          <a:lstStyle/>
+          <a:p>
+            <a:pPr algn="r" indent="0" marL="0">
+              <a:buNone/>
+            </a:pPr>
+            <a:r>
+              <a:rPr lang="en-US" sz="800" dirty="0">
+                <a:solidFill>
+                  <a:srgbClr val="5F7181"/>
+                </a:solidFill>
+                <a:latin typeface="Aptos" pitchFamily="34" charset="0"/>
+                <a:ea typeface="Aptos" pitchFamily="34" charset="-122"/>
+                <a:cs typeface="Aptos" pitchFamily="34" charset="-120"/>
+              </a:rPr>
+              <a:t>© Paula Soper</a:t>
+            </a:r>
+            <a:endParaRPr lang="en-US" sz="800" dirty="0"/>
+          </a:p>
+        </p:txBody>
+      </p:sp>
+      <p:sp>
+        <p:nvSpPr>
+          <p:cNvPr id="7" name="Shape 5"/>
+          <p:cNvSpPr/>
+          <p:nvPr/>
+        </p:nvSpPr>
+        <p:spPr>
+          <a:xfrm>
+            <a:off x="640080" y="658368"/>
+            <a:ext cx="420624" cy="420624"/>
+          </a:xfrm>
+          <a:prstGeom prst="ellipse">
+            <a:avLst/>
+          </a:prstGeom>
+          <a:solidFill>
+            <a:srgbClr val="0068B7"/>
+          </a:solidFill>
+          <a:ln w="12700">
+            <a:solidFill>
+              <a:srgbClr val="0068B7"/>
+            </a:solidFill>
+            <a:prstDash val="solid"/>
+          </a:ln>
+        </p:spPr>
+      </p:sp>
+      <p:sp>
+        <p:nvSpPr>
+          <p:cNvPr id="8" name="Text 6"/>
+          <p:cNvSpPr/>
+          <p:nvPr/>
+        </p:nvSpPr>
+        <p:spPr>
+          <a:xfrm>
+            <a:off x="640080" y="731520"/>
+            <a:ext cx="420624" cy="164592"/>
+          </a:xfrm>
+          <a:prstGeom prst="rect">
+            <a:avLst/>
+          </a:prstGeom>
+          <a:noFill/>
+          <a:ln/>
+        </p:spPr>
+        <p:txBody>
+          <a:bodyPr wrap="square" lIns="0" tIns="0" rIns="0" bIns="0" rtlCol="0" anchor="ctr"/>
+          <a:lstStyle/>
+          <a:p>
+            <a:pPr algn="ctr" indent="0" marL="0">
+              <a:buNone/>
+            </a:pPr>
+            <a:r>
+              <a:rPr lang="en-US" sz="1100" b="1" dirty="0">
+                <a:solidFill>
+                  <a:srgbClr val="FFFFFF"/>
+                </a:solidFill>
+                <a:latin typeface="Aptos" pitchFamily="34" charset="0"/>
+                <a:ea typeface="Aptos" pitchFamily="34" charset="-122"/>
+                <a:cs typeface="Aptos" pitchFamily="34" charset="-120"/>
+              </a:rPr>
+              <a:t>15</a:t>
+            </a:r>
+            <a:endParaRPr lang="en-US" sz="1100" dirty="0"/>
+          </a:p>
+        </p:txBody>
+      </p:sp>
+      <p:sp>
+        <p:nvSpPr>
+          <p:cNvPr id="9" name="Text 7"/>
+          <p:cNvSpPr/>
+          <p:nvPr/>
+        </p:nvSpPr>
+        <p:spPr>
+          <a:xfrm>
+            <a:off x="640080" y="621792"/>
+            <a:ext cx="10881360" cy="566928"/>
+          </a:xfrm>
+          <a:prstGeom prst="rect">
+            <a:avLst/>
+          </a:prstGeom>
+          <a:noFill/>
+          <a:ln/>
+        </p:spPr>
+        <p:txBody>
+          <a:bodyPr wrap="square" lIns="0" tIns="0" rIns="0" bIns="0" rtlCol="0" anchor="ctr">
+            <a:normAutofit/>
+          </a:bodyPr>
+          <a:lstStyle/>
+          <a:p>
+            <a:pPr indent="0" marL="0">
+              <a:buNone/>
+            </a:pPr>
+            <a:r>
+              <a:rPr lang="en-US" sz="2700" b="1" dirty="0">
+                <a:solidFill>
+                  <a:srgbClr val="003A63"/>
+                </a:solidFill>
+                <a:latin typeface="Aptos Display" pitchFamily="34" charset="0"/>
+                <a:ea typeface="Aptos Display" pitchFamily="34" charset="-122"/>
+                <a:cs typeface="Aptos Display" pitchFamily="34" charset="-120"/>
+              </a:rPr>
+              <a:t>References and Resources</a:t>
+            </a:r>
+            <a:endParaRPr lang="en-US" sz="2700" dirty="0"/>
+          </a:p>
+        </p:txBody>
+      </p:sp>
+      <p:sp>
+        <p:nvSpPr>
+          <p:cNvPr id="10" name="Text 8"/>
+          <p:cNvSpPr/>
+          <p:nvPr/>
+        </p:nvSpPr>
+        <p:spPr>
+          <a:xfrm>
+            <a:off x="868680" y="1417320"/>
+            <a:ext cx="6675120" cy="4434840"/>
+          </a:xfrm>
+          <a:prstGeom prst="rect">
+            <a:avLst/>
+          </a:prstGeom>
+          <a:noFill/>
+          <a:ln/>
+        </p:spPr>
+        <p:txBody>
+          <a:bodyPr wrap="square" lIns="635" tIns="635" rIns="635" bIns="635" rtlCol="0" anchor="t">
+            <a:normAutofit/>
+          </a:bodyPr>
+          <a:lstStyle/>
+          <a:p>
+            <a:r>
+              <a:rPr lang="en-US" sz="1700" dirty="0">
+                <a:solidFill>
+                  <a:srgbClr val="17364A"/>
+                </a:solidFill>
+                <a:latin typeface="Aptos" pitchFamily="34" charset="0"/>
+                <a:ea typeface="Aptos" pitchFamily="34" charset="-122"/>
+                <a:cs typeface="Aptos" pitchFamily="34" charset="-120"/>
+              </a:rPr>
+              <a:t>NIST Artificial Intelligence Risk Management Framework (AI RMF 1.0): https://www.nist.gov/itl/ai-risk-management-framework</a:t>
+            </a:r>
+            <a:endParaRPr lang="en-US" sz="1700" dirty="0"/>
+          </a:p>
+          <a:p>
+            <a:r>
+              <a:rPr lang="en-US" sz="1700" dirty="0">
+                <a:solidFill>
+                  <a:srgbClr val="17364A"/>
+                </a:solidFill>
+                <a:latin typeface="Aptos" pitchFamily="34" charset="0"/>
+                <a:ea typeface="Aptos" pitchFamily="34" charset="-122"/>
+                <a:cs typeface="Aptos" pitchFamily="34" charset="-120"/>
+              </a:rPr>
+              <a:t>NIST Generative AI Profile:.</a:t>
+            </a:r>
+            <a:endParaRPr lang="en-US" sz="1700" dirty="0"/>
+          </a:p>
+          <a:p>
+            <a:r>
+              <a:rPr lang="en-US" sz="1700" dirty="0">
+                <a:solidFill>
+                  <a:srgbClr val="17364A"/>
+                </a:solidFill>
+                <a:latin typeface="Aptos" pitchFamily="34" charset="0"/>
+                <a:ea typeface="Aptos" pitchFamily="34" charset="-122"/>
+                <a:cs typeface="Aptos" pitchFamily="34" charset="-120"/>
+              </a:rPr>
+              <a:t>NIST Privacy Framework</a:t>
+            </a:r>
+            <a:endParaRPr lang="en-US" sz="1700" dirty="0"/>
+          </a:p>
+          <a:p>
+            <a:r>
+              <a:rPr lang="en-US" sz="1700" dirty="0">
+                <a:solidFill>
+                  <a:srgbClr val="17364A"/>
+                </a:solidFill>
+                <a:latin typeface="Aptos" pitchFamily="34" charset="0"/>
+                <a:ea typeface="Aptos" pitchFamily="34" charset="-122"/>
+                <a:cs typeface="Aptos" pitchFamily="34" charset="-120"/>
+              </a:rPr>
+              <a:t>CDC Public Health Data Strategy and Data Modernization resources:.</a:t>
+            </a:r>
+            <a:endParaRPr lang="en-US" sz="1700" dirty="0"/>
+          </a:p>
+        </p:txBody>
+      </p:sp>
+      <p:sp>
+        <p:nvSpPr>
+          <p:cNvPr id="11" name="Shape 9"/>
+          <p:cNvSpPr/>
+          <p:nvPr/>
+        </p:nvSpPr>
+        <p:spPr>
+          <a:xfrm>
+            <a:off x="7909560" y="1417320"/>
+            <a:ext cx="3154680" cy="1828800"/>
+          </a:xfrm>
+          <a:prstGeom prst="roundRect">
+            <a:avLst>
+              <a:gd name="adj" fmla="val 6000"/>
+            </a:avLst>
+          </a:prstGeom>
+          <a:solidFill>
+            <a:srgbClr val="EEF8ED"/>
+          </a:solidFill>
+          <a:ln w="12700">
+            <a:solidFill>
+              <a:srgbClr val="B9D7E6"/>
+            </a:solidFill>
+            <a:prstDash val="solid"/>
+          </a:ln>
+        </p:spPr>
+      </p:sp>
+      <p:sp>
+        <p:nvSpPr>
+          <p:cNvPr id="12" name="Text 10"/>
+          <p:cNvSpPr/>
+          <p:nvPr/>
+        </p:nvSpPr>
+        <p:spPr>
+          <a:xfrm>
+            <a:off x="8074152" y="1563624"/>
+            <a:ext cx="2825496" cy="201168"/>
+          </a:xfrm>
+          <a:prstGeom prst="rect">
+            <a:avLst/>
+          </a:prstGeom>
+          <a:noFill/>
+          <a:ln/>
+        </p:spPr>
+        <p:txBody>
+          <a:bodyPr wrap="square" lIns="0" tIns="0" rIns="0" bIns="0" rtlCol="0" anchor="ctr"/>
+          <a:lstStyle/>
+          <a:p>
+            <a:pPr indent="0" marL="0">
+              <a:buNone/>
+            </a:pPr>
+            <a:r>
+              <a:rPr lang="en-US" sz="950" b="1" dirty="0">
+                <a:solidFill>
+                  <a:srgbClr val="0068B7"/>
+                </a:solidFill>
+                <a:latin typeface="Aptos" pitchFamily="34" charset="0"/>
+                <a:ea typeface="Aptos" pitchFamily="34" charset="-122"/>
+                <a:cs typeface="Aptos" pitchFamily="34" charset="-120"/>
+              </a:rPr>
+              <a:t>Key idea</a:t>
+            </a:r>
+            <a:endParaRPr lang="en-US" sz="950" dirty="0"/>
+          </a:p>
+        </p:txBody>
+      </p:sp>
+      <p:sp>
+        <p:nvSpPr>
+          <p:cNvPr id="13" name="Text 11"/>
+          <p:cNvSpPr/>
+          <p:nvPr/>
+        </p:nvSpPr>
+        <p:spPr>
+          <a:xfrm>
+            <a:off x="8074152" y="1856232"/>
+            <a:ext cx="2825496" cy="1261872"/>
+          </a:xfrm>
+          <a:prstGeom prst="rect">
+            <a:avLst/>
+          </a:prstGeom>
+          <a:noFill/>
+          <a:ln/>
+        </p:spPr>
+        <p:txBody>
+          <a:bodyPr wrap="square" lIns="0" tIns="0" rIns="0" bIns="0" rtlCol="0" anchor="t">
+            <a:normAutofit/>
+          </a:bodyPr>
+          <a:lstStyle/>
+          <a:p>
+            <a:pPr indent="0" marL="0">
+              <a:buNone/>
+            </a:pPr>
+            <a:r>
+              <a:rPr lang="en-US" sz="1250" dirty="0">
+                <a:solidFill>
+                  <a:srgbClr val="17364A"/>
+                </a:solidFill>
+                <a:latin typeface="Aptos" pitchFamily="34" charset="0"/>
+                <a:ea typeface="Aptos" pitchFamily="34" charset="-122"/>
+                <a:cs typeface="Aptos" pitchFamily="34" charset="-120"/>
+              </a:rPr>
+              <a:t>NIST Artificial Intelligence Risk Management Framework (AI RMF 1.0): https://www.nist.gov/itl/ai-risk-management-framework</a:t>
+            </a:r>
+            <a:endParaRPr lang="en-US" sz="1250" dirty="0"/>
+          </a:p>
+        </p:txBody>
+      </p:sp>
+      <p:sp>
+        <p:nvSpPr>
+          <p:cNvPr id="14" name="Shape 12"/>
+          <p:cNvSpPr/>
+          <p:nvPr/>
+        </p:nvSpPr>
+        <p:spPr>
+          <a:xfrm>
+            <a:off x="7909560" y="3520440"/>
+            <a:ext cx="3154680" cy="1737360"/>
+          </a:xfrm>
+          <a:prstGeom prst="roundRect">
+            <a:avLst>
+              <a:gd name="adj" fmla="val 6316"/>
+            </a:avLst>
+          </a:prstGeom>
+          <a:solidFill>
+            <a:srgbClr val="EAF6F8"/>
+          </a:solidFill>
+          <a:ln w="12700">
+            <a:solidFill>
+              <a:srgbClr val="B9D7E6"/>
+            </a:solidFill>
+            <a:prstDash val="solid"/>
+          </a:ln>
+        </p:spPr>
+      </p:sp>
+      <p:sp>
+        <p:nvSpPr>
+          <p:cNvPr id="15" name="Text 13"/>
+          <p:cNvSpPr/>
+          <p:nvPr/>
+        </p:nvSpPr>
+        <p:spPr>
+          <a:xfrm>
+            <a:off x="8074152" y="3666744"/>
+            <a:ext cx="2825496" cy="201168"/>
+          </a:xfrm>
+          <a:prstGeom prst="rect">
+            <a:avLst/>
+          </a:prstGeom>
+          <a:noFill/>
+          <a:ln/>
+        </p:spPr>
+        <p:txBody>
+          <a:bodyPr wrap="square" lIns="0" tIns="0" rIns="0" bIns="0" rtlCol="0" anchor="ctr"/>
+          <a:lstStyle/>
+          <a:p>
+            <a:pPr indent="0" marL="0">
+              <a:buNone/>
+            </a:pPr>
+            <a:r>
+              <a:rPr lang="en-US" sz="950" b="1" dirty="0">
+                <a:solidFill>
+                  <a:srgbClr val="0068B7"/>
+                </a:solidFill>
+                <a:latin typeface="Aptos" pitchFamily="34" charset="0"/>
+                <a:ea typeface="Aptos" pitchFamily="34" charset="-122"/>
+                <a:cs typeface="Aptos" pitchFamily="34" charset="-120"/>
+              </a:rPr>
+              <a:t>Use this for</a:t>
+            </a:r>
+            <a:endParaRPr lang="en-US" sz="950" dirty="0"/>
+          </a:p>
+        </p:txBody>
+      </p:sp>
+      <p:sp>
+        <p:nvSpPr>
+          <p:cNvPr id="16" name="Text 14"/>
+          <p:cNvSpPr/>
+          <p:nvPr/>
+        </p:nvSpPr>
+        <p:spPr>
+          <a:xfrm>
+            <a:off x="8074152" y="3959352"/>
+            <a:ext cx="2825496" cy="1170432"/>
+          </a:xfrm>
+          <a:prstGeom prst="rect">
+            <a:avLst/>
+          </a:prstGeom>
+          <a:noFill/>
+          <a:ln/>
+        </p:spPr>
+        <p:txBody>
+          <a:bodyPr wrap="square" lIns="0" tIns="0" rIns="0" bIns="0" rtlCol="0" anchor="t">
+            <a:normAutofit/>
+          </a:bodyPr>
+          <a:lstStyle/>
+          <a:p>
+            <a:pPr indent="0" marL="0">
+              <a:buNone/>
+            </a:pPr>
+            <a:r>
+              <a:rPr lang="en-US" sz="1250" dirty="0">
+                <a:solidFill>
+                  <a:srgbClr val="17364A"/>
+                </a:solidFill>
+                <a:latin typeface="Aptos" pitchFamily="34" charset="0"/>
+                <a:ea typeface="Aptos" pitchFamily="34" charset="-122"/>
+                <a:cs typeface="Aptos" pitchFamily="34" charset="-120"/>
+              </a:rPr>
+              <a:t>Connect the concept to public health decisions, safeguards, documentation, or implementation work.</a:t>
+            </a:r>
+            <a:endParaRPr lang="en-US" sz="1250" dirty="0"/>
+          </a:p>
+        </p:txBody>
+      </p:sp>
+    </p:spTree>
+  </p:cSld>
+  <p:clrMapOvr>
+    <a:masterClrMapping/>
+  </p:clrMapOvr>
+</p:sld>
+</file>
+
+<file path=ppt/slides/slide21.xml><?xml version="1.0" encoding="utf-8"?>
+<p:sld xmlns:a="http://schemas.openxmlformats.org/drawingml/2006/main" xmlns:r="http://schemas.openxmlformats.org/officeDocument/2006/relationships" xmlns:p="http://schemas.openxmlformats.org/presentationml/2006/main">
+  <p:cSld name="Slide 21">
+    <p:bg>
+      <p:bgPr>
+        <a:solidFill>
+          <a:srgbClr val="F7FBFD"/>
+        </a:solidFill>
+      </p:bgPr>
+    </p:bg>
+    <p:spTree>
+      <p:nvGrpSpPr>
+        <p:cNvPr id="1" name=""/>
+        <p:cNvGrpSpPr/>
+        <p:nvPr/>
+      </p:nvGrpSpPr>
+      <p:grpSpPr>
+        <a:xfrm>
+          <a:off x="0" y="0"/>
+          <a:ext cx="0" cy="0"/>
+          <a:chOff x="0" y="0"/>
+          <a:chExt cx="0" cy="0"/>
+        </a:xfrm>
+      </p:grpSpPr>
+      <p:sp>
+        <p:nvSpPr>
+          <p:cNvPr id="2" name="Shape 0"/>
+          <p:cNvSpPr/>
+          <p:nvPr/>
+        </p:nvSpPr>
+        <p:spPr>
+          <a:xfrm>
+            <a:off x="0" y="0"/>
+            <a:ext cx="12191695" cy="164592"/>
+          </a:xfrm>
+          <a:prstGeom prst="rect">
+            <a:avLst/>
+          </a:prstGeom>
+          <a:solidFill>
+            <a:srgbClr val="0068B7"/>
+          </a:solidFill>
+          <a:ln w="12700">
+            <a:solidFill>
+              <a:srgbClr val="0068B7"/>
+            </a:solidFill>
+            <a:prstDash val="solid"/>
+          </a:ln>
+        </p:spPr>
+      </p:sp>
+      <p:sp>
+        <p:nvSpPr>
+          <p:cNvPr id="3" name="Shape 1"/>
+          <p:cNvSpPr/>
+          <p:nvPr/>
+        </p:nvSpPr>
+        <p:spPr>
+          <a:xfrm>
+            <a:off x="0" y="164592"/>
+            <a:ext cx="146304" cy="6693408"/>
+          </a:xfrm>
+          <a:prstGeom prst="rect">
+            <a:avLst/>
+          </a:prstGeom>
+          <a:solidFill>
+            <a:srgbClr val="2F8A28"/>
+          </a:solidFill>
+          <a:ln w="12700">
+            <a:solidFill>
+              <a:srgbClr val="2F8A28"/>
+            </a:solidFill>
+            <a:prstDash val="solid"/>
+          </a:ln>
+        </p:spPr>
+      </p:sp>
+      <p:sp>
+        <p:nvSpPr>
+          <p:cNvPr id="4" name="Text 2"/>
+          <p:cNvSpPr/>
+          <p:nvPr/>
+        </p:nvSpPr>
+        <p:spPr>
+          <a:xfrm>
+            <a:off x="502920" y="292608"/>
+            <a:ext cx="10149840" cy="256032"/>
+          </a:xfrm>
+          <a:prstGeom prst="rect">
+            <a:avLst/>
+          </a:prstGeom>
+          <a:noFill/>
+          <a:ln/>
+        </p:spPr>
+        <p:txBody>
+          <a:bodyPr wrap="square" lIns="0" tIns="0" rIns="0" bIns="0" rtlCol="0" anchor="ctr"/>
+          <a:lstStyle/>
+          <a:p>
+            <a:pPr indent="0" marL="0">
+              <a:buNone/>
+            </a:pPr>
+            <a:r>
+              <a:rPr lang="en-US" sz="900" b="1" dirty="0">
+                <a:solidFill>
+                  <a:srgbClr val="5F7181"/>
+                </a:solidFill>
+                <a:latin typeface="Aptos" pitchFamily="34" charset="0"/>
+                <a:ea typeface="Aptos" pitchFamily="34" charset="-122"/>
+                <a:cs typeface="Aptos" pitchFamily="34" charset="-120"/>
+              </a:rPr>
+              <a:t>AI Governance Charter and Operating Model</a:t>
+            </a:r>
+            <a:endParaRPr lang="en-US" sz="900" dirty="0"/>
+          </a:p>
+        </p:txBody>
+      </p:sp>
+      <p:sp>
+        <p:nvSpPr>
+          <p:cNvPr id="5" name="Text 3"/>
+          <p:cNvSpPr/>
+          <p:nvPr/>
+        </p:nvSpPr>
+        <p:spPr>
+          <a:xfrm>
+            <a:off x="502920" y="6537960"/>
+            <a:ext cx="7772400" cy="201168"/>
+          </a:xfrm>
+          <a:prstGeom prst="rect">
+            <a:avLst/>
+          </a:prstGeom>
+          <a:noFill/>
+          <a:ln/>
+        </p:spPr>
+        <p:txBody>
+          <a:bodyPr wrap="square" lIns="0" tIns="0" rIns="0" bIns="0" rtlCol="0" anchor="ctr"/>
+          <a:lstStyle/>
+          <a:p>
+            <a:pPr indent="0" marL="0">
+              <a:buNone/>
+            </a:pPr>
+            <a:r>
+              <a:rPr lang="en-US" sz="800" dirty="0">
+                <a:solidFill>
+                  <a:srgbClr val="5F7181"/>
+                </a:solidFill>
+                <a:latin typeface="Aptos" pitchFamily="34" charset="0"/>
+                <a:ea typeface="Aptos" pitchFamily="34" charset="-122"/>
+                <a:cs typeface="Aptos" pitchFamily="34" charset="-120"/>
+              </a:rPr>
+              <a:t>AI Playbook and Toolkit for Public Health Departments</a:t>
+            </a:r>
+            <a:endParaRPr lang="en-US" sz="800" dirty="0"/>
+          </a:p>
+        </p:txBody>
+      </p:sp>
+      <p:sp>
+        <p:nvSpPr>
+          <p:cNvPr id="6" name="Text 4"/>
+          <p:cNvSpPr/>
+          <p:nvPr/>
+        </p:nvSpPr>
+        <p:spPr>
+          <a:xfrm>
+            <a:off x="9966960" y="6537960"/>
+            <a:ext cx="1645920" cy="201168"/>
+          </a:xfrm>
+          <a:prstGeom prst="rect">
+            <a:avLst/>
+          </a:prstGeom>
+          <a:noFill/>
+          <a:ln/>
+        </p:spPr>
+        <p:txBody>
+          <a:bodyPr wrap="square" lIns="0" tIns="0" rIns="0" bIns="0" rtlCol="0" anchor="ctr"/>
+          <a:lstStyle/>
+          <a:p>
+            <a:pPr algn="r" indent="0" marL="0">
+              <a:buNone/>
+            </a:pPr>
+            <a:r>
+              <a:rPr lang="en-US" sz="800" dirty="0">
+                <a:solidFill>
+                  <a:srgbClr val="5F7181"/>
+                </a:solidFill>
+                <a:latin typeface="Aptos" pitchFamily="34" charset="0"/>
+                <a:ea typeface="Aptos" pitchFamily="34" charset="-122"/>
+                <a:cs typeface="Aptos" pitchFamily="34" charset="-120"/>
+              </a:rPr>
+              <a:t>© Paula Soper</a:t>
+            </a:r>
+            <a:endParaRPr lang="en-US" sz="800" dirty="0"/>
+          </a:p>
+        </p:txBody>
+      </p:sp>
+      <p:sp>
+        <p:nvSpPr>
+          <p:cNvPr id="7" name="Text 5"/>
+          <p:cNvSpPr/>
+          <p:nvPr/>
+        </p:nvSpPr>
+        <p:spPr>
+          <a:xfrm>
+            <a:off x="640080" y="658368"/>
+            <a:ext cx="10881360" cy="566928"/>
+          </a:xfrm>
+          <a:prstGeom prst="rect">
+            <a:avLst/>
+          </a:prstGeom>
+          <a:noFill/>
+          <a:ln/>
+        </p:spPr>
+        <p:txBody>
+          <a:bodyPr wrap="square" lIns="0" tIns="0" rIns="0" bIns="0" rtlCol="0" anchor="ctr">
+            <a:normAutofit/>
+          </a:bodyPr>
+          <a:lstStyle/>
+          <a:p>
+            <a:pPr indent="0" marL="0">
+              <a:buNone/>
+            </a:pPr>
+            <a:r>
+              <a:rPr lang="en-US" sz="2700" b="1" dirty="0">
+                <a:solidFill>
+                  <a:srgbClr val="003A63"/>
+                </a:solidFill>
+                <a:latin typeface="Aptos Display" pitchFamily="34" charset="0"/>
+                <a:ea typeface="Aptos Display" pitchFamily="34" charset="-122"/>
+                <a:cs typeface="Aptos Display" pitchFamily="34" charset="-120"/>
+              </a:rPr>
+              <a:t>References and Resources Continued</a:t>
+            </a:r>
+            <a:endParaRPr lang="en-US" sz="2700" dirty="0"/>
+          </a:p>
+        </p:txBody>
+      </p:sp>
+      <p:sp>
+        <p:nvSpPr>
+          <p:cNvPr id="8" name="Text 6"/>
+          <p:cNvSpPr/>
+          <p:nvPr/>
+        </p:nvSpPr>
+        <p:spPr>
+          <a:xfrm>
+            <a:off x="868680" y="1417320"/>
+            <a:ext cx="6675120" cy="4434840"/>
+          </a:xfrm>
+          <a:prstGeom prst="rect">
+            <a:avLst/>
+          </a:prstGeom>
+          <a:noFill/>
+          <a:ln/>
+        </p:spPr>
+        <p:txBody>
+          <a:bodyPr wrap="square" lIns="635" tIns="635" rIns="635" bIns="635" rtlCol="0" anchor="t">
+            <a:normAutofit/>
+          </a:bodyPr>
+          <a:lstStyle/>
+          <a:p>
+            <a:r>
+              <a:rPr lang="en-US" sz="1700" dirty="0">
+                <a:solidFill>
+                  <a:srgbClr val="17364A"/>
+                </a:solidFill>
+                <a:latin typeface="Aptos" pitchFamily="34" charset="0"/>
+                <a:ea typeface="Aptos" pitchFamily="34" charset="-122"/>
+                <a:cs typeface="Aptos" pitchFamily="34" charset="-120"/>
+              </a:rPr>
+              <a:t>OMB Memorandum M-24-10 on federal AI governance, risk management, and innovation, where relevant to public-sector governance.</a:t>
+            </a:r>
+            <a:endParaRPr lang="en-US" sz="1700" dirty="0"/>
+          </a:p>
+          <a:p>
+            <a:r>
+              <a:rPr lang="en-US" sz="1700" dirty="0">
+                <a:solidFill>
+                  <a:srgbClr val="17364A"/>
+                </a:solidFill>
+                <a:latin typeface="Aptos" pitchFamily="34" charset="0"/>
+                <a:ea typeface="Aptos" pitchFamily="34" charset="-122"/>
+                <a:cs typeface="Aptos" pitchFamily="34" charset="-120"/>
+              </a:rPr>
+              <a:t>Agency strategic plans, procurement policies, privacy policies, cybersecurity policies, records policies, and equity plans</a:t>
+            </a:r>
+            <a:endParaRPr lang="en-US" sz="1700" dirty="0"/>
+          </a:p>
+        </p:txBody>
+      </p:sp>
+      <p:sp>
+        <p:nvSpPr>
+          <p:cNvPr id="9" name="Shape 7"/>
+          <p:cNvSpPr/>
+          <p:nvPr/>
+        </p:nvSpPr>
+        <p:spPr>
+          <a:xfrm>
+            <a:off x="7909560" y="1417320"/>
+            <a:ext cx="3154680" cy="1828800"/>
+          </a:xfrm>
+          <a:prstGeom prst="roundRect">
+            <a:avLst>
+              <a:gd name="adj" fmla="val 6000"/>
+            </a:avLst>
+          </a:prstGeom>
+          <a:solidFill>
+            <a:srgbClr val="EEF8ED"/>
+          </a:solidFill>
+          <a:ln w="12700">
+            <a:solidFill>
+              <a:srgbClr val="B9D7E6"/>
+            </a:solidFill>
+            <a:prstDash val="solid"/>
+          </a:ln>
+        </p:spPr>
+      </p:sp>
+      <p:sp>
+        <p:nvSpPr>
+          <p:cNvPr id="10" name="Text 8"/>
+          <p:cNvSpPr/>
+          <p:nvPr/>
+        </p:nvSpPr>
+        <p:spPr>
+          <a:xfrm>
+            <a:off x="8074152" y="1563624"/>
+            <a:ext cx="2825496" cy="201168"/>
+          </a:xfrm>
+          <a:prstGeom prst="rect">
+            <a:avLst/>
+          </a:prstGeom>
+          <a:noFill/>
+          <a:ln/>
+        </p:spPr>
+        <p:txBody>
+          <a:bodyPr wrap="square" lIns="0" tIns="0" rIns="0" bIns="0" rtlCol="0" anchor="ctr"/>
+          <a:lstStyle/>
+          <a:p>
+            <a:pPr indent="0" marL="0">
+              <a:buNone/>
+            </a:pPr>
+            <a:r>
+              <a:rPr lang="en-US" sz="950" b="1" dirty="0">
+                <a:solidFill>
+                  <a:srgbClr val="0068B7"/>
+                </a:solidFill>
+                <a:latin typeface="Aptos" pitchFamily="34" charset="0"/>
+                <a:ea typeface="Aptos" pitchFamily="34" charset="-122"/>
+                <a:cs typeface="Aptos" pitchFamily="34" charset="-120"/>
+              </a:rPr>
+              <a:t>Key idea</a:t>
+            </a:r>
+            <a:endParaRPr lang="en-US" sz="950" dirty="0"/>
+          </a:p>
+        </p:txBody>
+      </p:sp>
+      <p:sp>
+        <p:nvSpPr>
+          <p:cNvPr id="11" name="Text 9"/>
+          <p:cNvSpPr/>
+          <p:nvPr/>
+        </p:nvSpPr>
+        <p:spPr>
+          <a:xfrm>
+            <a:off x="8074152" y="1856232"/>
+            <a:ext cx="2825496" cy="1261872"/>
+          </a:xfrm>
+          <a:prstGeom prst="rect">
+            <a:avLst/>
+          </a:prstGeom>
+          <a:noFill/>
+          <a:ln/>
+        </p:spPr>
+        <p:txBody>
+          <a:bodyPr wrap="square" lIns="0" tIns="0" rIns="0" bIns="0" rtlCol="0" anchor="t">
+            <a:normAutofit/>
+          </a:bodyPr>
+          <a:lstStyle/>
+          <a:p>
+            <a:pPr indent="0" marL="0">
+              <a:buNone/>
+            </a:pPr>
+            <a:r>
+              <a:rPr lang="en-US" sz="1250" dirty="0">
+                <a:solidFill>
+                  <a:srgbClr val="17364A"/>
+                </a:solidFill>
+                <a:latin typeface="Aptos" pitchFamily="34" charset="0"/>
+                <a:ea typeface="Aptos" pitchFamily="34" charset="-122"/>
+                <a:cs typeface="Aptos" pitchFamily="34" charset="-120"/>
+              </a:rPr>
+              <a:t>OMB Memorandum M-24-10 on federal AI governance, risk management, and innovation, where relevant to public-sector governance.</a:t>
+            </a:r>
+            <a:endParaRPr lang="en-US" sz="1250" dirty="0"/>
+          </a:p>
+        </p:txBody>
+      </p:sp>
+      <p:sp>
+        <p:nvSpPr>
+          <p:cNvPr id="12" name="Shape 10"/>
+          <p:cNvSpPr/>
+          <p:nvPr/>
+        </p:nvSpPr>
+        <p:spPr>
+          <a:xfrm>
+            <a:off x="7909560" y="3520440"/>
+            <a:ext cx="3154680" cy="1737360"/>
+          </a:xfrm>
+          <a:prstGeom prst="roundRect">
+            <a:avLst>
+              <a:gd name="adj" fmla="val 6316"/>
+            </a:avLst>
+          </a:prstGeom>
+          <a:solidFill>
+            <a:srgbClr val="EAF6F8"/>
+          </a:solidFill>
+          <a:ln w="12700">
+            <a:solidFill>
+              <a:srgbClr val="B9D7E6"/>
+            </a:solidFill>
+            <a:prstDash val="solid"/>
+          </a:ln>
+        </p:spPr>
+      </p:sp>
+      <p:sp>
+        <p:nvSpPr>
+          <p:cNvPr id="13" name="Text 11"/>
+          <p:cNvSpPr/>
+          <p:nvPr/>
+        </p:nvSpPr>
+        <p:spPr>
+          <a:xfrm>
+            <a:off x="8074152" y="3666744"/>
+            <a:ext cx="2825496" cy="201168"/>
+          </a:xfrm>
+          <a:prstGeom prst="rect">
+            <a:avLst/>
+          </a:prstGeom>
+          <a:noFill/>
+          <a:ln/>
+        </p:spPr>
+        <p:txBody>
+          <a:bodyPr wrap="square" lIns="0" tIns="0" rIns="0" bIns="0" rtlCol="0" anchor="ctr"/>
+          <a:lstStyle/>
+          <a:p>
+            <a:pPr indent="0" marL="0">
+              <a:buNone/>
+            </a:pPr>
+            <a:r>
+              <a:rPr lang="en-US" sz="950" b="1" dirty="0">
+                <a:solidFill>
+                  <a:srgbClr val="0068B7"/>
+                </a:solidFill>
+                <a:latin typeface="Aptos" pitchFamily="34" charset="0"/>
+                <a:ea typeface="Aptos" pitchFamily="34" charset="-122"/>
+                <a:cs typeface="Aptos" pitchFamily="34" charset="-120"/>
+              </a:rPr>
+              <a:t>Use this for</a:t>
+            </a:r>
+            <a:endParaRPr lang="en-US" sz="950" dirty="0"/>
+          </a:p>
+        </p:txBody>
+      </p:sp>
+      <p:sp>
+        <p:nvSpPr>
+          <p:cNvPr id="14" name="Text 12"/>
+          <p:cNvSpPr/>
+          <p:nvPr/>
+        </p:nvSpPr>
+        <p:spPr>
+          <a:xfrm>
+            <a:off x="8074152" y="3959352"/>
+            <a:ext cx="2825496" cy="1170432"/>
+          </a:xfrm>
+          <a:prstGeom prst="rect">
+            <a:avLst/>
+          </a:prstGeom>
+          <a:noFill/>
+          <a:ln/>
+        </p:spPr>
+        <p:txBody>
+          <a:bodyPr wrap="square" lIns="0" tIns="0" rIns="0" bIns="0" rtlCol="0" anchor="t">
+            <a:normAutofit/>
+          </a:bodyPr>
+          <a:lstStyle/>
+          <a:p>
+            <a:pPr indent="0" marL="0">
+              <a:buNone/>
+            </a:pPr>
+            <a:r>
+              <a:rPr lang="en-US" sz="1250" dirty="0">
+                <a:solidFill>
+                  <a:srgbClr val="17364A"/>
+                </a:solidFill>
+                <a:latin typeface="Aptos" pitchFamily="34" charset="0"/>
+                <a:ea typeface="Aptos" pitchFamily="34" charset="-122"/>
+                <a:cs typeface="Aptos" pitchFamily="34" charset="-120"/>
+              </a:rPr>
+              <a:t>Connect the concept to public health decisions, safeguards, documentation, or implementation work.</a:t>
+            </a:r>
+            <a:endParaRPr lang="en-US" sz="1250" dirty="0"/>
           </a:p>
         </p:txBody>
       </p:sp>
@@ -5767,7 +10379,32 @@
       </p:sp>
       <p:sp>
         <p:nvSpPr>
-          <p:cNvPr id="3" name="Text 1"/>
+          <p:cNvPr id="3" name="Shape 1"/>
+          <p:cNvSpPr/>
+          <p:nvPr/>
+        </p:nvSpPr>
+        <p:spPr>
+          <a:xfrm>
+            <a:off x="0" y="164592"/>
+            <a:ext cx="146304" cy="6693408"/>
+          </a:xfrm>
+          <a:prstGeom prst="rect">
+            <a:avLst/>
+          </a:prstGeom>
+          <a:solidFill>
+            <a:srgbClr val="2F8A28"/>
+          </a:solidFill>
+          <a:ln w="12700">
+            <a:solidFill>
+              <a:srgbClr val="2F8A28"/>
+            </a:solidFill>
+            <a:prstDash val="solid"/>
+          </a:ln>
+        </p:spPr>
+      </p:sp>
+      <p:sp>
+        <p:nvSpPr>
+          <p:cNvPr id="4" name="Text 2"/>
           <p:cNvSpPr/>
           <p:nvPr/>
         </p:nvSpPr>
@@ -5806,7 +10443,7 @@
       </p:sp>
       <p:sp>
         <p:nvSpPr>
-          <p:cNvPr id="4" name="Text 2"/>
+          <p:cNvPr id="5" name="Text 3"/>
           <p:cNvSpPr/>
           <p:nvPr/>
         </p:nvSpPr>
@@ -5845,7 +10482,7 @@
       </p:sp>
       <p:sp>
         <p:nvSpPr>
-          <p:cNvPr id="5" name="Text 3"/>
+          <p:cNvPr id="6" name="Text 4"/>
           <p:cNvSpPr/>
           <p:nvPr/>
         </p:nvSpPr>
@@ -5884,7 +10521,7 @@
       </p:sp>
       <p:sp>
         <p:nvSpPr>
-          <p:cNvPr id="6" name="Text 4"/>
+          <p:cNvPr id="7" name="Text 5"/>
           <p:cNvSpPr/>
           <p:nvPr/>
         </p:nvSpPr>
@@ -5917,7 +10554,7 @@
                 <a:ea typeface="Aptos Display" pitchFamily="34" charset="-122"/>
                 <a:cs typeface="Aptos Display" pitchFamily="34" charset="-120"/>
               </a:rPr>
-              <a:t>Learning Objectives</a:t>
+              <a:t>How this module connects to the playbook</a:t>
             </a:r>
             <a:endParaRPr lang="en-US" sz="2700" dirty="0"/>
           </a:p>
@@ -5925,14 +10562,14 @@
       </p:sp>
       <p:sp>
         <p:nvSpPr>
-          <p:cNvPr id="7" name="Text 5"/>
-          <p:cNvSpPr/>
-          <p:nvPr/>
-        </p:nvSpPr>
-        <p:spPr>
-          <a:xfrm>
-            <a:off x="822960" y="1325880"/>
-            <a:ext cx="10378440" cy="4800600"/>
+          <p:cNvPr id="8" name="Text 6"/>
+          <p:cNvSpPr/>
+          <p:nvPr/>
+        </p:nvSpPr>
+        <p:spPr>
+          <a:xfrm>
+            <a:off x="868680" y="1417320"/>
+            <a:ext cx="6903720" cy="4480560"/>
           </a:xfrm>
           <a:prstGeom prst="rect">
             <a:avLst/>
@@ -5947,7 +10584,7 @@
           <a:lstStyle/>
           <a:p>
             <a:r>
-              <a:rPr lang="en-US" sz="1450" dirty="0">
+              <a:rPr lang="en-US" sz="1540" dirty="0">
                 <a:solidFill>
                   <a:srgbClr val="17364A"/>
                 </a:solidFill>
@@ -5955,13 +10592,13 @@
                 <a:ea typeface="Aptos" pitchFamily="34" charset="-122"/>
                 <a:cs typeface="Aptos" pitchFamily="34" charset="-120"/>
               </a:rPr>
-              <a:t>Define the purpose and minimum contents of an AI governance charter.</a:t>
-            </a:r>
-            <a:endParaRPr lang="en-US" sz="1450" dirty="0"/>
-          </a:p>
-          <a:p>
-            <a:r>
-              <a:rPr lang="en-US" sz="1450" dirty="0">
+              <a:t>Play 11: Build and Deploy AI Solutions - This lesson informs Play 11 by helping learners connect the lesson topic to build and deploy.</a:t>
+            </a:r>
+            <a:endParaRPr lang="en-US" sz="1540" dirty="0"/>
+          </a:p>
+          <a:p>
+            <a:r>
+              <a:rPr lang="en-US" sz="1540" dirty="0">
                 <a:solidFill>
                   <a:srgbClr val="17364A"/>
                 </a:solidFill>
@@ -5969,13 +10606,13 @@
                 <a:ea typeface="Aptos" pitchFamily="34" charset="-122"/>
                 <a:cs typeface="Aptos" pitchFamily="34" charset="-120"/>
               </a:rPr>
-              <a:t>Distinguish between a governance committee, technical review group, executive sponsor, and implementation team.</a:t>
-            </a:r>
-            <a:endParaRPr lang="en-US" sz="1450" dirty="0"/>
-          </a:p>
-          <a:p>
-            <a:r>
-              <a:rPr lang="en-US" sz="1450" dirty="0">
+              <a:t>Play 2: Readiness Assessment - This lesson informs Play 2 by helping learners connect the lesson topic to readiness assessment work.</a:t>
+            </a:r>
+            <a:endParaRPr lang="en-US" sz="1540" dirty="0"/>
+          </a:p>
+          <a:p>
+            <a:r>
+              <a:rPr lang="en-US" sz="1540" dirty="0">
                 <a:solidFill>
                   <a:srgbClr val="17364A"/>
                 </a:solidFill>
@@ -5983,13 +10620,13 @@
                 <a:ea typeface="Aptos" pitchFamily="34" charset="-122"/>
                 <a:cs typeface="Aptos" pitchFamily="34" charset="-120"/>
               </a:rPr>
-              <a:t>Identify which agency functions should participate in AI governance and when their review is required.</a:t>
-            </a:r>
-            <a:endParaRPr lang="en-US" sz="1450" dirty="0"/>
-          </a:p>
-          <a:p>
-            <a:r>
-              <a:rPr lang="en-US" sz="1450" dirty="0">
+              <a:t>Play 3: Establish AI Governance - This lesson informs Play 3 by helping learners connect the lesson topic to establish ai governance.</a:t>
+            </a:r>
+            <a:endParaRPr lang="en-US" sz="1540" dirty="0"/>
+          </a:p>
+          <a:p>
+            <a:r>
+              <a:rPr lang="en-US" sz="1540" dirty="0">
                 <a:solidFill>
                   <a:srgbClr val="17364A"/>
                 </a:solidFill>
@@ -5997,13 +10634,106 @@
                 <a:ea typeface="Aptos" pitchFamily="34" charset="-122"/>
                 <a:cs typeface="Aptos" pitchFamily="34" charset="-120"/>
               </a:rPr>
-              <a:t>Develop operating procedures for intake, review, approval, monitoring, exceptions, escalation, and retirement of AI use cases.</a:t>
-            </a:r>
-            <a:endParaRPr lang="en-US" sz="1450" dirty="0"/>
-          </a:p>
-          <a:p>
-            <a:r>
-              <a:rPr lang="en-US" sz="1450" dirty="0">
+              <a:t>Play 7: Prioritize Use Cases - This lesson informs Play 7 by helping learners connect the lesson topic to prioritize use cases work.</a:t>
+            </a:r>
+            <a:endParaRPr lang="en-US" sz="1540" dirty="0"/>
+          </a:p>
+        </p:txBody>
+      </p:sp>
+      <p:sp>
+        <p:nvSpPr>
+          <p:cNvPr id="9" name="Shape 7"/>
+          <p:cNvSpPr/>
+          <p:nvPr/>
+        </p:nvSpPr>
+        <p:spPr>
+          <a:xfrm>
+            <a:off x="8046720" y="1417320"/>
+            <a:ext cx="3063240" cy="2103120"/>
+          </a:xfrm>
+          <a:prstGeom prst="roundRect">
+            <a:avLst>
+              <a:gd name="adj" fmla="val 5217"/>
+            </a:avLst>
+          </a:prstGeom>
+          <a:solidFill>
+            <a:srgbClr val="EEF8ED"/>
+          </a:solidFill>
+          <a:ln w="12700">
+            <a:solidFill>
+              <a:srgbClr val="B9D7E6"/>
+            </a:solidFill>
+            <a:prstDash val="solid"/>
+          </a:ln>
+        </p:spPr>
+      </p:sp>
+      <p:sp>
+        <p:nvSpPr>
+          <p:cNvPr id="10" name="Text 8"/>
+          <p:cNvSpPr/>
+          <p:nvPr/>
+        </p:nvSpPr>
+        <p:spPr>
+          <a:xfrm>
+            <a:off x="8211312" y="1563624"/>
+            <a:ext cx="2734056" cy="201168"/>
+          </a:xfrm>
+          <a:prstGeom prst="rect">
+            <a:avLst/>
+          </a:prstGeom>
+          <a:noFill/>
+          <a:ln/>
+        </p:spPr>
+        <p:txBody>
+          <a:bodyPr wrap="square" lIns="0" tIns="0" rIns="0" bIns="0" rtlCol="0" anchor="ctr"/>
+          <a:lstStyle/>
+          <a:p>
+            <a:pPr indent="0" marL="0">
+              <a:buNone/>
+            </a:pPr>
+            <a:r>
+              <a:rPr lang="en-US" sz="950" b="1" dirty="0">
+                <a:solidFill>
+                  <a:srgbClr val="0068B7"/>
+                </a:solidFill>
+                <a:latin typeface="Aptos" pitchFamily="34" charset="0"/>
+                <a:ea typeface="Aptos" pitchFamily="34" charset="-122"/>
+                <a:cs typeface="Aptos" pitchFamily="34" charset="-120"/>
+              </a:rPr>
+              <a:t>Apply the lesson</a:t>
+            </a:r>
+            <a:endParaRPr lang="en-US" sz="950" dirty="0"/>
+          </a:p>
+        </p:txBody>
+      </p:sp>
+      <p:sp>
+        <p:nvSpPr>
+          <p:cNvPr id="11" name="Text 9"/>
+          <p:cNvSpPr/>
+          <p:nvPr/>
+        </p:nvSpPr>
+        <p:spPr>
+          <a:xfrm>
+            <a:off x="8211312" y="1856232"/>
+            <a:ext cx="2734056" cy="1536192"/>
+          </a:xfrm>
+          <a:prstGeom prst="rect">
+            <a:avLst/>
+          </a:prstGeom>
+          <a:noFill/>
+          <a:ln/>
+        </p:spPr>
+        <p:txBody>
+          <a:bodyPr wrap="square" lIns="0" tIns="0" rIns="0" bIns="0" rtlCol="0" anchor="t">
+            <a:normAutofit/>
+          </a:bodyPr>
+          <a:lstStyle/>
+          <a:p>
+            <a:pPr indent="0" marL="0">
+              <a:buNone/>
+            </a:pPr>
+            <a:r>
+              <a:rPr lang="en-US" sz="1250" dirty="0">
                 <a:solidFill>
                   <a:srgbClr val="17364A"/>
                 </a:solidFill>
@@ -6011,9 +10741,116 @@
                 <a:ea typeface="Aptos" pitchFamily="34" charset="-122"/>
                 <a:cs typeface="Aptos" pitchFamily="34" charset="-120"/>
               </a:rPr>
-              <a:t>Produce a draft AI governance charter or operating model that can be adapted by a public health agency.</a:t>
-            </a:r>
-            <a:endParaRPr lang="en-US" sz="1450" dirty="0"/>
+              <a:t>Use the related plays to identify decisions, participants, timing, approvals, and documentation needed for responsible implementation.</a:t>
+            </a:r>
+            <a:endParaRPr lang="en-US" sz="1250" dirty="0"/>
+          </a:p>
+        </p:txBody>
+      </p:sp>
+      <p:sp>
+        <p:nvSpPr>
+          <p:cNvPr id="12" name="Shape 10"/>
+          <p:cNvSpPr/>
+          <p:nvPr/>
+        </p:nvSpPr>
+        <p:spPr>
+          <a:xfrm>
+            <a:off x="8046720" y="3794760"/>
+            <a:ext cx="3063240" cy="1508760"/>
+          </a:xfrm>
+          <a:prstGeom prst="roundRect">
+            <a:avLst>
+              <a:gd name="adj" fmla="val 7273"/>
+            </a:avLst>
+          </a:prstGeom>
+          <a:solidFill>
+            <a:srgbClr val="FFF4D9"/>
+          </a:solidFill>
+          <a:ln w="12700">
+            <a:solidFill>
+              <a:srgbClr val="B9D7E6"/>
+            </a:solidFill>
+            <a:prstDash val="solid"/>
+          </a:ln>
+        </p:spPr>
+      </p:sp>
+      <p:sp>
+        <p:nvSpPr>
+          <p:cNvPr id="13" name="Text 11"/>
+          <p:cNvSpPr/>
+          <p:nvPr/>
+        </p:nvSpPr>
+        <p:spPr>
+          <a:xfrm>
+            <a:off x="8211312" y="3941064"/>
+            <a:ext cx="2734056" cy="201168"/>
+          </a:xfrm>
+          <a:prstGeom prst="rect">
+            <a:avLst/>
+          </a:prstGeom>
+          <a:noFill/>
+          <a:ln/>
+        </p:spPr>
+        <p:txBody>
+          <a:bodyPr wrap="square" lIns="0" tIns="0" rIns="0" bIns="0" rtlCol="0" anchor="ctr"/>
+          <a:lstStyle/>
+          <a:p>
+            <a:pPr indent="0" marL="0">
+              <a:buNone/>
+            </a:pPr>
+            <a:r>
+              <a:rPr lang="en-US" sz="950" b="1" dirty="0">
+                <a:solidFill>
+                  <a:srgbClr val="0068B7"/>
+                </a:solidFill>
+                <a:latin typeface="Aptos" pitchFamily="34" charset="0"/>
+                <a:ea typeface="Aptos" pitchFamily="34" charset="-122"/>
+                <a:cs typeface="Aptos" pitchFamily="34" charset="-120"/>
+              </a:rPr>
+              <a:t>Keep in mind</a:t>
+            </a:r>
+            <a:endParaRPr lang="en-US" sz="950" dirty="0"/>
+          </a:p>
+        </p:txBody>
+      </p:sp>
+      <p:sp>
+        <p:nvSpPr>
+          <p:cNvPr id="14" name="Text 12"/>
+          <p:cNvSpPr/>
+          <p:nvPr/>
+        </p:nvSpPr>
+        <p:spPr>
+          <a:xfrm>
+            <a:off x="8211312" y="4233672"/>
+            <a:ext cx="2734056" cy="941832"/>
+          </a:xfrm>
+          <a:prstGeom prst="rect">
+            <a:avLst/>
+          </a:prstGeom>
+          <a:noFill/>
+          <a:ln/>
+        </p:spPr>
+        <p:txBody>
+          <a:bodyPr wrap="square" lIns="0" tIns="0" rIns="0" bIns="0" rtlCol="0" anchor="t">
+            <a:normAutofit/>
+          </a:bodyPr>
+          <a:lstStyle/>
+          <a:p>
+            <a:pPr indent="0" marL="0">
+              <a:buNone/>
+            </a:pPr>
+            <a:r>
+              <a:rPr lang="en-US" sz="1250" dirty="0">
+                <a:solidFill>
+                  <a:srgbClr val="17364A"/>
+                </a:solidFill>
+                <a:latin typeface="Aptos" pitchFamily="34" charset="0"/>
+                <a:ea typeface="Aptos" pitchFamily="34" charset="-122"/>
+                <a:cs typeface="Aptos" pitchFamily="34" charset="-120"/>
+              </a:rPr>
+              <a:t>The playbook connection helps turn training into agency work, not just individual knowledge.</a:t>
+            </a:r>
+            <a:endParaRPr lang="en-US" sz="1250" dirty="0"/>
           </a:p>
         </p:txBody>
       </p:sp>
@@ -6076,7 +10913,32 @@
       </p:sp>
       <p:sp>
         <p:nvSpPr>
-          <p:cNvPr id="3" name="Text 1"/>
+          <p:cNvPr id="3" name="Shape 1"/>
+          <p:cNvSpPr/>
+          <p:nvPr/>
+        </p:nvSpPr>
+        <p:spPr>
+          <a:xfrm>
+            <a:off x="0" y="164592"/>
+            <a:ext cx="146304" cy="6693408"/>
+          </a:xfrm>
+          <a:prstGeom prst="rect">
+            <a:avLst/>
+          </a:prstGeom>
+          <a:solidFill>
+            <a:srgbClr val="2F8A28"/>
+          </a:solidFill>
+          <a:ln w="12700">
+            <a:solidFill>
+              <a:srgbClr val="2F8A28"/>
+            </a:solidFill>
+            <a:prstDash val="solid"/>
+          </a:ln>
+        </p:spPr>
+      </p:sp>
+      <p:sp>
+        <p:nvSpPr>
+          <p:cNvPr id="4" name="Text 2"/>
           <p:cNvSpPr/>
           <p:nvPr/>
         </p:nvSpPr>
@@ -6115,7 +10977,7 @@
       </p:sp>
       <p:sp>
         <p:nvSpPr>
-          <p:cNvPr id="4" name="Text 2"/>
+          <p:cNvPr id="5" name="Text 3"/>
           <p:cNvSpPr/>
           <p:nvPr/>
         </p:nvSpPr>
@@ -6154,7 +11016,7 @@
       </p:sp>
       <p:sp>
         <p:nvSpPr>
-          <p:cNvPr id="5" name="Text 3"/>
+          <p:cNvPr id="6" name="Text 4"/>
           <p:cNvSpPr/>
           <p:nvPr/>
         </p:nvSpPr>
@@ -6193,7 +11055,7 @@
       </p:sp>
       <p:sp>
         <p:nvSpPr>
-          <p:cNvPr id="6" name="Text 4"/>
+          <p:cNvPr id="7" name="Text 5"/>
           <p:cNvSpPr/>
           <p:nvPr/>
         </p:nvSpPr>
@@ -6226,7 +11088,7 @@
                 <a:ea typeface="Aptos Display" pitchFamily="34" charset="-122"/>
                 <a:cs typeface="Aptos Display" pitchFamily="34" charset="-120"/>
               </a:rPr>
-              <a:t>Module Overview</a:t>
+              <a:t>Related toolkit resources</a:t>
             </a:r>
             <a:endParaRPr lang="en-US" sz="2700" dirty="0"/>
           </a:p>
@@ -6234,32 +11096,192 @@
       </p:sp>
       <p:sp>
         <p:nvSpPr>
-          <p:cNvPr id="7" name="Text 5"/>
-          <p:cNvSpPr/>
-          <p:nvPr/>
-        </p:nvSpPr>
-        <p:spPr>
-          <a:xfrm>
-            <a:off x="822960" y="1325880"/>
-            <a:ext cx="10378440" cy="4800600"/>
-          </a:xfrm>
-          <a:prstGeom prst="rect">
-            <a:avLst/>
-          </a:prstGeom>
-          <a:noFill/>
-          <a:ln/>
-        </p:spPr>
-        <p:txBody>
-          <a:bodyPr wrap="square" lIns="1016" tIns="1016" rIns="1016" bIns="1016" rtlCol="0" anchor="t">
+          <p:cNvPr id="8" name="Text 6"/>
+          <p:cNvSpPr/>
+          <p:nvPr/>
+        </p:nvSpPr>
+        <p:spPr>
+          <a:xfrm>
+            <a:off x="868680" y="1417320"/>
+            <a:ext cx="6903720" cy="4480560"/>
+          </a:xfrm>
+          <a:prstGeom prst="rect">
+            <a:avLst/>
+          </a:prstGeom>
+          <a:noFill/>
+          <a:ln/>
+        </p:spPr>
+        <p:txBody>
+          <a:bodyPr wrap="square" lIns="635" tIns="635" rIns="635" bIns="635" rtlCol="0" anchor="t">
             <a:normAutofit/>
           </a:bodyPr>
           <a:lstStyle/>
           <a:p>
+            <a:r>
+              <a:rPr lang="en-US" sz="1460" dirty="0">
+                <a:solidFill>
+                  <a:srgbClr val="17364A"/>
+                </a:solidFill>
+                <a:latin typeface="Aptos" pitchFamily="34" charset="0"/>
+                <a:ea typeface="Aptos" pitchFamily="34" charset="-122"/>
+                <a:cs typeface="Aptos" pitchFamily="34" charset="-120"/>
+              </a:rPr>
+              <a:t>Tool 4: AI Policy Landscape Scan (Worksheet) - Use AI Policy Landscape Scan to translate this lesson into a documented public health.</a:t>
+            </a:r>
+            <a:endParaRPr lang="en-US" sz="1460" dirty="0"/>
+          </a:p>
+          <a:p>
+            <a:r>
+              <a:rPr lang="en-US" sz="1460" dirty="0">
+                <a:solidFill>
+                  <a:srgbClr val="17364A"/>
+                </a:solidFill>
+                <a:latin typeface="Aptos" pitchFamily="34" charset="0"/>
+                <a:ea typeface="Aptos" pitchFamily="34" charset="-122"/>
+                <a:cs typeface="Aptos" pitchFamily="34" charset="-120"/>
+              </a:rPr>
+              <a:t>Tool 5: AI Environmental and Resource Impact Review (Checklist) - Use AI Environmental and Resource Impact Review to translate this.</a:t>
+            </a:r>
+            <a:endParaRPr lang="en-US" sz="1460" dirty="0"/>
+          </a:p>
+          <a:p>
+            <a:r>
+              <a:rPr lang="en-US" sz="1460" dirty="0">
+                <a:solidFill>
+                  <a:srgbClr val="17364A"/>
+                </a:solidFill>
+                <a:latin typeface="Aptos" pitchFamily="34" charset="0"/>
+                <a:ea typeface="Aptos" pitchFamily="34" charset="-122"/>
+                <a:cs typeface="Aptos" pitchFamily="34" charset="-120"/>
+              </a:rPr>
+              <a:t>Tool 6: Human-Centered AI Decision Rule Checklist (Checklist) - Use Human-Centered AI Decision Rule Checklist to translate this.</a:t>
+            </a:r>
+            <a:endParaRPr lang="en-US" sz="1460" dirty="0"/>
+          </a:p>
+          <a:p>
+            <a:r>
+              <a:rPr lang="en-US" sz="1460" dirty="0">
+                <a:solidFill>
+                  <a:srgbClr val="17364A"/>
+                </a:solidFill>
+                <a:latin typeface="Aptos" pitchFamily="34" charset="0"/>
+                <a:ea typeface="Aptos" pitchFamily="34" charset="-122"/>
+                <a:cs typeface="Aptos" pitchFamily="34" charset="-120"/>
+              </a:rPr>
+              <a:t>Tool 8: AI Project Charter (Planning) - Use AI Project Charter to translate this lesson into a documented public health AI planning,.</a:t>
+            </a:r>
+            <a:endParaRPr lang="en-US" sz="1460" dirty="0"/>
+          </a:p>
+          <a:p>
+            <a:r>
+              <a:rPr lang="en-US" sz="1460" dirty="0">
+                <a:solidFill>
+                  <a:srgbClr val="17364A"/>
+                </a:solidFill>
+                <a:latin typeface="Aptos" pitchFamily="34" charset="0"/>
+                <a:ea typeface="Aptos" pitchFamily="34" charset="-122"/>
+                <a:cs typeface="Aptos" pitchFamily="34" charset="-120"/>
+              </a:rPr>
+              <a:t>Tool 9: Data Quality Assessment Checklist (Checklist) - Use this tool to complete or strengthen the practical exercise for the module.</a:t>
+            </a:r>
+            <a:endParaRPr lang="en-US" sz="1460" dirty="0"/>
+          </a:p>
+        </p:txBody>
+      </p:sp>
+      <p:sp>
+        <p:nvSpPr>
+          <p:cNvPr id="9" name="Shape 7"/>
+          <p:cNvSpPr/>
+          <p:nvPr/>
+        </p:nvSpPr>
+        <p:spPr>
+          <a:xfrm>
+            <a:off x="8046720" y="1417320"/>
+            <a:ext cx="3063240" cy="2103120"/>
+          </a:xfrm>
+          <a:prstGeom prst="roundRect">
+            <a:avLst>
+              <a:gd name="adj" fmla="val 5217"/>
+            </a:avLst>
+          </a:prstGeom>
+          <a:solidFill>
+            <a:srgbClr val="EAF6F8"/>
+          </a:solidFill>
+          <a:ln w="12700">
+            <a:solidFill>
+              <a:srgbClr val="B9D7E6"/>
+            </a:solidFill>
+            <a:prstDash val="solid"/>
+          </a:ln>
+        </p:spPr>
+      </p:sp>
+      <p:sp>
+        <p:nvSpPr>
+          <p:cNvPr id="10" name="Text 8"/>
+          <p:cNvSpPr/>
+          <p:nvPr/>
+        </p:nvSpPr>
+        <p:spPr>
+          <a:xfrm>
+            <a:off x="8211312" y="1563624"/>
+            <a:ext cx="2734056" cy="201168"/>
+          </a:xfrm>
+          <a:prstGeom prst="rect">
+            <a:avLst/>
+          </a:prstGeom>
+          <a:noFill/>
+          <a:ln/>
+        </p:spPr>
+        <p:txBody>
+          <a:bodyPr wrap="square" lIns="0" tIns="0" rIns="0" bIns="0" rtlCol="0" anchor="ctr"/>
+          <a:lstStyle/>
+          <a:p>
             <a:pPr indent="0" marL="0">
               <a:buNone/>
             </a:pPr>
             <a:r>
-              <a:rPr lang="en-US" sz="1420" dirty="0">
+              <a:rPr lang="en-US" sz="950" b="1" dirty="0">
+                <a:solidFill>
+                  <a:srgbClr val="0068B7"/>
+                </a:solidFill>
+                <a:latin typeface="Aptos" pitchFamily="34" charset="0"/>
+                <a:ea typeface="Aptos" pitchFamily="34" charset="-122"/>
+                <a:cs typeface="Aptos" pitchFamily="34" charset="-120"/>
+              </a:rPr>
+              <a:t>Use the tools</a:t>
+            </a:r>
+            <a:endParaRPr lang="en-US" sz="950" dirty="0"/>
+          </a:p>
+        </p:txBody>
+      </p:sp>
+      <p:sp>
+        <p:nvSpPr>
+          <p:cNvPr id="11" name="Text 9"/>
+          <p:cNvSpPr/>
+          <p:nvPr/>
+        </p:nvSpPr>
+        <p:spPr>
+          <a:xfrm>
+            <a:off x="8211312" y="1856232"/>
+            <a:ext cx="2734056" cy="1536192"/>
+          </a:xfrm>
+          <a:prstGeom prst="rect">
+            <a:avLst/>
+          </a:prstGeom>
+          <a:noFill/>
+          <a:ln/>
+        </p:spPr>
+        <p:txBody>
+          <a:bodyPr wrap="square" lIns="0" tIns="0" rIns="0" bIns="0" rtlCol="0" anchor="t">
+            <a:normAutofit/>
+          </a:bodyPr>
+          <a:lstStyle/>
+          <a:p>
+            <a:pPr indent="0" marL="0">
+              <a:buNone/>
+            </a:pPr>
+            <a:r>
+              <a:rPr lang="en-US" sz="1250" dirty="0">
                 <a:solidFill>
                   <a:srgbClr val="17364A"/>
                 </a:solidFill>
@@ -6267,9 +11289,116 @@
                 <a:ea typeface="Aptos" pitchFamily="34" charset="-122"/>
                 <a:cs typeface="Aptos" pitchFamily="34" charset="-120"/>
               </a:rPr>
-              <a:t>AI governance needs a formal home before an agency begins approving tools, pilots, vendor products, or workflow automation. A governance charter defines the purpose, scope, authority, membership, cadence, decision rules, and documentation expectations for the group that will oversee AI. Without a charter, AI decisions often become scattered across IT, program areas, legal, privacy, procurement, and individual project teams, which can lead to inconsistent standards and unclear accountability. This module helps leaders design an AI governance operating model that is practical for a public health agency. The operating model should connect strategy, risk management, technical review, privacy review, equity review, procurement, implementation oversight, and incident response. The goal is not to create another committee for its own sake. The goal is to make sure AI decisions are reviewed consistently, documented clearly, and connected to public health authority, community trust, and operational realities.</a:t>
-            </a:r>
-            <a:endParaRPr lang="en-US" sz="1420" dirty="0"/>
+              <a:t>Use linked tools when your department needs a structured worksheet, template, checklist, review process, or documentation artifact.</a:t>
+            </a:r>
+            <a:endParaRPr lang="en-US" sz="1250" dirty="0"/>
+          </a:p>
+        </p:txBody>
+      </p:sp>
+      <p:sp>
+        <p:nvSpPr>
+          <p:cNvPr id="12" name="Shape 10"/>
+          <p:cNvSpPr/>
+          <p:nvPr/>
+        </p:nvSpPr>
+        <p:spPr>
+          <a:xfrm>
+            <a:off x="8046720" y="3794760"/>
+            <a:ext cx="3063240" cy="1508760"/>
+          </a:xfrm>
+          <a:prstGeom prst="roundRect">
+            <a:avLst>
+              <a:gd name="adj" fmla="val 7273"/>
+            </a:avLst>
+          </a:prstGeom>
+          <a:solidFill>
+            <a:srgbClr val="EEF8ED"/>
+          </a:solidFill>
+          <a:ln w="12700">
+            <a:solidFill>
+              <a:srgbClr val="B9D7E6"/>
+            </a:solidFill>
+            <a:prstDash val="solid"/>
+          </a:ln>
+        </p:spPr>
+      </p:sp>
+      <p:sp>
+        <p:nvSpPr>
+          <p:cNvPr id="13" name="Text 11"/>
+          <p:cNvSpPr/>
+          <p:nvPr/>
+        </p:nvSpPr>
+        <p:spPr>
+          <a:xfrm>
+            <a:off x="8211312" y="3941064"/>
+            <a:ext cx="2734056" cy="201168"/>
+          </a:xfrm>
+          <a:prstGeom prst="rect">
+            <a:avLst/>
+          </a:prstGeom>
+          <a:noFill/>
+          <a:ln/>
+        </p:spPr>
+        <p:txBody>
+          <a:bodyPr wrap="square" lIns="0" tIns="0" rIns="0" bIns="0" rtlCol="0" anchor="ctr"/>
+          <a:lstStyle/>
+          <a:p>
+            <a:pPr indent="0" marL="0">
+              <a:buNone/>
+            </a:pPr>
+            <a:r>
+              <a:rPr lang="en-US" sz="950" b="1" dirty="0">
+                <a:solidFill>
+                  <a:srgbClr val="0068B7"/>
+                </a:solidFill>
+                <a:latin typeface="Aptos" pitchFamily="34" charset="0"/>
+                <a:ea typeface="Aptos" pitchFamily="34" charset="-122"/>
+                <a:cs typeface="Aptos" pitchFamily="34" charset="-120"/>
+              </a:rPr>
+              <a:t>Avoid duplication</a:t>
+            </a:r>
+            <a:endParaRPr lang="en-US" sz="950" dirty="0"/>
+          </a:p>
+        </p:txBody>
+      </p:sp>
+      <p:sp>
+        <p:nvSpPr>
+          <p:cNvPr id="14" name="Text 12"/>
+          <p:cNvSpPr/>
+          <p:nvPr/>
+        </p:nvSpPr>
+        <p:spPr>
+          <a:xfrm>
+            <a:off x="8211312" y="4233672"/>
+            <a:ext cx="2734056" cy="941832"/>
+          </a:xfrm>
+          <a:prstGeom prst="rect">
+            <a:avLst/>
+          </a:prstGeom>
+          <a:noFill/>
+          <a:ln/>
+        </p:spPr>
+        <p:txBody>
+          <a:bodyPr wrap="square" lIns="0" tIns="0" rIns="0" bIns="0" rtlCol="0" anchor="t">
+            <a:normAutofit/>
+          </a:bodyPr>
+          <a:lstStyle/>
+          <a:p>
+            <a:pPr indent="0" marL="0">
+              <a:buNone/>
+            </a:pPr>
+            <a:r>
+              <a:rPr lang="en-US" sz="1250" dirty="0">
+                <a:solidFill>
+                  <a:srgbClr val="17364A"/>
+                </a:solidFill>
+                <a:latin typeface="Aptos" pitchFamily="34" charset="0"/>
+                <a:ea typeface="Aptos" pitchFamily="34" charset="-122"/>
+                <a:cs typeface="Aptos" pitchFamily="34" charset="-120"/>
+              </a:rPr>
+              <a:t>If your department already has a strong equivalent tool, adapt or use the existing process instead of recreating it.</a:t>
+            </a:r>
+            <a:endParaRPr lang="en-US" sz="1250" dirty="0"/>
           </a:p>
         </p:txBody>
       </p:sp>
@@ -6332,7 +11461,32 @@
       </p:sp>
       <p:sp>
         <p:nvSpPr>
-          <p:cNvPr id="3" name="Text 1"/>
+          <p:cNvPr id="3" name="Shape 1"/>
+          <p:cNvSpPr/>
+          <p:nvPr/>
+        </p:nvSpPr>
+        <p:spPr>
+          <a:xfrm>
+            <a:off x="0" y="164592"/>
+            <a:ext cx="146304" cy="6693408"/>
+          </a:xfrm>
+          <a:prstGeom prst="rect">
+            <a:avLst/>
+          </a:prstGeom>
+          <a:solidFill>
+            <a:srgbClr val="2F8A28"/>
+          </a:solidFill>
+          <a:ln w="12700">
+            <a:solidFill>
+              <a:srgbClr val="2F8A28"/>
+            </a:solidFill>
+            <a:prstDash val="solid"/>
+          </a:ln>
+        </p:spPr>
+      </p:sp>
+      <p:sp>
+        <p:nvSpPr>
+          <p:cNvPr id="4" name="Text 2"/>
           <p:cNvSpPr/>
           <p:nvPr/>
         </p:nvSpPr>
@@ -6371,7 +11525,7 @@
       </p:sp>
       <p:sp>
         <p:nvSpPr>
-          <p:cNvPr id="4" name="Text 2"/>
+          <p:cNvPr id="5" name="Text 3"/>
           <p:cNvSpPr/>
           <p:nvPr/>
         </p:nvSpPr>
@@ -6410,7 +11564,7 @@
       </p:sp>
       <p:sp>
         <p:nvSpPr>
-          <p:cNvPr id="5" name="Text 3"/>
+          <p:cNvPr id="6" name="Text 4"/>
           <p:cNvSpPr/>
           <p:nvPr/>
         </p:nvSpPr>
@@ -6449,13 +11603,77 @@
       </p:sp>
       <p:sp>
         <p:nvSpPr>
-          <p:cNvPr id="6" name="Text 4"/>
+          <p:cNvPr id="7" name="Shape 5"/>
           <p:cNvSpPr/>
           <p:nvPr/>
         </p:nvSpPr>
         <p:spPr>
           <a:xfrm>
             <a:off x="640080" y="658368"/>
+            <a:ext cx="420624" cy="420624"/>
+          </a:xfrm>
+          <a:prstGeom prst="ellipse">
+            <a:avLst/>
+          </a:prstGeom>
+          <a:solidFill>
+            <a:srgbClr val="0068B7"/>
+          </a:solidFill>
+          <a:ln w="12700">
+            <a:solidFill>
+              <a:srgbClr val="0068B7"/>
+            </a:solidFill>
+            <a:prstDash val="solid"/>
+          </a:ln>
+        </p:spPr>
+      </p:sp>
+      <p:sp>
+        <p:nvSpPr>
+          <p:cNvPr id="8" name="Text 6"/>
+          <p:cNvSpPr/>
+          <p:nvPr/>
+        </p:nvSpPr>
+        <p:spPr>
+          <a:xfrm>
+            <a:off x="640080" y="731520"/>
+            <a:ext cx="420624" cy="164592"/>
+          </a:xfrm>
+          <a:prstGeom prst="rect">
+            <a:avLst/>
+          </a:prstGeom>
+          <a:noFill/>
+          <a:ln/>
+        </p:spPr>
+        <p:txBody>
+          <a:bodyPr wrap="square" lIns="0" tIns="0" rIns="0" bIns="0" rtlCol="0" anchor="ctr"/>
+          <a:lstStyle/>
+          <a:p>
+            <a:pPr algn="ctr" indent="0" marL="0">
+              <a:buNone/>
+            </a:pPr>
+            <a:r>
+              <a:rPr lang="en-US" sz="1100" b="1" dirty="0">
+                <a:solidFill>
+                  <a:srgbClr val="FFFFFF"/>
+                </a:solidFill>
+                <a:latin typeface="Aptos" pitchFamily="34" charset="0"/>
+                <a:ea typeface="Aptos" pitchFamily="34" charset="-122"/>
+                <a:cs typeface="Aptos" pitchFamily="34" charset="-120"/>
+              </a:rPr>
+              <a:t>1</a:t>
+            </a:r>
+            <a:endParaRPr lang="en-US" sz="1100" dirty="0"/>
+          </a:p>
+        </p:txBody>
+      </p:sp>
+      <p:sp>
+        <p:nvSpPr>
+          <p:cNvPr id="9" name="Text 7"/>
+          <p:cNvSpPr/>
+          <p:nvPr/>
+        </p:nvSpPr>
+        <p:spPr>
+          <a:xfrm>
+            <a:off x="640080" y="621792"/>
             <a:ext cx="10881360" cy="566928"/>
           </a:xfrm>
           <a:prstGeom prst="rect">
@@ -6482,7 +11700,7 @@
                 <a:ea typeface="Aptos Display" pitchFamily="34" charset="-122"/>
                 <a:cs typeface="Aptos Display" pitchFamily="34" charset="-120"/>
               </a:rPr>
-              <a:t>Jurisdiction and Agency Policy Note</a:t>
+              <a:t>Learning Objectives</a:t>
             </a:r>
             <a:endParaRPr lang="en-US" sz="2700" dirty="0"/>
           </a:p>
@@ -6490,32 +11708,178 @@
       </p:sp>
       <p:sp>
         <p:nvSpPr>
-          <p:cNvPr id="7" name="Text 5"/>
-          <p:cNvSpPr/>
-          <p:nvPr/>
-        </p:nvSpPr>
-        <p:spPr>
-          <a:xfrm>
-            <a:off x="822960" y="1325880"/>
-            <a:ext cx="10378440" cy="4800600"/>
-          </a:xfrm>
-          <a:prstGeom prst="rect">
-            <a:avLst/>
-          </a:prstGeom>
-          <a:noFill/>
-          <a:ln/>
-        </p:spPr>
-        <p:txBody>
-          <a:bodyPr wrap="square" lIns="1016" tIns="1016" rIns="1016" bIns="1016" rtlCol="0" anchor="t">
+          <p:cNvPr id="10" name="Text 8"/>
+          <p:cNvSpPr/>
+          <p:nvPr/>
+        </p:nvSpPr>
+        <p:spPr>
+          <a:xfrm>
+            <a:off x="868680" y="1417320"/>
+            <a:ext cx="6675120" cy="4434840"/>
+          </a:xfrm>
+          <a:prstGeom prst="rect">
+            <a:avLst/>
+          </a:prstGeom>
+          <a:noFill/>
+          <a:ln/>
+        </p:spPr>
+        <p:txBody>
+          <a:bodyPr wrap="square" lIns="635" tIns="635" rIns="635" bIns="635" rtlCol="0" anchor="t">
             <a:normAutofit/>
           </a:bodyPr>
           <a:lstStyle/>
           <a:p>
+            <a:r>
+              <a:rPr lang="en-US" sz="1700" dirty="0">
+                <a:solidFill>
+                  <a:srgbClr val="17364A"/>
+                </a:solidFill>
+                <a:latin typeface="Aptos" pitchFamily="34" charset="0"/>
+                <a:ea typeface="Aptos" pitchFamily="34" charset="-122"/>
+                <a:cs typeface="Aptos" pitchFamily="34" charset="-120"/>
+              </a:rPr>
+              <a:t>Define the purpose and minimum contents of an AI governance charter.</a:t>
+            </a:r>
+            <a:endParaRPr lang="en-US" sz="1700" dirty="0"/>
+          </a:p>
+          <a:p>
+            <a:r>
+              <a:rPr lang="en-US" sz="1700" dirty="0">
+                <a:solidFill>
+                  <a:srgbClr val="17364A"/>
+                </a:solidFill>
+                <a:latin typeface="Aptos" pitchFamily="34" charset="0"/>
+                <a:ea typeface="Aptos" pitchFamily="34" charset="-122"/>
+                <a:cs typeface="Aptos" pitchFamily="34" charset="-120"/>
+              </a:rPr>
+              <a:t>Distinguish between a governance committee, technical review group, executive sponsor, and implementation team.</a:t>
+            </a:r>
+            <a:endParaRPr lang="en-US" sz="1700" dirty="0"/>
+          </a:p>
+          <a:p>
+            <a:r>
+              <a:rPr lang="en-US" sz="1700" dirty="0">
+                <a:solidFill>
+                  <a:srgbClr val="17364A"/>
+                </a:solidFill>
+                <a:latin typeface="Aptos" pitchFamily="34" charset="0"/>
+                <a:ea typeface="Aptos" pitchFamily="34" charset="-122"/>
+                <a:cs typeface="Aptos" pitchFamily="34" charset="-120"/>
+              </a:rPr>
+              <a:t>Identify which agency functions should participate in AI governance and when their review is required.</a:t>
+            </a:r>
+            <a:endParaRPr lang="en-US" sz="1700" dirty="0"/>
+          </a:p>
+          <a:p>
+            <a:r>
+              <a:rPr lang="en-US" sz="1700" dirty="0">
+                <a:solidFill>
+                  <a:srgbClr val="17364A"/>
+                </a:solidFill>
+                <a:latin typeface="Aptos" pitchFamily="34" charset="0"/>
+                <a:ea typeface="Aptos" pitchFamily="34" charset="-122"/>
+                <a:cs typeface="Aptos" pitchFamily="34" charset="-120"/>
+              </a:rPr>
+              <a:t>Develop operating procedures for intake, review, approval, monitoring, exceptions, escalation, and retirement of AI use cases.</a:t>
+            </a:r>
+            <a:endParaRPr lang="en-US" sz="1700" dirty="0"/>
+          </a:p>
+        </p:txBody>
+      </p:sp>
+      <p:sp>
+        <p:nvSpPr>
+          <p:cNvPr id="11" name="Shape 9"/>
+          <p:cNvSpPr/>
+          <p:nvPr/>
+        </p:nvSpPr>
+        <p:spPr>
+          <a:xfrm>
+            <a:off x="7909560" y="1417320"/>
+            <a:ext cx="3154680" cy="1828800"/>
+          </a:xfrm>
+          <a:prstGeom prst="roundRect">
+            <a:avLst>
+              <a:gd name="adj" fmla="val 6000"/>
+            </a:avLst>
+          </a:prstGeom>
+          <a:solidFill>
+            <a:srgbClr val="EEF8ED"/>
+          </a:solidFill>
+          <a:ln w="12700">
+            <a:solidFill>
+              <a:srgbClr val="B9D7E6"/>
+            </a:solidFill>
+            <a:prstDash val="solid"/>
+          </a:ln>
+        </p:spPr>
+      </p:sp>
+      <p:sp>
+        <p:nvSpPr>
+          <p:cNvPr id="12" name="Text 10"/>
+          <p:cNvSpPr/>
+          <p:nvPr/>
+        </p:nvSpPr>
+        <p:spPr>
+          <a:xfrm>
+            <a:off x="8074152" y="1563624"/>
+            <a:ext cx="2825496" cy="201168"/>
+          </a:xfrm>
+          <a:prstGeom prst="rect">
+            <a:avLst/>
+          </a:prstGeom>
+          <a:noFill/>
+          <a:ln/>
+        </p:spPr>
+        <p:txBody>
+          <a:bodyPr wrap="square" lIns="0" tIns="0" rIns="0" bIns="0" rtlCol="0" anchor="ctr"/>
+          <a:lstStyle/>
+          <a:p>
             <a:pPr indent="0" marL="0">
               <a:buNone/>
             </a:pPr>
             <a:r>
-              <a:rPr lang="en-US" sz="1420" dirty="0">
+              <a:rPr lang="en-US" sz="950" b="1" dirty="0">
+                <a:solidFill>
+                  <a:srgbClr val="0068B7"/>
+                </a:solidFill>
+                <a:latin typeface="Aptos" pitchFamily="34" charset="0"/>
+                <a:ea typeface="Aptos" pitchFamily="34" charset="-122"/>
+                <a:cs typeface="Aptos" pitchFamily="34" charset="-120"/>
+              </a:rPr>
+              <a:t>Key idea</a:t>
+            </a:r>
+            <a:endParaRPr lang="en-US" sz="950" dirty="0"/>
+          </a:p>
+        </p:txBody>
+      </p:sp>
+      <p:sp>
+        <p:nvSpPr>
+          <p:cNvPr id="13" name="Text 11"/>
+          <p:cNvSpPr/>
+          <p:nvPr/>
+        </p:nvSpPr>
+        <p:spPr>
+          <a:xfrm>
+            <a:off x="8074152" y="1856232"/>
+            <a:ext cx="2825496" cy="1261872"/>
+          </a:xfrm>
+          <a:prstGeom prst="rect">
+            <a:avLst/>
+          </a:prstGeom>
+          <a:noFill/>
+          <a:ln/>
+        </p:spPr>
+        <p:txBody>
+          <a:bodyPr wrap="square" lIns="0" tIns="0" rIns="0" bIns="0" rtlCol="0" anchor="t">
+            <a:normAutofit/>
+          </a:bodyPr>
+          <a:lstStyle/>
+          <a:p>
+            <a:pPr indent="0" marL="0">
+              <a:buNone/>
+            </a:pPr>
+            <a:r>
+              <a:rPr lang="en-US" sz="1250" dirty="0">
                 <a:solidFill>
                   <a:srgbClr val="17364A"/>
                 </a:solidFill>
@@ -6523,9 +11887,116 @@
                 <a:ea typeface="Aptos" pitchFamily="34" charset="-122"/>
                 <a:cs typeface="Aptos" pitchFamily="34" charset="-120"/>
               </a:rPr>
-              <a:t>This module provides national-level training guidance for public health agencies and partners. It is not legal advice and does not replace review by agency legal counsel, privacy officers, procurement officials, civil rights staff, records officers, or other authorized decision-makers. Requirements may vary by state, locality, territory, Tribe, agency, funding source, data-sharing agreement, emergency authority, and organizational policy. Learners should use this module to identify the issues that require review and should confirm applicable requirements before approving, procuring, deploying, or publicly communicating about AI-supported work.</a:t>
-            </a:r>
-            <a:endParaRPr lang="en-US" sz="1420" dirty="0"/>
+              <a:t>Define the purpose and minimum contents of an AI governance charter.</a:t>
+            </a:r>
+            <a:endParaRPr lang="en-US" sz="1250" dirty="0"/>
+          </a:p>
+        </p:txBody>
+      </p:sp>
+      <p:sp>
+        <p:nvSpPr>
+          <p:cNvPr id="14" name="Shape 12"/>
+          <p:cNvSpPr/>
+          <p:nvPr/>
+        </p:nvSpPr>
+        <p:spPr>
+          <a:xfrm>
+            <a:off x="7909560" y="3520440"/>
+            <a:ext cx="3154680" cy="1737360"/>
+          </a:xfrm>
+          <a:prstGeom prst="roundRect">
+            <a:avLst>
+              <a:gd name="adj" fmla="val 6316"/>
+            </a:avLst>
+          </a:prstGeom>
+          <a:solidFill>
+            <a:srgbClr val="EAF6F8"/>
+          </a:solidFill>
+          <a:ln w="12700">
+            <a:solidFill>
+              <a:srgbClr val="B9D7E6"/>
+            </a:solidFill>
+            <a:prstDash val="solid"/>
+          </a:ln>
+        </p:spPr>
+      </p:sp>
+      <p:sp>
+        <p:nvSpPr>
+          <p:cNvPr id="15" name="Text 13"/>
+          <p:cNvSpPr/>
+          <p:nvPr/>
+        </p:nvSpPr>
+        <p:spPr>
+          <a:xfrm>
+            <a:off x="8074152" y="3666744"/>
+            <a:ext cx="2825496" cy="201168"/>
+          </a:xfrm>
+          <a:prstGeom prst="rect">
+            <a:avLst/>
+          </a:prstGeom>
+          <a:noFill/>
+          <a:ln/>
+        </p:spPr>
+        <p:txBody>
+          <a:bodyPr wrap="square" lIns="0" tIns="0" rIns="0" bIns="0" rtlCol="0" anchor="ctr"/>
+          <a:lstStyle/>
+          <a:p>
+            <a:pPr indent="0" marL="0">
+              <a:buNone/>
+            </a:pPr>
+            <a:r>
+              <a:rPr lang="en-US" sz="950" b="1" dirty="0">
+                <a:solidFill>
+                  <a:srgbClr val="0068B7"/>
+                </a:solidFill>
+                <a:latin typeface="Aptos" pitchFamily="34" charset="0"/>
+                <a:ea typeface="Aptos" pitchFamily="34" charset="-122"/>
+                <a:cs typeface="Aptos" pitchFamily="34" charset="-120"/>
+              </a:rPr>
+              <a:t>Use this for</a:t>
+            </a:r>
+            <a:endParaRPr lang="en-US" sz="950" dirty="0"/>
+          </a:p>
+        </p:txBody>
+      </p:sp>
+      <p:sp>
+        <p:nvSpPr>
+          <p:cNvPr id="16" name="Text 14"/>
+          <p:cNvSpPr/>
+          <p:nvPr/>
+        </p:nvSpPr>
+        <p:spPr>
+          <a:xfrm>
+            <a:off x="8074152" y="3959352"/>
+            <a:ext cx="2825496" cy="1170432"/>
+          </a:xfrm>
+          <a:prstGeom prst="rect">
+            <a:avLst/>
+          </a:prstGeom>
+          <a:noFill/>
+          <a:ln/>
+        </p:spPr>
+        <p:txBody>
+          <a:bodyPr wrap="square" lIns="0" tIns="0" rIns="0" bIns="0" rtlCol="0" anchor="t">
+            <a:normAutofit/>
+          </a:bodyPr>
+          <a:lstStyle/>
+          <a:p>
+            <a:pPr indent="0" marL="0">
+              <a:buNone/>
+            </a:pPr>
+            <a:r>
+              <a:rPr lang="en-US" sz="1250" dirty="0">
+                <a:solidFill>
+                  <a:srgbClr val="17364A"/>
+                </a:solidFill>
+                <a:latin typeface="Aptos" pitchFamily="34" charset="0"/>
+                <a:ea typeface="Aptos" pitchFamily="34" charset="-122"/>
+                <a:cs typeface="Aptos" pitchFamily="34" charset="-120"/>
+              </a:rPr>
+              <a:t>Connect the concept to public health decisions, safeguards, documentation, or implementation work.</a:t>
+            </a:r>
+            <a:endParaRPr lang="en-US" sz="1250" dirty="0"/>
           </a:p>
         </p:txBody>
       </p:sp>
@@ -6588,7 +12059,32 @@
       </p:sp>
       <p:sp>
         <p:nvSpPr>
-          <p:cNvPr id="3" name="Text 1"/>
+          <p:cNvPr id="3" name="Shape 1"/>
+          <p:cNvSpPr/>
+          <p:nvPr/>
+        </p:nvSpPr>
+        <p:spPr>
+          <a:xfrm>
+            <a:off x="0" y="164592"/>
+            <a:ext cx="146304" cy="6693408"/>
+          </a:xfrm>
+          <a:prstGeom prst="rect">
+            <a:avLst/>
+          </a:prstGeom>
+          <a:solidFill>
+            <a:srgbClr val="2F8A28"/>
+          </a:solidFill>
+          <a:ln w="12700">
+            <a:solidFill>
+              <a:srgbClr val="2F8A28"/>
+            </a:solidFill>
+            <a:prstDash val="solid"/>
+          </a:ln>
+        </p:spPr>
+      </p:sp>
+      <p:sp>
+        <p:nvSpPr>
+          <p:cNvPr id="4" name="Text 2"/>
           <p:cNvSpPr/>
           <p:nvPr/>
         </p:nvSpPr>
@@ -6627,7 +12123,7 @@
       </p:sp>
       <p:sp>
         <p:nvSpPr>
-          <p:cNvPr id="4" name="Text 2"/>
+          <p:cNvPr id="5" name="Text 3"/>
           <p:cNvSpPr/>
           <p:nvPr/>
         </p:nvSpPr>
@@ -6666,7 +12162,7 @@
       </p:sp>
       <p:sp>
         <p:nvSpPr>
-          <p:cNvPr id="5" name="Text 3"/>
+          <p:cNvPr id="6" name="Text 4"/>
           <p:cNvSpPr/>
           <p:nvPr/>
         </p:nvSpPr>
@@ -6705,13 +12201,77 @@
       </p:sp>
       <p:sp>
         <p:nvSpPr>
-          <p:cNvPr id="6" name="Text 4"/>
+          <p:cNvPr id="7" name="Shape 5"/>
           <p:cNvSpPr/>
           <p:nvPr/>
         </p:nvSpPr>
         <p:spPr>
           <a:xfrm>
             <a:off x="640080" y="658368"/>
+            <a:ext cx="420624" cy="420624"/>
+          </a:xfrm>
+          <a:prstGeom prst="ellipse">
+            <a:avLst/>
+          </a:prstGeom>
+          <a:solidFill>
+            <a:srgbClr val="0068B7"/>
+          </a:solidFill>
+          <a:ln w="12700">
+            <a:solidFill>
+              <a:srgbClr val="0068B7"/>
+            </a:solidFill>
+            <a:prstDash val="solid"/>
+          </a:ln>
+        </p:spPr>
+      </p:sp>
+      <p:sp>
+        <p:nvSpPr>
+          <p:cNvPr id="8" name="Text 6"/>
+          <p:cNvSpPr/>
+          <p:nvPr/>
+        </p:nvSpPr>
+        <p:spPr>
+          <a:xfrm>
+            <a:off x="640080" y="731520"/>
+            <a:ext cx="420624" cy="164592"/>
+          </a:xfrm>
+          <a:prstGeom prst="rect">
+            <a:avLst/>
+          </a:prstGeom>
+          <a:noFill/>
+          <a:ln/>
+        </p:spPr>
+        <p:txBody>
+          <a:bodyPr wrap="square" lIns="0" tIns="0" rIns="0" bIns="0" rtlCol="0" anchor="ctr"/>
+          <a:lstStyle/>
+          <a:p>
+            <a:pPr algn="ctr" indent="0" marL="0">
+              <a:buNone/>
+            </a:pPr>
+            <a:r>
+              <a:rPr lang="en-US" sz="1100" b="1" dirty="0">
+                <a:solidFill>
+                  <a:srgbClr val="FFFFFF"/>
+                </a:solidFill>
+                <a:latin typeface="Aptos" pitchFamily="34" charset="0"/>
+                <a:ea typeface="Aptos" pitchFamily="34" charset="-122"/>
+                <a:cs typeface="Aptos" pitchFamily="34" charset="-120"/>
+              </a:rPr>
+              <a:t>2</a:t>
+            </a:r>
+            <a:endParaRPr lang="en-US" sz="1100" dirty="0"/>
+          </a:p>
+        </p:txBody>
+      </p:sp>
+      <p:sp>
+        <p:nvSpPr>
+          <p:cNvPr id="9" name="Text 7"/>
+          <p:cNvSpPr/>
+          <p:nvPr/>
+        </p:nvSpPr>
+        <p:spPr>
+          <a:xfrm>
+            <a:off x="640080" y="621792"/>
             <a:ext cx="10881360" cy="566928"/>
           </a:xfrm>
           <a:prstGeom prst="rect">
@@ -6738,7 +12298,7 @@
                 <a:ea typeface="Aptos Display" pitchFamily="34" charset="-122"/>
                 <a:cs typeface="Aptos Display" pitchFamily="34" charset="-120"/>
               </a:rPr>
-              <a:t>Why This Topic Matters for Public Health AI</a:t>
+              <a:t>Module Overview</a:t>
             </a:r>
             <a:endParaRPr lang="en-US" sz="2700" dirty="0"/>
           </a:p>
@@ -6746,32 +12306,178 @@
       </p:sp>
       <p:sp>
         <p:nvSpPr>
-          <p:cNvPr id="7" name="Text 5"/>
-          <p:cNvSpPr/>
-          <p:nvPr/>
-        </p:nvSpPr>
-        <p:spPr>
-          <a:xfrm>
-            <a:off x="822960" y="1325880"/>
-            <a:ext cx="10378440" cy="4800600"/>
-          </a:xfrm>
-          <a:prstGeom prst="rect">
-            <a:avLst/>
-          </a:prstGeom>
-          <a:noFill/>
-          <a:ln/>
-        </p:spPr>
-        <p:txBody>
-          <a:bodyPr wrap="square" lIns="1016" tIns="1016" rIns="1016" bIns="1016" rtlCol="0" anchor="t">
+          <p:cNvPr id="10" name="Text 8"/>
+          <p:cNvSpPr/>
+          <p:nvPr/>
+        </p:nvSpPr>
+        <p:spPr>
+          <a:xfrm>
+            <a:off x="868680" y="1417320"/>
+            <a:ext cx="6675120" cy="4434840"/>
+          </a:xfrm>
+          <a:prstGeom prst="rect">
+            <a:avLst/>
+          </a:prstGeom>
+          <a:noFill/>
+          <a:ln/>
+        </p:spPr>
+        <p:txBody>
+          <a:bodyPr wrap="square" lIns="635" tIns="635" rIns="635" bIns="635" rtlCol="0" anchor="t">
             <a:normAutofit/>
           </a:bodyPr>
           <a:lstStyle/>
           <a:p>
+            <a:r>
+              <a:rPr lang="en-US" sz="1700" dirty="0">
+                <a:solidFill>
+                  <a:srgbClr val="17364A"/>
+                </a:solidFill>
+                <a:latin typeface="Aptos" pitchFamily="34" charset="0"/>
+                <a:ea typeface="Aptos" pitchFamily="34" charset="-122"/>
+                <a:cs typeface="Aptos" pitchFamily="34" charset="-120"/>
+              </a:rPr>
+              <a:t>AI governance needs a formal home before an agency begins approving tools, pilots, vendor products, or workflow automation.</a:t>
+            </a:r>
+            <a:endParaRPr lang="en-US" sz="1700" dirty="0"/>
+          </a:p>
+          <a:p>
+            <a:r>
+              <a:rPr lang="en-US" sz="1700" dirty="0">
+                <a:solidFill>
+                  <a:srgbClr val="17364A"/>
+                </a:solidFill>
+                <a:latin typeface="Aptos" pitchFamily="34" charset="0"/>
+                <a:ea typeface="Aptos" pitchFamily="34" charset="-122"/>
+                <a:cs typeface="Aptos" pitchFamily="34" charset="-120"/>
+              </a:rPr>
+              <a:t>A governance charter defines the purpose, scope, authority, membership, cadence, decision rules, and documentation.</a:t>
+            </a:r>
+            <a:endParaRPr lang="en-US" sz="1700" dirty="0"/>
+          </a:p>
+          <a:p>
+            <a:r>
+              <a:rPr lang="en-US" sz="1700" dirty="0">
+                <a:solidFill>
+                  <a:srgbClr val="17364A"/>
+                </a:solidFill>
+                <a:latin typeface="Aptos" pitchFamily="34" charset="0"/>
+                <a:ea typeface="Aptos" pitchFamily="34" charset="-122"/>
+                <a:cs typeface="Aptos" pitchFamily="34" charset="-120"/>
+              </a:rPr>
+              <a:t>Without a charter, AI decisions often become scattered across IT, program areas, legal, privacy, procurement, and.</a:t>
+            </a:r>
+            <a:endParaRPr lang="en-US" sz="1700" dirty="0"/>
+          </a:p>
+          <a:p>
+            <a:r>
+              <a:rPr lang="en-US" sz="1700" dirty="0">
+                <a:solidFill>
+                  <a:srgbClr val="17364A"/>
+                </a:solidFill>
+                <a:latin typeface="Aptos" pitchFamily="34" charset="0"/>
+                <a:ea typeface="Aptos" pitchFamily="34" charset="-122"/>
+                <a:cs typeface="Aptos" pitchFamily="34" charset="-120"/>
+              </a:rPr>
+              <a:t>This module helps leaders design an AI governance operating model that is practical for a public health agency.</a:t>
+            </a:r>
+            <a:endParaRPr lang="en-US" sz="1700" dirty="0"/>
+          </a:p>
+        </p:txBody>
+      </p:sp>
+      <p:sp>
+        <p:nvSpPr>
+          <p:cNvPr id="11" name="Shape 9"/>
+          <p:cNvSpPr/>
+          <p:nvPr/>
+        </p:nvSpPr>
+        <p:spPr>
+          <a:xfrm>
+            <a:off x="7909560" y="1417320"/>
+            <a:ext cx="3154680" cy="1828800"/>
+          </a:xfrm>
+          <a:prstGeom prst="roundRect">
+            <a:avLst>
+              <a:gd name="adj" fmla="val 6000"/>
+            </a:avLst>
+          </a:prstGeom>
+          <a:solidFill>
+            <a:srgbClr val="EEF8ED"/>
+          </a:solidFill>
+          <a:ln w="12700">
+            <a:solidFill>
+              <a:srgbClr val="B9D7E6"/>
+            </a:solidFill>
+            <a:prstDash val="solid"/>
+          </a:ln>
+        </p:spPr>
+      </p:sp>
+      <p:sp>
+        <p:nvSpPr>
+          <p:cNvPr id="12" name="Text 10"/>
+          <p:cNvSpPr/>
+          <p:nvPr/>
+        </p:nvSpPr>
+        <p:spPr>
+          <a:xfrm>
+            <a:off x="8074152" y="1563624"/>
+            <a:ext cx="2825496" cy="201168"/>
+          </a:xfrm>
+          <a:prstGeom prst="rect">
+            <a:avLst/>
+          </a:prstGeom>
+          <a:noFill/>
+          <a:ln/>
+        </p:spPr>
+        <p:txBody>
+          <a:bodyPr wrap="square" lIns="0" tIns="0" rIns="0" bIns="0" rtlCol="0" anchor="ctr"/>
+          <a:lstStyle/>
+          <a:p>
             <a:pPr indent="0" marL="0">
               <a:buNone/>
             </a:pPr>
             <a:r>
-              <a:rPr lang="en-US" sz="1420" dirty="0">
+              <a:rPr lang="en-US" sz="950" b="1" dirty="0">
+                <a:solidFill>
+                  <a:srgbClr val="0068B7"/>
+                </a:solidFill>
+                <a:latin typeface="Aptos" pitchFamily="34" charset="0"/>
+                <a:ea typeface="Aptos" pitchFamily="34" charset="-122"/>
+                <a:cs typeface="Aptos" pitchFamily="34" charset="-120"/>
+              </a:rPr>
+              <a:t>Key idea</a:t>
+            </a:r>
+            <a:endParaRPr lang="en-US" sz="950" dirty="0"/>
+          </a:p>
+        </p:txBody>
+      </p:sp>
+      <p:sp>
+        <p:nvSpPr>
+          <p:cNvPr id="13" name="Text 11"/>
+          <p:cNvSpPr/>
+          <p:nvPr/>
+        </p:nvSpPr>
+        <p:spPr>
+          <a:xfrm>
+            <a:off x="8074152" y="1856232"/>
+            <a:ext cx="2825496" cy="1261872"/>
+          </a:xfrm>
+          <a:prstGeom prst="rect">
+            <a:avLst/>
+          </a:prstGeom>
+          <a:noFill/>
+          <a:ln/>
+        </p:spPr>
+        <p:txBody>
+          <a:bodyPr wrap="square" lIns="0" tIns="0" rIns="0" bIns="0" rtlCol="0" anchor="t">
+            <a:normAutofit/>
+          </a:bodyPr>
+          <a:lstStyle/>
+          <a:p>
+            <a:pPr indent="0" marL="0">
+              <a:buNone/>
+            </a:pPr>
+            <a:r>
+              <a:rPr lang="en-US" sz="1250" dirty="0">
                 <a:solidFill>
                   <a:srgbClr val="17364A"/>
                 </a:solidFill>
@@ -6779,9 +12485,116 @@
                 <a:ea typeface="Aptos" pitchFamily="34" charset="-122"/>
                 <a:cs typeface="Aptos" pitchFamily="34" charset="-120"/>
               </a:rPr>
-              <a:t>Public health agencies operate under legal authorities, public accountability obligations, data-sharing agreements, privacy requirements, procurement rules, and equity commitments. AI governance must therefore be more than a technology review process. It must define how the agency decides which AI uses are acceptable, which safeguards are required, who has authority to approve use, and how concerns are escalated. A governance operating model also helps avoid the problem of uneven adoption. One program may use a public AI tool informally, another may procure a vendor product, and a third may build an internal workflow using sensitive data. If these activities are not reviewed through a common process, the agency may create inconsistent privacy practices, duplicative investments, and uneven risk tolerance. Governance makes AI activity visible and manageable.</a:t>
-            </a:r>
-            <a:endParaRPr lang="en-US" sz="1420" dirty="0"/>
+              <a:t>AI governance needs a formal home before an agency begins approving tools, pilots, vendor products, or workflow automation.</a:t>
+            </a:r>
+            <a:endParaRPr lang="en-US" sz="1250" dirty="0"/>
+          </a:p>
+        </p:txBody>
+      </p:sp>
+      <p:sp>
+        <p:nvSpPr>
+          <p:cNvPr id="14" name="Shape 12"/>
+          <p:cNvSpPr/>
+          <p:nvPr/>
+        </p:nvSpPr>
+        <p:spPr>
+          <a:xfrm>
+            <a:off x="7909560" y="3520440"/>
+            <a:ext cx="3154680" cy="1737360"/>
+          </a:xfrm>
+          <a:prstGeom prst="roundRect">
+            <a:avLst>
+              <a:gd name="adj" fmla="val 6316"/>
+            </a:avLst>
+          </a:prstGeom>
+          <a:solidFill>
+            <a:srgbClr val="EAF6F8"/>
+          </a:solidFill>
+          <a:ln w="12700">
+            <a:solidFill>
+              <a:srgbClr val="B9D7E6"/>
+            </a:solidFill>
+            <a:prstDash val="solid"/>
+          </a:ln>
+        </p:spPr>
+      </p:sp>
+      <p:sp>
+        <p:nvSpPr>
+          <p:cNvPr id="15" name="Text 13"/>
+          <p:cNvSpPr/>
+          <p:nvPr/>
+        </p:nvSpPr>
+        <p:spPr>
+          <a:xfrm>
+            <a:off x="8074152" y="3666744"/>
+            <a:ext cx="2825496" cy="201168"/>
+          </a:xfrm>
+          <a:prstGeom prst="rect">
+            <a:avLst/>
+          </a:prstGeom>
+          <a:noFill/>
+          <a:ln/>
+        </p:spPr>
+        <p:txBody>
+          <a:bodyPr wrap="square" lIns="0" tIns="0" rIns="0" bIns="0" rtlCol="0" anchor="ctr"/>
+          <a:lstStyle/>
+          <a:p>
+            <a:pPr indent="0" marL="0">
+              <a:buNone/>
+            </a:pPr>
+            <a:r>
+              <a:rPr lang="en-US" sz="950" b="1" dirty="0">
+                <a:solidFill>
+                  <a:srgbClr val="0068B7"/>
+                </a:solidFill>
+                <a:latin typeface="Aptos" pitchFamily="34" charset="0"/>
+                <a:ea typeface="Aptos" pitchFamily="34" charset="-122"/>
+                <a:cs typeface="Aptos" pitchFamily="34" charset="-120"/>
+              </a:rPr>
+              <a:t>Use this for</a:t>
+            </a:r>
+            <a:endParaRPr lang="en-US" sz="950" dirty="0"/>
+          </a:p>
+        </p:txBody>
+      </p:sp>
+      <p:sp>
+        <p:nvSpPr>
+          <p:cNvPr id="16" name="Text 14"/>
+          <p:cNvSpPr/>
+          <p:nvPr/>
+        </p:nvSpPr>
+        <p:spPr>
+          <a:xfrm>
+            <a:off x="8074152" y="3959352"/>
+            <a:ext cx="2825496" cy="1170432"/>
+          </a:xfrm>
+          <a:prstGeom prst="rect">
+            <a:avLst/>
+          </a:prstGeom>
+          <a:noFill/>
+          <a:ln/>
+        </p:spPr>
+        <p:txBody>
+          <a:bodyPr wrap="square" lIns="0" tIns="0" rIns="0" bIns="0" rtlCol="0" anchor="t">
+            <a:normAutofit/>
+          </a:bodyPr>
+          <a:lstStyle/>
+          <a:p>
+            <a:pPr indent="0" marL="0">
+              <a:buNone/>
+            </a:pPr>
+            <a:r>
+              <a:rPr lang="en-US" sz="1250" dirty="0">
+                <a:solidFill>
+                  <a:srgbClr val="17364A"/>
+                </a:solidFill>
+                <a:latin typeface="Aptos" pitchFamily="34" charset="0"/>
+                <a:ea typeface="Aptos" pitchFamily="34" charset="-122"/>
+                <a:cs typeface="Aptos" pitchFamily="34" charset="-120"/>
+              </a:rPr>
+              <a:t>Connect the concept to public health decisions, safeguards, documentation, or implementation work.</a:t>
+            </a:r>
+            <a:endParaRPr lang="en-US" sz="1250" dirty="0"/>
           </a:p>
         </p:txBody>
       </p:sp>
@@ -6844,7 +12657,32 @@
       </p:sp>
       <p:sp>
         <p:nvSpPr>
-          <p:cNvPr id="3" name="Text 1"/>
+          <p:cNvPr id="3" name="Shape 1"/>
+          <p:cNvSpPr/>
+          <p:nvPr/>
+        </p:nvSpPr>
+        <p:spPr>
+          <a:xfrm>
+            <a:off x="0" y="164592"/>
+            <a:ext cx="146304" cy="6693408"/>
+          </a:xfrm>
+          <a:prstGeom prst="rect">
+            <a:avLst/>
+          </a:prstGeom>
+          <a:solidFill>
+            <a:srgbClr val="2F8A28"/>
+          </a:solidFill>
+          <a:ln w="12700">
+            <a:solidFill>
+              <a:srgbClr val="2F8A28"/>
+            </a:solidFill>
+            <a:prstDash val="solid"/>
+          </a:ln>
+        </p:spPr>
+      </p:sp>
+      <p:sp>
+        <p:nvSpPr>
+          <p:cNvPr id="4" name="Text 2"/>
           <p:cNvSpPr/>
           <p:nvPr/>
         </p:nvSpPr>
@@ -6883,7 +12721,7 @@
       </p:sp>
       <p:sp>
         <p:nvSpPr>
-          <p:cNvPr id="4" name="Text 2"/>
+          <p:cNvPr id="5" name="Text 3"/>
           <p:cNvSpPr/>
           <p:nvPr/>
         </p:nvSpPr>
@@ -6922,7 +12760,7 @@
       </p:sp>
       <p:sp>
         <p:nvSpPr>
-          <p:cNvPr id="5" name="Text 3"/>
+          <p:cNvPr id="6" name="Text 4"/>
           <p:cNvSpPr/>
           <p:nvPr/>
         </p:nvSpPr>
@@ -6961,13 +12799,77 @@
       </p:sp>
       <p:sp>
         <p:nvSpPr>
-          <p:cNvPr id="6" name="Text 4"/>
+          <p:cNvPr id="7" name="Shape 5"/>
           <p:cNvSpPr/>
           <p:nvPr/>
         </p:nvSpPr>
         <p:spPr>
           <a:xfrm>
             <a:off x="640080" y="658368"/>
+            <a:ext cx="420624" cy="420624"/>
+          </a:xfrm>
+          <a:prstGeom prst="ellipse">
+            <a:avLst/>
+          </a:prstGeom>
+          <a:solidFill>
+            <a:srgbClr val="0068B7"/>
+          </a:solidFill>
+          <a:ln w="12700">
+            <a:solidFill>
+              <a:srgbClr val="0068B7"/>
+            </a:solidFill>
+            <a:prstDash val="solid"/>
+          </a:ln>
+        </p:spPr>
+      </p:sp>
+      <p:sp>
+        <p:nvSpPr>
+          <p:cNvPr id="8" name="Text 6"/>
+          <p:cNvSpPr/>
+          <p:nvPr/>
+        </p:nvSpPr>
+        <p:spPr>
+          <a:xfrm>
+            <a:off x="640080" y="731520"/>
+            <a:ext cx="420624" cy="164592"/>
+          </a:xfrm>
+          <a:prstGeom prst="rect">
+            <a:avLst/>
+          </a:prstGeom>
+          <a:noFill/>
+          <a:ln/>
+        </p:spPr>
+        <p:txBody>
+          <a:bodyPr wrap="square" lIns="0" tIns="0" rIns="0" bIns="0" rtlCol="0" anchor="ctr"/>
+          <a:lstStyle/>
+          <a:p>
+            <a:pPr algn="ctr" indent="0" marL="0">
+              <a:buNone/>
+            </a:pPr>
+            <a:r>
+              <a:rPr lang="en-US" sz="1100" b="1" dirty="0">
+                <a:solidFill>
+                  <a:srgbClr val="FFFFFF"/>
+                </a:solidFill>
+                <a:latin typeface="Aptos" pitchFamily="34" charset="0"/>
+                <a:ea typeface="Aptos" pitchFamily="34" charset="-122"/>
+                <a:cs typeface="Aptos" pitchFamily="34" charset="-120"/>
+              </a:rPr>
+              <a:t>3</a:t>
+            </a:r>
+            <a:endParaRPr lang="en-US" sz="1100" dirty="0"/>
+          </a:p>
+        </p:txBody>
+      </p:sp>
+      <p:sp>
+        <p:nvSpPr>
+          <p:cNvPr id="9" name="Text 7"/>
+          <p:cNvSpPr/>
+          <p:nvPr/>
+        </p:nvSpPr>
+        <p:spPr>
+          <a:xfrm>
+            <a:off x="640080" y="621792"/>
             <a:ext cx="10881360" cy="566928"/>
           </a:xfrm>
           <a:prstGeom prst="rect">
@@ -6994,7 +12896,7 @@
                 <a:ea typeface="Aptos Display" pitchFamily="34" charset="-122"/>
                 <a:cs typeface="Aptos Display" pitchFamily="34" charset="-120"/>
               </a:rPr>
-              <a:t>Public Health Example</a:t>
+              <a:t>Jurisdiction and Agency Policy Note</a:t>
             </a:r>
             <a:endParaRPr lang="en-US" sz="2700" dirty="0"/>
           </a:p>
@@ -7002,32 +12904,178 @@
       </p:sp>
       <p:sp>
         <p:nvSpPr>
-          <p:cNvPr id="7" name="Text 5"/>
-          <p:cNvSpPr/>
-          <p:nvPr/>
-        </p:nvSpPr>
-        <p:spPr>
-          <a:xfrm>
-            <a:off x="822960" y="1325880"/>
-            <a:ext cx="10378440" cy="4800600"/>
-          </a:xfrm>
-          <a:prstGeom prst="rect">
-            <a:avLst/>
-          </a:prstGeom>
-          <a:noFill/>
-          <a:ln/>
-        </p:spPr>
-        <p:txBody>
-          <a:bodyPr wrap="square" lIns="1016" tIns="1016" rIns="1016" bIns="1016" rtlCol="0" anchor="t">
+          <p:cNvPr id="10" name="Text 8"/>
+          <p:cNvSpPr/>
+          <p:nvPr/>
+        </p:nvSpPr>
+        <p:spPr>
+          <a:xfrm>
+            <a:off x="868680" y="1417320"/>
+            <a:ext cx="6675120" cy="4434840"/>
+          </a:xfrm>
+          <a:prstGeom prst="rect">
+            <a:avLst/>
+          </a:prstGeom>
+          <a:noFill/>
+          <a:ln/>
+        </p:spPr>
+        <p:txBody>
+          <a:bodyPr wrap="square" lIns="635" tIns="635" rIns="635" bIns="635" rtlCol="0" anchor="t">
             <a:normAutofit/>
           </a:bodyPr>
           <a:lstStyle/>
           <a:p>
+            <a:r>
+              <a:rPr lang="en-US" sz="1700" dirty="0">
+                <a:solidFill>
+                  <a:srgbClr val="17364A"/>
+                </a:solidFill>
+                <a:latin typeface="Aptos" pitchFamily="34" charset="0"/>
+                <a:ea typeface="Aptos" pitchFamily="34" charset="-122"/>
+                <a:cs typeface="Aptos" pitchFamily="34" charset="-120"/>
+              </a:rPr>
+              <a:t>This module provides national-level training guidance for public health agencies and partners.</a:t>
+            </a:r>
+            <a:endParaRPr lang="en-US" sz="1700" dirty="0"/>
+          </a:p>
+          <a:p>
+            <a:r>
+              <a:rPr lang="en-US" sz="1700" dirty="0">
+                <a:solidFill>
+                  <a:srgbClr val="17364A"/>
+                </a:solidFill>
+                <a:latin typeface="Aptos" pitchFamily="34" charset="0"/>
+                <a:ea typeface="Aptos" pitchFamily="34" charset="-122"/>
+                <a:cs typeface="Aptos" pitchFamily="34" charset="-120"/>
+              </a:rPr>
+              <a:t>It is not legal advice and does not replace review by agency legal counsel, privacy officers, procurement officials, civil.</a:t>
+            </a:r>
+            <a:endParaRPr lang="en-US" sz="1700" dirty="0"/>
+          </a:p>
+          <a:p>
+            <a:r>
+              <a:rPr lang="en-US" sz="1700" dirty="0">
+                <a:solidFill>
+                  <a:srgbClr val="17364A"/>
+                </a:solidFill>
+                <a:latin typeface="Aptos" pitchFamily="34" charset="0"/>
+                <a:ea typeface="Aptos" pitchFamily="34" charset="-122"/>
+                <a:cs typeface="Aptos" pitchFamily="34" charset="-120"/>
+              </a:rPr>
+              <a:t>Requirements may vary by state, locality, territory, Tribe, agency, funding source, data-sharing agreement, emergency.</a:t>
+            </a:r>
+            <a:endParaRPr lang="en-US" sz="1700" dirty="0"/>
+          </a:p>
+          <a:p>
+            <a:r>
+              <a:rPr lang="en-US" sz="1700" dirty="0">
+                <a:solidFill>
+                  <a:srgbClr val="17364A"/>
+                </a:solidFill>
+                <a:latin typeface="Aptos" pitchFamily="34" charset="0"/>
+                <a:ea typeface="Aptos" pitchFamily="34" charset="-122"/>
+                <a:cs typeface="Aptos" pitchFamily="34" charset="-120"/>
+              </a:rPr>
+              <a:t>Learners should use this module to identify the issues that require review and should confirm applicable requirements.</a:t>
+            </a:r>
+            <a:endParaRPr lang="en-US" sz="1700" dirty="0"/>
+          </a:p>
+        </p:txBody>
+      </p:sp>
+      <p:sp>
+        <p:nvSpPr>
+          <p:cNvPr id="11" name="Shape 9"/>
+          <p:cNvSpPr/>
+          <p:nvPr/>
+        </p:nvSpPr>
+        <p:spPr>
+          <a:xfrm>
+            <a:off x="7909560" y="1417320"/>
+            <a:ext cx="3154680" cy="1828800"/>
+          </a:xfrm>
+          <a:prstGeom prst="roundRect">
+            <a:avLst>
+              <a:gd name="adj" fmla="val 6000"/>
+            </a:avLst>
+          </a:prstGeom>
+          <a:solidFill>
+            <a:srgbClr val="EEF8ED"/>
+          </a:solidFill>
+          <a:ln w="12700">
+            <a:solidFill>
+              <a:srgbClr val="B9D7E6"/>
+            </a:solidFill>
+            <a:prstDash val="solid"/>
+          </a:ln>
+        </p:spPr>
+      </p:sp>
+      <p:sp>
+        <p:nvSpPr>
+          <p:cNvPr id="12" name="Text 10"/>
+          <p:cNvSpPr/>
+          <p:nvPr/>
+        </p:nvSpPr>
+        <p:spPr>
+          <a:xfrm>
+            <a:off x="8074152" y="1563624"/>
+            <a:ext cx="2825496" cy="201168"/>
+          </a:xfrm>
+          <a:prstGeom prst="rect">
+            <a:avLst/>
+          </a:prstGeom>
+          <a:noFill/>
+          <a:ln/>
+        </p:spPr>
+        <p:txBody>
+          <a:bodyPr wrap="square" lIns="0" tIns="0" rIns="0" bIns="0" rtlCol="0" anchor="ctr"/>
+          <a:lstStyle/>
+          <a:p>
             <a:pPr indent="0" marL="0">
               <a:buNone/>
             </a:pPr>
             <a:r>
-              <a:rPr lang="en-US" sz="1420" dirty="0">
+              <a:rPr lang="en-US" sz="950" b="1" dirty="0">
+                <a:solidFill>
+                  <a:srgbClr val="0068B7"/>
+                </a:solidFill>
+                <a:latin typeface="Aptos" pitchFamily="34" charset="0"/>
+                <a:ea typeface="Aptos" pitchFamily="34" charset="-122"/>
+                <a:cs typeface="Aptos" pitchFamily="34" charset="-120"/>
+              </a:rPr>
+              <a:t>Key idea</a:t>
+            </a:r>
+            <a:endParaRPr lang="en-US" sz="950" dirty="0"/>
+          </a:p>
+        </p:txBody>
+      </p:sp>
+      <p:sp>
+        <p:nvSpPr>
+          <p:cNvPr id="13" name="Text 11"/>
+          <p:cNvSpPr/>
+          <p:nvPr/>
+        </p:nvSpPr>
+        <p:spPr>
+          <a:xfrm>
+            <a:off x="8074152" y="1856232"/>
+            <a:ext cx="2825496" cy="1261872"/>
+          </a:xfrm>
+          <a:prstGeom prst="rect">
+            <a:avLst/>
+          </a:prstGeom>
+          <a:noFill/>
+          <a:ln/>
+        </p:spPr>
+        <p:txBody>
+          <a:bodyPr wrap="square" lIns="0" tIns="0" rIns="0" bIns="0" rtlCol="0" anchor="t">
+            <a:normAutofit/>
+          </a:bodyPr>
+          <a:lstStyle/>
+          <a:p>
+            <a:pPr indent="0" marL="0">
+              <a:buNone/>
+            </a:pPr>
+            <a:r>
+              <a:rPr lang="en-US" sz="1250" dirty="0">
                 <a:solidFill>
                   <a:srgbClr val="17364A"/>
                 </a:solidFill>
@@ -7035,9 +13083,116 @@
                 <a:ea typeface="Aptos" pitchFamily="34" charset="-122"/>
                 <a:cs typeface="Aptos" pitchFamily="34" charset="-120"/>
               </a:rPr>
-              <a:t>A state health department wants to allow staff to use AI tools for program support, document review, code assistance, case summarization, and public-facing communications. Without a governance charter, each program may develop its own rules. The communications office may require human review, the surveillance program may prohibit sensitive data entry, IT may limit tool access, and procurement may approve a vendor product without a clear validation plan. A governance operating model brings these decisions into one structured process. The agency can define low-risk uses that require staff training and supervisor approval, moderate-risk uses that require privacy and program review, and high-risk uses that require executive approval, validation evidence, monitoring, and incident response planning. The charter does not eliminate flexibility. It creates a consistent path for responsible flexibility.</a:t>
-            </a:r>
-            <a:endParaRPr lang="en-US" sz="1420" dirty="0"/>
+              <a:t>This module provides national-level training guidance for public health agencies and partners.</a:t>
+            </a:r>
+            <a:endParaRPr lang="en-US" sz="1250" dirty="0"/>
+          </a:p>
+        </p:txBody>
+      </p:sp>
+      <p:sp>
+        <p:nvSpPr>
+          <p:cNvPr id="14" name="Shape 12"/>
+          <p:cNvSpPr/>
+          <p:nvPr/>
+        </p:nvSpPr>
+        <p:spPr>
+          <a:xfrm>
+            <a:off x="7909560" y="3520440"/>
+            <a:ext cx="3154680" cy="1737360"/>
+          </a:xfrm>
+          <a:prstGeom prst="roundRect">
+            <a:avLst>
+              <a:gd name="adj" fmla="val 6316"/>
+            </a:avLst>
+          </a:prstGeom>
+          <a:solidFill>
+            <a:srgbClr val="EAF6F8"/>
+          </a:solidFill>
+          <a:ln w="12700">
+            <a:solidFill>
+              <a:srgbClr val="B9D7E6"/>
+            </a:solidFill>
+            <a:prstDash val="solid"/>
+          </a:ln>
+        </p:spPr>
+      </p:sp>
+      <p:sp>
+        <p:nvSpPr>
+          <p:cNvPr id="15" name="Text 13"/>
+          <p:cNvSpPr/>
+          <p:nvPr/>
+        </p:nvSpPr>
+        <p:spPr>
+          <a:xfrm>
+            <a:off x="8074152" y="3666744"/>
+            <a:ext cx="2825496" cy="201168"/>
+          </a:xfrm>
+          <a:prstGeom prst="rect">
+            <a:avLst/>
+          </a:prstGeom>
+          <a:noFill/>
+          <a:ln/>
+        </p:spPr>
+        <p:txBody>
+          <a:bodyPr wrap="square" lIns="0" tIns="0" rIns="0" bIns="0" rtlCol="0" anchor="ctr"/>
+          <a:lstStyle/>
+          <a:p>
+            <a:pPr indent="0" marL="0">
+              <a:buNone/>
+            </a:pPr>
+            <a:r>
+              <a:rPr lang="en-US" sz="950" b="1" dirty="0">
+                <a:solidFill>
+                  <a:srgbClr val="0068B7"/>
+                </a:solidFill>
+                <a:latin typeface="Aptos" pitchFamily="34" charset="0"/>
+                <a:ea typeface="Aptos" pitchFamily="34" charset="-122"/>
+                <a:cs typeface="Aptos" pitchFamily="34" charset="-120"/>
+              </a:rPr>
+              <a:t>Use this for</a:t>
+            </a:r>
+            <a:endParaRPr lang="en-US" sz="950" dirty="0"/>
+          </a:p>
+        </p:txBody>
+      </p:sp>
+      <p:sp>
+        <p:nvSpPr>
+          <p:cNvPr id="16" name="Text 14"/>
+          <p:cNvSpPr/>
+          <p:nvPr/>
+        </p:nvSpPr>
+        <p:spPr>
+          <a:xfrm>
+            <a:off x="8074152" y="3959352"/>
+            <a:ext cx="2825496" cy="1170432"/>
+          </a:xfrm>
+          <a:prstGeom prst="rect">
+            <a:avLst/>
+          </a:prstGeom>
+          <a:noFill/>
+          <a:ln/>
+        </p:spPr>
+        <p:txBody>
+          <a:bodyPr wrap="square" lIns="0" tIns="0" rIns="0" bIns="0" rtlCol="0" anchor="t">
+            <a:normAutofit/>
+          </a:bodyPr>
+          <a:lstStyle/>
+          <a:p>
+            <a:pPr indent="0" marL="0">
+              <a:buNone/>
+            </a:pPr>
+            <a:r>
+              <a:rPr lang="en-US" sz="1250" dirty="0">
+                <a:solidFill>
+                  <a:srgbClr val="17364A"/>
+                </a:solidFill>
+                <a:latin typeface="Aptos" pitchFamily="34" charset="0"/>
+                <a:ea typeface="Aptos" pitchFamily="34" charset="-122"/>
+                <a:cs typeface="Aptos" pitchFamily="34" charset="-120"/>
+              </a:rPr>
+              <a:t>Connect the concept to public health decisions, safeguards, documentation, or implementation work.</a:t>
+            </a:r>
+            <a:endParaRPr lang="en-US" sz="1250" dirty="0"/>
           </a:p>
         </p:txBody>
       </p:sp>
@@ -7100,7 +13255,32 @@
       </p:sp>
       <p:sp>
         <p:nvSpPr>
-          <p:cNvPr id="3" name="Text 1"/>
+          <p:cNvPr id="3" name="Shape 1"/>
+          <p:cNvSpPr/>
+          <p:nvPr/>
+        </p:nvSpPr>
+        <p:spPr>
+          <a:xfrm>
+            <a:off x="0" y="164592"/>
+            <a:ext cx="146304" cy="6693408"/>
+          </a:xfrm>
+          <a:prstGeom prst="rect">
+            <a:avLst/>
+          </a:prstGeom>
+          <a:solidFill>
+            <a:srgbClr val="2F8A28"/>
+          </a:solidFill>
+          <a:ln w="12700">
+            <a:solidFill>
+              <a:srgbClr val="2F8A28"/>
+            </a:solidFill>
+            <a:prstDash val="solid"/>
+          </a:ln>
+        </p:spPr>
+      </p:sp>
+      <p:sp>
+        <p:nvSpPr>
+          <p:cNvPr id="4" name="Text 2"/>
           <p:cNvSpPr/>
           <p:nvPr/>
         </p:nvSpPr>
@@ -7139,7 +13319,7 @@
       </p:sp>
       <p:sp>
         <p:nvSpPr>
-          <p:cNvPr id="4" name="Text 2"/>
+          <p:cNvPr id="5" name="Text 3"/>
           <p:cNvSpPr/>
           <p:nvPr/>
         </p:nvSpPr>
@@ -7178,7 +13358,7 @@
       </p:sp>
       <p:sp>
         <p:nvSpPr>
-          <p:cNvPr id="5" name="Text 3"/>
+          <p:cNvPr id="6" name="Text 4"/>
           <p:cNvSpPr/>
           <p:nvPr/>
         </p:nvSpPr>
@@ -7217,13 +13397,77 @@
       </p:sp>
       <p:sp>
         <p:nvSpPr>
-          <p:cNvPr id="6" name="Text 4"/>
+          <p:cNvPr id="7" name="Shape 5"/>
           <p:cNvSpPr/>
           <p:nvPr/>
         </p:nvSpPr>
         <p:spPr>
           <a:xfrm>
             <a:off x="640080" y="658368"/>
+            <a:ext cx="420624" cy="420624"/>
+          </a:xfrm>
+          <a:prstGeom prst="ellipse">
+            <a:avLst/>
+          </a:prstGeom>
+          <a:solidFill>
+            <a:srgbClr val="0068B7"/>
+          </a:solidFill>
+          <a:ln w="12700">
+            <a:solidFill>
+              <a:srgbClr val="0068B7"/>
+            </a:solidFill>
+            <a:prstDash val="solid"/>
+          </a:ln>
+        </p:spPr>
+      </p:sp>
+      <p:sp>
+        <p:nvSpPr>
+          <p:cNvPr id="8" name="Text 6"/>
+          <p:cNvSpPr/>
+          <p:nvPr/>
+        </p:nvSpPr>
+        <p:spPr>
+          <a:xfrm>
+            <a:off x="640080" y="731520"/>
+            <a:ext cx="420624" cy="164592"/>
+          </a:xfrm>
+          <a:prstGeom prst="rect">
+            <a:avLst/>
+          </a:prstGeom>
+          <a:noFill/>
+          <a:ln/>
+        </p:spPr>
+        <p:txBody>
+          <a:bodyPr wrap="square" lIns="0" tIns="0" rIns="0" bIns="0" rtlCol="0" anchor="ctr"/>
+          <a:lstStyle/>
+          <a:p>
+            <a:pPr algn="ctr" indent="0" marL="0">
+              <a:buNone/>
+            </a:pPr>
+            <a:r>
+              <a:rPr lang="en-US" sz="1100" b="1" dirty="0">
+                <a:solidFill>
+                  <a:srgbClr val="FFFFFF"/>
+                </a:solidFill>
+                <a:latin typeface="Aptos" pitchFamily="34" charset="0"/>
+                <a:ea typeface="Aptos" pitchFamily="34" charset="-122"/>
+                <a:cs typeface="Aptos" pitchFamily="34" charset="-120"/>
+              </a:rPr>
+              <a:t>4</a:t>
+            </a:r>
+            <a:endParaRPr lang="en-US" sz="1100" dirty="0"/>
+          </a:p>
+        </p:txBody>
+      </p:sp>
+      <p:sp>
+        <p:nvSpPr>
+          <p:cNvPr id="9" name="Text 7"/>
+          <p:cNvSpPr/>
+          <p:nvPr/>
+        </p:nvSpPr>
+        <p:spPr>
+          <a:xfrm>
+            <a:off x="640080" y="621792"/>
             <a:ext cx="10881360" cy="566928"/>
           </a:xfrm>
           <a:prstGeom prst="rect">
@@ -7250,7 +13494,7 @@
                 <a:ea typeface="Aptos Display" pitchFamily="34" charset="-122"/>
                 <a:cs typeface="Aptos Display" pitchFamily="34" charset="-120"/>
               </a:rPr>
-              <a:t>Technical and Governance Deep Dive</a:t>
+              <a:t>Why This Topic Matters for Public Health AI</a:t>
             </a:r>
             <a:endParaRPr lang="en-US" sz="2700" dirty="0"/>
           </a:p>
@@ -7258,32 +13502,178 @@
       </p:sp>
       <p:sp>
         <p:nvSpPr>
-          <p:cNvPr id="7" name="Text 5"/>
-          <p:cNvSpPr/>
-          <p:nvPr/>
-        </p:nvSpPr>
-        <p:spPr>
-          <a:xfrm>
-            <a:off x="822960" y="1325880"/>
-            <a:ext cx="10378440" cy="4800600"/>
-          </a:xfrm>
-          <a:prstGeom prst="rect">
-            <a:avLst/>
-          </a:prstGeom>
-          <a:noFill/>
-          <a:ln/>
-        </p:spPr>
-        <p:txBody>
-          <a:bodyPr wrap="square" lIns="1016" tIns="1016" rIns="1016" bIns="1016" rtlCol="0" anchor="t">
+          <p:cNvPr id="10" name="Text 8"/>
+          <p:cNvSpPr/>
+          <p:nvPr/>
+        </p:nvSpPr>
+        <p:spPr>
+          <a:xfrm>
+            <a:off x="868680" y="1417320"/>
+            <a:ext cx="6675120" cy="4434840"/>
+          </a:xfrm>
+          <a:prstGeom prst="rect">
+            <a:avLst/>
+          </a:prstGeom>
+          <a:noFill/>
+          <a:ln/>
+        </p:spPr>
+        <p:txBody>
+          <a:bodyPr wrap="square" lIns="635" tIns="635" rIns="635" bIns="635" rtlCol="0" anchor="t">
             <a:normAutofit/>
           </a:bodyPr>
           <a:lstStyle/>
           <a:p>
+            <a:r>
+              <a:rPr lang="en-US" sz="1700" dirty="0">
+                <a:solidFill>
+                  <a:srgbClr val="17364A"/>
+                </a:solidFill>
+                <a:latin typeface="Aptos" pitchFamily="34" charset="0"/>
+                <a:ea typeface="Aptos" pitchFamily="34" charset="-122"/>
+                <a:cs typeface="Aptos" pitchFamily="34" charset="-120"/>
+              </a:rPr>
+              <a:t>Public health agencies operate under legal authorities, public accountability obligations, data-sharing agreements, privacy.</a:t>
+            </a:r>
+            <a:endParaRPr lang="en-US" sz="1700" dirty="0"/>
+          </a:p>
+          <a:p>
+            <a:r>
+              <a:rPr lang="en-US" sz="1700" dirty="0">
+                <a:solidFill>
+                  <a:srgbClr val="17364A"/>
+                </a:solidFill>
+                <a:latin typeface="Aptos" pitchFamily="34" charset="0"/>
+                <a:ea typeface="Aptos" pitchFamily="34" charset="-122"/>
+                <a:cs typeface="Aptos" pitchFamily="34" charset="-120"/>
+              </a:rPr>
+              <a:t>AI governance must therefore be more than a technology review process.</a:t>
+            </a:r>
+            <a:endParaRPr lang="en-US" sz="1700" dirty="0"/>
+          </a:p>
+          <a:p>
+            <a:r>
+              <a:rPr lang="en-US" sz="1700" dirty="0">
+                <a:solidFill>
+                  <a:srgbClr val="17364A"/>
+                </a:solidFill>
+                <a:latin typeface="Aptos" pitchFamily="34" charset="0"/>
+                <a:ea typeface="Aptos" pitchFamily="34" charset="-122"/>
+                <a:cs typeface="Aptos" pitchFamily="34" charset="-120"/>
+              </a:rPr>
+              <a:t>It must define how the agency decides which AI uses are acceptable, which safeguards are required, who has authority to.</a:t>
+            </a:r>
+            <a:endParaRPr lang="en-US" sz="1700" dirty="0"/>
+          </a:p>
+          <a:p>
+            <a:r>
+              <a:rPr lang="en-US" sz="1700" dirty="0">
+                <a:solidFill>
+                  <a:srgbClr val="17364A"/>
+                </a:solidFill>
+                <a:latin typeface="Aptos" pitchFamily="34" charset="0"/>
+                <a:ea typeface="Aptos" pitchFamily="34" charset="-122"/>
+                <a:cs typeface="Aptos" pitchFamily="34" charset="-120"/>
+              </a:rPr>
+              <a:t>A governance operating model also helps avoid the problem of uneven adoption.</a:t>
+            </a:r>
+            <a:endParaRPr lang="en-US" sz="1700" dirty="0"/>
+          </a:p>
+        </p:txBody>
+      </p:sp>
+      <p:sp>
+        <p:nvSpPr>
+          <p:cNvPr id="11" name="Shape 9"/>
+          <p:cNvSpPr/>
+          <p:nvPr/>
+        </p:nvSpPr>
+        <p:spPr>
+          <a:xfrm>
+            <a:off x="7909560" y="1417320"/>
+            <a:ext cx="3154680" cy="1828800"/>
+          </a:xfrm>
+          <a:prstGeom prst="roundRect">
+            <a:avLst>
+              <a:gd name="adj" fmla="val 6000"/>
+            </a:avLst>
+          </a:prstGeom>
+          <a:solidFill>
+            <a:srgbClr val="EEF8ED"/>
+          </a:solidFill>
+          <a:ln w="12700">
+            <a:solidFill>
+              <a:srgbClr val="B9D7E6"/>
+            </a:solidFill>
+            <a:prstDash val="solid"/>
+          </a:ln>
+        </p:spPr>
+      </p:sp>
+      <p:sp>
+        <p:nvSpPr>
+          <p:cNvPr id="12" name="Text 10"/>
+          <p:cNvSpPr/>
+          <p:nvPr/>
+        </p:nvSpPr>
+        <p:spPr>
+          <a:xfrm>
+            <a:off x="8074152" y="1563624"/>
+            <a:ext cx="2825496" cy="201168"/>
+          </a:xfrm>
+          <a:prstGeom prst="rect">
+            <a:avLst/>
+          </a:prstGeom>
+          <a:noFill/>
+          <a:ln/>
+        </p:spPr>
+        <p:txBody>
+          <a:bodyPr wrap="square" lIns="0" tIns="0" rIns="0" bIns="0" rtlCol="0" anchor="ctr"/>
+          <a:lstStyle/>
+          <a:p>
             <a:pPr indent="0" marL="0">
               <a:buNone/>
             </a:pPr>
             <a:r>
-              <a:rPr lang="en-US" sz="1420" dirty="0">
+              <a:rPr lang="en-US" sz="950" b="1" dirty="0">
+                <a:solidFill>
+                  <a:srgbClr val="0068B7"/>
+                </a:solidFill>
+                <a:latin typeface="Aptos" pitchFamily="34" charset="0"/>
+                <a:ea typeface="Aptos" pitchFamily="34" charset="-122"/>
+                <a:cs typeface="Aptos" pitchFamily="34" charset="-120"/>
+              </a:rPr>
+              <a:t>Key idea</a:t>
+            </a:r>
+            <a:endParaRPr lang="en-US" sz="950" dirty="0"/>
+          </a:p>
+        </p:txBody>
+      </p:sp>
+      <p:sp>
+        <p:nvSpPr>
+          <p:cNvPr id="13" name="Text 11"/>
+          <p:cNvSpPr/>
+          <p:nvPr/>
+        </p:nvSpPr>
+        <p:spPr>
+          <a:xfrm>
+            <a:off x="8074152" y="1856232"/>
+            <a:ext cx="2825496" cy="1261872"/>
+          </a:xfrm>
+          <a:prstGeom prst="rect">
+            <a:avLst/>
+          </a:prstGeom>
+          <a:noFill/>
+          <a:ln/>
+        </p:spPr>
+        <p:txBody>
+          <a:bodyPr wrap="square" lIns="0" tIns="0" rIns="0" bIns="0" rtlCol="0" anchor="t">
+            <a:normAutofit/>
+          </a:bodyPr>
+          <a:lstStyle/>
+          <a:p>
+            <a:pPr indent="0" marL="0">
+              <a:buNone/>
+            </a:pPr>
+            <a:r>
+              <a:rPr lang="en-US" sz="1250" dirty="0">
                 <a:solidFill>
                   <a:srgbClr val="17364A"/>
                 </a:solidFill>
@@ -7291,9 +13681,116 @@
                 <a:ea typeface="Aptos" pitchFamily="34" charset="-122"/>
                 <a:cs typeface="Aptos" pitchFamily="34" charset="-120"/>
               </a:rPr>
-              <a:t>A strong governance charter begins with purpose and scope. Purpose explains why the governance body exists, such as protecting public trust, supporting responsible innovation, aligning AI investments with agency priorities, and managing risk across the AI lifecycle. Scope explains what falls under the governance process. For public health, scope should include internally developed AI tools, vendor AI products, generative AI tools, predictive models, agentic workflows, AI features embedded in existing software, and AI-supported uses of sensitive or operational data. The operating model should define roles clearly. An executive sponsor provides authority and connects governance to agency strategy. A governance chair manages the review process. Privacy, legal, cybersecurity, equity, procurement, records, program, data, and informatics representatives bring specialized review perspectives. Technical reviewers assess architecture, validation, interoperability, security, and monitoring. Program owners remain responsible for the public health workflow and for ensuring that AI supports, rather than replaces, appropriate judgment. The model should also define the life of an AI use case. Intake captures the proposed use, data involved, intended users, expected benefits, risks, and requested decision. Triage determines the review level. Governance review evaluates authority, data use, privacy, equity, security, accessibility, technical readiness, validation, procurement, and monitoring. Approval should include conditions, documentation requirements, and an owner. Post-approval oversight should review performance, incidents, changes, and whether the use case should continue.</a:t>
-            </a:r>
-            <a:endParaRPr lang="en-US" sz="1420" dirty="0"/>
+              <a:t>Public health agencies operate under legal authorities, public accountability obligations, data-sharing agreements, privacy.</a:t>
+            </a:r>
+            <a:endParaRPr lang="en-US" sz="1250" dirty="0"/>
+          </a:p>
+        </p:txBody>
+      </p:sp>
+      <p:sp>
+        <p:nvSpPr>
+          <p:cNvPr id="14" name="Shape 12"/>
+          <p:cNvSpPr/>
+          <p:nvPr/>
+        </p:nvSpPr>
+        <p:spPr>
+          <a:xfrm>
+            <a:off x="7909560" y="3520440"/>
+            <a:ext cx="3154680" cy="1737360"/>
+          </a:xfrm>
+          <a:prstGeom prst="roundRect">
+            <a:avLst>
+              <a:gd name="adj" fmla="val 6316"/>
+            </a:avLst>
+          </a:prstGeom>
+          <a:solidFill>
+            <a:srgbClr val="EAF6F8"/>
+          </a:solidFill>
+          <a:ln w="12700">
+            <a:solidFill>
+              <a:srgbClr val="B9D7E6"/>
+            </a:solidFill>
+            <a:prstDash val="solid"/>
+          </a:ln>
+        </p:spPr>
+      </p:sp>
+      <p:sp>
+        <p:nvSpPr>
+          <p:cNvPr id="15" name="Text 13"/>
+          <p:cNvSpPr/>
+          <p:nvPr/>
+        </p:nvSpPr>
+        <p:spPr>
+          <a:xfrm>
+            <a:off x="8074152" y="3666744"/>
+            <a:ext cx="2825496" cy="201168"/>
+          </a:xfrm>
+          <a:prstGeom prst="rect">
+            <a:avLst/>
+          </a:prstGeom>
+          <a:noFill/>
+          <a:ln/>
+        </p:spPr>
+        <p:txBody>
+          <a:bodyPr wrap="square" lIns="0" tIns="0" rIns="0" bIns="0" rtlCol="0" anchor="ctr"/>
+          <a:lstStyle/>
+          <a:p>
+            <a:pPr indent="0" marL="0">
+              <a:buNone/>
+            </a:pPr>
+            <a:r>
+              <a:rPr lang="en-US" sz="950" b="1" dirty="0">
+                <a:solidFill>
+                  <a:srgbClr val="0068B7"/>
+                </a:solidFill>
+                <a:latin typeface="Aptos" pitchFamily="34" charset="0"/>
+                <a:ea typeface="Aptos" pitchFamily="34" charset="-122"/>
+                <a:cs typeface="Aptos" pitchFamily="34" charset="-120"/>
+              </a:rPr>
+              <a:t>Use this for</a:t>
+            </a:r>
+            <a:endParaRPr lang="en-US" sz="950" dirty="0"/>
+          </a:p>
+        </p:txBody>
+      </p:sp>
+      <p:sp>
+        <p:nvSpPr>
+          <p:cNvPr id="16" name="Text 14"/>
+          <p:cNvSpPr/>
+          <p:nvPr/>
+        </p:nvSpPr>
+        <p:spPr>
+          <a:xfrm>
+            <a:off x="8074152" y="3959352"/>
+            <a:ext cx="2825496" cy="1170432"/>
+          </a:xfrm>
+          <a:prstGeom prst="rect">
+            <a:avLst/>
+          </a:prstGeom>
+          <a:noFill/>
+          <a:ln/>
+        </p:spPr>
+        <p:txBody>
+          <a:bodyPr wrap="square" lIns="0" tIns="0" rIns="0" bIns="0" rtlCol="0" anchor="t">
+            <a:normAutofit/>
+          </a:bodyPr>
+          <a:lstStyle/>
+          <a:p>
+            <a:pPr indent="0" marL="0">
+              <a:buNone/>
+            </a:pPr>
+            <a:r>
+              <a:rPr lang="en-US" sz="1250" dirty="0">
+                <a:solidFill>
+                  <a:srgbClr val="17364A"/>
+                </a:solidFill>
+                <a:latin typeface="Aptos" pitchFamily="34" charset="0"/>
+                <a:ea typeface="Aptos" pitchFamily="34" charset="-122"/>
+                <a:cs typeface="Aptos" pitchFamily="34" charset="-120"/>
+              </a:rPr>
+              <a:t>Connect the concept to public health decisions, safeguards, documentation, or implementation work.</a:t>
+            </a:r>
+            <a:endParaRPr lang="en-US" sz="1250" dirty="0"/>
           </a:p>
         </p:txBody>
       </p:sp>
@@ -7356,7 +13853,32 @@
       </p:sp>
       <p:sp>
         <p:nvSpPr>
-          <p:cNvPr id="3" name="Text 1"/>
+          <p:cNvPr id="3" name="Shape 1"/>
+          <p:cNvSpPr/>
+          <p:nvPr/>
+        </p:nvSpPr>
+        <p:spPr>
+          <a:xfrm>
+            <a:off x="0" y="164592"/>
+            <a:ext cx="146304" cy="6693408"/>
+          </a:xfrm>
+          <a:prstGeom prst="rect">
+            <a:avLst/>
+          </a:prstGeom>
+          <a:solidFill>
+            <a:srgbClr val="2F8A28"/>
+          </a:solidFill>
+          <a:ln w="12700">
+            <a:solidFill>
+              <a:srgbClr val="2F8A28"/>
+            </a:solidFill>
+            <a:prstDash val="solid"/>
+          </a:ln>
+        </p:spPr>
+      </p:sp>
+      <p:sp>
+        <p:nvSpPr>
+          <p:cNvPr id="4" name="Text 2"/>
           <p:cNvSpPr/>
           <p:nvPr/>
         </p:nvSpPr>
@@ -7395,7 +13917,7 @@
       </p:sp>
       <p:sp>
         <p:nvSpPr>
-          <p:cNvPr id="4" name="Text 2"/>
+          <p:cNvPr id="5" name="Text 3"/>
           <p:cNvSpPr/>
           <p:nvPr/>
         </p:nvSpPr>
@@ -7434,7 +13956,7 @@
       </p:sp>
       <p:sp>
         <p:nvSpPr>
-          <p:cNvPr id="5" name="Text 3"/>
+          <p:cNvPr id="6" name="Text 4"/>
           <p:cNvSpPr/>
           <p:nvPr/>
         </p:nvSpPr>
@@ -7473,13 +13995,77 @@
       </p:sp>
       <p:sp>
         <p:nvSpPr>
-          <p:cNvPr id="6" name="Text 4"/>
+          <p:cNvPr id="7" name="Shape 5"/>
           <p:cNvSpPr/>
           <p:nvPr/>
         </p:nvSpPr>
         <p:spPr>
           <a:xfrm>
             <a:off x="640080" y="658368"/>
+            <a:ext cx="420624" cy="420624"/>
+          </a:xfrm>
+          <a:prstGeom prst="ellipse">
+            <a:avLst/>
+          </a:prstGeom>
+          <a:solidFill>
+            <a:srgbClr val="0068B7"/>
+          </a:solidFill>
+          <a:ln w="12700">
+            <a:solidFill>
+              <a:srgbClr val="0068B7"/>
+            </a:solidFill>
+            <a:prstDash val="solid"/>
+          </a:ln>
+        </p:spPr>
+      </p:sp>
+      <p:sp>
+        <p:nvSpPr>
+          <p:cNvPr id="8" name="Text 6"/>
+          <p:cNvSpPr/>
+          <p:nvPr/>
+        </p:nvSpPr>
+        <p:spPr>
+          <a:xfrm>
+            <a:off x="640080" y="731520"/>
+            <a:ext cx="420624" cy="164592"/>
+          </a:xfrm>
+          <a:prstGeom prst="rect">
+            <a:avLst/>
+          </a:prstGeom>
+          <a:noFill/>
+          <a:ln/>
+        </p:spPr>
+        <p:txBody>
+          <a:bodyPr wrap="square" lIns="0" tIns="0" rIns="0" bIns="0" rtlCol="0" anchor="ctr"/>
+          <a:lstStyle/>
+          <a:p>
+            <a:pPr algn="ctr" indent="0" marL="0">
+              <a:buNone/>
+            </a:pPr>
+            <a:r>
+              <a:rPr lang="en-US" sz="1100" b="1" dirty="0">
+                <a:solidFill>
+                  <a:srgbClr val="FFFFFF"/>
+                </a:solidFill>
+                <a:latin typeface="Aptos" pitchFamily="34" charset="0"/>
+                <a:ea typeface="Aptos" pitchFamily="34" charset="-122"/>
+                <a:cs typeface="Aptos" pitchFamily="34" charset="-120"/>
+              </a:rPr>
+              <a:t>5</a:t>
+            </a:r>
+            <a:endParaRPr lang="en-US" sz="1100" dirty="0"/>
+          </a:p>
+        </p:txBody>
+      </p:sp>
+      <p:sp>
+        <p:nvSpPr>
+          <p:cNvPr id="9" name="Text 7"/>
+          <p:cNvSpPr/>
+          <p:nvPr/>
+        </p:nvSpPr>
+        <p:spPr>
+          <a:xfrm>
+            <a:off x="640080" y="621792"/>
             <a:ext cx="10881360" cy="566928"/>
           </a:xfrm>
           <a:prstGeom prst="rect">
@@ -7506,7 +14092,7 @@
                 <a:ea typeface="Aptos Display" pitchFamily="34" charset="-122"/>
                 <a:cs typeface="Aptos Display" pitchFamily="34" charset="-120"/>
               </a:rPr>
-              <a:t>Risks, Failure Modes, and Guardrails</a:t>
+              <a:t>Public Health Example</a:t>
             </a:r>
             <a:endParaRPr lang="en-US" sz="2700" dirty="0"/>
           </a:p>
@@ -7514,32 +14100,178 @@
       </p:sp>
       <p:sp>
         <p:nvSpPr>
-          <p:cNvPr id="7" name="Text 5"/>
-          <p:cNvSpPr/>
-          <p:nvPr/>
-        </p:nvSpPr>
-        <p:spPr>
-          <a:xfrm>
-            <a:off x="822960" y="1325880"/>
-            <a:ext cx="10378440" cy="4800600"/>
-          </a:xfrm>
-          <a:prstGeom prst="rect">
-            <a:avLst/>
-          </a:prstGeom>
-          <a:noFill/>
-          <a:ln/>
-        </p:spPr>
-        <p:txBody>
-          <a:bodyPr wrap="square" lIns="1016" tIns="1016" rIns="1016" bIns="1016" rtlCol="0" anchor="t">
+          <p:cNvPr id="10" name="Text 8"/>
+          <p:cNvSpPr/>
+          <p:nvPr/>
+        </p:nvSpPr>
+        <p:spPr>
+          <a:xfrm>
+            <a:off x="868680" y="1417320"/>
+            <a:ext cx="6675120" cy="4434840"/>
+          </a:xfrm>
+          <a:prstGeom prst="rect">
+            <a:avLst/>
+          </a:prstGeom>
+          <a:noFill/>
+          <a:ln/>
+        </p:spPr>
+        <p:txBody>
+          <a:bodyPr wrap="square" lIns="635" tIns="635" rIns="635" bIns="635" rtlCol="0" anchor="t">
             <a:normAutofit/>
           </a:bodyPr>
           <a:lstStyle/>
           <a:p>
+            <a:r>
+              <a:rPr lang="en-US" sz="1700" dirty="0">
+                <a:solidFill>
+                  <a:srgbClr val="17364A"/>
+                </a:solidFill>
+                <a:latin typeface="Aptos" pitchFamily="34" charset="0"/>
+                <a:ea typeface="Aptos" pitchFamily="34" charset="-122"/>
+                <a:cs typeface="Aptos" pitchFamily="34" charset="-120"/>
+              </a:rPr>
+              <a:t>A state health department wants to allow staff to use AI tools for program support, document review, code assistance, case.</a:t>
+            </a:r>
+            <a:endParaRPr lang="en-US" sz="1700" dirty="0"/>
+          </a:p>
+          <a:p>
+            <a:r>
+              <a:rPr lang="en-US" sz="1700" dirty="0">
+                <a:solidFill>
+                  <a:srgbClr val="17364A"/>
+                </a:solidFill>
+                <a:latin typeface="Aptos" pitchFamily="34" charset="0"/>
+                <a:ea typeface="Aptos" pitchFamily="34" charset="-122"/>
+                <a:cs typeface="Aptos" pitchFamily="34" charset="-120"/>
+              </a:rPr>
+              <a:t>Without a governance charter, each program may develop its own rules.</a:t>
+            </a:r>
+            <a:endParaRPr lang="en-US" sz="1700" dirty="0"/>
+          </a:p>
+          <a:p>
+            <a:r>
+              <a:rPr lang="en-US" sz="1700" dirty="0">
+                <a:solidFill>
+                  <a:srgbClr val="17364A"/>
+                </a:solidFill>
+                <a:latin typeface="Aptos" pitchFamily="34" charset="0"/>
+                <a:ea typeface="Aptos" pitchFamily="34" charset="-122"/>
+                <a:cs typeface="Aptos" pitchFamily="34" charset="-120"/>
+              </a:rPr>
+              <a:t>The communications office may require human review, the surveillance program may prohibit sensitive data entry, IT may.</a:t>
+            </a:r>
+            <a:endParaRPr lang="en-US" sz="1700" dirty="0"/>
+          </a:p>
+          <a:p>
+            <a:r>
+              <a:rPr lang="en-US" sz="1700" dirty="0">
+                <a:solidFill>
+                  <a:srgbClr val="17364A"/>
+                </a:solidFill>
+                <a:latin typeface="Aptos" pitchFamily="34" charset="0"/>
+                <a:ea typeface="Aptos" pitchFamily="34" charset="-122"/>
+                <a:cs typeface="Aptos" pitchFamily="34" charset="-120"/>
+              </a:rPr>
+              <a:t>A governance operating model brings these decisions into one structured process.</a:t>
+            </a:r>
+            <a:endParaRPr lang="en-US" sz="1700" dirty="0"/>
+          </a:p>
+        </p:txBody>
+      </p:sp>
+      <p:sp>
+        <p:nvSpPr>
+          <p:cNvPr id="11" name="Shape 9"/>
+          <p:cNvSpPr/>
+          <p:nvPr/>
+        </p:nvSpPr>
+        <p:spPr>
+          <a:xfrm>
+            <a:off x="7909560" y="1417320"/>
+            <a:ext cx="3154680" cy="1828800"/>
+          </a:xfrm>
+          <a:prstGeom prst="roundRect">
+            <a:avLst>
+              <a:gd name="adj" fmla="val 6000"/>
+            </a:avLst>
+          </a:prstGeom>
+          <a:solidFill>
+            <a:srgbClr val="EEF8ED"/>
+          </a:solidFill>
+          <a:ln w="12700">
+            <a:solidFill>
+              <a:srgbClr val="B9D7E6"/>
+            </a:solidFill>
+            <a:prstDash val="solid"/>
+          </a:ln>
+        </p:spPr>
+      </p:sp>
+      <p:sp>
+        <p:nvSpPr>
+          <p:cNvPr id="12" name="Text 10"/>
+          <p:cNvSpPr/>
+          <p:nvPr/>
+        </p:nvSpPr>
+        <p:spPr>
+          <a:xfrm>
+            <a:off x="8074152" y="1563624"/>
+            <a:ext cx="2825496" cy="201168"/>
+          </a:xfrm>
+          <a:prstGeom prst="rect">
+            <a:avLst/>
+          </a:prstGeom>
+          <a:noFill/>
+          <a:ln/>
+        </p:spPr>
+        <p:txBody>
+          <a:bodyPr wrap="square" lIns="0" tIns="0" rIns="0" bIns="0" rtlCol="0" anchor="ctr"/>
+          <a:lstStyle/>
+          <a:p>
             <a:pPr indent="0" marL="0">
               <a:buNone/>
             </a:pPr>
             <a:r>
-              <a:rPr lang="en-US" sz="1420" dirty="0">
+              <a:rPr lang="en-US" sz="950" b="1" dirty="0">
+                <a:solidFill>
+                  <a:srgbClr val="0068B7"/>
+                </a:solidFill>
+                <a:latin typeface="Aptos" pitchFamily="34" charset="0"/>
+                <a:ea typeface="Aptos" pitchFamily="34" charset="-122"/>
+                <a:cs typeface="Aptos" pitchFamily="34" charset="-120"/>
+              </a:rPr>
+              <a:t>Key idea</a:t>
+            </a:r>
+            <a:endParaRPr lang="en-US" sz="950" dirty="0"/>
+          </a:p>
+        </p:txBody>
+      </p:sp>
+      <p:sp>
+        <p:nvSpPr>
+          <p:cNvPr id="13" name="Text 11"/>
+          <p:cNvSpPr/>
+          <p:nvPr/>
+        </p:nvSpPr>
+        <p:spPr>
+          <a:xfrm>
+            <a:off x="8074152" y="1856232"/>
+            <a:ext cx="2825496" cy="1261872"/>
+          </a:xfrm>
+          <a:prstGeom prst="rect">
+            <a:avLst/>
+          </a:prstGeom>
+          <a:noFill/>
+          <a:ln/>
+        </p:spPr>
+        <p:txBody>
+          <a:bodyPr wrap="square" lIns="0" tIns="0" rIns="0" bIns="0" rtlCol="0" anchor="t">
+            <a:normAutofit/>
+          </a:bodyPr>
+          <a:lstStyle/>
+          <a:p>
+            <a:pPr indent="0" marL="0">
+              <a:buNone/>
+            </a:pPr>
+            <a:r>
+              <a:rPr lang="en-US" sz="1250" dirty="0">
                 <a:solidFill>
                   <a:srgbClr val="17364A"/>
                 </a:solidFill>
@@ -7547,9 +14279,116 @@
                 <a:ea typeface="Aptos" pitchFamily="34" charset="-122"/>
                 <a:cs typeface="Aptos" pitchFamily="34" charset="-120"/>
               </a:rPr>
-              <a:t>A common failure mode is governance that exists only on paper. A charter may sound strong, but if staff do not know when to submit use cases, who decides, or what evidence is required, AI decisions will still happen informally. A practical guardrail is to create a simple intake form, review rubric, meeting cadence, decision log, and escalation pathway. Another failure mode is over-centralization. If every minor use requires extensive review, staff may avoid the process or use unapproved tools. Governance should be tiered so low-risk uses move quickly while high-impact uses receive deeper review. This balance helps the agency support innovation while protecting public health values and obligations.</a:t>
-            </a:r>
-            <a:endParaRPr lang="en-US" sz="1420" dirty="0"/>
+              <a:t>A state health department wants to allow staff to use AI tools for program support, document review, code assistance, case.</a:t>
+            </a:r>
+            <a:endParaRPr lang="en-US" sz="1250" dirty="0"/>
+          </a:p>
+        </p:txBody>
+      </p:sp>
+      <p:sp>
+        <p:nvSpPr>
+          <p:cNvPr id="14" name="Shape 12"/>
+          <p:cNvSpPr/>
+          <p:nvPr/>
+        </p:nvSpPr>
+        <p:spPr>
+          <a:xfrm>
+            <a:off x="7909560" y="3520440"/>
+            <a:ext cx="3154680" cy="1737360"/>
+          </a:xfrm>
+          <a:prstGeom prst="roundRect">
+            <a:avLst>
+              <a:gd name="adj" fmla="val 6316"/>
+            </a:avLst>
+          </a:prstGeom>
+          <a:solidFill>
+            <a:srgbClr val="EAF6F8"/>
+          </a:solidFill>
+          <a:ln w="12700">
+            <a:solidFill>
+              <a:srgbClr val="B9D7E6"/>
+            </a:solidFill>
+            <a:prstDash val="solid"/>
+          </a:ln>
+        </p:spPr>
+      </p:sp>
+      <p:sp>
+        <p:nvSpPr>
+          <p:cNvPr id="15" name="Text 13"/>
+          <p:cNvSpPr/>
+          <p:nvPr/>
+        </p:nvSpPr>
+        <p:spPr>
+          <a:xfrm>
+            <a:off x="8074152" y="3666744"/>
+            <a:ext cx="2825496" cy="201168"/>
+          </a:xfrm>
+          <a:prstGeom prst="rect">
+            <a:avLst/>
+          </a:prstGeom>
+          <a:noFill/>
+          <a:ln/>
+        </p:spPr>
+        <p:txBody>
+          <a:bodyPr wrap="square" lIns="0" tIns="0" rIns="0" bIns="0" rtlCol="0" anchor="ctr"/>
+          <a:lstStyle/>
+          <a:p>
+            <a:pPr indent="0" marL="0">
+              <a:buNone/>
+            </a:pPr>
+            <a:r>
+              <a:rPr lang="en-US" sz="950" b="1" dirty="0">
+                <a:solidFill>
+                  <a:srgbClr val="0068B7"/>
+                </a:solidFill>
+                <a:latin typeface="Aptos" pitchFamily="34" charset="0"/>
+                <a:ea typeface="Aptos" pitchFamily="34" charset="-122"/>
+                <a:cs typeface="Aptos" pitchFamily="34" charset="-120"/>
+              </a:rPr>
+              <a:t>Use this for</a:t>
+            </a:r>
+            <a:endParaRPr lang="en-US" sz="950" dirty="0"/>
+          </a:p>
+        </p:txBody>
+      </p:sp>
+      <p:sp>
+        <p:nvSpPr>
+          <p:cNvPr id="16" name="Text 14"/>
+          <p:cNvSpPr/>
+          <p:nvPr/>
+        </p:nvSpPr>
+        <p:spPr>
+          <a:xfrm>
+            <a:off x="8074152" y="3959352"/>
+            <a:ext cx="2825496" cy="1170432"/>
+          </a:xfrm>
+          <a:prstGeom prst="rect">
+            <a:avLst/>
+          </a:prstGeom>
+          <a:noFill/>
+          <a:ln/>
+        </p:spPr>
+        <p:txBody>
+          <a:bodyPr wrap="square" lIns="0" tIns="0" rIns="0" bIns="0" rtlCol="0" anchor="t">
+            <a:normAutofit/>
+          </a:bodyPr>
+          <a:lstStyle/>
+          <a:p>
+            <a:pPr indent="0" marL="0">
+              <a:buNone/>
+            </a:pPr>
+            <a:r>
+              <a:rPr lang="en-US" sz="1250" dirty="0">
+                <a:solidFill>
+                  <a:srgbClr val="17364A"/>
+                </a:solidFill>
+                <a:latin typeface="Aptos" pitchFamily="34" charset="0"/>
+                <a:ea typeface="Aptos" pitchFamily="34" charset="-122"/>
+                <a:cs typeface="Aptos" pitchFamily="34" charset="-120"/>
+              </a:rPr>
+              <a:t>Connect the concept to public health decisions, safeguards, documentation, or implementation work.</a:t>
+            </a:r>
+            <a:endParaRPr lang="en-US" sz="1250" dirty="0"/>
           </a:p>
         </p:txBody>
       </p:sp>

--- a/downloads/presentations/modules/lesson-47-ai-governance-charter-and-operating-model.pptx
+++ b/downloads/presentations/modules/lesson-47-ai-governance-charter-and-operating-model.pptx
@@ -2900,6 +2900,45 @@
           </a:p>
         </p:txBody>
       </p:sp>
+      <p:sp>
+        <p:nvSpPr>
+          <p:cNvPr id="8" name="Text 5"/>
+          <p:cNvSpPr/>
+          <p:nvPr/>
+        </p:nvSpPr>
+        <p:spPr>
+          <a:xfrm>
+            <a:off x="11137392" y="6510528"/>
+            <a:ext cx="411480" cy="201168"/>
+          </a:xfrm>
+          <a:prstGeom prst="rect">
+            <a:avLst/>
+          </a:prstGeom>
+          <a:noFill/>
+          <a:ln/>
+        </p:spPr>
+        <p:txBody>
+          <a:bodyPr wrap="square" lIns="0" tIns="0" rIns="0" bIns="0" rtlCol="0" anchor="ctr"/>
+          <a:lstStyle/>
+          <a:p>
+            <a:pPr algn="r" indent="0" marL="0">
+              <a:buNone/>
+            </a:pPr>
+            <a:r>
+              <a:rPr lang="en-US" sz="900" dirty="0">
+                <a:solidFill>
+                  <a:srgbClr val="5F7181"/>
+                </a:solidFill>
+                <a:latin typeface="Aptos" pitchFamily="34" charset="0"/>
+                <a:ea typeface="Aptos" pitchFamily="34" charset="-122"/>
+                <a:cs typeface="Aptos" pitchFamily="34" charset="-120"/>
+              </a:rPr>
+              <a:t>1</a:t>
+            </a:r>
+            <a:endParaRPr lang="en-US" sz="900" dirty="0"/>
+          </a:p>
+        </p:txBody>
+      </p:sp>
     </p:spTree>
   </p:cSld>
   <p:clrMapOvr>
@@ -3093,7 +3132,7 @@
                 <a:ea typeface="Aptos" pitchFamily="34" charset="-122"/>
                 <a:cs typeface="Aptos" pitchFamily="34" charset="-120"/>
               </a:rPr>
-              <a:t>© Paula Soper</a:t>
+              <a:t>Â© Paula Soper</a:t>
             </a:r>
             <a:endParaRPr lang="en-US" sz="800" dirty="0"/>
           </a:p>
@@ -3101,7 +3140,46 @@
       </p:sp>
       <p:sp>
         <p:nvSpPr>
-          <p:cNvPr id="7" name="Shape 5"/>
+          <p:cNvPr id="7" name="Text 5"/>
+          <p:cNvSpPr/>
+          <p:nvPr/>
+        </p:nvSpPr>
+        <p:spPr>
+          <a:xfrm>
+            <a:off x="11137392" y="6510528"/>
+            <a:ext cx="411480" cy="201168"/>
+          </a:xfrm>
+          <a:prstGeom prst="rect">
+            <a:avLst/>
+          </a:prstGeom>
+          <a:noFill/>
+          <a:ln/>
+        </p:spPr>
+        <p:txBody>
+          <a:bodyPr wrap="square" lIns="0" tIns="0" rIns="0" bIns="0" rtlCol="0" anchor="ctr"/>
+          <a:lstStyle/>
+          <a:p>
+            <a:pPr algn="r" indent="0" marL="0">
+              <a:buNone/>
+            </a:pPr>
+            <a:r>
+              <a:rPr lang="en-US" sz="900" dirty="0">
+                <a:solidFill>
+                  <a:srgbClr val="5F7181"/>
+                </a:solidFill>
+                <a:latin typeface="Aptos" pitchFamily="34" charset="0"/>
+                <a:ea typeface="Aptos" pitchFamily="34" charset="-122"/>
+                <a:cs typeface="Aptos" pitchFamily="34" charset="-120"/>
+              </a:rPr>
+              <a:t>10</a:t>
+            </a:r>
+            <a:endParaRPr lang="en-US" sz="900" dirty="0"/>
+          </a:p>
+        </p:txBody>
+      </p:sp>
+      <p:sp>
+        <p:nvSpPr>
+          <p:cNvPr id="8" name="Shape 6"/>
           <p:cNvSpPr/>
           <p:nvPr/>
         </p:nvSpPr>
@@ -3126,7 +3204,7 @@
       </p:sp>
       <p:sp>
         <p:nvSpPr>
-          <p:cNvPr id="8" name="Text 6"/>
+          <p:cNvPr id="9" name="Text 7"/>
           <p:cNvSpPr/>
           <p:nvPr/>
         </p:nvSpPr>
@@ -3165,14 +3243,14 @@
       </p:sp>
       <p:sp>
         <p:nvSpPr>
-          <p:cNvPr id="9" name="Text 7"/>
+          <p:cNvPr id="10" name="Text 8"/>
           <p:cNvSpPr/>
           <p:nvPr/>
         </p:nvSpPr>
         <p:spPr>
           <a:xfrm>
             <a:off x="640080" y="621792"/>
-            <a:ext cx="10881360" cy="566928"/>
+            <a:ext cx="10881360" cy="713232"/>
           </a:xfrm>
           <a:prstGeom prst="rect">
             <a:avLst/>
@@ -3190,7 +3268,7 @@
               <a:buNone/>
             </a:pPr>
             <a:r>
-              <a:rPr lang="en-US" sz="2700" b="1" dirty="0">
+              <a:rPr lang="en-US" sz="3400" b="1" dirty="0">
                 <a:solidFill>
                   <a:srgbClr val="003A63"/>
                 </a:solidFill>
@@ -3200,20 +3278,20 @@
               </a:rPr>
               <a:t>Technical and Governance Deep Dive</a:t>
             </a:r>
-            <a:endParaRPr lang="en-US" sz="2700" dirty="0"/>
-          </a:p>
-        </p:txBody>
-      </p:sp>
-      <p:sp>
-        <p:nvSpPr>
-          <p:cNvPr id="10" name="Text 8"/>
-          <p:cNvSpPr/>
-          <p:nvPr/>
-        </p:nvSpPr>
-        <p:spPr>
-          <a:xfrm>
-            <a:off x="868680" y="1417320"/>
-            <a:ext cx="6675120" cy="4434840"/>
+            <a:endParaRPr lang="en-US" sz="3400" dirty="0"/>
+          </a:p>
+        </p:txBody>
+      </p:sp>
+      <p:sp>
+        <p:nvSpPr>
+          <p:cNvPr id="11" name="Text 9"/>
+          <p:cNvSpPr/>
+          <p:nvPr/>
+        </p:nvSpPr>
+        <p:spPr>
+          <a:xfrm>
+            <a:off x="868680" y="1508760"/>
+            <a:ext cx="6537960" cy="4160520"/>
           </a:xfrm>
           <a:prstGeom prst="rect">
             <a:avLst/>
@@ -3228,7 +3306,7 @@
           <a:lstStyle/>
           <a:p>
             <a:r>
-              <a:rPr lang="en-US" sz="1700" dirty="0">
+              <a:rPr lang="en-US" sz="2100" dirty="0">
                 <a:solidFill>
                   <a:srgbClr val="17364A"/>
                 </a:solidFill>
@@ -3238,11 +3316,11 @@
               </a:rPr>
               <a:t>A strong governance charter begins with purpose and scope.</a:t>
             </a:r>
-            <a:endParaRPr lang="en-US" sz="1700" dirty="0"/>
-          </a:p>
-          <a:p>
-            <a:r>
-              <a:rPr lang="en-US" sz="1700" dirty="0">
+            <a:endParaRPr lang="en-US" sz="2100" dirty="0"/>
+          </a:p>
+          <a:p>
+            <a:r>
+              <a:rPr lang="en-US" sz="2100" dirty="0">
                 <a:solidFill>
                   <a:srgbClr val="17364A"/>
                 </a:solidFill>
@@ -3250,13 +3328,13 @@
                 <a:ea typeface="Aptos" pitchFamily="34" charset="-122"/>
                 <a:cs typeface="Aptos" pitchFamily="34" charset="-120"/>
               </a:rPr>
-              <a:t>Purpose explains why the governance body exists, such as protecting public trust, supporting responsible innovation,.</a:t>
-            </a:r>
-            <a:endParaRPr lang="en-US" sz="1700" dirty="0"/>
-          </a:p>
-          <a:p>
-            <a:r>
-              <a:rPr lang="en-US" sz="1700" dirty="0">
+              <a:t>Purpose explains why the governance body exists, such as protecting public trust, supporting.</a:t>
+            </a:r>
+            <a:endParaRPr lang="en-US" sz="2100" dirty="0"/>
+          </a:p>
+          <a:p>
+            <a:r>
+              <a:rPr lang="en-US" sz="2100" dirty="0">
                 <a:solidFill>
                   <a:srgbClr val="17364A"/>
                 </a:solidFill>
@@ -3266,27 +3344,13 @@
               </a:rPr>
               <a:t>Scope explains what falls under the governance process.</a:t>
             </a:r>
-            <a:endParaRPr lang="en-US" sz="1700" dirty="0"/>
-          </a:p>
-          <a:p>
-            <a:r>
-              <a:rPr lang="en-US" sz="1700" dirty="0">
-                <a:solidFill>
-                  <a:srgbClr val="17364A"/>
-                </a:solidFill>
-                <a:latin typeface="Aptos" pitchFamily="34" charset="0"/>
-                <a:ea typeface="Aptos" pitchFamily="34" charset="-122"/>
-                <a:cs typeface="Aptos" pitchFamily="34" charset="-120"/>
-              </a:rPr>
-              <a:t>For public health, scope should include internally developed AI tools, vendor AI products, generative AI tools, predictive.</a:t>
-            </a:r>
-            <a:endParaRPr lang="en-US" sz="1700" dirty="0"/>
-          </a:p>
-        </p:txBody>
-      </p:sp>
-      <p:sp>
-        <p:nvSpPr>
-          <p:cNvPr id="11" name="Shape 9"/>
+            <a:endParaRPr lang="en-US" sz="2100" dirty="0"/>
+          </a:p>
+        </p:txBody>
+      </p:sp>
+      <p:sp>
+        <p:nvSpPr>
+          <p:cNvPr id="12" name="Shape 10"/>
           <p:cNvSpPr/>
           <p:nvPr/>
         </p:nvSpPr>
@@ -3313,14 +3377,14 @@
       </p:sp>
       <p:sp>
         <p:nvSpPr>
-          <p:cNvPr id="12" name="Text 10"/>
+          <p:cNvPr id="13" name="Text 11"/>
           <p:cNvSpPr/>
           <p:nvPr/>
         </p:nvSpPr>
         <p:spPr>
           <a:xfrm>
             <a:off x="8074152" y="1563624"/>
-            <a:ext cx="2825496" cy="201168"/>
+            <a:ext cx="2825496" cy="256032"/>
           </a:xfrm>
           <a:prstGeom prst="rect">
             <a:avLst/>
@@ -3336,7 +3400,7 @@
               <a:buNone/>
             </a:pPr>
             <a:r>
-              <a:rPr lang="en-US" sz="950" b="1" dirty="0">
+              <a:rPr lang="en-US" sz="1300" b="1" dirty="0">
                 <a:solidFill>
                   <a:srgbClr val="0068B7"/>
                 </a:solidFill>
@@ -3346,20 +3410,20 @@
               </a:rPr>
               <a:t>Key idea</a:t>
             </a:r>
-            <a:endParaRPr lang="en-US" sz="950" dirty="0"/>
-          </a:p>
-        </p:txBody>
-      </p:sp>
-      <p:sp>
-        <p:nvSpPr>
-          <p:cNvPr id="13" name="Text 11"/>
-          <p:cNvSpPr/>
-          <p:nvPr/>
-        </p:nvSpPr>
-        <p:spPr>
-          <a:xfrm>
-            <a:off x="8074152" y="1856232"/>
-            <a:ext cx="2825496" cy="1261872"/>
+            <a:endParaRPr lang="en-US" sz="1300" dirty="0"/>
+          </a:p>
+        </p:txBody>
+      </p:sp>
+      <p:sp>
+        <p:nvSpPr>
+          <p:cNvPr id="14" name="Text 12"/>
+          <p:cNvSpPr/>
+          <p:nvPr/>
+        </p:nvSpPr>
+        <p:spPr>
+          <a:xfrm>
+            <a:off x="8074152" y="1920240"/>
+            <a:ext cx="2825496" cy="1188720"/>
           </a:xfrm>
           <a:prstGeom prst="rect">
             <a:avLst/>
@@ -3377,7 +3441,7 @@
               <a:buNone/>
             </a:pPr>
             <a:r>
-              <a:rPr lang="en-US" sz="1250" dirty="0">
+              <a:rPr lang="en-US" sz="1550" dirty="0">
                 <a:solidFill>
                   <a:srgbClr val="17364A"/>
                 </a:solidFill>
@@ -3387,13 +3451,13 @@
               </a:rPr>
               <a:t>A strong governance charter begins with purpose and scope.</a:t>
             </a:r>
-            <a:endParaRPr lang="en-US" sz="1250" dirty="0"/>
-          </a:p>
-        </p:txBody>
-      </p:sp>
-      <p:sp>
-        <p:nvSpPr>
-          <p:cNvPr id="14" name="Shape 12"/>
+            <a:endParaRPr lang="en-US" sz="1550" dirty="0"/>
+          </a:p>
+        </p:txBody>
+      </p:sp>
+      <p:sp>
+        <p:nvSpPr>
+          <p:cNvPr id="15" name="Shape 13"/>
           <p:cNvSpPr/>
           <p:nvPr/>
         </p:nvSpPr>
@@ -3420,14 +3484,14 @@
       </p:sp>
       <p:sp>
         <p:nvSpPr>
-          <p:cNvPr id="15" name="Text 13"/>
+          <p:cNvPr id="16" name="Text 14"/>
           <p:cNvSpPr/>
           <p:nvPr/>
         </p:nvSpPr>
         <p:spPr>
           <a:xfrm>
             <a:off x="8074152" y="3666744"/>
-            <a:ext cx="2825496" cy="201168"/>
+            <a:ext cx="2825496" cy="256032"/>
           </a:xfrm>
           <a:prstGeom prst="rect">
             <a:avLst/>
@@ -3443,7 +3507,7 @@
               <a:buNone/>
             </a:pPr>
             <a:r>
-              <a:rPr lang="en-US" sz="950" b="1" dirty="0">
+              <a:rPr lang="en-US" sz="1300" b="1" dirty="0">
                 <a:solidFill>
                   <a:srgbClr val="0068B7"/>
                 </a:solidFill>
@@ -3453,20 +3517,20 @@
               </a:rPr>
               <a:t>Use this for</a:t>
             </a:r>
-            <a:endParaRPr lang="en-US" sz="950" dirty="0"/>
-          </a:p>
-        </p:txBody>
-      </p:sp>
-      <p:sp>
-        <p:nvSpPr>
-          <p:cNvPr id="16" name="Text 14"/>
-          <p:cNvSpPr/>
-          <p:nvPr/>
-        </p:nvSpPr>
-        <p:spPr>
-          <a:xfrm>
-            <a:off x="8074152" y="3959352"/>
-            <a:ext cx="2825496" cy="1170432"/>
+            <a:endParaRPr lang="en-US" sz="1300" dirty="0"/>
+          </a:p>
+        </p:txBody>
+      </p:sp>
+      <p:sp>
+        <p:nvSpPr>
+          <p:cNvPr id="17" name="Text 15"/>
+          <p:cNvSpPr/>
+          <p:nvPr/>
+        </p:nvSpPr>
+        <p:spPr>
+          <a:xfrm>
+            <a:off x="8074152" y="4023360"/>
+            <a:ext cx="2825496" cy="1097280"/>
           </a:xfrm>
           <a:prstGeom prst="rect">
             <a:avLst/>
@@ -3484,7 +3548,7 @@
               <a:buNone/>
             </a:pPr>
             <a:r>
-              <a:rPr lang="en-US" sz="1250" dirty="0">
+              <a:rPr lang="en-US" sz="1550" dirty="0">
                 <a:solidFill>
                   <a:srgbClr val="17364A"/>
                 </a:solidFill>
@@ -3494,7 +3558,7 @@
               </a:rPr>
               <a:t>Connect the concept to public health decisions, safeguards, documentation, or implementation work.</a:t>
             </a:r>
-            <a:endParaRPr lang="en-US" sz="1250" dirty="0"/>
+            <a:endParaRPr lang="en-US" sz="1550" dirty="0"/>
           </a:p>
         </p:txBody>
       </p:sp>
@@ -3691,7 +3755,7 @@
                 <a:ea typeface="Aptos" pitchFamily="34" charset="-122"/>
                 <a:cs typeface="Aptos" pitchFamily="34" charset="-120"/>
               </a:rPr>
-              <a:t>© Paula Soper</a:t>
+              <a:t>Â© Paula Soper</a:t>
             </a:r>
             <a:endParaRPr lang="en-US" sz="800" dirty="0"/>
           </a:p>
@@ -3699,7 +3763,46 @@
       </p:sp>
       <p:sp>
         <p:nvSpPr>
-          <p:cNvPr id="7" name="Shape 5"/>
+          <p:cNvPr id="7" name="Text 5"/>
+          <p:cNvSpPr/>
+          <p:nvPr/>
+        </p:nvSpPr>
+        <p:spPr>
+          <a:xfrm>
+            <a:off x="11137392" y="6510528"/>
+            <a:ext cx="411480" cy="201168"/>
+          </a:xfrm>
+          <a:prstGeom prst="rect">
+            <a:avLst/>
+          </a:prstGeom>
+          <a:noFill/>
+          <a:ln/>
+        </p:spPr>
+        <p:txBody>
+          <a:bodyPr wrap="square" lIns="0" tIns="0" rIns="0" bIns="0" rtlCol="0" anchor="ctr"/>
+          <a:lstStyle/>
+          <a:p>
+            <a:pPr algn="r" indent="0" marL="0">
+              <a:buNone/>
+            </a:pPr>
+            <a:r>
+              <a:rPr lang="en-US" sz="900" dirty="0">
+                <a:solidFill>
+                  <a:srgbClr val="5F7181"/>
+                </a:solidFill>
+                <a:latin typeface="Aptos" pitchFamily="34" charset="0"/>
+                <a:ea typeface="Aptos" pitchFamily="34" charset="-122"/>
+                <a:cs typeface="Aptos" pitchFamily="34" charset="-120"/>
+              </a:rPr>
+              <a:t>11</a:t>
+            </a:r>
+            <a:endParaRPr lang="en-US" sz="900" dirty="0"/>
+          </a:p>
+        </p:txBody>
+      </p:sp>
+      <p:sp>
+        <p:nvSpPr>
+          <p:cNvPr id="8" name="Shape 6"/>
           <p:cNvSpPr/>
           <p:nvPr/>
         </p:nvSpPr>
@@ -3724,7 +3827,7 @@
       </p:sp>
       <p:sp>
         <p:nvSpPr>
-          <p:cNvPr id="8" name="Text 6"/>
+          <p:cNvPr id="9" name="Text 7"/>
           <p:cNvSpPr/>
           <p:nvPr/>
         </p:nvSpPr>
@@ -3763,14 +3866,14 @@
       </p:sp>
       <p:sp>
         <p:nvSpPr>
-          <p:cNvPr id="9" name="Text 7"/>
+          <p:cNvPr id="10" name="Text 8"/>
           <p:cNvSpPr/>
           <p:nvPr/>
         </p:nvSpPr>
         <p:spPr>
           <a:xfrm>
             <a:off x="640080" y="621792"/>
-            <a:ext cx="10881360" cy="566928"/>
+            <a:ext cx="10881360" cy="713232"/>
           </a:xfrm>
           <a:prstGeom prst="rect">
             <a:avLst/>
@@ -3788,7 +3891,7 @@
               <a:buNone/>
             </a:pPr>
             <a:r>
-              <a:rPr lang="en-US" sz="2700" b="1" dirty="0">
+              <a:rPr lang="en-US" sz="3400" b="1" dirty="0">
                 <a:solidFill>
                   <a:srgbClr val="003A63"/>
                 </a:solidFill>
@@ -3798,20 +3901,20 @@
               </a:rPr>
               <a:t>Risks, Failure Modes, and Guardrails</a:t>
             </a:r>
-            <a:endParaRPr lang="en-US" sz="2700" dirty="0"/>
-          </a:p>
-        </p:txBody>
-      </p:sp>
-      <p:sp>
-        <p:nvSpPr>
-          <p:cNvPr id="10" name="Text 8"/>
-          <p:cNvSpPr/>
-          <p:nvPr/>
-        </p:nvSpPr>
-        <p:spPr>
-          <a:xfrm>
-            <a:off x="868680" y="1417320"/>
-            <a:ext cx="6675120" cy="4434840"/>
+            <a:endParaRPr lang="en-US" sz="3400" dirty="0"/>
+          </a:p>
+        </p:txBody>
+      </p:sp>
+      <p:sp>
+        <p:nvSpPr>
+          <p:cNvPr id="11" name="Text 9"/>
+          <p:cNvSpPr/>
+          <p:nvPr/>
+        </p:nvSpPr>
+        <p:spPr>
+          <a:xfrm>
+            <a:off x="868680" y="1508760"/>
+            <a:ext cx="6537960" cy="4160520"/>
           </a:xfrm>
           <a:prstGeom prst="rect">
             <a:avLst/>
@@ -3826,7 +3929,7 @@
           <a:lstStyle/>
           <a:p>
             <a:r>
-              <a:rPr lang="en-US" sz="1700" dirty="0">
+              <a:rPr lang="en-US" sz="2100" dirty="0">
                 <a:solidFill>
                   <a:srgbClr val="17364A"/>
                 </a:solidFill>
@@ -3836,11 +3939,11 @@
               </a:rPr>
               <a:t>A common failure mode is governance that exists only on paper.</a:t>
             </a:r>
-            <a:endParaRPr lang="en-US" sz="1700" dirty="0"/>
-          </a:p>
-          <a:p>
-            <a:r>
-              <a:rPr lang="en-US" sz="1700" dirty="0">
+            <a:endParaRPr lang="en-US" sz="2100" dirty="0"/>
+          </a:p>
+          <a:p>
+            <a:r>
+              <a:rPr lang="en-US" sz="2100" dirty="0">
                 <a:solidFill>
                   <a:srgbClr val="17364A"/>
                 </a:solidFill>
@@ -3848,13 +3951,13 @@
                 <a:ea typeface="Aptos" pitchFamily="34" charset="-122"/>
                 <a:cs typeface="Aptos" pitchFamily="34" charset="-120"/>
               </a:rPr>
-              <a:t>A charter may sound strong, but if staff do not know when to submit use cases, who decides, or what evidence is required,.</a:t>
-            </a:r>
-            <a:endParaRPr lang="en-US" sz="1700" dirty="0"/>
-          </a:p>
-          <a:p>
-            <a:r>
-              <a:rPr lang="en-US" sz="1700" dirty="0">
+              <a:t>A charter may sound strong, but if staff do not know when to submit use cases, who decides, or what.</a:t>
+            </a:r>
+            <a:endParaRPr lang="en-US" sz="2100" dirty="0"/>
+          </a:p>
+          <a:p>
+            <a:r>
+              <a:rPr lang="en-US" sz="2100" dirty="0">
                 <a:solidFill>
                   <a:srgbClr val="17364A"/>
                 </a:solidFill>
@@ -3862,29 +3965,15 @@
                 <a:ea typeface="Aptos" pitchFamily="34" charset="-122"/>
                 <a:cs typeface="Aptos" pitchFamily="34" charset="-120"/>
               </a:rPr>
-              <a:t>A practical guardrail is to create a simple intake form, review rubric, meeting cadence, decision log, and escalation.</a:t>
-            </a:r>
-            <a:endParaRPr lang="en-US" sz="1700" dirty="0"/>
-          </a:p>
-          <a:p>
-            <a:r>
-              <a:rPr lang="en-US" sz="1700" dirty="0">
-                <a:solidFill>
-                  <a:srgbClr val="17364A"/>
-                </a:solidFill>
-                <a:latin typeface="Aptos" pitchFamily="34" charset="0"/>
-                <a:ea typeface="Aptos" pitchFamily="34" charset="-122"/>
-                <a:cs typeface="Aptos" pitchFamily="34" charset="-120"/>
-              </a:rPr>
-              <a:t>Another failure mode is over-centralization.</a:t>
-            </a:r>
-            <a:endParaRPr lang="en-US" sz="1700" dirty="0"/>
-          </a:p>
-        </p:txBody>
-      </p:sp>
-      <p:sp>
-        <p:nvSpPr>
-          <p:cNvPr id="11" name="Shape 9"/>
+              <a:t>A practical guardrail is to create a simple intake form, review rubric, meeting cadence, decision log,.</a:t>
+            </a:r>
+            <a:endParaRPr lang="en-US" sz="2100" dirty="0"/>
+          </a:p>
+        </p:txBody>
+      </p:sp>
+      <p:sp>
+        <p:nvSpPr>
+          <p:cNvPr id="12" name="Shape 10"/>
           <p:cNvSpPr/>
           <p:nvPr/>
         </p:nvSpPr>
@@ -3911,14 +4000,14 @@
       </p:sp>
       <p:sp>
         <p:nvSpPr>
-          <p:cNvPr id="12" name="Text 10"/>
+          <p:cNvPr id="13" name="Text 11"/>
           <p:cNvSpPr/>
           <p:nvPr/>
         </p:nvSpPr>
         <p:spPr>
           <a:xfrm>
             <a:off x="8074152" y="1563624"/>
-            <a:ext cx="2825496" cy="201168"/>
+            <a:ext cx="2825496" cy="256032"/>
           </a:xfrm>
           <a:prstGeom prst="rect">
             <a:avLst/>
@@ -3934,7 +4023,7 @@
               <a:buNone/>
             </a:pPr>
             <a:r>
-              <a:rPr lang="en-US" sz="950" b="1" dirty="0">
+              <a:rPr lang="en-US" sz="1300" b="1" dirty="0">
                 <a:solidFill>
                   <a:srgbClr val="0068B7"/>
                 </a:solidFill>
@@ -3944,20 +4033,20 @@
               </a:rPr>
               <a:t>Key idea</a:t>
             </a:r>
-            <a:endParaRPr lang="en-US" sz="950" dirty="0"/>
-          </a:p>
-        </p:txBody>
-      </p:sp>
-      <p:sp>
-        <p:nvSpPr>
-          <p:cNvPr id="13" name="Text 11"/>
-          <p:cNvSpPr/>
-          <p:nvPr/>
-        </p:nvSpPr>
-        <p:spPr>
-          <a:xfrm>
-            <a:off x="8074152" y="1856232"/>
-            <a:ext cx="2825496" cy="1261872"/>
+            <a:endParaRPr lang="en-US" sz="1300" dirty="0"/>
+          </a:p>
+        </p:txBody>
+      </p:sp>
+      <p:sp>
+        <p:nvSpPr>
+          <p:cNvPr id="14" name="Text 12"/>
+          <p:cNvSpPr/>
+          <p:nvPr/>
+        </p:nvSpPr>
+        <p:spPr>
+          <a:xfrm>
+            <a:off x="8074152" y="1920240"/>
+            <a:ext cx="2825496" cy="1188720"/>
           </a:xfrm>
           <a:prstGeom prst="rect">
             <a:avLst/>
@@ -3975,7 +4064,7 @@
               <a:buNone/>
             </a:pPr>
             <a:r>
-              <a:rPr lang="en-US" sz="1250" dirty="0">
+              <a:rPr lang="en-US" sz="1550" dirty="0">
                 <a:solidFill>
                   <a:srgbClr val="17364A"/>
                 </a:solidFill>
@@ -3985,13 +4074,13 @@
               </a:rPr>
               <a:t>A common failure mode is governance that exists only on paper.</a:t>
             </a:r>
-            <a:endParaRPr lang="en-US" sz="1250" dirty="0"/>
-          </a:p>
-        </p:txBody>
-      </p:sp>
-      <p:sp>
-        <p:nvSpPr>
-          <p:cNvPr id="14" name="Shape 12"/>
+            <a:endParaRPr lang="en-US" sz="1550" dirty="0"/>
+          </a:p>
+        </p:txBody>
+      </p:sp>
+      <p:sp>
+        <p:nvSpPr>
+          <p:cNvPr id="15" name="Shape 13"/>
           <p:cNvSpPr/>
           <p:nvPr/>
         </p:nvSpPr>
@@ -4018,14 +4107,14 @@
       </p:sp>
       <p:sp>
         <p:nvSpPr>
-          <p:cNvPr id="15" name="Text 13"/>
+          <p:cNvPr id="16" name="Text 14"/>
           <p:cNvSpPr/>
           <p:nvPr/>
         </p:nvSpPr>
         <p:spPr>
           <a:xfrm>
             <a:off x="8074152" y="3666744"/>
-            <a:ext cx="2825496" cy="201168"/>
+            <a:ext cx="2825496" cy="256032"/>
           </a:xfrm>
           <a:prstGeom prst="rect">
             <a:avLst/>
@@ -4041,7 +4130,7 @@
               <a:buNone/>
             </a:pPr>
             <a:r>
-              <a:rPr lang="en-US" sz="950" b="1" dirty="0">
+              <a:rPr lang="en-US" sz="1300" b="1" dirty="0">
                 <a:solidFill>
                   <a:srgbClr val="0068B7"/>
                 </a:solidFill>
@@ -4051,20 +4140,20 @@
               </a:rPr>
               <a:t>Use this for</a:t>
             </a:r>
-            <a:endParaRPr lang="en-US" sz="950" dirty="0"/>
-          </a:p>
-        </p:txBody>
-      </p:sp>
-      <p:sp>
-        <p:nvSpPr>
-          <p:cNvPr id="16" name="Text 14"/>
-          <p:cNvSpPr/>
-          <p:nvPr/>
-        </p:nvSpPr>
-        <p:spPr>
-          <a:xfrm>
-            <a:off x="8074152" y="3959352"/>
-            <a:ext cx="2825496" cy="1170432"/>
+            <a:endParaRPr lang="en-US" sz="1300" dirty="0"/>
+          </a:p>
+        </p:txBody>
+      </p:sp>
+      <p:sp>
+        <p:nvSpPr>
+          <p:cNvPr id="17" name="Text 15"/>
+          <p:cNvSpPr/>
+          <p:nvPr/>
+        </p:nvSpPr>
+        <p:spPr>
+          <a:xfrm>
+            <a:off x="8074152" y="4023360"/>
+            <a:ext cx="2825496" cy="1097280"/>
           </a:xfrm>
           <a:prstGeom prst="rect">
             <a:avLst/>
@@ -4082,7 +4171,7 @@
               <a:buNone/>
             </a:pPr>
             <a:r>
-              <a:rPr lang="en-US" sz="1250" dirty="0">
+              <a:rPr lang="en-US" sz="1550" dirty="0">
                 <a:solidFill>
                   <a:srgbClr val="17364A"/>
                 </a:solidFill>
@@ -4092,7 +4181,7 @@
               </a:rPr>
               <a:t>Connect the concept to public health decisions, safeguards, documentation, or implementation work.</a:t>
             </a:r>
-            <a:endParaRPr lang="en-US" sz="1250" dirty="0"/>
+            <a:endParaRPr lang="en-US" sz="1550" dirty="0"/>
           </a:p>
         </p:txBody>
       </p:sp>
@@ -4289,7 +4378,7 @@
                 <a:ea typeface="Aptos" pitchFamily="34" charset="-122"/>
                 <a:cs typeface="Aptos" pitchFamily="34" charset="-120"/>
               </a:rPr>
-              <a:t>© Paula Soper</a:t>
+              <a:t>Â© Paula Soper</a:t>
             </a:r>
             <a:endParaRPr lang="en-US" sz="800" dirty="0"/>
           </a:p>
@@ -4297,7 +4386,46 @@
       </p:sp>
       <p:sp>
         <p:nvSpPr>
-          <p:cNvPr id="7" name="Shape 5"/>
+          <p:cNvPr id="7" name="Text 5"/>
+          <p:cNvSpPr/>
+          <p:nvPr/>
+        </p:nvSpPr>
+        <p:spPr>
+          <a:xfrm>
+            <a:off x="11137392" y="6510528"/>
+            <a:ext cx="411480" cy="201168"/>
+          </a:xfrm>
+          <a:prstGeom prst="rect">
+            <a:avLst/>
+          </a:prstGeom>
+          <a:noFill/>
+          <a:ln/>
+        </p:spPr>
+        <p:txBody>
+          <a:bodyPr wrap="square" lIns="0" tIns="0" rIns="0" bIns="0" rtlCol="0" anchor="ctr"/>
+          <a:lstStyle/>
+          <a:p>
+            <a:pPr algn="r" indent="0" marL="0">
+              <a:buNone/>
+            </a:pPr>
+            <a:r>
+              <a:rPr lang="en-US" sz="900" dirty="0">
+                <a:solidFill>
+                  <a:srgbClr val="5F7181"/>
+                </a:solidFill>
+                <a:latin typeface="Aptos" pitchFamily="34" charset="0"/>
+                <a:ea typeface="Aptos" pitchFamily="34" charset="-122"/>
+                <a:cs typeface="Aptos" pitchFamily="34" charset="-120"/>
+              </a:rPr>
+              <a:t>12</a:t>
+            </a:r>
+            <a:endParaRPr lang="en-US" sz="900" dirty="0"/>
+          </a:p>
+        </p:txBody>
+      </p:sp>
+      <p:sp>
+        <p:nvSpPr>
+          <p:cNvPr id="8" name="Shape 6"/>
           <p:cNvSpPr/>
           <p:nvPr/>
         </p:nvSpPr>
@@ -4322,7 +4450,7 @@
       </p:sp>
       <p:sp>
         <p:nvSpPr>
-          <p:cNvPr id="8" name="Text 6"/>
+          <p:cNvPr id="9" name="Text 7"/>
           <p:cNvSpPr/>
           <p:nvPr/>
         </p:nvSpPr>
@@ -4361,14 +4489,14 @@
       </p:sp>
       <p:sp>
         <p:nvSpPr>
-          <p:cNvPr id="9" name="Text 7"/>
+          <p:cNvPr id="10" name="Text 8"/>
           <p:cNvSpPr/>
           <p:nvPr/>
         </p:nvSpPr>
         <p:spPr>
           <a:xfrm>
             <a:off x="640080" y="621792"/>
-            <a:ext cx="10881360" cy="566928"/>
+            <a:ext cx="10881360" cy="713232"/>
           </a:xfrm>
           <a:prstGeom prst="rect">
             <a:avLst/>
@@ -4386,7 +4514,7 @@
               <a:buNone/>
             </a:pPr>
             <a:r>
-              <a:rPr lang="en-US" sz="2700" b="1" dirty="0">
+              <a:rPr lang="en-US" sz="3400" b="1" dirty="0">
                 <a:solidFill>
                   <a:srgbClr val="003A63"/>
                 </a:solidFill>
@@ -4396,20 +4524,20 @@
               </a:rPr>
               <a:t>Application to AI-Supported Workflows</a:t>
             </a:r>
-            <a:endParaRPr lang="en-US" sz="2700" dirty="0"/>
-          </a:p>
-        </p:txBody>
-      </p:sp>
-      <p:sp>
-        <p:nvSpPr>
-          <p:cNvPr id="10" name="Text 8"/>
-          <p:cNvSpPr/>
-          <p:nvPr/>
-        </p:nvSpPr>
-        <p:spPr>
-          <a:xfrm>
-            <a:off x="868680" y="1417320"/>
-            <a:ext cx="6675120" cy="4434840"/>
+            <a:endParaRPr lang="en-US" sz="3400" dirty="0"/>
+          </a:p>
+        </p:txBody>
+      </p:sp>
+      <p:sp>
+        <p:nvSpPr>
+          <p:cNvPr id="11" name="Text 9"/>
+          <p:cNvSpPr/>
+          <p:nvPr/>
+        </p:nvSpPr>
+        <p:spPr>
+          <a:xfrm>
+            <a:off x="868680" y="1508760"/>
+            <a:ext cx="6537960" cy="4160520"/>
           </a:xfrm>
           <a:prstGeom prst="rect">
             <a:avLst/>
@@ -4424,7 +4552,7 @@
           <a:lstStyle/>
           <a:p>
             <a:r>
-              <a:rPr lang="en-US" sz="1700" dirty="0">
+              <a:rPr lang="en-US" sz="2100" dirty="0">
                 <a:solidFill>
                   <a:srgbClr val="17364A"/>
                 </a:solidFill>
@@ -4432,13 +4560,13 @@
                 <a:ea typeface="Aptos" pitchFamily="34" charset="-122"/>
                 <a:cs typeface="Aptos" pitchFamily="34" charset="-120"/>
               </a:rPr>
-              <a:t>Generative AI governance should define approved tools, prohibited data, review expectations, and when outputs may be used.</a:t>
-            </a:r>
-            <a:endParaRPr lang="en-US" sz="1700" dirty="0"/>
-          </a:p>
-          <a:p>
-            <a:r>
-              <a:rPr lang="en-US" sz="1700" dirty="0">
+              <a:t>Generative AI governance should define approved tools, prohibited data, review expectations, and when.</a:t>
+            </a:r>
+            <a:endParaRPr lang="en-US" sz="2100" dirty="0"/>
+          </a:p>
+          <a:p>
+            <a:r>
+              <a:rPr lang="en-US" sz="2100" dirty="0">
                 <a:solidFill>
                   <a:srgbClr val="17364A"/>
                 </a:solidFill>
@@ -4446,13 +4574,13 @@
                 <a:ea typeface="Aptos" pitchFamily="34" charset="-122"/>
                 <a:cs typeface="Aptos" pitchFamily="34" charset="-120"/>
               </a:rPr>
-              <a:t>Predictive model governance should require validation, subgroup performance review, monitoring, and clear limits on.</a:t>
-            </a:r>
-            <a:endParaRPr lang="en-US" sz="1700" dirty="0"/>
-          </a:p>
-          <a:p>
-            <a:r>
-              <a:rPr lang="en-US" sz="1700" dirty="0">
+              <a:t>Predictive model governance should require validation, subgroup performance review, monitoring, and.</a:t>
+            </a:r>
+            <a:endParaRPr lang="en-US" sz="2100" dirty="0"/>
+          </a:p>
+          <a:p>
+            <a:r>
+              <a:rPr lang="en-US" sz="2100" dirty="0">
                 <a:solidFill>
                   <a:srgbClr val="17364A"/>
                 </a:solidFill>
@@ -4460,29 +4588,15 @@
                 <a:ea typeface="Aptos" pitchFamily="34" charset="-122"/>
                 <a:cs typeface="Aptos" pitchFamily="34" charset="-120"/>
               </a:rPr>
-              <a:t>Agentic AI governance should define allowed actions, approval checkpoints, logging, rollback procedures, and incident.</a:t>
-            </a:r>
-            <a:endParaRPr lang="en-US" sz="1700" dirty="0"/>
-          </a:p>
-          <a:p>
-            <a:r>
-              <a:rPr lang="en-US" sz="1700" dirty="0">
-                <a:solidFill>
-                  <a:srgbClr val="17364A"/>
-                </a:solidFill>
-                <a:latin typeface="Aptos" pitchFamily="34" charset="0"/>
-                <a:ea typeface="Aptos" pitchFamily="34" charset="-122"/>
-                <a:cs typeface="Aptos" pitchFamily="34" charset="-120"/>
-              </a:rPr>
-              <a:t>In each case, the charter gives the agency a repeatable way to make and document decisions.</a:t>
-            </a:r>
-            <a:endParaRPr lang="en-US" sz="1700" dirty="0"/>
-          </a:p>
-        </p:txBody>
-      </p:sp>
-      <p:sp>
-        <p:nvSpPr>
-          <p:cNvPr id="11" name="Shape 9"/>
+              <a:t>Agentic AI governance should define allowed actions, approval checkpoints, logging, rollback.</a:t>
+            </a:r>
+            <a:endParaRPr lang="en-US" sz="2100" dirty="0"/>
+          </a:p>
+        </p:txBody>
+      </p:sp>
+      <p:sp>
+        <p:nvSpPr>
+          <p:cNvPr id="12" name="Shape 10"/>
           <p:cNvSpPr/>
           <p:nvPr/>
         </p:nvSpPr>
@@ -4509,14 +4623,14 @@
       </p:sp>
       <p:sp>
         <p:nvSpPr>
-          <p:cNvPr id="12" name="Text 10"/>
+          <p:cNvPr id="13" name="Text 11"/>
           <p:cNvSpPr/>
           <p:nvPr/>
         </p:nvSpPr>
         <p:spPr>
           <a:xfrm>
             <a:off x="8074152" y="1563624"/>
-            <a:ext cx="2825496" cy="201168"/>
+            <a:ext cx="2825496" cy="256032"/>
           </a:xfrm>
           <a:prstGeom prst="rect">
             <a:avLst/>
@@ -4532,7 +4646,7 @@
               <a:buNone/>
             </a:pPr>
             <a:r>
-              <a:rPr lang="en-US" sz="950" b="1" dirty="0">
+              <a:rPr lang="en-US" sz="1300" b="1" dirty="0">
                 <a:solidFill>
                   <a:srgbClr val="0068B7"/>
                 </a:solidFill>
@@ -4542,20 +4656,20 @@
               </a:rPr>
               <a:t>Key idea</a:t>
             </a:r>
-            <a:endParaRPr lang="en-US" sz="950" dirty="0"/>
-          </a:p>
-        </p:txBody>
-      </p:sp>
-      <p:sp>
-        <p:nvSpPr>
-          <p:cNvPr id="13" name="Text 11"/>
-          <p:cNvSpPr/>
-          <p:nvPr/>
-        </p:nvSpPr>
-        <p:spPr>
-          <a:xfrm>
-            <a:off x="8074152" y="1856232"/>
-            <a:ext cx="2825496" cy="1261872"/>
+            <a:endParaRPr lang="en-US" sz="1300" dirty="0"/>
+          </a:p>
+        </p:txBody>
+      </p:sp>
+      <p:sp>
+        <p:nvSpPr>
+          <p:cNvPr id="14" name="Text 12"/>
+          <p:cNvSpPr/>
+          <p:nvPr/>
+        </p:nvSpPr>
+        <p:spPr>
+          <a:xfrm>
+            <a:off x="8074152" y="1920240"/>
+            <a:ext cx="2825496" cy="1188720"/>
           </a:xfrm>
           <a:prstGeom prst="rect">
             <a:avLst/>
@@ -4573,7 +4687,7 @@
               <a:buNone/>
             </a:pPr>
             <a:r>
-              <a:rPr lang="en-US" sz="1250" dirty="0">
+              <a:rPr lang="en-US" sz="1550" dirty="0">
                 <a:solidFill>
                   <a:srgbClr val="17364A"/>
                 </a:solidFill>
@@ -4581,15 +4695,15 @@
                 <a:ea typeface="Aptos" pitchFamily="34" charset="-122"/>
                 <a:cs typeface="Aptos" pitchFamily="34" charset="-120"/>
               </a:rPr>
-              <a:t>Generative AI governance should define approved tools, prohibited data, review expectations, and when outputs may be used.</a:t>
-            </a:r>
-            <a:endParaRPr lang="en-US" sz="1250" dirty="0"/>
-          </a:p>
-        </p:txBody>
-      </p:sp>
-      <p:sp>
-        <p:nvSpPr>
-          <p:cNvPr id="14" name="Shape 12"/>
+              <a:t>Generative AI governance should define approved tools, prohibited data, review expectations, and when.</a:t>
+            </a:r>
+            <a:endParaRPr lang="en-US" sz="1550" dirty="0"/>
+          </a:p>
+        </p:txBody>
+      </p:sp>
+      <p:sp>
+        <p:nvSpPr>
+          <p:cNvPr id="15" name="Shape 13"/>
           <p:cNvSpPr/>
           <p:nvPr/>
         </p:nvSpPr>
@@ -4616,14 +4730,14 @@
       </p:sp>
       <p:sp>
         <p:nvSpPr>
-          <p:cNvPr id="15" name="Text 13"/>
+          <p:cNvPr id="16" name="Text 14"/>
           <p:cNvSpPr/>
           <p:nvPr/>
         </p:nvSpPr>
         <p:spPr>
           <a:xfrm>
             <a:off x="8074152" y="3666744"/>
-            <a:ext cx="2825496" cy="201168"/>
+            <a:ext cx="2825496" cy="256032"/>
           </a:xfrm>
           <a:prstGeom prst="rect">
             <a:avLst/>
@@ -4639,7 +4753,7 @@
               <a:buNone/>
             </a:pPr>
             <a:r>
-              <a:rPr lang="en-US" sz="950" b="1" dirty="0">
+              <a:rPr lang="en-US" sz="1300" b="1" dirty="0">
                 <a:solidFill>
                   <a:srgbClr val="0068B7"/>
                 </a:solidFill>
@@ -4649,20 +4763,20 @@
               </a:rPr>
               <a:t>Use this for</a:t>
             </a:r>
-            <a:endParaRPr lang="en-US" sz="950" dirty="0"/>
-          </a:p>
-        </p:txBody>
-      </p:sp>
-      <p:sp>
-        <p:nvSpPr>
-          <p:cNvPr id="16" name="Text 14"/>
-          <p:cNvSpPr/>
-          <p:nvPr/>
-        </p:nvSpPr>
-        <p:spPr>
-          <a:xfrm>
-            <a:off x="8074152" y="3959352"/>
-            <a:ext cx="2825496" cy="1170432"/>
+            <a:endParaRPr lang="en-US" sz="1300" dirty="0"/>
+          </a:p>
+        </p:txBody>
+      </p:sp>
+      <p:sp>
+        <p:nvSpPr>
+          <p:cNvPr id="17" name="Text 15"/>
+          <p:cNvSpPr/>
+          <p:nvPr/>
+        </p:nvSpPr>
+        <p:spPr>
+          <a:xfrm>
+            <a:off x="8074152" y="4023360"/>
+            <a:ext cx="2825496" cy="1097280"/>
           </a:xfrm>
           <a:prstGeom prst="rect">
             <a:avLst/>
@@ -4680,7 +4794,7 @@
               <a:buNone/>
             </a:pPr>
             <a:r>
-              <a:rPr lang="en-US" sz="1250" dirty="0">
+              <a:rPr lang="en-US" sz="1550" dirty="0">
                 <a:solidFill>
                   <a:srgbClr val="17364A"/>
                 </a:solidFill>
@@ -4690,7 +4804,7 @@
               </a:rPr>
               <a:t>Connect the concept to public health decisions, safeguards, documentation, or implementation work.</a:t>
             </a:r>
-            <a:endParaRPr lang="en-US" sz="1250" dirty="0"/>
+            <a:endParaRPr lang="en-US" sz="1550" dirty="0"/>
           </a:p>
         </p:txBody>
       </p:sp>
@@ -4887,7 +5001,7 @@
                 <a:ea typeface="Aptos" pitchFamily="34" charset="-122"/>
                 <a:cs typeface="Aptos" pitchFamily="34" charset="-120"/>
               </a:rPr>
-              <a:t>© Paula Soper</a:t>
+              <a:t>Â© Paula Soper</a:t>
             </a:r>
             <a:endParaRPr lang="en-US" sz="800" dirty="0"/>
           </a:p>
@@ -4895,7 +5009,46 @@
       </p:sp>
       <p:sp>
         <p:nvSpPr>
-          <p:cNvPr id="7" name="Shape 5"/>
+          <p:cNvPr id="7" name="Text 5"/>
+          <p:cNvSpPr/>
+          <p:nvPr/>
+        </p:nvSpPr>
+        <p:spPr>
+          <a:xfrm>
+            <a:off x="11137392" y="6510528"/>
+            <a:ext cx="411480" cy="201168"/>
+          </a:xfrm>
+          <a:prstGeom prst="rect">
+            <a:avLst/>
+          </a:prstGeom>
+          <a:noFill/>
+          <a:ln/>
+        </p:spPr>
+        <p:txBody>
+          <a:bodyPr wrap="square" lIns="0" tIns="0" rIns="0" bIns="0" rtlCol="0" anchor="ctr"/>
+          <a:lstStyle/>
+          <a:p>
+            <a:pPr algn="r" indent="0" marL="0">
+              <a:buNone/>
+            </a:pPr>
+            <a:r>
+              <a:rPr lang="en-US" sz="900" dirty="0">
+                <a:solidFill>
+                  <a:srgbClr val="5F7181"/>
+                </a:solidFill>
+                <a:latin typeface="Aptos" pitchFamily="34" charset="0"/>
+                <a:ea typeface="Aptos" pitchFamily="34" charset="-122"/>
+                <a:cs typeface="Aptos" pitchFamily="34" charset="-120"/>
+              </a:rPr>
+              <a:t>13</a:t>
+            </a:r>
+            <a:endParaRPr lang="en-US" sz="900" dirty="0"/>
+          </a:p>
+        </p:txBody>
+      </p:sp>
+      <p:sp>
+        <p:nvSpPr>
+          <p:cNvPr id="8" name="Shape 6"/>
           <p:cNvSpPr/>
           <p:nvPr/>
         </p:nvSpPr>
@@ -4920,7 +5073,7 @@
       </p:sp>
       <p:sp>
         <p:nvSpPr>
-          <p:cNvPr id="8" name="Text 6"/>
+          <p:cNvPr id="9" name="Text 7"/>
           <p:cNvSpPr/>
           <p:nvPr/>
         </p:nvSpPr>
@@ -4959,14 +5112,14 @@
       </p:sp>
       <p:sp>
         <p:nvSpPr>
-          <p:cNvPr id="9" name="Text 7"/>
+          <p:cNvPr id="10" name="Text 8"/>
           <p:cNvSpPr/>
           <p:nvPr/>
         </p:nvSpPr>
         <p:spPr>
           <a:xfrm>
             <a:off x="640080" y="621792"/>
-            <a:ext cx="10881360" cy="566928"/>
+            <a:ext cx="10881360" cy="713232"/>
           </a:xfrm>
           <a:prstGeom prst="rect">
             <a:avLst/>
@@ -4984,7 +5137,7 @@
               <a:buNone/>
             </a:pPr>
             <a:r>
-              <a:rPr lang="en-US" sz="2700" b="1" dirty="0">
+              <a:rPr lang="en-US" sz="3400" b="1" dirty="0">
                 <a:solidFill>
                   <a:srgbClr val="003A63"/>
                 </a:solidFill>
@@ -4994,20 +5147,20 @@
               </a:rPr>
               <a:t>Reflection Questions</a:t>
             </a:r>
-            <a:endParaRPr lang="en-US" sz="2700" dirty="0"/>
-          </a:p>
-        </p:txBody>
-      </p:sp>
-      <p:sp>
-        <p:nvSpPr>
-          <p:cNvPr id="10" name="Text 8"/>
-          <p:cNvSpPr/>
-          <p:nvPr/>
-        </p:nvSpPr>
-        <p:spPr>
-          <a:xfrm>
-            <a:off x="868680" y="1417320"/>
-            <a:ext cx="6675120" cy="4434840"/>
+            <a:endParaRPr lang="en-US" sz="3400" dirty="0"/>
+          </a:p>
+        </p:txBody>
+      </p:sp>
+      <p:sp>
+        <p:nvSpPr>
+          <p:cNvPr id="11" name="Text 9"/>
+          <p:cNvSpPr/>
+          <p:nvPr/>
+        </p:nvSpPr>
+        <p:spPr>
+          <a:xfrm>
+            <a:off x="868680" y="1508760"/>
+            <a:ext cx="6537960" cy="4160520"/>
           </a:xfrm>
           <a:prstGeom prst="rect">
             <a:avLst/>
@@ -5022,7 +5175,7 @@
           <a:lstStyle/>
           <a:p>
             <a:r>
-              <a:rPr lang="en-US" sz="1700" dirty="0">
+              <a:rPr lang="en-US" sz="2100" dirty="0">
                 <a:solidFill>
                   <a:srgbClr val="17364A"/>
                 </a:solidFill>
@@ -5030,13 +5183,13 @@
                 <a:ea typeface="Aptos" pitchFamily="34" charset="-122"/>
                 <a:cs typeface="Aptos" pitchFamily="34" charset="-120"/>
               </a:rPr>
-              <a:t>Which current or proposed AI use case in your agency raises this leadership or governance issue most clearly?</a:t>
-            </a:r>
-            <a:endParaRPr lang="en-US" sz="1700" dirty="0"/>
-          </a:p>
-          <a:p>
-            <a:r>
-              <a:rPr lang="en-US" sz="1700" dirty="0">
+              <a:t>Which current or proposed AI use case in your agency raises this leadership or governance issue most.</a:t>
+            </a:r>
+            <a:endParaRPr lang="en-US" sz="2100" dirty="0"/>
+          </a:p>
+          <a:p>
+            <a:r>
+              <a:rPr lang="en-US" sz="2100" dirty="0">
                 <a:solidFill>
                   <a:srgbClr val="17364A"/>
                 </a:solidFill>
@@ -5046,11 +5199,11 @@
               </a:rPr>
               <a:t>Who currently has authority to make decisions about this issue, and is that authority documented?</a:t>
             </a:r>
-            <a:endParaRPr lang="en-US" sz="1700" dirty="0"/>
-          </a:p>
-          <a:p>
-            <a:r>
-              <a:rPr lang="en-US" sz="1700" dirty="0">
+            <a:endParaRPr lang="en-US" sz="2100" dirty="0"/>
+          </a:p>
+          <a:p>
+            <a:r>
+              <a:rPr lang="en-US" sz="2100" dirty="0">
                 <a:solidFill>
                   <a:srgbClr val="17364A"/>
                 </a:solidFill>
@@ -5060,13 +5213,13 @@
               </a:rPr>
               <a:t>What evidence would governance or leadership need before approving the use case?</a:t>
             </a:r>
-            <a:endParaRPr lang="en-US" sz="1700" dirty="0"/>
-          </a:p>
-        </p:txBody>
-      </p:sp>
-      <p:sp>
-        <p:nvSpPr>
-          <p:cNvPr id="11" name="Shape 9"/>
+            <a:endParaRPr lang="en-US" sz="2100" dirty="0"/>
+          </a:p>
+        </p:txBody>
+      </p:sp>
+      <p:sp>
+        <p:nvSpPr>
+          <p:cNvPr id="12" name="Shape 10"/>
           <p:cNvSpPr/>
           <p:nvPr/>
         </p:nvSpPr>
@@ -5093,14 +5246,14 @@
       </p:sp>
       <p:sp>
         <p:nvSpPr>
-          <p:cNvPr id="12" name="Text 10"/>
+          <p:cNvPr id="13" name="Text 11"/>
           <p:cNvSpPr/>
           <p:nvPr/>
         </p:nvSpPr>
         <p:spPr>
           <a:xfrm>
             <a:off x="8074152" y="1563624"/>
-            <a:ext cx="2825496" cy="201168"/>
+            <a:ext cx="2825496" cy="256032"/>
           </a:xfrm>
           <a:prstGeom prst="rect">
             <a:avLst/>
@@ -5116,7 +5269,7 @@
               <a:buNone/>
             </a:pPr>
             <a:r>
-              <a:rPr lang="en-US" sz="950" b="1" dirty="0">
+              <a:rPr lang="en-US" sz="1300" b="1" dirty="0">
                 <a:solidFill>
                   <a:srgbClr val="0068B7"/>
                 </a:solidFill>
@@ -5126,20 +5279,20 @@
               </a:rPr>
               <a:t>Key idea</a:t>
             </a:r>
-            <a:endParaRPr lang="en-US" sz="950" dirty="0"/>
-          </a:p>
-        </p:txBody>
-      </p:sp>
-      <p:sp>
-        <p:nvSpPr>
-          <p:cNvPr id="13" name="Text 11"/>
-          <p:cNvSpPr/>
-          <p:nvPr/>
-        </p:nvSpPr>
-        <p:spPr>
-          <a:xfrm>
-            <a:off x="8074152" y="1856232"/>
-            <a:ext cx="2825496" cy="1261872"/>
+            <a:endParaRPr lang="en-US" sz="1300" dirty="0"/>
+          </a:p>
+        </p:txBody>
+      </p:sp>
+      <p:sp>
+        <p:nvSpPr>
+          <p:cNvPr id="14" name="Text 12"/>
+          <p:cNvSpPr/>
+          <p:nvPr/>
+        </p:nvSpPr>
+        <p:spPr>
+          <a:xfrm>
+            <a:off x="8074152" y="1920240"/>
+            <a:ext cx="2825496" cy="1188720"/>
           </a:xfrm>
           <a:prstGeom prst="rect">
             <a:avLst/>
@@ -5157,7 +5310,7 @@
               <a:buNone/>
             </a:pPr>
             <a:r>
-              <a:rPr lang="en-US" sz="1250" dirty="0">
+              <a:rPr lang="en-US" sz="1550" dirty="0">
                 <a:solidFill>
                   <a:srgbClr val="17364A"/>
                 </a:solidFill>
@@ -5165,15 +5318,15 @@
                 <a:ea typeface="Aptos" pitchFamily="34" charset="-122"/>
                 <a:cs typeface="Aptos" pitchFamily="34" charset="-120"/>
               </a:rPr>
-              <a:t>Which current or proposed AI use case in your agency raises this leadership or governance issue most clearly?</a:t>
-            </a:r>
-            <a:endParaRPr lang="en-US" sz="1250" dirty="0"/>
-          </a:p>
-        </p:txBody>
-      </p:sp>
-      <p:sp>
-        <p:nvSpPr>
-          <p:cNvPr id="14" name="Shape 12"/>
+              <a:t>Which current or proposed AI use case in your agency raises this leadership or governance issue most.</a:t>
+            </a:r>
+            <a:endParaRPr lang="en-US" sz="1550" dirty="0"/>
+          </a:p>
+        </p:txBody>
+      </p:sp>
+      <p:sp>
+        <p:nvSpPr>
+          <p:cNvPr id="15" name="Shape 13"/>
           <p:cNvSpPr/>
           <p:nvPr/>
         </p:nvSpPr>
@@ -5200,14 +5353,14 @@
       </p:sp>
       <p:sp>
         <p:nvSpPr>
-          <p:cNvPr id="15" name="Text 13"/>
+          <p:cNvPr id="16" name="Text 14"/>
           <p:cNvSpPr/>
           <p:nvPr/>
         </p:nvSpPr>
         <p:spPr>
           <a:xfrm>
             <a:off x="8074152" y="3666744"/>
-            <a:ext cx="2825496" cy="201168"/>
+            <a:ext cx="2825496" cy="256032"/>
           </a:xfrm>
           <a:prstGeom prst="rect">
             <a:avLst/>
@@ -5223,7 +5376,7 @@
               <a:buNone/>
             </a:pPr>
             <a:r>
-              <a:rPr lang="en-US" sz="950" b="1" dirty="0">
+              <a:rPr lang="en-US" sz="1300" b="1" dirty="0">
                 <a:solidFill>
                   <a:srgbClr val="0068B7"/>
                 </a:solidFill>
@@ -5233,20 +5386,20 @@
               </a:rPr>
               <a:t>Use this for</a:t>
             </a:r>
-            <a:endParaRPr lang="en-US" sz="950" dirty="0"/>
-          </a:p>
-        </p:txBody>
-      </p:sp>
-      <p:sp>
-        <p:nvSpPr>
-          <p:cNvPr id="16" name="Text 14"/>
-          <p:cNvSpPr/>
-          <p:nvPr/>
-        </p:nvSpPr>
-        <p:spPr>
-          <a:xfrm>
-            <a:off x="8074152" y="3959352"/>
-            <a:ext cx="2825496" cy="1170432"/>
+            <a:endParaRPr lang="en-US" sz="1300" dirty="0"/>
+          </a:p>
+        </p:txBody>
+      </p:sp>
+      <p:sp>
+        <p:nvSpPr>
+          <p:cNvPr id="17" name="Text 15"/>
+          <p:cNvSpPr/>
+          <p:nvPr/>
+        </p:nvSpPr>
+        <p:spPr>
+          <a:xfrm>
+            <a:off x="8074152" y="4023360"/>
+            <a:ext cx="2825496" cy="1097280"/>
           </a:xfrm>
           <a:prstGeom prst="rect">
             <a:avLst/>
@@ -5264,7 +5417,7 @@
               <a:buNone/>
             </a:pPr>
             <a:r>
-              <a:rPr lang="en-US" sz="1250" dirty="0">
+              <a:rPr lang="en-US" sz="1550" dirty="0">
                 <a:solidFill>
                   <a:srgbClr val="17364A"/>
                 </a:solidFill>
@@ -5274,7 +5427,7 @@
               </a:rPr>
               <a:t>Connect the concept to public health decisions, safeguards, documentation, or implementation work.</a:t>
             </a:r>
-            <a:endParaRPr lang="en-US" sz="1250" dirty="0"/>
+            <a:endParaRPr lang="en-US" sz="1550" dirty="0"/>
           </a:p>
         </p:txBody>
       </p:sp>
@@ -5471,7 +5624,7 @@
                 <a:ea typeface="Aptos" pitchFamily="34" charset="-122"/>
                 <a:cs typeface="Aptos" pitchFamily="34" charset="-120"/>
               </a:rPr>
-              <a:t>© Paula Soper</a:t>
+              <a:t>Â© Paula Soper</a:t>
             </a:r>
             <a:endParaRPr lang="en-US" sz="800" dirty="0"/>
           </a:p>
@@ -5485,8 +5638,47 @@
         </p:nvSpPr>
         <p:spPr>
           <a:xfrm>
+            <a:off x="11137392" y="6510528"/>
+            <a:ext cx="411480" cy="201168"/>
+          </a:xfrm>
+          <a:prstGeom prst="rect">
+            <a:avLst/>
+          </a:prstGeom>
+          <a:noFill/>
+          <a:ln/>
+        </p:spPr>
+        <p:txBody>
+          <a:bodyPr wrap="square" lIns="0" tIns="0" rIns="0" bIns="0" rtlCol="0" anchor="ctr"/>
+          <a:lstStyle/>
+          <a:p>
+            <a:pPr algn="r" indent="0" marL="0">
+              <a:buNone/>
+            </a:pPr>
+            <a:r>
+              <a:rPr lang="en-US" sz="900" dirty="0">
+                <a:solidFill>
+                  <a:srgbClr val="5F7181"/>
+                </a:solidFill>
+                <a:latin typeface="Aptos" pitchFamily="34" charset="0"/>
+                <a:ea typeface="Aptos" pitchFamily="34" charset="-122"/>
+                <a:cs typeface="Aptos" pitchFamily="34" charset="-120"/>
+              </a:rPr>
+              <a:t>14</a:t>
+            </a:r>
+            <a:endParaRPr lang="en-US" sz="900" dirty="0"/>
+          </a:p>
+        </p:txBody>
+      </p:sp>
+      <p:sp>
+        <p:nvSpPr>
+          <p:cNvPr id="8" name="Text 6"/>
+          <p:cNvSpPr/>
+          <p:nvPr/>
+        </p:nvSpPr>
+        <p:spPr>
+          <a:xfrm>
             <a:off x="640080" y="658368"/>
-            <a:ext cx="10881360" cy="566928"/>
+            <a:ext cx="10881360" cy="713232"/>
           </a:xfrm>
           <a:prstGeom prst="rect">
             <a:avLst/>
@@ -5504,7 +5696,7 @@
               <a:buNone/>
             </a:pPr>
             <a:r>
-              <a:rPr lang="en-US" sz="2700" b="1" dirty="0">
+              <a:rPr lang="en-US" sz="3400" b="1" dirty="0">
                 <a:solidFill>
                   <a:srgbClr val="003A63"/>
                 </a:solidFill>
@@ -5514,20 +5706,20 @@
               </a:rPr>
               <a:t>Reflection Questions Continued</a:t>
             </a:r>
-            <a:endParaRPr lang="en-US" sz="2700" dirty="0"/>
-          </a:p>
-        </p:txBody>
-      </p:sp>
-      <p:sp>
-        <p:nvSpPr>
-          <p:cNvPr id="8" name="Text 6"/>
-          <p:cNvSpPr/>
-          <p:nvPr/>
-        </p:nvSpPr>
-        <p:spPr>
-          <a:xfrm>
-            <a:off x="868680" y="1417320"/>
-            <a:ext cx="6675120" cy="4434840"/>
+            <a:endParaRPr lang="en-US" sz="3400" dirty="0"/>
+          </a:p>
+        </p:txBody>
+      </p:sp>
+      <p:sp>
+        <p:nvSpPr>
+          <p:cNvPr id="9" name="Text 7"/>
+          <p:cNvSpPr/>
+          <p:nvPr/>
+        </p:nvSpPr>
+        <p:spPr>
+          <a:xfrm>
+            <a:off x="868680" y="1508760"/>
+            <a:ext cx="6537960" cy="4160520"/>
           </a:xfrm>
           <a:prstGeom prst="rect">
             <a:avLst/>
@@ -5542,7 +5734,7 @@
           <a:lstStyle/>
           <a:p>
             <a:r>
-              <a:rPr lang="en-US" sz="1700" dirty="0">
+              <a:rPr lang="en-US" sz="2100" dirty="0">
                 <a:solidFill>
                   <a:srgbClr val="17364A"/>
                 </a:solidFill>
@@ -5552,11 +5744,11 @@
               </a:rPr>
               <a:t>Which staff, partners, or communities would be affected if this issue were handled poorly?</a:t>
             </a:r>
-            <a:endParaRPr lang="en-US" sz="1700" dirty="0"/>
-          </a:p>
-          <a:p>
-            <a:r>
-              <a:rPr lang="en-US" sz="1700" dirty="0">
+            <a:endParaRPr lang="en-US" sz="2100" dirty="0"/>
+          </a:p>
+          <a:p>
+            <a:r>
+              <a:rPr lang="en-US" sz="2100" dirty="0">
                 <a:solidFill>
                   <a:srgbClr val="17364A"/>
                 </a:solidFill>
@@ -5566,13 +5758,13 @@
               </a:rPr>
               <a:t>What policy, process, or artifact should be created or updated after this module?</a:t>
             </a:r>
-            <a:endParaRPr lang="en-US" sz="1700" dirty="0"/>
-          </a:p>
-        </p:txBody>
-      </p:sp>
-      <p:sp>
-        <p:nvSpPr>
-          <p:cNvPr id="9" name="Shape 7"/>
+            <a:endParaRPr lang="en-US" sz="2100" dirty="0"/>
+          </a:p>
+        </p:txBody>
+      </p:sp>
+      <p:sp>
+        <p:nvSpPr>
+          <p:cNvPr id="10" name="Shape 8"/>
           <p:cNvSpPr/>
           <p:nvPr/>
         </p:nvSpPr>
@@ -5599,14 +5791,14 @@
       </p:sp>
       <p:sp>
         <p:nvSpPr>
-          <p:cNvPr id="10" name="Text 8"/>
+          <p:cNvPr id="11" name="Text 9"/>
           <p:cNvSpPr/>
           <p:nvPr/>
         </p:nvSpPr>
         <p:spPr>
           <a:xfrm>
             <a:off x="8074152" y="1563624"/>
-            <a:ext cx="2825496" cy="201168"/>
+            <a:ext cx="2825496" cy="256032"/>
           </a:xfrm>
           <a:prstGeom prst="rect">
             <a:avLst/>
@@ -5622,7 +5814,7 @@
               <a:buNone/>
             </a:pPr>
             <a:r>
-              <a:rPr lang="en-US" sz="950" b="1" dirty="0">
+              <a:rPr lang="en-US" sz="1300" b="1" dirty="0">
                 <a:solidFill>
                   <a:srgbClr val="0068B7"/>
                 </a:solidFill>
@@ -5632,20 +5824,20 @@
               </a:rPr>
               <a:t>Key idea</a:t>
             </a:r>
-            <a:endParaRPr lang="en-US" sz="950" dirty="0"/>
-          </a:p>
-        </p:txBody>
-      </p:sp>
-      <p:sp>
-        <p:nvSpPr>
-          <p:cNvPr id="11" name="Text 9"/>
-          <p:cNvSpPr/>
-          <p:nvPr/>
-        </p:nvSpPr>
-        <p:spPr>
-          <a:xfrm>
-            <a:off x="8074152" y="1856232"/>
-            <a:ext cx="2825496" cy="1261872"/>
+            <a:endParaRPr lang="en-US" sz="1300" dirty="0"/>
+          </a:p>
+        </p:txBody>
+      </p:sp>
+      <p:sp>
+        <p:nvSpPr>
+          <p:cNvPr id="12" name="Text 10"/>
+          <p:cNvSpPr/>
+          <p:nvPr/>
+        </p:nvSpPr>
+        <p:spPr>
+          <a:xfrm>
+            <a:off x="8074152" y="1920240"/>
+            <a:ext cx="2825496" cy="1188720"/>
           </a:xfrm>
           <a:prstGeom prst="rect">
             <a:avLst/>
@@ -5663,7 +5855,7 @@
               <a:buNone/>
             </a:pPr>
             <a:r>
-              <a:rPr lang="en-US" sz="1250" dirty="0">
+              <a:rPr lang="en-US" sz="1550" dirty="0">
                 <a:solidFill>
                   <a:srgbClr val="17364A"/>
                 </a:solidFill>
@@ -5673,13 +5865,13 @@
               </a:rPr>
               <a:t>Which staff, partners, or communities would be affected if this issue were handled poorly?</a:t>
             </a:r>
-            <a:endParaRPr lang="en-US" sz="1250" dirty="0"/>
-          </a:p>
-        </p:txBody>
-      </p:sp>
-      <p:sp>
-        <p:nvSpPr>
-          <p:cNvPr id="12" name="Shape 10"/>
+            <a:endParaRPr lang="en-US" sz="1550" dirty="0"/>
+          </a:p>
+        </p:txBody>
+      </p:sp>
+      <p:sp>
+        <p:nvSpPr>
+          <p:cNvPr id="13" name="Shape 11"/>
           <p:cNvSpPr/>
           <p:nvPr/>
         </p:nvSpPr>
@@ -5706,14 +5898,14 @@
       </p:sp>
       <p:sp>
         <p:nvSpPr>
-          <p:cNvPr id="13" name="Text 11"/>
+          <p:cNvPr id="14" name="Text 12"/>
           <p:cNvSpPr/>
           <p:nvPr/>
         </p:nvSpPr>
         <p:spPr>
           <a:xfrm>
             <a:off x="8074152" y="3666744"/>
-            <a:ext cx="2825496" cy="201168"/>
+            <a:ext cx="2825496" cy="256032"/>
           </a:xfrm>
           <a:prstGeom prst="rect">
             <a:avLst/>
@@ -5729,7 +5921,7 @@
               <a:buNone/>
             </a:pPr>
             <a:r>
-              <a:rPr lang="en-US" sz="950" b="1" dirty="0">
+              <a:rPr lang="en-US" sz="1300" b="1" dirty="0">
                 <a:solidFill>
                   <a:srgbClr val="0068B7"/>
                 </a:solidFill>
@@ -5739,20 +5931,20 @@
               </a:rPr>
               <a:t>Use this for</a:t>
             </a:r>
-            <a:endParaRPr lang="en-US" sz="950" dirty="0"/>
-          </a:p>
-        </p:txBody>
-      </p:sp>
-      <p:sp>
-        <p:nvSpPr>
-          <p:cNvPr id="14" name="Text 12"/>
-          <p:cNvSpPr/>
-          <p:nvPr/>
-        </p:nvSpPr>
-        <p:spPr>
-          <a:xfrm>
-            <a:off x="8074152" y="3959352"/>
-            <a:ext cx="2825496" cy="1170432"/>
+            <a:endParaRPr lang="en-US" sz="1300" dirty="0"/>
+          </a:p>
+        </p:txBody>
+      </p:sp>
+      <p:sp>
+        <p:nvSpPr>
+          <p:cNvPr id="15" name="Text 13"/>
+          <p:cNvSpPr/>
+          <p:nvPr/>
+        </p:nvSpPr>
+        <p:spPr>
+          <a:xfrm>
+            <a:off x="8074152" y="4023360"/>
+            <a:ext cx="2825496" cy="1097280"/>
           </a:xfrm>
           <a:prstGeom prst="rect">
             <a:avLst/>
@@ -5770,7 +5962,7 @@
               <a:buNone/>
             </a:pPr>
             <a:r>
-              <a:rPr lang="en-US" sz="1250" dirty="0">
+              <a:rPr lang="en-US" sz="1550" dirty="0">
                 <a:solidFill>
                   <a:srgbClr val="17364A"/>
                 </a:solidFill>
@@ -5780,7 +5972,7 @@
               </a:rPr>
               <a:t>Connect the concept to public health decisions, safeguards, documentation, or implementation work.</a:t>
             </a:r>
-            <a:endParaRPr lang="en-US" sz="1250" dirty="0"/>
+            <a:endParaRPr lang="en-US" sz="1550" dirty="0"/>
           </a:p>
         </p:txBody>
       </p:sp>
@@ -5977,7 +6169,7 @@
                 <a:ea typeface="Aptos" pitchFamily="34" charset="-122"/>
                 <a:cs typeface="Aptos" pitchFamily="34" charset="-120"/>
               </a:rPr>
-              <a:t>© Paula Soper</a:t>
+              <a:t>Â© Paula Soper</a:t>
             </a:r>
             <a:endParaRPr lang="en-US" sz="800" dirty="0"/>
           </a:p>
@@ -5985,7 +6177,46 @@
       </p:sp>
       <p:sp>
         <p:nvSpPr>
-          <p:cNvPr id="7" name="Shape 5"/>
+          <p:cNvPr id="7" name="Text 5"/>
+          <p:cNvSpPr/>
+          <p:nvPr/>
+        </p:nvSpPr>
+        <p:spPr>
+          <a:xfrm>
+            <a:off x="11137392" y="6510528"/>
+            <a:ext cx="411480" cy="201168"/>
+          </a:xfrm>
+          <a:prstGeom prst="rect">
+            <a:avLst/>
+          </a:prstGeom>
+          <a:noFill/>
+          <a:ln/>
+        </p:spPr>
+        <p:txBody>
+          <a:bodyPr wrap="square" lIns="0" tIns="0" rIns="0" bIns="0" rtlCol="0" anchor="ctr"/>
+          <a:lstStyle/>
+          <a:p>
+            <a:pPr algn="r" indent="0" marL="0">
+              <a:buNone/>
+            </a:pPr>
+            <a:r>
+              <a:rPr lang="en-US" sz="900" dirty="0">
+                <a:solidFill>
+                  <a:srgbClr val="5F7181"/>
+                </a:solidFill>
+                <a:latin typeface="Aptos" pitchFamily="34" charset="0"/>
+                <a:ea typeface="Aptos" pitchFamily="34" charset="-122"/>
+                <a:cs typeface="Aptos" pitchFamily="34" charset="-120"/>
+              </a:rPr>
+              <a:t>15</a:t>
+            </a:r>
+            <a:endParaRPr lang="en-US" sz="900" dirty="0"/>
+          </a:p>
+        </p:txBody>
+      </p:sp>
+      <p:sp>
+        <p:nvSpPr>
+          <p:cNvPr id="8" name="Shape 6"/>
           <p:cNvSpPr/>
           <p:nvPr/>
         </p:nvSpPr>
@@ -6010,7 +6241,7 @@
       </p:sp>
       <p:sp>
         <p:nvSpPr>
-          <p:cNvPr id="8" name="Text 6"/>
+          <p:cNvPr id="9" name="Text 7"/>
           <p:cNvSpPr/>
           <p:nvPr/>
         </p:nvSpPr>
@@ -6049,14 +6280,14 @@
       </p:sp>
       <p:sp>
         <p:nvSpPr>
-          <p:cNvPr id="9" name="Text 7"/>
+          <p:cNvPr id="10" name="Text 8"/>
           <p:cNvSpPr/>
           <p:nvPr/>
         </p:nvSpPr>
         <p:spPr>
           <a:xfrm>
             <a:off x="640080" y="621792"/>
-            <a:ext cx="10881360" cy="566928"/>
+            <a:ext cx="10881360" cy="713232"/>
           </a:xfrm>
           <a:prstGeom prst="rect">
             <a:avLst/>
@@ -6074,7 +6305,7 @@
               <a:buNone/>
             </a:pPr>
             <a:r>
-              <a:rPr lang="en-US" sz="2700" b="1" dirty="0">
+              <a:rPr lang="en-US" sz="3400" b="1" dirty="0">
                 <a:solidFill>
                   <a:srgbClr val="003A63"/>
                 </a:solidFill>
@@ -6084,20 +6315,20 @@
               </a:rPr>
               <a:t>Practical Exercise</a:t>
             </a:r>
-            <a:endParaRPr lang="en-US" sz="2700" dirty="0"/>
-          </a:p>
-        </p:txBody>
-      </p:sp>
-      <p:sp>
-        <p:nvSpPr>
-          <p:cNvPr id="10" name="Text 8"/>
-          <p:cNvSpPr/>
-          <p:nvPr/>
-        </p:nvSpPr>
-        <p:spPr>
-          <a:xfrm>
-            <a:off x="868680" y="1417320"/>
-            <a:ext cx="6675120" cy="4434840"/>
+            <a:endParaRPr lang="en-US" sz="3400" dirty="0"/>
+          </a:p>
+        </p:txBody>
+      </p:sp>
+      <p:sp>
+        <p:nvSpPr>
+          <p:cNvPr id="11" name="Text 9"/>
+          <p:cNvSpPr/>
+          <p:nvPr/>
+        </p:nvSpPr>
+        <p:spPr>
+          <a:xfrm>
+            <a:off x="868680" y="1508760"/>
+            <a:ext cx="6537960" cy="4160520"/>
           </a:xfrm>
           <a:prstGeom prst="rect">
             <a:avLst/>
@@ -6112,7 +6343,7 @@
           <a:lstStyle/>
           <a:p>
             <a:r>
-              <a:rPr lang="en-US" sz="1700" dirty="0">
+              <a:rPr lang="en-US" sz="2100" dirty="0">
                 <a:solidFill>
                   <a:srgbClr val="17364A"/>
                 </a:solidFill>
@@ -6122,11 +6353,11 @@
               </a:rPr>
               <a:t>Draft a one-page AI governance charter and a one-page operating model.</a:t>
             </a:r>
-            <a:endParaRPr lang="en-US" sz="1700" dirty="0"/>
-          </a:p>
-          <a:p>
-            <a:r>
-              <a:rPr lang="en-US" sz="1700" dirty="0">
+            <a:endParaRPr lang="en-US" sz="2100" dirty="0"/>
+          </a:p>
+          <a:p>
+            <a:r>
+              <a:rPr lang="en-US" sz="2100" dirty="0">
                 <a:solidFill>
                   <a:srgbClr val="17364A"/>
                 </a:solidFill>
@@ -6134,15 +6365,15 @@
                 <a:ea typeface="Aptos" pitchFamily="34" charset="-122"/>
                 <a:cs typeface="Aptos" pitchFamily="34" charset="-120"/>
               </a:rPr>
-              <a:t>Include scope, membership, review levels, decision rights, documentation, escalation, monitoring, and meeting cadence.</a:t>
-            </a:r>
-            <a:endParaRPr lang="en-US" sz="1700" dirty="0"/>
-          </a:p>
-        </p:txBody>
-      </p:sp>
-      <p:sp>
-        <p:nvSpPr>
-          <p:cNvPr id="11" name="Shape 9"/>
+              <a:t>Include scope, membership, review levels, decision rights, documentation, escalation, monitoring, and.</a:t>
+            </a:r>
+            <a:endParaRPr lang="en-US" sz="2100" dirty="0"/>
+          </a:p>
+        </p:txBody>
+      </p:sp>
+      <p:sp>
+        <p:nvSpPr>
+          <p:cNvPr id="12" name="Shape 10"/>
           <p:cNvSpPr/>
           <p:nvPr/>
         </p:nvSpPr>
@@ -6169,14 +6400,14 @@
       </p:sp>
       <p:sp>
         <p:nvSpPr>
-          <p:cNvPr id="12" name="Text 10"/>
+          <p:cNvPr id="13" name="Text 11"/>
           <p:cNvSpPr/>
           <p:nvPr/>
         </p:nvSpPr>
         <p:spPr>
           <a:xfrm>
             <a:off x="8074152" y="1563624"/>
-            <a:ext cx="2825496" cy="201168"/>
+            <a:ext cx="2825496" cy="256032"/>
           </a:xfrm>
           <a:prstGeom prst="rect">
             <a:avLst/>
@@ -6192,7 +6423,7 @@
               <a:buNone/>
             </a:pPr>
             <a:r>
-              <a:rPr lang="en-US" sz="950" b="1" dirty="0">
+              <a:rPr lang="en-US" sz="1300" b="1" dirty="0">
                 <a:solidFill>
                   <a:srgbClr val="0068B7"/>
                 </a:solidFill>
@@ -6202,20 +6433,20 @@
               </a:rPr>
               <a:t>Key idea</a:t>
             </a:r>
-            <a:endParaRPr lang="en-US" sz="950" dirty="0"/>
-          </a:p>
-        </p:txBody>
-      </p:sp>
-      <p:sp>
-        <p:nvSpPr>
-          <p:cNvPr id="13" name="Text 11"/>
-          <p:cNvSpPr/>
-          <p:nvPr/>
-        </p:nvSpPr>
-        <p:spPr>
-          <a:xfrm>
-            <a:off x="8074152" y="1856232"/>
-            <a:ext cx="2825496" cy="1261872"/>
+            <a:endParaRPr lang="en-US" sz="1300" dirty="0"/>
+          </a:p>
+        </p:txBody>
+      </p:sp>
+      <p:sp>
+        <p:nvSpPr>
+          <p:cNvPr id="14" name="Text 12"/>
+          <p:cNvSpPr/>
+          <p:nvPr/>
+        </p:nvSpPr>
+        <p:spPr>
+          <a:xfrm>
+            <a:off x="8074152" y="1920240"/>
+            <a:ext cx="2825496" cy="1188720"/>
           </a:xfrm>
           <a:prstGeom prst="rect">
             <a:avLst/>
@@ -6233,7 +6464,7 @@
               <a:buNone/>
             </a:pPr>
             <a:r>
-              <a:rPr lang="en-US" sz="1250" dirty="0">
+              <a:rPr lang="en-US" sz="1550" dirty="0">
                 <a:solidFill>
                   <a:srgbClr val="17364A"/>
                 </a:solidFill>
@@ -6243,13 +6474,13 @@
               </a:rPr>
               <a:t>Draft a one-page AI governance charter and a one-page operating model.</a:t>
             </a:r>
-            <a:endParaRPr lang="en-US" sz="1250" dirty="0"/>
-          </a:p>
-        </p:txBody>
-      </p:sp>
-      <p:sp>
-        <p:nvSpPr>
-          <p:cNvPr id="14" name="Shape 12"/>
+            <a:endParaRPr lang="en-US" sz="1550" dirty="0"/>
+          </a:p>
+        </p:txBody>
+      </p:sp>
+      <p:sp>
+        <p:nvSpPr>
+          <p:cNvPr id="15" name="Shape 13"/>
           <p:cNvSpPr/>
           <p:nvPr/>
         </p:nvSpPr>
@@ -6276,14 +6507,14 @@
       </p:sp>
       <p:sp>
         <p:nvSpPr>
-          <p:cNvPr id="15" name="Text 13"/>
+          <p:cNvPr id="16" name="Text 14"/>
           <p:cNvSpPr/>
           <p:nvPr/>
         </p:nvSpPr>
         <p:spPr>
           <a:xfrm>
             <a:off x="8074152" y="3666744"/>
-            <a:ext cx="2825496" cy="201168"/>
+            <a:ext cx="2825496" cy="256032"/>
           </a:xfrm>
           <a:prstGeom prst="rect">
             <a:avLst/>
@@ -6299,7 +6530,7 @@
               <a:buNone/>
             </a:pPr>
             <a:r>
-              <a:rPr lang="en-US" sz="950" b="1" dirty="0">
+              <a:rPr lang="en-US" sz="1300" b="1" dirty="0">
                 <a:solidFill>
                   <a:srgbClr val="0068B7"/>
                 </a:solidFill>
@@ -6309,20 +6540,20 @@
               </a:rPr>
               <a:t>Use this for</a:t>
             </a:r>
-            <a:endParaRPr lang="en-US" sz="950" dirty="0"/>
-          </a:p>
-        </p:txBody>
-      </p:sp>
-      <p:sp>
-        <p:nvSpPr>
-          <p:cNvPr id="16" name="Text 14"/>
-          <p:cNvSpPr/>
-          <p:nvPr/>
-        </p:nvSpPr>
-        <p:spPr>
-          <a:xfrm>
-            <a:off x="8074152" y="3959352"/>
-            <a:ext cx="2825496" cy="1170432"/>
+            <a:endParaRPr lang="en-US" sz="1300" dirty="0"/>
+          </a:p>
+        </p:txBody>
+      </p:sp>
+      <p:sp>
+        <p:nvSpPr>
+          <p:cNvPr id="17" name="Text 15"/>
+          <p:cNvSpPr/>
+          <p:nvPr/>
+        </p:nvSpPr>
+        <p:spPr>
+          <a:xfrm>
+            <a:off x="8074152" y="4023360"/>
+            <a:ext cx="2825496" cy="1097280"/>
           </a:xfrm>
           <a:prstGeom prst="rect">
             <a:avLst/>
@@ -6340,7 +6571,7 @@
               <a:buNone/>
             </a:pPr>
             <a:r>
-              <a:rPr lang="en-US" sz="1250" dirty="0">
+              <a:rPr lang="en-US" sz="1550" dirty="0">
                 <a:solidFill>
                   <a:srgbClr val="17364A"/>
                 </a:solidFill>
@@ -6350,7 +6581,7 @@
               </a:rPr>
               <a:t>Connect the concept to public health decisions, safeguards, documentation, or implementation work.</a:t>
             </a:r>
-            <a:endParaRPr lang="en-US" sz="1250" dirty="0"/>
+            <a:endParaRPr lang="en-US" sz="1550" dirty="0"/>
           </a:p>
         </p:txBody>
       </p:sp>
@@ -6547,7 +6778,7 @@
                 <a:ea typeface="Aptos" pitchFamily="34" charset="-122"/>
                 <a:cs typeface="Aptos" pitchFamily="34" charset="-120"/>
               </a:rPr>
-              <a:t>© Paula Soper</a:t>
+              <a:t>Â© Paula Soper</a:t>
             </a:r>
             <a:endParaRPr lang="en-US" sz="800" dirty="0"/>
           </a:p>
@@ -6555,7 +6786,46 @@
       </p:sp>
       <p:sp>
         <p:nvSpPr>
-          <p:cNvPr id="7" name="Shape 5"/>
+          <p:cNvPr id="7" name="Text 5"/>
+          <p:cNvSpPr/>
+          <p:nvPr/>
+        </p:nvSpPr>
+        <p:spPr>
+          <a:xfrm>
+            <a:off x="11137392" y="6510528"/>
+            <a:ext cx="411480" cy="201168"/>
+          </a:xfrm>
+          <a:prstGeom prst="rect">
+            <a:avLst/>
+          </a:prstGeom>
+          <a:noFill/>
+          <a:ln/>
+        </p:spPr>
+        <p:txBody>
+          <a:bodyPr wrap="square" lIns="0" tIns="0" rIns="0" bIns="0" rtlCol="0" anchor="ctr"/>
+          <a:lstStyle/>
+          <a:p>
+            <a:pPr algn="r" indent="0" marL="0">
+              <a:buNone/>
+            </a:pPr>
+            <a:r>
+              <a:rPr lang="en-US" sz="900" dirty="0">
+                <a:solidFill>
+                  <a:srgbClr val="5F7181"/>
+                </a:solidFill>
+                <a:latin typeface="Aptos" pitchFamily="34" charset="0"/>
+                <a:ea typeface="Aptos" pitchFamily="34" charset="-122"/>
+                <a:cs typeface="Aptos" pitchFamily="34" charset="-120"/>
+              </a:rPr>
+              <a:t>16</a:t>
+            </a:r>
+            <a:endParaRPr lang="en-US" sz="900" dirty="0"/>
+          </a:p>
+        </p:txBody>
+      </p:sp>
+      <p:sp>
+        <p:nvSpPr>
+          <p:cNvPr id="8" name="Shape 6"/>
           <p:cNvSpPr/>
           <p:nvPr/>
         </p:nvSpPr>
@@ -6580,7 +6850,7 @@
       </p:sp>
       <p:sp>
         <p:nvSpPr>
-          <p:cNvPr id="8" name="Text 6"/>
+          <p:cNvPr id="9" name="Text 7"/>
           <p:cNvSpPr/>
           <p:nvPr/>
         </p:nvSpPr>
@@ -6619,14 +6889,14 @@
       </p:sp>
       <p:sp>
         <p:nvSpPr>
-          <p:cNvPr id="9" name="Text 7"/>
+          <p:cNvPr id="10" name="Text 8"/>
           <p:cNvSpPr/>
           <p:nvPr/>
         </p:nvSpPr>
         <p:spPr>
           <a:xfrm>
             <a:off x="640080" y="621792"/>
-            <a:ext cx="10881360" cy="566928"/>
+            <a:ext cx="10881360" cy="713232"/>
           </a:xfrm>
           <a:prstGeom prst="rect">
             <a:avLst/>
@@ -6644,7 +6914,7 @@
               <a:buNone/>
             </a:pPr>
             <a:r>
-              <a:rPr lang="en-US" sz="2700" b="1" dirty="0">
+              <a:rPr lang="en-US" sz="3400" b="1" dirty="0">
                 <a:solidFill>
                   <a:srgbClr val="003A63"/>
                 </a:solidFill>
@@ -6654,20 +6924,20 @@
               </a:rPr>
               <a:t>Before You Begin</a:t>
             </a:r>
-            <a:endParaRPr lang="en-US" sz="2700" dirty="0"/>
-          </a:p>
-        </p:txBody>
-      </p:sp>
-      <p:sp>
-        <p:nvSpPr>
-          <p:cNvPr id="10" name="Text 8"/>
-          <p:cNvSpPr/>
-          <p:nvPr/>
-        </p:nvSpPr>
-        <p:spPr>
-          <a:xfrm>
-            <a:off x="868680" y="1417320"/>
-            <a:ext cx="6675120" cy="4434840"/>
+            <a:endParaRPr lang="en-US" sz="3400" dirty="0"/>
+          </a:p>
+        </p:txBody>
+      </p:sp>
+      <p:sp>
+        <p:nvSpPr>
+          <p:cNvPr id="11" name="Text 9"/>
+          <p:cNvSpPr/>
+          <p:nvPr/>
+        </p:nvSpPr>
+        <p:spPr>
+          <a:xfrm>
+            <a:off x="868680" y="1508760"/>
+            <a:ext cx="6537960" cy="4160520"/>
           </a:xfrm>
           <a:prstGeom prst="rect">
             <a:avLst/>
@@ -6682,7 +6952,7 @@
           <a:lstStyle/>
           <a:p>
             <a:r>
-              <a:rPr lang="en-US" sz="1700" dirty="0">
+              <a:rPr lang="en-US" sz="2100" dirty="0">
                 <a:solidFill>
                   <a:srgbClr val="17364A"/>
                 </a:solidFill>
@@ -6692,11 +6962,11 @@
               </a:rPr>
               <a:t>Choose a real or realistic public health AI use case.</a:t>
             </a:r>
-            <a:endParaRPr lang="en-US" sz="1700" dirty="0"/>
-          </a:p>
-          <a:p>
-            <a:r>
-              <a:rPr lang="en-US" sz="1700" dirty="0">
+            <a:endParaRPr lang="en-US" sz="2100" dirty="0"/>
+          </a:p>
+          <a:p>
+            <a:r>
+              <a:rPr lang="en-US" sz="2100" dirty="0">
                 <a:solidFill>
                   <a:srgbClr val="17364A"/>
                 </a:solidFill>
@@ -6704,13 +6974,13 @@
                 <a:ea typeface="Aptos" pitchFamily="34" charset="-122"/>
                 <a:cs typeface="Aptos" pitchFamily="34" charset="-120"/>
               </a:rPr>
-              <a:t>Document assumptions, unresolved questions, and which agency roles would need to review the artifact before it is adopted.</a:t>
-            </a:r>
-            <a:endParaRPr lang="en-US" sz="1700" dirty="0"/>
-          </a:p>
-          <a:p>
-            <a:r>
-              <a:rPr lang="en-US" sz="1700" dirty="0">
+              <a:t>Document assumptions, unresolved questions, and which agency roles would need to review the artifact.</a:t>
+            </a:r>
+            <a:endParaRPr lang="en-US" sz="2100" dirty="0"/>
+          </a:p>
+          <a:p>
+            <a:r>
+              <a:rPr lang="en-US" sz="2100" dirty="0">
                 <a:solidFill>
                   <a:srgbClr val="17364A"/>
                 </a:solidFill>
@@ -6718,15 +6988,15 @@
                 <a:ea typeface="Aptos" pitchFamily="34" charset="-122"/>
                 <a:cs typeface="Aptos" pitchFamily="34" charset="-120"/>
               </a:rPr>
-              <a:t>The exercise should produce a work product that could support governance review, leadership discussion, implementation.</a:t>
-            </a:r>
-            <a:endParaRPr lang="en-US" sz="1700" dirty="0"/>
-          </a:p>
-        </p:txBody>
-      </p:sp>
-      <p:sp>
-        <p:nvSpPr>
-          <p:cNvPr id="11" name="Shape 9"/>
+              <a:t>The exercise should produce a work product that could support governance review, leadership discussion,.</a:t>
+            </a:r>
+            <a:endParaRPr lang="en-US" sz="2100" dirty="0"/>
+          </a:p>
+        </p:txBody>
+      </p:sp>
+      <p:sp>
+        <p:nvSpPr>
+          <p:cNvPr id="12" name="Shape 10"/>
           <p:cNvSpPr/>
           <p:nvPr/>
         </p:nvSpPr>
@@ -6753,14 +7023,14 @@
       </p:sp>
       <p:sp>
         <p:nvSpPr>
-          <p:cNvPr id="12" name="Text 10"/>
+          <p:cNvPr id="13" name="Text 11"/>
           <p:cNvSpPr/>
           <p:nvPr/>
         </p:nvSpPr>
         <p:spPr>
           <a:xfrm>
             <a:off x="8074152" y="1563624"/>
-            <a:ext cx="2825496" cy="201168"/>
+            <a:ext cx="2825496" cy="256032"/>
           </a:xfrm>
           <a:prstGeom prst="rect">
             <a:avLst/>
@@ -6776,7 +7046,7 @@
               <a:buNone/>
             </a:pPr>
             <a:r>
-              <a:rPr lang="en-US" sz="950" b="1" dirty="0">
+              <a:rPr lang="en-US" sz="1300" b="1" dirty="0">
                 <a:solidFill>
                   <a:srgbClr val="0068B7"/>
                 </a:solidFill>
@@ -6786,20 +7056,20 @@
               </a:rPr>
               <a:t>Key idea</a:t>
             </a:r>
-            <a:endParaRPr lang="en-US" sz="950" dirty="0"/>
-          </a:p>
-        </p:txBody>
-      </p:sp>
-      <p:sp>
-        <p:nvSpPr>
-          <p:cNvPr id="13" name="Text 11"/>
-          <p:cNvSpPr/>
-          <p:nvPr/>
-        </p:nvSpPr>
-        <p:spPr>
-          <a:xfrm>
-            <a:off x="8074152" y="1856232"/>
-            <a:ext cx="2825496" cy="1261872"/>
+            <a:endParaRPr lang="en-US" sz="1300" dirty="0"/>
+          </a:p>
+        </p:txBody>
+      </p:sp>
+      <p:sp>
+        <p:nvSpPr>
+          <p:cNvPr id="14" name="Text 12"/>
+          <p:cNvSpPr/>
+          <p:nvPr/>
+        </p:nvSpPr>
+        <p:spPr>
+          <a:xfrm>
+            <a:off x="8074152" y="1920240"/>
+            <a:ext cx="2825496" cy="1188720"/>
           </a:xfrm>
           <a:prstGeom prst="rect">
             <a:avLst/>
@@ -6817,7 +7087,7 @@
               <a:buNone/>
             </a:pPr>
             <a:r>
-              <a:rPr lang="en-US" sz="1250" dirty="0">
+              <a:rPr lang="en-US" sz="1550" dirty="0">
                 <a:solidFill>
                   <a:srgbClr val="17364A"/>
                 </a:solidFill>
@@ -6827,13 +7097,13 @@
               </a:rPr>
               <a:t>Choose a real or realistic public health AI use case.</a:t>
             </a:r>
-            <a:endParaRPr lang="en-US" sz="1250" dirty="0"/>
-          </a:p>
-        </p:txBody>
-      </p:sp>
-      <p:sp>
-        <p:nvSpPr>
-          <p:cNvPr id="14" name="Shape 12"/>
+            <a:endParaRPr lang="en-US" sz="1550" dirty="0"/>
+          </a:p>
+        </p:txBody>
+      </p:sp>
+      <p:sp>
+        <p:nvSpPr>
+          <p:cNvPr id="15" name="Shape 13"/>
           <p:cNvSpPr/>
           <p:nvPr/>
         </p:nvSpPr>
@@ -6860,14 +7130,14 @@
       </p:sp>
       <p:sp>
         <p:nvSpPr>
-          <p:cNvPr id="15" name="Text 13"/>
+          <p:cNvPr id="16" name="Text 14"/>
           <p:cNvSpPr/>
           <p:nvPr/>
         </p:nvSpPr>
         <p:spPr>
           <a:xfrm>
             <a:off x="8074152" y="3666744"/>
-            <a:ext cx="2825496" cy="201168"/>
+            <a:ext cx="2825496" cy="256032"/>
           </a:xfrm>
           <a:prstGeom prst="rect">
             <a:avLst/>
@@ -6883,7 +7153,7 @@
               <a:buNone/>
             </a:pPr>
             <a:r>
-              <a:rPr lang="en-US" sz="950" b="1" dirty="0">
+              <a:rPr lang="en-US" sz="1300" b="1" dirty="0">
                 <a:solidFill>
                   <a:srgbClr val="0068B7"/>
                 </a:solidFill>
@@ -6893,20 +7163,20 @@
               </a:rPr>
               <a:t>Use this for</a:t>
             </a:r>
-            <a:endParaRPr lang="en-US" sz="950" dirty="0"/>
-          </a:p>
-        </p:txBody>
-      </p:sp>
-      <p:sp>
-        <p:nvSpPr>
-          <p:cNvPr id="16" name="Text 14"/>
-          <p:cNvSpPr/>
-          <p:nvPr/>
-        </p:nvSpPr>
-        <p:spPr>
-          <a:xfrm>
-            <a:off x="8074152" y="3959352"/>
-            <a:ext cx="2825496" cy="1170432"/>
+            <a:endParaRPr lang="en-US" sz="1300" dirty="0"/>
+          </a:p>
+        </p:txBody>
+      </p:sp>
+      <p:sp>
+        <p:nvSpPr>
+          <p:cNvPr id="17" name="Text 15"/>
+          <p:cNvSpPr/>
+          <p:nvPr/>
+        </p:nvSpPr>
+        <p:spPr>
+          <a:xfrm>
+            <a:off x="8074152" y="4023360"/>
+            <a:ext cx="2825496" cy="1097280"/>
           </a:xfrm>
           <a:prstGeom prst="rect">
             <a:avLst/>
@@ -6924,7 +7194,7 @@
               <a:buNone/>
             </a:pPr>
             <a:r>
-              <a:rPr lang="en-US" sz="1250" dirty="0">
+              <a:rPr lang="en-US" sz="1550" dirty="0">
                 <a:solidFill>
                   <a:srgbClr val="17364A"/>
                 </a:solidFill>
@@ -6934,7 +7204,7 @@
               </a:rPr>
               <a:t>Connect the concept to public health decisions, safeguards, documentation, or implementation work.</a:t>
             </a:r>
-            <a:endParaRPr lang="en-US" sz="1250" dirty="0"/>
+            <a:endParaRPr lang="en-US" sz="1550" dirty="0"/>
           </a:p>
         </p:txBody>
       </p:sp>
@@ -7131,7 +7401,7 @@
                 <a:ea typeface="Aptos" pitchFamily="34" charset="-122"/>
                 <a:cs typeface="Aptos" pitchFamily="34" charset="-120"/>
               </a:rPr>
-              <a:t>© Paula Soper</a:t>
+              <a:t>Â© Paula Soper</a:t>
             </a:r>
             <a:endParaRPr lang="en-US" sz="800" dirty="0"/>
           </a:p>
@@ -7139,7 +7409,46 @@
       </p:sp>
       <p:sp>
         <p:nvSpPr>
-          <p:cNvPr id="7" name="Shape 5"/>
+          <p:cNvPr id="7" name="Text 5"/>
+          <p:cNvSpPr/>
+          <p:nvPr/>
+        </p:nvSpPr>
+        <p:spPr>
+          <a:xfrm>
+            <a:off x="11137392" y="6510528"/>
+            <a:ext cx="411480" cy="201168"/>
+          </a:xfrm>
+          <a:prstGeom prst="rect">
+            <a:avLst/>
+          </a:prstGeom>
+          <a:noFill/>
+          <a:ln/>
+        </p:spPr>
+        <p:txBody>
+          <a:bodyPr wrap="square" lIns="0" tIns="0" rIns="0" bIns="0" rtlCol="0" anchor="ctr"/>
+          <a:lstStyle/>
+          <a:p>
+            <a:pPr algn="r" indent="0" marL="0">
+              <a:buNone/>
+            </a:pPr>
+            <a:r>
+              <a:rPr lang="en-US" sz="900" dirty="0">
+                <a:solidFill>
+                  <a:srgbClr val="5F7181"/>
+                </a:solidFill>
+                <a:latin typeface="Aptos" pitchFamily="34" charset="0"/>
+                <a:ea typeface="Aptos" pitchFamily="34" charset="-122"/>
+                <a:cs typeface="Aptos" pitchFamily="34" charset="-120"/>
+              </a:rPr>
+              <a:t>17</a:t>
+            </a:r>
+            <a:endParaRPr lang="en-US" sz="900" dirty="0"/>
+          </a:p>
+        </p:txBody>
+      </p:sp>
+      <p:sp>
+        <p:nvSpPr>
+          <p:cNvPr id="8" name="Shape 6"/>
           <p:cNvSpPr/>
           <p:nvPr/>
         </p:nvSpPr>
@@ -7164,7 +7473,7 @@
       </p:sp>
       <p:sp>
         <p:nvSpPr>
-          <p:cNvPr id="8" name="Text 6"/>
+          <p:cNvPr id="9" name="Text 7"/>
           <p:cNvSpPr/>
           <p:nvPr/>
         </p:nvSpPr>
@@ -7203,14 +7512,14 @@
       </p:sp>
       <p:sp>
         <p:nvSpPr>
-          <p:cNvPr id="9" name="Text 7"/>
+          <p:cNvPr id="10" name="Text 8"/>
           <p:cNvSpPr/>
           <p:nvPr/>
         </p:nvSpPr>
         <p:spPr>
           <a:xfrm>
             <a:off x="640080" y="621792"/>
-            <a:ext cx="10881360" cy="566928"/>
+            <a:ext cx="10881360" cy="713232"/>
           </a:xfrm>
           <a:prstGeom prst="rect">
             <a:avLst/>
@@ -7228,7 +7537,7 @@
               <a:buNone/>
             </a:pPr>
             <a:r>
-              <a:rPr lang="en-US" sz="2700" b="1" dirty="0">
+              <a:rPr lang="en-US" sz="3400" b="1" dirty="0">
                 <a:solidFill>
                   <a:srgbClr val="003A63"/>
                 </a:solidFill>
@@ -7238,20 +7547,20 @@
               </a:rPr>
               <a:t>Expected Artifact or Evidence</a:t>
             </a:r>
-            <a:endParaRPr lang="en-US" sz="2700" dirty="0"/>
-          </a:p>
-        </p:txBody>
-      </p:sp>
-      <p:sp>
-        <p:nvSpPr>
-          <p:cNvPr id="10" name="Text 8"/>
-          <p:cNvSpPr/>
-          <p:nvPr/>
-        </p:nvSpPr>
-        <p:spPr>
-          <a:xfrm>
-            <a:off x="868680" y="1417320"/>
-            <a:ext cx="6675120" cy="4434840"/>
+            <a:endParaRPr lang="en-US" sz="3400" dirty="0"/>
+          </a:p>
+        </p:txBody>
+      </p:sp>
+      <p:sp>
+        <p:nvSpPr>
+          <p:cNvPr id="11" name="Text 9"/>
+          <p:cNvSpPr/>
+          <p:nvPr/>
+        </p:nvSpPr>
+        <p:spPr>
+          <a:xfrm>
+            <a:off x="868680" y="1508760"/>
+            <a:ext cx="6537960" cy="4160520"/>
           </a:xfrm>
           <a:prstGeom prst="rect">
             <a:avLst/>
@@ -7266,7 +7575,7 @@
           <a:lstStyle/>
           <a:p>
             <a:r>
-              <a:rPr lang="en-US" sz="1700" dirty="0">
+              <a:rPr lang="en-US" sz="2100" dirty="0">
                 <a:solidFill>
                   <a:srgbClr val="17364A"/>
                 </a:solidFill>
@@ -7274,15 +7583,15 @@
                 <a:ea typeface="Aptos" pitchFamily="34" charset="-122"/>
                 <a:cs typeface="Aptos" pitchFamily="34" charset="-120"/>
               </a:rPr>
-              <a:t>Draft AI governance charter; governance operating model; intake and decision-flow diagram; list of unresolved policy.</a:t>
-            </a:r>
-            <a:endParaRPr lang="en-US" sz="1700" dirty="0"/>
-          </a:p>
-        </p:txBody>
-      </p:sp>
-      <p:sp>
-        <p:nvSpPr>
-          <p:cNvPr id="11" name="Shape 9"/>
+              <a:t>Draft AI governance charter; governance operating model; intake and decision-flow diagram; list of.</a:t>
+            </a:r>
+            <a:endParaRPr lang="en-US" sz="2100" dirty="0"/>
+          </a:p>
+        </p:txBody>
+      </p:sp>
+      <p:sp>
+        <p:nvSpPr>
+          <p:cNvPr id="12" name="Shape 10"/>
           <p:cNvSpPr/>
           <p:nvPr/>
         </p:nvSpPr>
@@ -7309,14 +7618,14 @@
       </p:sp>
       <p:sp>
         <p:nvSpPr>
-          <p:cNvPr id="12" name="Text 10"/>
+          <p:cNvPr id="13" name="Text 11"/>
           <p:cNvSpPr/>
           <p:nvPr/>
         </p:nvSpPr>
         <p:spPr>
           <a:xfrm>
             <a:off x="8074152" y="1563624"/>
-            <a:ext cx="2825496" cy="201168"/>
+            <a:ext cx="2825496" cy="256032"/>
           </a:xfrm>
           <a:prstGeom prst="rect">
             <a:avLst/>
@@ -7332,7 +7641,7 @@
               <a:buNone/>
             </a:pPr>
             <a:r>
-              <a:rPr lang="en-US" sz="950" b="1" dirty="0">
+              <a:rPr lang="en-US" sz="1300" b="1" dirty="0">
                 <a:solidFill>
                   <a:srgbClr val="0068B7"/>
                 </a:solidFill>
@@ -7342,20 +7651,20 @@
               </a:rPr>
               <a:t>Key idea</a:t>
             </a:r>
-            <a:endParaRPr lang="en-US" sz="950" dirty="0"/>
-          </a:p>
-        </p:txBody>
-      </p:sp>
-      <p:sp>
-        <p:nvSpPr>
-          <p:cNvPr id="13" name="Text 11"/>
-          <p:cNvSpPr/>
-          <p:nvPr/>
-        </p:nvSpPr>
-        <p:spPr>
-          <a:xfrm>
-            <a:off x="8074152" y="1856232"/>
-            <a:ext cx="2825496" cy="1261872"/>
+            <a:endParaRPr lang="en-US" sz="1300" dirty="0"/>
+          </a:p>
+        </p:txBody>
+      </p:sp>
+      <p:sp>
+        <p:nvSpPr>
+          <p:cNvPr id="14" name="Text 12"/>
+          <p:cNvSpPr/>
+          <p:nvPr/>
+        </p:nvSpPr>
+        <p:spPr>
+          <a:xfrm>
+            <a:off x="8074152" y="1920240"/>
+            <a:ext cx="2825496" cy="1188720"/>
           </a:xfrm>
           <a:prstGeom prst="rect">
             <a:avLst/>
@@ -7373,7 +7682,7 @@
               <a:buNone/>
             </a:pPr>
             <a:r>
-              <a:rPr lang="en-US" sz="1250" dirty="0">
+              <a:rPr lang="en-US" sz="1550" dirty="0">
                 <a:solidFill>
                   <a:srgbClr val="17364A"/>
                 </a:solidFill>
@@ -7381,15 +7690,15 @@
                 <a:ea typeface="Aptos" pitchFamily="34" charset="-122"/>
                 <a:cs typeface="Aptos" pitchFamily="34" charset="-120"/>
               </a:rPr>
-              <a:t>Draft AI governance charter; governance operating model; intake and decision-flow diagram; list of unresolved policy.</a:t>
-            </a:r>
-            <a:endParaRPr lang="en-US" sz="1250" dirty="0"/>
-          </a:p>
-        </p:txBody>
-      </p:sp>
-      <p:sp>
-        <p:nvSpPr>
-          <p:cNvPr id="14" name="Shape 12"/>
+              <a:t>Draft AI governance charter; governance operating model; intake and decision-flow diagram; list of.</a:t>
+            </a:r>
+            <a:endParaRPr lang="en-US" sz="1550" dirty="0"/>
+          </a:p>
+        </p:txBody>
+      </p:sp>
+      <p:sp>
+        <p:nvSpPr>
+          <p:cNvPr id="15" name="Shape 13"/>
           <p:cNvSpPr/>
           <p:nvPr/>
         </p:nvSpPr>
@@ -7416,14 +7725,14 @@
       </p:sp>
       <p:sp>
         <p:nvSpPr>
-          <p:cNvPr id="15" name="Text 13"/>
+          <p:cNvPr id="16" name="Text 14"/>
           <p:cNvSpPr/>
           <p:nvPr/>
         </p:nvSpPr>
         <p:spPr>
           <a:xfrm>
             <a:off x="8074152" y="3666744"/>
-            <a:ext cx="2825496" cy="201168"/>
+            <a:ext cx="2825496" cy="256032"/>
           </a:xfrm>
           <a:prstGeom prst="rect">
             <a:avLst/>
@@ -7439,7 +7748,7 @@
               <a:buNone/>
             </a:pPr>
             <a:r>
-              <a:rPr lang="en-US" sz="950" b="1" dirty="0">
+              <a:rPr lang="en-US" sz="1300" b="1" dirty="0">
                 <a:solidFill>
                   <a:srgbClr val="0068B7"/>
                 </a:solidFill>
@@ -7449,20 +7758,20 @@
               </a:rPr>
               <a:t>Use this for</a:t>
             </a:r>
-            <a:endParaRPr lang="en-US" sz="950" dirty="0"/>
-          </a:p>
-        </p:txBody>
-      </p:sp>
-      <p:sp>
-        <p:nvSpPr>
-          <p:cNvPr id="16" name="Text 14"/>
-          <p:cNvSpPr/>
-          <p:nvPr/>
-        </p:nvSpPr>
-        <p:spPr>
-          <a:xfrm>
-            <a:off x="8074152" y="3959352"/>
-            <a:ext cx="2825496" cy="1170432"/>
+            <a:endParaRPr lang="en-US" sz="1300" dirty="0"/>
+          </a:p>
+        </p:txBody>
+      </p:sp>
+      <p:sp>
+        <p:nvSpPr>
+          <p:cNvPr id="17" name="Text 15"/>
+          <p:cNvSpPr/>
+          <p:nvPr/>
+        </p:nvSpPr>
+        <p:spPr>
+          <a:xfrm>
+            <a:off x="8074152" y="4023360"/>
+            <a:ext cx="2825496" cy="1097280"/>
           </a:xfrm>
           <a:prstGeom prst="rect">
             <a:avLst/>
@@ -7480,7 +7789,7 @@
               <a:buNone/>
             </a:pPr>
             <a:r>
-              <a:rPr lang="en-US" sz="1250" dirty="0">
+              <a:rPr lang="en-US" sz="1550" dirty="0">
                 <a:solidFill>
                   <a:srgbClr val="17364A"/>
                 </a:solidFill>
@@ -7490,7 +7799,7 @@
               </a:rPr>
               <a:t>Connect the concept to public health decisions, safeguards, documentation, or implementation work.</a:t>
             </a:r>
-            <a:endParaRPr lang="en-US" sz="1250" dirty="0"/>
+            <a:endParaRPr lang="en-US" sz="1550" dirty="0"/>
           </a:p>
         </p:txBody>
       </p:sp>
@@ -7687,7 +7996,7 @@
                 <a:ea typeface="Aptos" pitchFamily="34" charset="-122"/>
                 <a:cs typeface="Aptos" pitchFamily="34" charset="-120"/>
               </a:rPr>
-              <a:t>© Paula Soper</a:t>
+              <a:t>Â© Paula Soper</a:t>
             </a:r>
             <a:endParaRPr lang="en-US" sz="800" dirty="0"/>
           </a:p>
@@ -7695,7 +8004,46 @@
       </p:sp>
       <p:sp>
         <p:nvSpPr>
-          <p:cNvPr id="7" name="Shape 5"/>
+          <p:cNvPr id="7" name="Text 5"/>
+          <p:cNvSpPr/>
+          <p:nvPr/>
+        </p:nvSpPr>
+        <p:spPr>
+          <a:xfrm>
+            <a:off x="11137392" y="6510528"/>
+            <a:ext cx="411480" cy="201168"/>
+          </a:xfrm>
+          <a:prstGeom prst="rect">
+            <a:avLst/>
+          </a:prstGeom>
+          <a:noFill/>
+          <a:ln/>
+        </p:spPr>
+        <p:txBody>
+          <a:bodyPr wrap="square" lIns="0" tIns="0" rIns="0" bIns="0" rtlCol="0" anchor="ctr"/>
+          <a:lstStyle/>
+          <a:p>
+            <a:pPr algn="r" indent="0" marL="0">
+              <a:buNone/>
+            </a:pPr>
+            <a:r>
+              <a:rPr lang="en-US" sz="900" dirty="0">
+                <a:solidFill>
+                  <a:srgbClr val="5F7181"/>
+                </a:solidFill>
+                <a:latin typeface="Aptos" pitchFamily="34" charset="0"/>
+                <a:ea typeface="Aptos" pitchFamily="34" charset="-122"/>
+                <a:cs typeface="Aptos" pitchFamily="34" charset="-120"/>
+              </a:rPr>
+              <a:t>18</a:t>
+            </a:r>
+            <a:endParaRPr lang="en-US" sz="900" dirty="0"/>
+          </a:p>
+        </p:txBody>
+      </p:sp>
+      <p:sp>
+        <p:nvSpPr>
+          <p:cNvPr id="8" name="Shape 6"/>
           <p:cNvSpPr/>
           <p:nvPr/>
         </p:nvSpPr>
@@ -7720,7 +8068,7 @@
       </p:sp>
       <p:sp>
         <p:nvSpPr>
-          <p:cNvPr id="8" name="Text 6"/>
+          <p:cNvPr id="9" name="Text 7"/>
           <p:cNvSpPr/>
           <p:nvPr/>
         </p:nvSpPr>
@@ -7759,14 +8107,14 @@
       </p:sp>
       <p:sp>
         <p:nvSpPr>
-          <p:cNvPr id="9" name="Text 7"/>
+          <p:cNvPr id="10" name="Text 8"/>
           <p:cNvSpPr/>
           <p:nvPr/>
         </p:nvSpPr>
         <p:spPr>
           <a:xfrm>
             <a:off x="640080" y="621792"/>
-            <a:ext cx="10881360" cy="566928"/>
+            <a:ext cx="10881360" cy="713232"/>
           </a:xfrm>
           <a:prstGeom prst="rect">
             <a:avLst/>
@@ -7784,7 +8132,7 @@
               <a:buNone/>
             </a:pPr>
             <a:r>
-              <a:rPr lang="en-US" sz="2700" b="1" dirty="0">
+              <a:rPr lang="en-US" sz="3400" b="1" dirty="0">
                 <a:solidFill>
                   <a:srgbClr val="003A63"/>
                 </a:solidFill>
@@ -7794,20 +8142,20 @@
               </a:rPr>
               <a:t>Expected Assignment</a:t>
             </a:r>
-            <a:endParaRPr lang="en-US" sz="2700" dirty="0"/>
-          </a:p>
-        </p:txBody>
-      </p:sp>
-      <p:sp>
-        <p:nvSpPr>
-          <p:cNvPr id="10" name="Text 8"/>
-          <p:cNvSpPr/>
-          <p:nvPr/>
-        </p:nvSpPr>
-        <p:spPr>
-          <a:xfrm>
-            <a:off x="868680" y="1417320"/>
-            <a:ext cx="6675120" cy="4434840"/>
+            <a:endParaRPr lang="en-US" sz="3400" dirty="0"/>
+          </a:p>
+        </p:txBody>
+      </p:sp>
+      <p:sp>
+        <p:nvSpPr>
+          <p:cNvPr id="11" name="Text 9"/>
+          <p:cNvSpPr/>
+          <p:nvPr/>
+        </p:nvSpPr>
+        <p:spPr>
+          <a:xfrm>
+            <a:off x="868680" y="1508760"/>
+            <a:ext cx="6537960" cy="4160520"/>
           </a:xfrm>
           <a:prstGeom prst="rect">
             <a:avLst/>
@@ -7822,7 +8170,7 @@
           <a:lstStyle/>
           <a:p>
             <a:r>
-              <a:rPr lang="en-US" sz="1700" dirty="0">
+              <a:rPr lang="en-US" sz="2100" dirty="0">
                 <a:solidFill>
                   <a:srgbClr val="17364A"/>
                 </a:solidFill>
@@ -7830,15 +8178,15 @@
                 <a:ea typeface="Aptos" pitchFamily="34" charset="-122"/>
                 <a:cs typeface="Aptos" pitchFamily="34" charset="-120"/>
               </a:rPr>
-              <a:t>Draft AI governance charter; governance operating model; intake and decision-flow diagram; list of unresolved policy questions.</a:t>
-            </a:r>
-            <a:endParaRPr lang="en-US" sz="1700" dirty="0"/>
-          </a:p>
-        </p:txBody>
-      </p:sp>
-      <p:sp>
-        <p:nvSpPr>
-          <p:cNvPr id="11" name="Shape 9"/>
+              <a:t>Draft AI governance charter; governance operating model; intake and decision-flow diagram; list of.</a:t>
+            </a:r>
+            <a:endParaRPr lang="en-US" sz="2100" dirty="0"/>
+          </a:p>
+        </p:txBody>
+      </p:sp>
+      <p:sp>
+        <p:nvSpPr>
+          <p:cNvPr id="12" name="Shape 10"/>
           <p:cNvSpPr/>
           <p:nvPr/>
         </p:nvSpPr>
@@ -7865,14 +8213,14 @@
       </p:sp>
       <p:sp>
         <p:nvSpPr>
-          <p:cNvPr id="12" name="Text 10"/>
+          <p:cNvPr id="13" name="Text 11"/>
           <p:cNvSpPr/>
           <p:nvPr/>
         </p:nvSpPr>
         <p:spPr>
           <a:xfrm>
             <a:off x="8074152" y="1563624"/>
-            <a:ext cx="2825496" cy="201168"/>
+            <a:ext cx="2825496" cy="256032"/>
           </a:xfrm>
           <a:prstGeom prst="rect">
             <a:avLst/>
@@ -7888,7 +8236,7 @@
               <a:buNone/>
             </a:pPr>
             <a:r>
-              <a:rPr lang="en-US" sz="950" b="1" dirty="0">
+              <a:rPr lang="en-US" sz="1300" b="1" dirty="0">
                 <a:solidFill>
                   <a:srgbClr val="0068B7"/>
                 </a:solidFill>
@@ -7898,20 +8246,20 @@
               </a:rPr>
               <a:t>Key idea</a:t>
             </a:r>
-            <a:endParaRPr lang="en-US" sz="950" dirty="0"/>
-          </a:p>
-        </p:txBody>
-      </p:sp>
-      <p:sp>
-        <p:nvSpPr>
-          <p:cNvPr id="13" name="Text 11"/>
-          <p:cNvSpPr/>
-          <p:nvPr/>
-        </p:nvSpPr>
-        <p:spPr>
-          <a:xfrm>
-            <a:off x="8074152" y="1856232"/>
-            <a:ext cx="2825496" cy="1261872"/>
+            <a:endParaRPr lang="en-US" sz="1300" dirty="0"/>
+          </a:p>
+        </p:txBody>
+      </p:sp>
+      <p:sp>
+        <p:nvSpPr>
+          <p:cNvPr id="14" name="Text 12"/>
+          <p:cNvSpPr/>
+          <p:nvPr/>
+        </p:nvSpPr>
+        <p:spPr>
+          <a:xfrm>
+            <a:off x="8074152" y="1920240"/>
+            <a:ext cx="2825496" cy="1188720"/>
           </a:xfrm>
           <a:prstGeom prst="rect">
             <a:avLst/>
@@ -7929,7 +8277,7 @@
               <a:buNone/>
             </a:pPr>
             <a:r>
-              <a:rPr lang="en-US" sz="1250" dirty="0">
+              <a:rPr lang="en-US" sz="1550" dirty="0">
                 <a:solidFill>
                   <a:srgbClr val="17364A"/>
                 </a:solidFill>
@@ -7937,15 +8285,15 @@
                 <a:ea typeface="Aptos" pitchFamily="34" charset="-122"/>
                 <a:cs typeface="Aptos" pitchFamily="34" charset="-120"/>
               </a:rPr>
-              <a:t>Draft AI governance charter; governance operating model; intake and decision-flow diagram; list of unresolved policy questions.</a:t>
-            </a:r>
-            <a:endParaRPr lang="en-US" sz="1250" dirty="0"/>
-          </a:p>
-        </p:txBody>
-      </p:sp>
-      <p:sp>
-        <p:nvSpPr>
-          <p:cNvPr id="14" name="Shape 12"/>
+              <a:t>Draft AI governance charter; governance operating model; intake and decision-flow diagram; list of.</a:t>
+            </a:r>
+            <a:endParaRPr lang="en-US" sz="1550" dirty="0"/>
+          </a:p>
+        </p:txBody>
+      </p:sp>
+      <p:sp>
+        <p:nvSpPr>
+          <p:cNvPr id="15" name="Shape 13"/>
           <p:cNvSpPr/>
           <p:nvPr/>
         </p:nvSpPr>
@@ -7972,14 +8320,14 @@
       </p:sp>
       <p:sp>
         <p:nvSpPr>
-          <p:cNvPr id="15" name="Text 13"/>
+          <p:cNvPr id="16" name="Text 14"/>
           <p:cNvSpPr/>
           <p:nvPr/>
         </p:nvSpPr>
         <p:spPr>
           <a:xfrm>
             <a:off x="8074152" y="3666744"/>
-            <a:ext cx="2825496" cy="201168"/>
+            <a:ext cx="2825496" cy="256032"/>
           </a:xfrm>
           <a:prstGeom prst="rect">
             <a:avLst/>
@@ -7995,7 +8343,7 @@
               <a:buNone/>
             </a:pPr>
             <a:r>
-              <a:rPr lang="en-US" sz="950" b="1" dirty="0">
+              <a:rPr lang="en-US" sz="1300" b="1" dirty="0">
                 <a:solidFill>
                   <a:srgbClr val="0068B7"/>
                 </a:solidFill>
@@ -8005,20 +8353,20 @@
               </a:rPr>
               <a:t>Use this for</a:t>
             </a:r>
-            <a:endParaRPr lang="en-US" sz="950" dirty="0"/>
-          </a:p>
-        </p:txBody>
-      </p:sp>
-      <p:sp>
-        <p:nvSpPr>
-          <p:cNvPr id="16" name="Text 14"/>
-          <p:cNvSpPr/>
-          <p:nvPr/>
-        </p:nvSpPr>
-        <p:spPr>
-          <a:xfrm>
-            <a:off x="8074152" y="3959352"/>
-            <a:ext cx="2825496" cy="1170432"/>
+            <a:endParaRPr lang="en-US" sz="1300" dirty="0"/>
+          </a:p>
+        </p:txBody>
+      </p:sp>
+      <p:sp>
+        <p:nvSpPr>
+          <p:cNvPr id="17" name="Text 15"/>
+          <p:cNvSpPr/>
+          <p:nvPr/>
+        </p:nvSpPr>
+        <p:spPr>
+          <a:xfrm>
+            <a:off x="8074152" y="4023360"/>
+            <a:ext cx="2825496" cy="1097280"/>
           </a:xfrm>
           <a:prstGeom prst="rect">
             <a:avLst/>
@@ -8036,7 +8384,7 @@
               <a:buNone/>
             </a:pPr>
             <a:r>
-              <a:rPr lang="en-US" sz="1250" dirty="0">
+              <a:rPr lang="en-US" sz="1550" dirty="0">
                 <a:solidFill>
                   <a:srgbClr val="17364A"/>
                 </a:solidFill>
@@ -8046,7 +8394,7 @@
               </a:rPr>
               <a:t>Connect the concept to public health decisions, safeguards, documentation, or implementation work.</a:t>
             </a:r>
-            <a:endParaRPr lang="en-US" sz="1250" dirty="0"/>
+            <a:endParaRPr lang="en-US" sz="1550" dirty="0"/>
           </a:p>
         </p:txBody>
       </p:sp>
@@ -8243,7 +8591,7 @@
                 <a:ea typeface="Aptos" pitchFamily="34" charset="-122"/>
                 <a:cs typeface="Aptos" pitchFamily="34" charset="-120"/>
               </a:rPr>
-              <a:t>© Paula Soper</a:t>
+              <a:t>Â© Paula Soper</a:t>
             </a:r>
             <a:endParaRPr lang="en-US" sz="800" dirty="0"/>
           </a:p>
@@ -8251,7 +8599,46 @@
       </p:sp>
       <p:sp>
         <p:nvSpPr>
-          <p:cNvPr id="7" name="Shape 5"/>
+          <p:cNvPr id="7" name="Text 5"/>
+          <p:cNvSpPr/>
+          <p:nvPr/>
+        </p:nvSpPr>
+        <p:spPr>
+          <a:xfrm>
+            <a:off x="11137392" y="6510528"/>
+            <a:ext cx="411480" cy="201168"/>
+          </a:xfrm>
+          <a:prstGeom prst="rect">
+            <a:avLst/>
+          </a:prstGeom>
+          <a:noFill/>
+          <a:ln/>
+        </p:spPr>
+        <p:txBody>
+          <a:bodyPr wrap="square" lIns="0" tIns="0" rIns="0" bIns="0" rtlCol="0" anchor="ctr"/>
+          <a:lstStyle/>
+          <a:p>
+            <a:pPr algn="r" indent="0" marL="0">
+              <a:buNone/>
+            </a:pPr>
+            <a:r>
+              <a:rPr lang="en-US" sz="900" dirty="0">
+                <a:solidFill>
+                  <a:srgbClr val="5F7181"/>
+                </a:solidFill>
+                <a:latin typeface="Aptos" pitchFamily="34" charset="0"/>
+                <a:ea typeface="Aptos" pitchFamily="34" charset="-122"/>
+                <a:cs typeface="Aptos" pitchFamily="34" charset="-120"/>
+              </a:rPr>
+              <a:t>19</a:t>
+            </a:r>
+            <a:endParaRPr lang="en-US" sz="900" dirty="0"/>
+          </a:p>
+        </p:txBody>
+      </p:sp>
+      <p:sp>
+        <p:nvSpPr>
+          <p:cNvPr id="8" name="Shape 6"/>
           <p:cNvSpPr/>
           <p:nvPr/>
         </p:nvSpPr>
@@ -8276,7 +8663,7 @@
       </p:sp>
       <p:sp>
         <p:nvSpPr>
-          <p:cNvPr id="8" name="Text 6"/>
+          <p:cNvPr id="9" name="Text 7"/>
           <p:cNvSpPr/>
           <p:nvPr/>
         </p:nvSpPr>
@@ -8315,14 +8702,14 @@
       </p:sp>
       <p:sp>
         <p:nvSpPr>
-          <p:cNvPr id="9" name="Text 7"/>
+          <p:cNvPr id="10" name="Text 8"/>
           <p:cNvSpPr/>
           <p:nvPr/>
         </p:nvSpPr>
         <p:spPr>
           <a:xfrm>
             <a:off x="640080" y="621792"/>
-            <a:ext cx="10881360" cy="566928"/>
+            <a:ext cx="10881360" cy="713232"/>
           </a:xfrm>
           <a:prstGeom prst="rect">
             <a:avLst/>
@@ -8340,7 +8727,7 @@
               <a:buNone/>
             </a:pPr>
             <a:r>
-              <a:rPr lang="en-US" sz="2700" b="1" dirty="0">
+              <a:rPr lang="en-US" sz="3400" b="1" dirty="0">
                 <a:solidFill>
                   <a:srgbClr val="003A63"/>
                 </a:solidFill>
@@ -8350,20 +8737,20 @@
               </a:rPr>
               <a:t>Knowledge Check</a:t>
             </a:r>
-            <a:endParaRPr lang="en-US" sz="2700" dirty="0"/>
-          </a:p>
-        </p:txBody>
-      </p:sp>
-      <p:sp>
-        <p:nvSpPr>
-          <p:cNvPr id="10" name="Text 8"/>
-          <p:cNvSpPr/>
-          <p:nvPr/>
-        </p:nvSpPr>
-        <p:spPr>
-          <a:xfrm>
-            <a:off x="868680" y="1417320"/>
-            <a:ext cx="6675120" cy="4434840"/>
+            <a:endParaRPr lang="en-US" sz="3400" dirty="0"/>
+          </a:p>
+        </p:txBody>
+      </p:sp>
+      <p:sp>
+        <p:nvSpPr>
+          <p:cNvPr id="11" name="Text 9"/>
+          <p:cNvSpPr/>
+          <p:nvPr/>
+        </p:nvSpPr>
+        <p:spPr>
+          <a:xfrm>
+            <a:off x="868680" y="1508760"/>
+            <a:ext cx="6537960" cy="4160520"/>
           </a:xfrm>
           <a:prstGeom prst="rect">
             <a:avLst/>
@@ -8378,7 +8765,7 @@
           <a:lstStyle/>
           <a:p>
             <a:r>
-              <a:rPr lang="en-US" sz="1700" dirty="0">
+              <a:rPr lang="en-US" sz="2100" dirty="0">
                 <a:solidFill>
                   <a:srgbClr val="17364A"/>
                 </a:solidFill>
@@ -8388,11 +8775,11 @@
               </a:rPr>
               <a:t>1. What is the strongest reason this module topic belongs in AI leadership and governance training?</a:t>
             </a:r>
-            <a:endParaRPr lang="en-US" sz="1700" dirty="0"/>
-          </a:p>
-          <a:p>
-            <a:r>
-              <a:rPr lang="en-US" sz="1700" dirty="0">
+            <a:endParaRPr lang="en-US" sz="2100" dirty="0"/>
+          </a:p>
+          <a:p>
+            <a:r>
+              <a:rPr lang="en-US" sz="2100" dirty="0">
                 <a:solidFill>
                   <a:srgbClr val="17364A"/>
                 </a:solidFill>
@@ -8402,11 +8789,11 @@
               </a:rPr>
               <a:t>2. Which practice best supports accountable public health AI governance?</a:t>
             </a:r>
-            <a:endParaRPr lang="en-US" sz="1700" dirty="0"/>
-          </a:p>
-          <a:p>
-            <a:r>
-              <a:rPr lang="en-US" sz="1700" dirty="0">
+            <a:endParaRPr lang="en-US" sz="2100" dirty="0"/>
+          </a:p>
+          <a:p>
+            <a:r>
+              <a:rPr lang="en-US" sz="2100" dirty="0">
                 <a:solidFill>
                   <a:srgbClr val="17364A"/>
                 </a:solidFill>
@@ -8416,27 +8803,13 @@
               </a:rPr>
               <a:t>3. When should an AI use case be escalated for leadership or governance review?</a:t>
             </a:r>
-            <a:endParaRPr lang="en-US" sz="1700" dirty="0"/>
-          </a:p>
-          <a:p>
-            <a:r>
-              <a:rPr lang="en-US" sz="1700" dirty="0">
-                <a:solidFill>
-                  <a:srgbClr val="17364A"/>
-                </a:solidFill>
-                <a:latin typeface="Aptos" pitchFamily="34" charset="0"/>
-                <a:ea typeface="Aptos" pitchFamily="34" charset="-122"/>
-                <a:cs typeface="Aptos" pitchFamily="34" charset="-120"/>
-              </a:rPr>
-              <a:t>4. What is weak evidence of completion for a leadership and governance module?</a:t>
-            </a:r>
-            <a:endParaRPr lang="en-US" sz="1700" dirty="0"/>
-          </a:p>
-        </p:txBody>
-      </p:sp>
-      <p:sp>
-        <p:nvSpPr>
-          <p:cNvPr id="11" name="Shape 9"/>
+            <a:endParaRPr lang="en-US" sz="2100" dirty="0"/>
+          </a:p>
+        </p:txBody>
+      </p:sp>
+      <p:sp>
+        <p:nvSpPr>
+          <p:cNvPr id="12" name="Shape 10"/>
           <p:cNvSpPr/>
           <p:nvPr/>
         </p:nvSpPr>
@@ -8463,14 +8836,14 @@
       </p:sp>
       <p:sp>
         <p:nvSpPr>
-          <p:cNvPr id="12" name="Text 10"/>
+          <p:cNvPr id="13" name="Text 11"/>
           <p:cNvSpPr/>
           <p:nvPr/>
         </p:nvSpPr>
         <p:spPr>
           <a:xfrm>
             <a:off x="8074152" y="1563624"/>
-            <a:ext cx="2825496" cy="201168"/>
+            <a:ext cx="2825496" cy="256032"/>
           </a:xfrm>
           <a:prstGeom prst="rect">
             <a:avLst/>
@@ -8486,7 +8859,7 @@
               <a:buNone/>
             </a:pPr>
             <a:r>
-              <a:rPr lang="en-US" sz="950" b="1" dirty="0">
+              <a:rPr lang="en-US" sz="1300" b="1" dirty="0">
                 <a:solidFill>
                   <a:srgbClr val="0068B7"/>
                 </a:solidFill>
@@ -8496,20 +8869,20 @@
               </a:rPr>
               <a:t>Key idea</a:t>
             </a:r>
-            <a:endParaRPr lang="en-US" sz="950" dirty="0"/>
-          </a:p>
-        </p:txBody>
-      </p:sp>
-      <p:sp>
-        <p:nvSpPr>
-          <p:cNvPr id="13" name="Text 11"/>
-          <p:cNvSpPr/>
-          <p:nvPr/>
-        </p:nvSpPr>
-        <p:spPr>
-          <a:xfrm>
-            <a:off x="8074152" y="1856232"/>
-            <a:ext cx="2825496" cy="1261872"/>
+            <a:endParaRPr lang="en-US" sz="1300" dirty="0"/>
+          </a:p>
+        </p:txBody>
+      </p:sp>
+      <p:sp>
+        <p:nvSpPr>
+          <p:cNvPr id="14" name="Text 12"/>
+          <p:cNvSpPr/>
+          <p:nvPr/>
+        </p:nvSpPr>
+        <p:spPr>
+          <a:xfrm>
+            <a:off x="8074152" y="1920240"/>
+            <a:ext cx="2825496" cy="1188720"/>
           </a:xfrm>
           <a:prstGeom prst="rect">
             <a:avLst/>
@@ -8527,7 +8900,7 @@
               <a:buNone/>
             </a:pPr>
             <a:r>
-              <a:rPr lang="en-US" sz="1250" dirty="0">
+              <a:rPr lang="en-US" sz="1550" dirty="0">
                 <a:solidFill>
                   <a:srgbClr val="17364A"/>
                 </a:solidFill>
@@ -8537,13 +8910,13 @@
               </a:rPr>
               <a:t>1. What is the strongest reason this module topic belongs in AI leadership and governance training?</a:t>
             </a:r>
-            <a:endParaRPr lang="en-US" sz="1250" dirty="0"/>
-          </a:p>
-        </p:txBody>
-      </p:sp>
-      <p:sp>
-        <p:nvSpPr>
-          <p:cNvPr id="14" name="Shape 12"/>
+            <a:endParaRPr lang="en-US" sz="1550" dirty="0"/>
+          </a:p>
+        </p:txBody>
+      </p:sp>
+      <p:sp>
+        <p:nvSpPr>
+          <p:cNvPr id="15" name="Shape 13"/>
           <p:cNvSpPr/>
           <p:nvPr/>
         </p:nvSpPr>
@@ -8570,14 +8943,14 @@
       </p:sp>
       <p:sp>
         <p:nvSpPr>
-          <p:cNvPr id="15" name="Text 13"/>
+          <p:cNvPr id="16" name="Text 14"/>
           <p:cNvSpPr/>
           <p:nvPr/>
         </p:nvSpPr>
         <p:spPr>
           <a:xfrm>
             <a:off x="8074152" y="3666744"/>
-            <a:ext cx="2825496" cy="201168"/>
+            <a:ext cx="2825496" cy="256032"/>
           </a:xfrm>
           <a:prstGeom prst="rect">
             <a:avLst/>
@@ -8593,7 +8966,7 @@
               <a:buNone/>
             </a:pPr>
             <a:r>
-              <a:rPr lang="en-US" sz="950" b="1" dirty="0">
+              <a:rPr lang="en-US" sz="1300" b="1" dirty="0">
                 <a:solidFill>
                   <a:srgbClr val="0068B7"/>
                 </a:solidFill>
@@ -8603,20 +8976,20 @@
               </a:rPr>
               <a:t>Use this for</a:t>
             </a:r>
-            <a:endParaRPr lang="en-US" sz="950" dirty="0"/>
-          </a:p>
-        </p:txBody>
-      </p:sp>
-      <p:sp>
-        <p:nvSpPr>
-          <p:cNvPr id="16" name="Text 14"/>
-          <p:cNvSpPr/>
-          <p:nvPr/>
-        </p:nvSpPr>
-        <p:spPr>
-          <a:xfrm>
-            <a:off x="8074152" y="3959352"/>
-            <a:ext cx="2825496" cy="1170432"/>
+            <a:endParaRPr lang="en-US" sz="1300" dirty="0"/>
+          </a:p>
+        </p:txBody>
+      </p:sp>
+      <p:sp>
+        <p:nvSpPr>
+          <p:cNvPr id="17" name="Text 15"/>
+          <p:cNvSpPr/>
+          <p:nvPr/>
+        </p:nvSpPr>
+        <p:spPr>
+          <a:xfrm>
+            <a:off x="8074152" y="4023360"/>
+            <a:ext cx="2825496" cy="1097280"/>
           </a:xfrm>
           <a:prstGeom prst="rect">
             <a:avLst/>
@@ -8634,7 +9007,7 @@
               <a:buNone/>
             </a:pPr>
             <a:r>
-              <a:rPr lang="en-US" sz="1250" dirty="0">
+              <a:rPr lang="en-US" sz="1550" dirty="0">
                 <a:solidFill>
                   <a:srgbClr val="17364A"/>
                 </a:solidFill>
@@ -8644,7 +9017,7 @@
               </a:rPr>
               <a:t>Connect the concept to public health decisions, safeguards, documentation, or implementation work.</a:t>
             </a:r>
-            <a:endParaRPr lang="en-US" sz="1250" dirty="0"/>
+            <a:endParaRPr lang="en-US" sz="1550" dirty="0"/>
           </a:p>
         </p:txBody>
       </p:sp>
@@ -8841,7 +9214,7 @@
                 <a:ea typeface="Aptos" pitchFamily="34" charset="-122"/>
                 <a:cs typeface="Aptos" pitchFamily="34" charset="-120"/>
               </a:rPr>
-              <a:t>© Paula Soper</a:t>
+              <a:t>Â© Paula Soper</a:t>
             </a:r>
             <a:endParaRPr lang="en-US" sz="800" dirty="0"/>
           </a:p>
@@ -8855,8 +9228,47 @@
         </p:nvSpPr>
         <p:spPr>
           <a:xfrm>
+            <a:off x="11137392" y="6510528"/>
+            <a:ext cx="411480" cy="201168"/>
+          </a:xfrm>
+          <a:prstGeom prst="rect">
+            <a:avLst/>
+          </a:prstGeom>
+          <a:noFill/>
+          <a:ln/>
+        </p:spPr>
+        <p:txBody>
+          <a:bodyPr wrap="square" lIns="0" tIns="0" rIns="0" bIns="0" rtlCol="0" anchor="ctr"/>
+          <a:lstStyle/>
+          <a:p>
+            <a:pPr algn="r" indent="0" marL="0">
+              <a:buNone/>
+            </a:pPr>
+            <a:r>
+              <a:rPr lang="en-US" sz="900" dirty="0">
+                <a:solidFill>
+                  <a:srgbClr val="5F7181"/>
+                </a:solidFill>
+                <a:latin typeface="Aptos" pitchFamily="34" charset="0"/>
+                <a:ea typeface="Aptos" pitchFamily="34" charset="-122"/>
+                <a:cs typeface="Aptos" pitchFamily="34" charset="-120"/>
+              </a:rPr>
+              <a:t>2</a:t>
+            </a:r>
+            <a:endParaRPr lang="en-US" sz="900" dirty="0"/>
+          </a:p>
+        </p:txBody>
+      </p:sp>
+      <p:sp>
+        <p:nvSpPr>
+          <p:cNvPr id="8" name="Text 6"/>
+          <p:cNvSpPr/>
+          <p:nvPr/>
+        </p:nvSpPr>
+        <p:spPr>
+          <a:xfrm>
             <a:off x="640080" y="658368"/>
-            <a:ext cx="10881360" cy="566928"/>
+            <a:ext cx="10881360" cy="713232"/>
           </a:xfrm>
           <a:prstGeom prst="rect">
             <a:avLst/>
@@ -8874,7 +9286,7 @@
               <a:buNone/>
             </a:pPr>
             <a:r>
-              <a:rPr lang="en-US" sz="2700" b="1" dirty="0">
+              <a:rPr lang="en-US" sz="3400" b="1" dirty="0">
                 <a:solidFill>
                   <a:srgbClr val="003A63"/>
                 </a:solidFill>
@@ -8884,20 +9296,20 @@
               </a:rPr>
               <a:t>What this module helps you do</a:t>
             </a:r>
-            <a:endParaRPr lang="en-US" sz="2700" dirty="0"/>
-          </a:p>
-        </p:txBody>
-      </p:sp>
-      <p:sp>
-        <p:nvSpPr>
-          <p:cNvPr id="8" name="Text 6"/>
-          <p:cNvSpPr/>
-          <p:nvPr/>
-        </p:nvSpPr>
-        <p:spPr>
-          <a:xfrm>
-            <a:off x="868680" y="1417320"/>
-            <a:ext cx="6675120" cy="3291840"/>
+            <a:endParaRPr lang="en-US" sz="3400" dirty="0"/>
+          </a:p>
+        </p:txBody>
+      </p:sp>
+      <p:sp>
+        <p:nvSpPr>
+          <p:cNvPr id="9" name="Text 7"/>
+          <p:cNvSpPr/>
+          <p:nvPr/>
+        </p:nvSpPr>
+        <p:spPr>
+          <a:xfrm>
+            <a:off x="868680" y="1508760"/>
+            <a:ext cx="6446520" cy="2926080"/>
           </a:xfrm>
           <a:prstGeom prst="rect">
             <a:avLst/>
@@ -8912,7 +9324,7 @@
           <a:lstStyle/>
           <a:p>
             <a:r>
-              <a:rPr lang="en-US" sz="1700" dirty="0">
+              <a:rPr lang="en-US" sz="2100" dirty="0">
                 <a:solidFill>
                   <a:srgbClr val="17364A"/>
                 </a:solidFill>
@@ -8920,13 +9332,13 @@
                 <a:ea typeface="Aptos" pitchFamily="34" charset="-122"/>
                 <a:cs typeface="Aptos" pitchFamily="34" charset="-120"/>
               </a:rPr>
-              <a:t>AI governance needs a formal home before an agency begins approving tools, pilots, vendor products, or workflow automation.</a:t>
-            </a:r>
-            <a:endParaRPr lang="en-US" sz="1700" dirty="0"/>
-          </a:p>
-          <a:p>
-            <a:r>
-              <a:rPr lang="en-US" sz="1700" dirty="0">
+              <a:t>AI governance needs a formal home before an agency begins approving tools, pilots, vendor products, or workflow.</a:t>
+            </a:r>
+            <a:endParaRPr lang="en-US" sz="2100" dirty="0"/>
+          </a:p>
+          <a:p>
+            <a:r>
+              <a:rPr lang="en-US" sz="2100" dirty="0">
                 <a:solidFill>
                   <a:srgbClr val="17364A"/>
                 </a:solidFill>
@@ -8934,13 +9346,13 @@
                 <a:ea typeface="Aptos" pitchFamily="34" charset="-122"/>
                 <a:cs typeface="Aptos" pitchFamily="34" charset="-120"/>
               </a:rPr>
-              <a:t>A governance charter defines the purpose, scope, authority, membership, cadence, decision rules, and documentation expectations for the group that.</a:t>
-            </a:r>
-            <a:endParaRPr lang="en-US" sz="1700" dirty="0"/>
-          </a:p>
-          <a:p>
-            <a:r>
-              <a:rPr lang="en-US" sz="1700" dirty="0">
+              <a:t>A governance charter defines the purpose, scope, authority, membership, cadence, decision rules, and.</a:t>
+            </a:r>
+            <a:endParaRPr lang="en-US" sz="2100" dirty="0"/>
+          </a:p>
+          <a:p>
+            <a:r>
+              <a:rPr lang="en-US" sz="2100" dirty="0">
                 <a:solidFill>
                   <a:srgbClr val="17364A"/>
                 </a:solidFill>
@@ -8948,29 +9360,15 @@
                 <a:ea typeface="Aptos" pitchFamily="34" charset="-122"/>
                 <a:cs typeface="Aptos" pitchFamily="34" charset="-120"/>
               </a:rPr>
-              <a:t>Without a charter, AI decisions often become scattered across IT, program areas, legal, privacy, procurement, and individual project teams, which.</a:t>
-            </a:r>
-            <a:endParaRPr lang="en-US" sz="1700" dirty="0"/>
-          </a:p>
-          <a:p>
-            <a:r>
-              <a:rPr lang="en-US" sz="1700" dirty="0">
-                <a:solidFill>
-                  <a:srgbClr val="17364A"/>
-                </a:solidFill>
-                <a:latin typeface="Aptos" pitchFamily="34" charset="0"/>
-                <a:ea typeface="Aptos" pitchFamily="34" charset="-122"/>
-                <a:cs typeface="Aptos" pitchFamily="34" charset="-120"/>
-              </a:rPr>
-              <a:t>This module helps leaders design an AI governance operating model that is practical for a public health agency.</a:t>
-            </a:r>
-            <a:endParaRPr lang="en-US" sz="1700" dirty="0"/>
-          </a:p>
-        </p:txBody>
-      </p:sp>
-      <p:sp>
-        <p:nvSpPr>
-          <p:cNvPr id="9" name="Shape 7"/>
+              <a:t>Without a charter, AI decisions often become scattered across IT, program areas, legal, privacy, procurement, and.</a:t>
+            </a:r>
+            <a:endParaRPr lang="en-US" sz="2100" dirty="0"/>
+          </a:p>
+        </p:txBody>
+      </p:sp>
+      <p:sp>
+        <p:nvSpPr>
+          <p:cNvPr id="10" name="Shape 8"/>
           <p:cNvSpPr/>
           <p:nvPr/>
         </p:nvSpPr>
@@ -8997,14 +9395,14 @@
       </p:sp>
       <p:sp>
         <p:nvSpPr>
-          <p:cNvPr id="10" name="Text 8"/>
+          <p:cNvPr id="11" name="Text 9"/>
           <p:cNvSpPr/>
           <p:nvPr/>
         </p:nvSpPr>
         <p:spPr>
           <a:xfrm>
             <a:off x="8074152" y="1563624"/>
-            <a:ext cx="2825496" cy="201168"/>
+            <a:ext cx="2825496" cy="256032"/>
           </a:xfrm>
           <a:prstGeom prst="rect">
             <a:avLst/>
@@ -9020,7 +9418,7 @@
               <a:buNone/>
             </a:pPr>
             <a:r>
-              <a:rPr lang="en-US" sz="950" b="1" dirty="0">
+              <a:rPr lang="en-US" sz="1300" b="1" dirty="0">
                 <a:solidFill>
                   <a:srgbClr val="0068B7"/>
                 </a:solidFill>
@@ -9030,20 +9428,20 @@
               </a:rPr>
               <a:t>Module details</a:t>
             </a:r>
-            <a:endParaRPr lang="en-US" sz="950" dirty="0"/>
-          </a:p>
-        </p:txBody>
-      </p:sp>
-      <p:sp>
-        <p:nvSpPr>
-          <p:cNvPr id="11" name="Text 9"/>
-          <p:cNvSpPr/>
-          <p:nvPr/>
-        </p:nvSpPr>
-        <p:spPr>
-          <a:xfrm>
-            <a:off x="8074152" y="1856232"/>
-            <a:ext cx="2825496" cy="1353312"/>
+            <a:endParaRPr lang="en-US" sz="1300" dirty="0"/>
+          </a:p>
+        </p:txBody>
+      </p:sp>
+      <p:sp>
+        <p:nvSpPr>
+          <p:cNvPr id="12" name="Text 10"/>
+          <p:cNvSpPr/>
+          <p:nvPr/>
+        </p:nvSpPr>
+        <p:spPr>
+          <a:xfrm>
+            <a:off x="8074152" y="1920240"/>
+            <a:ext cx="2825496" cy="1280160"/>
           </a:xfrm>
           <a:prstGeom prst="rect">
             <a:avLst/>
@@ -9061,7 +9459,7 @@
               <a:buNone/>
             </a:pPr>
             <a:r>
-              <a:rPr lang="en-US" sz="1250" dirty="0">
+              <a:rPr lang="en-US" sz="1550" dirty="0">
                 <a:solidFill>
                   <a:srgbClr val="17364A"/>
                 </a:solidFill>
@@ -9071,14 +9469,14 @@
               </a:rPr>
               <a:t>Level: advanced/leadership</a:t>
             </a:r>
-            <a:endParaRPr lang="en-US" sz="1250" dirty="0"/>
+            <a:endParaRPr lang="en-US" sz="1550" dirty="0"/>
           </a:p>
           <a:p>
             <a:pPr indent="0" marL="0">
               <a:buNone/>
             </a:pPr>
             <a:r>
-              <a:rPr lang="en-US" sz="1250" dirty="0">
+              <a:rPr lang="en-US" sz="1550" dirty="0">
                 <a:solidFill>
                   <a:srgbClr val="17364A"/>
                 </a:solidFill>
@@ -9088,14 +9486,14 @@
               </a:rPr>
               <a:t>Primary track: Governance and Security Track</a:t>
             </a:r>
-            <a:endParaRPr lang="en-US" sz="1250" dirty="0"/>
+            <a:endParaRPr lang="en-US" sz="1550" dirty="0"/>
           </a:p>
           <a:p>
             <a:pPr indent="0" marL="0">
               <a:buNone/>
             </a:pPr>
             <a:r>
-              <a:rPr lang="en-US" sz="1250" dirty="0">
+              <a:rPr lang="en-US" sz="1550" dirty="0">
                 <a:solidFill>
                   <a:srgbClr val="17364A"/>
                 </a:solidFill>
@@ -9105,32 +9503,32 @@
               </a:rPr>
               <a:t>Appears in tracks: governance-security</a:t>
             </a:r>
-            <a:endParaRPr lang="en-US" sz="1250" dirty="0"/>
-          </a:p>
-        </p:txBody>
-      </p:sp>
-      <p:sp>
-        <p:nvSpPr>
-          <p:cNvPr id="12" name="Shape 10"/>
-          <p:cNvSpPr/>
-          <p:nvPr/>
-        </p:nvSpPr>
-        <p:spPr>
-          <a:xfrm>
-            <a:off x="7909560" y="3611880"/>
-            <a:ext cx="3154680" cy="1783080"/>
+            <a:endParaRPr lang="en-US" sz="1550" dirty="0"/>
+          </a:p>
+        </p:txBody>
+      </p:sp>
+      <p:sp>
+        <p:nvSpPr>
+          <p:cNvPr id="13" name="Shape 11"/>
+          <p:cNvSpPr/>
+          <p:nvPr/>
+        </p:nvSpPr>
+        <p:spPr>
+          <a:xfrm>
+            <a:off x="7635240" y="3730752"/>
+            <a:ext cx="1033272" cy="749808"/>
           </a:xfrm>
           <a:prstGeom prst="roundRect">
             <a:avLst>
-              <a:gd name="adj" fmla="val 6154"/>
+              <a:gd name="adj" fmla="val 14634"/>
             </a:avLst>
           </a:prstGeom>
           <a:solidFill>
-            <a:srgbClr val="EEF8ED"/>
+            <a:srgbClr val="0068B7"/>
           </a:solidFill>
           <a:ln w="12700">
             <a:solidFill>
-              <a:srgbClr val="B9D7E6"/>
+              <a:srgbClr val="0068B7"/>
             </a:solidFill>
             <a:prstDash val="solid"/>
           </a:ln>
@@ -9138,81 +9536,256 @@
       </p:sp>
       <p:sp>
         <p:nvSpPr>
-          <p:cNvPr id="13" name="Text 11"/>
-          <p:cNvSpPr/>
-          <p:nvPr/>
-        </p:nvSpPr>
-        <p:spPr>
-          <a:xfrm>
-            <a:off x="8074152" y="3758184"/>
-            <a:ext cx="2825496" cy="201168"/>
-          </a:xfrm>
-          <a:prstGeom prst="rect">
-            <a:avLst/>
-          </a:prstGeom>
-          <a:noFill/>
-          <a:ln/>
-        </p:spPr>
-        <p:txBody>
-          <a:bodyPr wrap="square" lIns="0" tIns="0" rIns="0" bIns="0" rtlCol="0" anchor="ctr"/>
-          <a:lstStyle/>
-          <a:p>
-            <a:pPr indent="0" marL="0">
-              <a:buNone/>
-            </a:pPr>
-            <a:r>
-              <a:rPr lang="en-US" sz="950" b="1" dirty="0">
-                <a:solidFill>
-                  <a:srgbClr val="0068B7"/>
-                </a:solidFill>
-                <a:latin typeface="Aptos" pitchFamily="34" charset="0"/>
-                <a:ea typeface="Aptos" pitchFamily="34" charset="-122"/>
-                <a:cs typeface="Aptos" pitchFamily="34" charset="-120"/>
-              </a:rPr>
-              <a:t>Learning approach</a:t>
-            </a:r>
-            <a:endParaRPr lang="en-US" sz="950" dirty="0"/>
-          </a:p>
-        </p:txBody>
-      </p:sp>
-      <p:sp>
-        <p:nvSpPr>
           <p:cNvPr id="14" name="Text 12"/>
           <p:cNvSpPr/>
           <p:nvPr/>
         </p:nvSpPr>
         <p:spPr>
           <a:xfrm>
-            <a:off x="8074152" y="4050792"/>
-            <a:ext cx="2825496" cy="1216152"/>
-          </a:xfrm>
-          <a:prstGeom prst="rect">
-            <a:avLst/>
-          </a:prstGeom>
-          <a:noFill/>
-          <a:ln/>
-        </p:spPr>
-        <p:txBody>
-          <a:bodyPr wrap="square" lIns="0" tIns="0" rIns="0" bIns="0" rtlCol="0" anchor="t">
+            <a:off x="7708392" y="3922776"/>
+            <a:ext cx="886968" cy="310896"/>
+          </a:xfrm>
+          <a:prstGeom prst="rect">
+            <a:avLst/>
+          </a:prstGeom>
+          <a:noFill/>
+          <a:ln/>
+        </p:spPr>
+        <p:txBody>
+          <a:bodyPr wrap="square" lIns="0" tIns="0" rIns="0" bIns="0" rtlCol="0" anchor="ctr">
             <a:normAutofit/>
           </a:bodyPr>
           <a:lstStyle/>
           <a:p>
-            <a:pPr indent="0" marL="0">
-              <a:buNone/>
-            </a:pPr>
-            <a:r>
-              <a:rPr lang="en-US" sz="1250" dirty="0">
-                <a:solidFill>
-                  <a:srgbClr val="17364A"/>
-                </a:solidFill>
-                <a:latin typeface="Aptos" pitchFamily="34" charset="0"/>
-                <a:ea typeface="Aptos" pitchFamily="34" charset="-122"/>
-                <a:cs typeface="Aptos" pitchFamily="34" charset="-120"/>
-              </a:rPr>
-              <a:t>Review the core ideas, complete the practical exercise, check your understanding, and use the related plays and tools to apply the lesson.</a:t>
-            </a:r>
-            <a:endParaRPr lang="en-US" sz="1250" dirty="0"/>
+            <a:pPr algn="ctr" indent="0" marL="0">
+              <a:buNone/>
+            </a:pPr>
+            <a:r>
+              <a:rPr lang="en-US" sz="1500" b="1" dirty="0">
+                <a:solidFill>
+                  <a:srgbClr val="FFFFFF"/>
+                </a:solidFill>
+                <a:latin typeface="Aptos" pitchFamily="34" charset="0"/>
+                <a:ea typeface="Aptos" pitchFamily="34" charset="-122"/>
+                <a:cs typeface="Aptos" pitchFamily="34" charset="-120"/>
+              </a:rPr>
+              <a:t>Learn</a:t>
+            </a:r>
+            <a:endParaRPr lang="en-US" sz="1500" dirty="0"/>
+          </a:p>
+        </p:txBody>
+      </p:sp>
+      <p:sp>
+        <p:nvSpPr>
+          <p:cNvPr id="15" name="Text 13"/>
+          <p:cNvSpPr/>
+          <p:nvPr/>
+        </p:nvSpPr>
+        <p:spPr>
+          <a:xfrm>
+            <a:off x="8695944" y="3941064"/>
+            <a:ext cx="201168" cy="256032"/>
+          </a:xfrm>
+          <a:prstGeom prst="rect">
+            <a:avLst/>
+          </a:prstGeom>
+          <a:noFill/>
+          <a:ln/>
+        </p:spPr>
+        <p:txBody>
+          <a:bodyPr wrap="square" lIns="0" tIns="0" rIns="0" bIns="0" rtlCol="0" anchor="ctr"/>
+          <a:lstStyle/>
+          <a:p>
+            <a:pPr algn="ctr" indent="0" marL="0">
+              <a:buNone/>
+            </a:pPr>
+            <a:r>
+              <a:rPr lang="en-US" sz="1800" b="1" dirty="0">
+                <a:solidFill>
+                  <a:srgbClr val="0068B7"/>
+                </a:solidFill>
+                <a:latin typeface="Aptos" pitchFamily="34" charset="0"/>
+                <a:ea typeface="Aptos" pitchFamily="34" charset="-122"/>
+                <a:cs typeface="Aptos" pitchFamily="34" charset="-120"/>
+              </a:rPr>
+              <a:t>â†’</a:t>
+            </a:r>
+            <a:endParaRPr lang="en-US" sz="1800" dirty="0"/>
+          </a:p>
+        </p:txBody>
+      </p:sp>
+      <p:sp>
+        <p:nvSpPr>
+          <p:cNvPr id="16" name="Shape 14"/>
+          <p:cNvSpPr/>
+          <p:nvPr/>
+        </p:nvSpPr>
+        <p:spPr>
+          <a:xfrm>
+            <a:off x="8924544" y="3730752"/>
+            <a:ext cx="1033272" cy="749808"/>
+          </a:xfrm>
+          <a:prstGeom prst="roundRect">
+            <a:avLst>
+              <a:gd name="adj" fmla="val 14634"/>
+            </a:avLst>
+          </a:prstGeom>
+          <a:solidFill>
+            <a:srgbClr val="2F8A28"/>
+          </a:solidFill>
+          <a:ln w="12700">
+            <a:solidFill>
+              <a:srgbClr val="2F8A28"/>
+            </a:solidFill>
+            <a:prstDash val="solid"/>
+          </a:ln>
+        </p:spPr>
+      </p:sp>
+      <p:sp>
+        <p:nvSpPr>
+          <p:cNvPr id="17" name="Text 15"/>
+          <p:cNvSpPr/>
+          <p:nvPr/>
+        </p:nvSpPr>
+        <p:spPr>
+          <a:xfrm>
+            <a:off x="8997696" y="3922776"/>
+            <a:ext cx="886968" cy="310896"/>
+          </a:xfrm>
+          <a:prstGeom prst="rect">
+            <a:avLst/>
+          </a:prstGeom>
+          <a:noFill/>
+          <a:ln/>
+        </p:spPr>
+        <p:txBody>
+          <a:bodyPr wrap="square" lIns="0" tIns="0" rIns="0" bIns="0" rtlCol="0" anchor="ctr">
+            <a:normAutofit/>
+          </a:bodyPr>
+          <a:lstStyle/>
+          <a:p>
+            <a:pPr algn="ctr" indent="0" marL="0">
+              <a:buNone/>
+            </a:pPr>
+            <a:r>
+              <a:rPr lang="en-US" sz="1500" b="1" dirty="0">
+                <a:solidFill>
+                  <a:srgbClr val="FFFFFF"/>
+                </a:solidFill>
+                <a:latin typeface="Aptos" pitchFamily="34" charset="0"/>
+                <a:ea typeface="Aptos" pitchFamily="34" charset="-122"/>
+                <a:cs typeface="Aptos" pitchFamily="34" charset="-120"/>
+              </a:rPr>
+              <a:t>Apply</a:t>
+            </a:r>
+            <a:endParaRPr lang="en-US" sz="1500" dirty="0"/>
+          </a:p>
+        </p:txBody>
+      </p:sp>
+      <p:sp>
+        <p:nvSpPr>
+          <p:cNvPr id="18" name="Text 16"/>
+          <p:cNvSpPr/>
+          <p:nvPr/>
+        </p:nvSpPr>
+        <p:spPr>
+          <a:xfrm>
+            <a:off x="9985248" y="3941064"/>
+            <a:ext cx="201168" cy="256032"/>
+          </a:xfrm>
+          <a:prstGeom prst="rect">
+            <a:avLst/>
+          </a:prstGeom>
+          <a:noFill/>
+          <a:ln/>
+        </p:spPr>
+        <p:txBody>
+          <a:bodyPr wrap="square" lIns="0" tIns="0" rIns="0" bIns="0" rtlCol="0" anchor="ctr"/>
+          <a:lstStyle/>
+          <a:p>
+            <a:pPr algn="ctr" indent="0" marL="0">
+              <a:buNone/>
+            </a:pPr>
+            <a:r>
+              <a:rPr lang="en-US" sz="1800" b="1" dirty="0">
+                <a:solidFill>
+                  <a:srgbClr val="0068B7"/>
+                </a:solidFill>
+                <a:latin typeface="Aptos" pitchFamily="34" charset="0"/>
+                <a:ea typeface="Aptos" pitchFamily="34" charset="-122"/>
+                <a:cs typeface="Aptos" pitchFamily="34" charset="-120"/>
+              </a:rPr>
+              <a:t>â†’</a:t>
+            </a:r>
+            <a:endParaRPr lang="en-US" sz="1800" dirty="0"/>
+          </a:p>
+        </p:txBody>
+      </p:sp>
+      <p:sp>
+        <p:nvSpPr>
+          <p:cNvPr id="19" name="Shape 17"/>
+          <p:cNvSpPr/>
+          <p:nvPr/>
+        </p:nvSpPr>
+        <p:spPr>
+          <a:xfrm>
+            <a:off x="10213848" y="3730752"/>
+            <a:ext cx="1033272" cy="749808"/>
+          </a:xfrm>
+          <a:prstGeom prst="roundRect">
+            <a:avLst>
+              <a:gd name="adj" fmla="val 14634"/>
+            </a:avLst>
+          </a:prstGeom>
+          <a:solidFill>
+            <a:srgbClr val="6A4CA3"/>
+          </a:solidFill>
+          <a:ln w="12700">
+            <a:solidFill>
+              <a:srgbClr val="6A4CA3"/>
+            </a:solidFill>
+            <a:prstDash val="solid"/>
+          </a:ln>
+        </p:spPr>
+      </p:sp>
+      <p:sp>
+        <p:nvSpPr>
+          <p:cNvPr id="20" name="Text 18"/>
+          <p:cNvSpPr/>
+          <p:nvPr/>
+        </p:nvSpPr>
+        <p:spPr>
+          <a:xfrm>
+            <a:off x="10287000" y="3922776"/>
+            <a:ext cx="886968" cy="310896"/>
+          </a:xfrm>
+          <a:prstGeom prst="rect">
+            <a:avLst/>
+          </a:prstGeom>
+          <a:noFill/>
+          <a:ln/>
+        </p:spPr>
+        <p:txBody>
+          <a:bodyPr wrap="square" lIns="0" tIns="0" rIns="0" bIns="0" rtlCol="0" anchor="ctr">
+            <a:normAutofit/>
+          </a:bodyPr>
+          <a:lstStyle/>
+          <a:p>
+            <a:pPr algn="ctr" indent="0" marL="0">
+              <a:buNone/>
+            </a:pPr>
+            <a:r>
+              <a:rPr lang="en-US" sz="1500" b="1" dirty="0">
+                <a:solidFill>
+                  <a:srgbClr val="FFFFFF"/>
+                </a:solidFill>
+                <a:latin typeface="Aptos" pitchFamily="34" charset="0"/>
+                <a:ea typeface="Aptos" pitchFamily="34" charset="-122"/>
+                <a:cs typeface="Aptos" pitchFamily="34" charset="-120"/>
+              </a:rPr>
+              <a:t>Document</a:t>
+            </a:r>
+            <a:endParaRPr lang="en-US" sz="1500" dirty="0"/>
           </a:p>
         </p:txBody>
       </p:sp>
@@ -9409,7 +9982,7 @@
                 <a:ea typeface="Aptos" pitchFamily="34" charset="-122"/>
                 <a:cs typeface="Aptos" pitchFamily="34" charset="-120"/>
               </a:rPr>
-              <a:t>© Paula Soper</a:t>
+              <a:t>Â© Paula Soper</a:t>
             </a:r>
             <a:endParaRPr lang="en-US" sz="800" dirty="0"/>
           </a:p>
@@ -9417,7 +9990,46 @@
       </p:sp>
       <p:sp>
         <p:nvSpPr>
-          <p:cNvPr id="7" name="Shape 5"/>
+          <p:cNvPr id="7" name="Text 5"/>
+          <p:cNvSpPr/>
+          <p:nvPr/>
+        </p:nvSpPr>
+        <p:spPr>
+          <a:xfrm>
+            <a:off x="11137392" y="6510528"/>
+            <a:ext cx="411480" cy="201168"/>
+          </a:xfrm>
+          <a:prstGeom prst="rect">
+            <a:avLst/>
+          </a:prstGeom>
+          <a:noFill/>
+          <a:ln/>
+        </p:spPr>
+        <p:txBody>
+          <a:bodyPr wrap="square" lIns="0" tIns="0" rIns="0" bIns="0" rtlCol="0" anchor="ctr"/>
+          <a:lstStyle/>
+          <a:p>
+            <a:pPr algn="r" indent="0" marL="0">
+              <a:buNone/>
+            </a:pPr>
+            <a:r>
+              <a:rPr lang="en-US" sz="900" dirty="0">
+                <a:solidFill>
+                  <a:srgbClr val="5F7181"/>
+                </a:solidFill>
+                <a:latin typeface="Aptos" pitchFamily="34" charset="0"/>
+                <a:ea typeface="Aptos" pitchFamily="34" charset="-122"/>
+                <a:cs typeface="Aptos" pitchFamily="34" charset="-120"/>
+              </a:rPr>
+              <a:t>20</a:t>
+            </a:r>
+            <a:endParaRPr lang="en-US" sz="900" dirty="0"/>
+          </a:p>
+        </p:txBody>
+      </p:sp>
+      <p:sp>
+        <p:nvSpPr>
+          <p:cNvPr id="8" name="Shape 6"/>
           <p:cNvSpPr/>
           <p:nvPr/>
         </p:nvSpPr>
@@ -9442,7 +10054,7 @@
       </p:sp>
       <p:sp>
         <p:nvSpPr>
-          <p:cNvPr id="8" name="Text 6"/>
+          <p:cNvPr id="9" name="Text 7"/>
           <p:cNvSpPr/>
           <p:nvPr/>
         </p:nvSpPr>
@@ -9481,14 +10093,14 @@
       </p:sp>
       <p:sp>
         <p:nvSpPr>
-          <p:cNvPr id="9" name="Text 7"/>
+          <p:cNvPr id="10" name="Text 8"/>
           <p:cNvSpPr/>
           <p:nvPr/>
         </p:nvSpPr>
         <p:spPr>
           <a:xfrm>
             <a:off x="640080" y="621792"/>
-            <a:ext cx="10881360" cy="566928"/>
+            <a:ext cx="10881360" cy="713232"/>
           </a:xfrm>
           <a:prstGeom prst="rect">
             <a:avLst/>
@@ -9506,7 +10118,7 @@
               <a:buNone/>
             </a:pPr>
             <a:r>
-              <a:rPr lang="en-US" sz="2700" b="1" dirty="0">
+              <a:rPr lang="en-US" sz="3400" b="1" dirty="0">
                 <a:solidFill>
                   <a:srgbClr val="003A63"/>
                 </a:solidFill>
@@ -9516,20 +10128,20 @@
               </a:rPr>
               <a:t>References and Resources</a:t>
             </a:r>
-            <a:endParaRPr lang="en-US" sz="2700" dirty="0"/>
-          </a:p>
-        </p:txBody>
-      </p:sp>
-      <p:sp>
-        <p:nvSpPr>
-          <p:cNvPr id="10" name="Text 8"/>
-          <p:cNvSpPr/>
-          <p:nvPr/>
-        </p:nvSpPr>
-        <p:spPr>
-          <a:xfrm>
-            <a:off x="868680" y="1417320"/>
-            <a:ext cx="6675120" cy="4434840"/>
+            <a:endParaRPr lang="en-US" sz="3400" dirty="0"/>
+          </a:p>
+        </p:txBody>
+      </p:sp>
+      <p:sp>
+        <p:nvSpPr>
+          <p:cNvPr id="11" name="Text 9"/>
+          <p:cNvSpPr/>
+          <p:nvPr/>
+        </p:nvSpPr>
+        <p:spPr>
+          <a:xfrm>
+            <a:off x="868680" y="1508760"/>
+            <a:ext cx="6537960" cy="4160520"/>
           </a:xfrm>
           <a:prstGeom prst="rect">
             <a:avLst/>
@@ -9544,7 +10156,7 @@
           <a:lstStyle/>
           <a:p>
             <a:r>
-              <a:rPr lang="en-US" sz="1700" dirty="0">
+              <a:rPr lang="en-US" sz="2100" dirty="0">
                 <a:solidFill>
                   <a:srgbClr val="17364A"/>
                 </a:solidFill>
@@ -9552,13 +10164,13 @@
                 <a:ea typeface="Aptos" pitchFamily="34" charset="-122"/>
                 <a:cs typeface="Aptos" pitchFamily="34" charset="-120"/>
               </a:rPr>
-              <a:t>NIST Artificial Intelligence Risk Management Framework (AI RMF 1.0): https://www.nist.gov/itl/ai-risk-management-framework</a:t>
-            </a:r>
-            <a:endParaRPr lang="en-US" sz="1700" dirty="0"/>
-          </a:p>
-          <a:p>
-            <a:r>
-              <a:rPr lang="en-US" sz="1700" dirty="0">
+              <a:t>NIST Artificial Intelligence Risk Management Framework (AI RMF 1.0):.</a:t>
+            </a:r>
+            <a:endParaRPr lang="en-US" sz="2100" dirty="0"/>
+          </a:p>
+          <a:p>
+            <a:r>
+              <a:rPr lang="en-US" sz="2100" dirty="0">
                 <a:solidFill>
                   <a:srgbClr val="17364A"/>
                 </a:solidFill>
@@ -9568,11 +10180,11 @@
               </a:rPr>
               <a:t>NIST Generative AI Profile:.</a:t>
             </a:r>
-            <a:endParaRPr lang="en-US" sz="1700" dirty="0"/>
-          </a:p>
-          <a:p>
-            <a:r>
-              <a:rPr lang="en-US" sz="1700" dirty="0">
+            <a:endParaRPr lang="en-US" sz="2100" dirty="0"/>
+          </a:p>
+          <a:p>
+            <a:r>
+              <a:rPr lang="en-US" sz="2100" dirty="0">
                 <a:solidFill>
                   <a:srgbClr val="17364A"/>
                 </a:solidFill>
@@ -9582,27 +10194,13 @@
               </a:rPr>
               <a:t>NIST Privacy Framework</a:t>
             </a:r>
-            <a:endParaRPr lang="en-US" sz="1700" dirty="0"/>
-          </a:p>
-          <a:p>
-            <a:r>
-              <a:rPr lang="en-US" sz="1700" dirty="0">
-                <a:solidFill>
-                  <a:srgbClr val="17364A"/>
-                </a:solidFill>
-                <a:latin typeface="Aptos" pitchFamily="34" charset="0"/>
-                <a:ea typeface="Aptos" pitchFamily="34" charset="-122"/>
-                <a:cs typeface="Aptos" pitchFamily="34" charset="-120"/>
-              </a:rPr>
-              <a:t>CDC Public Health Data Strategy and Data Modernization resources:.</a:t>
-            </a:r>
-            <a:endParaRPr lang="en-US" sz="1700" dirty="0"/>
-          </a:p>
-        </p:txBody>
-      </p:sp>
-      <p:sp>
-        <p:nvSpPr>
-          <p:cNvPr id="11" name="Shape 9"/>
+            <a:endParaRPr lang="en-US" sz="2100" dirty="0"/>
+          </a:p>
+        </p:txBody>
+      </p:sp>
+      <p:sp>
+        <p:nvSpPr>
+          <p:cNvPr id="12" name="Shape 10"/>
           <p:cNvSpPr/>
           <p:nvPr/>
         </p:nvSpPr>
@@ -9629,14 +10227,14 @@
       </p:sp>
       <p:sp>
         <p:nvSpPr>
-          <p:cNvPr id="12" name="Text 10"/>
+          <p:cNvPr id="13" name="Text 11"/>
           <p:cNvSpPr/>
           <p:nvPr/>
         </p:nvSpPr>
         <p:spPr>
           <a:xfrm>
             <a:off x="8074152" y="1563624"/>
-            <a:ext cx="2825496" cy="201168"/>
+            <a:ext cx="2825496" cy="256032"/>
           </a:xfrm>
           <a:prstGeom prst="rect">
             <a:avLst/>
@@ -9652,7 +10250,7 @@
               <a:buNone/>
             </a:pPr>
             <a:r>
-              <a:rPr lang="en-US" sz="950" b="1" dirty="0">
+              <a:rPr lang="en-US" sz="1300" b="1" dirty="0">
                 <a:solidFill>
                   <a:srgbClr val="0068B7"/>
                 </a:solidFill>
@@ -9662,20 +10260,20 @@
               </a:rPr>
               <a:t>Key idea</a:t>
             </a:r>
-            <a:endParaRPr lang="en-US" sz="950" dirty="0"/>
-          </a:p>
-        </p:txBody>
-      </p:sp>
-      <p:sp>
-        <p:nvSpPr>
-          <p:cNvPr id="13" name="Text 11"/>
-          <p:cNvSpPr/>
-          <p:nvPr/>
-        </p:nvSpPr>
-        <p:spPr>
-          <a:xfrm>
-            <a:off x="8074152" y="1856232"/>
-            <a:ext cx="2825496" cy="1261872"/>
+            <a:endParaRPr lang="en-US" sz="1300" dirty="0"/>
+          </a:p>
+        </p:txBody>
+      </p:sp>
+      <p:sp>
+        <p:nvSpPr>
+          <p:cNvPr id="14" name="Text 12"/>
+          <p:cNvSpPr/>
+          <p:nvPr/>
+        </p:nvSpPr>
+        <p:spPr>
+          <a:xfrm>
+            <a:off x="8074152" y="1920240"/>
+            <a:ext cx="2825496" cy="1188720"/>
           </a:xfrm>
           <a:prstGeom prst="rect">
             <a:avLst/>
@@ -9693,7 +10291,7 @@
               <a:buNone/>
             </a:pPr>
             <a:r>
-              <a:rPr lang="en-US" sz="1250" dirty="0">
+              <a:rPr lang="en-US" sz="1550" dirty="0">
                 <a:solidFill>
                   <a:srgbClr val="17364A"/>
                 </a:solidFill>
@@ -9701,15 +10299,15 @@
                 <a:ea typeface="Aptos" pitchFamily="34" charset="-122"/>
                 <a:cs typeface="Aptos" pitchFamily="34" charset="-120"/>
               </a:rPr>
-              <a:t>NIST Artificial Intelligence Risk Management Framework (AI RMF 1.0): https://www.nist.gov/itl/ai-risk-management-framework</a:t>
-            </a:r>
-            <a:endParaRPr lang="en-US" sz="1250" dirty="0"/>
-          </a:p>
-        </p:txBody>
-      </p:sp>
-      <p:sp>
-        <p:nvSpPr>
-          <p:cNvPr id="14" name="Shape 12"/>
+              <a:t>NIST Artificial Intelligence Risk Management Framework (AI RMF 1.0):.</a:t>
+            </a:r>
+            <a:endParaRPr lang="en-US" sz="1550" dirty="0"/>
+          </a:p>
+        </p:txBody>
+      </p:sp>
+      <p:sp>
+        <p:nvSpPr>
+          <p:cNvPr id="15" name="Shape 13"/>
           <p:cNvSpPr/>
           <p:nvPr/>
         </p:nvSpPr>
@@ -9736,14 +10334,14 @@
       </p:sp>
       <p:sp>
         <p:nvSpPr>
-          <p:cNvPr id="15" name="Text 13"/>
+          <p:cNvPr id="16" name="Text 14"/>
           <p:cNvSpPr/>
           <p:nvPr/>
         </p:nvSpPr>
         <p:spPr>
           <a:xfrm>
             <a:off x="8074152" y="3666744"/>
-            <a:ext cx="2825496" cy="201168"/>
+            <a:ext cx="2825496" cy="256032"/>
           </a:xfrm>
           <a:prstGeom prst="rect">
             <a:avLst/>
@@ -9759,7 +10357,7 @@
               <a:buNone/>
             </a:pPr>
             <a:r>
-              <a:rPr lang="en-US" sz="950" b="1" dirty="0">
+              <a:rPr lang="en-US" sz="1300" b="1" dirty="0">
                 <a:solidFill>
                   <a:srgbClr val="0068B7"/>
                 </a:solidFill>
@@ -9769,20 +10367,20 @@
               </a:rPr>
               <a:t>Use this for</a:t>
             </a:r>
-            <a:endParaRPr lang="en-US" sz="950" dirty="0"/>
-          </a:p>
-        </p:txBody>
-      </p:sp>
-      <p:sp>
-        <p:nvSpPr>
-          <p:cNvPr id="16" name="Text 14"/>
-          <p:cNvSpPr/>
-          <p:nvPr/>
-        </p:nvSpPr>
-        <p:spPr>
-          <a:xfrm>
-            <a:off x="8074152" y="3959352"/>
-            <a:ext cx="2825496" cy="1170432"/>
+            <a:endParaRPr lang="en-US" sz="1300" dirty="0"/>
+          </a:p>
+        </p:txBody>
+      </p:sp>
+      <p:sp>
+        <p:nvSpPr>
+          <p:cNvPr id="17" name="Text 15"/>
+          <p:cNvSpPr/>
+          <p:nvPr/>
+        </p:nvSpPr>
+        <p:spPr>
+          <a:xfrm>
+            <a:off x="8074152" y="4023360"/>
+            <a:ext cx="2825496" cy="1097280"/>
           </a:xfrm>
           <a:prstGeom prst="rect">
             <a:avLst/>
@@ -9800,7 +10398,7 @@
               <a:buNone/>
             </a:pPr>
             <a:r>
-              <a:rPr lang="en-US" sz="1250" dirty="0">
+              <a:rPr lang="en-US" sz="1550" dirty="0">
                 <a:solidFill>
                   <a:srgbClr val="17364A"/>
                 </a:solidFill>
@@ -9810,7 +10408,7 @@
               </a:rPr>
               <a:t>Connect the concept to public health decisions, safeguards, documentation, or implementation work.</a:t>
             </a:r>
-            <a:endParaRPr lang="en-US" sz="1250" dirty="0"/>
+            <a:endParaRPr lang="en-US" sz="1550" dirty="0"/>
           </a:p>
         </p:txBody>
       </p:sp>
@@ -10007,7 +10605,7 @@
                 <a:ea typeface="Aptos" pitchFamily="34" charset="-122"/>
                 <a:cs typeface="Aptos" pitchFamily="34" charset="-120"/>
               </a:rPr>
-              <a:t>© Paula Soper</a:t>
+              <a:t>Â© Paula Soper</a:t>
             </a:r>
             <a:endParaRPr lang="en-US" sz="800" dirty="0"/>
           </a:p>
@@ -10021,8 +10619,47 @@
         </p:nvSpPr>
         <p:spPr>
           <a:xfrm>
+            <a:off x="11137392" y="6510528"/>
+            <a:ext cx="411480" cy="201168"/>
+          </a:xfrm>
+          <a:prstGeom prst="rect">
+            <a:avLst/>
+          </a:prstGeom>
+          <a:noFill/>
+          <a:ln/>
+        </p:spPr>
+        <p:txBody>
+          <a:bodyPr wrap="square" lIns="0" tIns="0" rIns="0" bIns="0" rtlCol="0" anchor="ctr"/>
+          <a:lstStyle/>
+          <a:p>
+            <a:pPr algn="r" indent="0" marL="0">
+              <a:buNone/>
+            </a:pPr>
+            <a:r>
+              <a:rPr lang="en-US" sz="900" dirty="0">
+                <a:solidFill>
+                  <a:srgbClr val="5F7181"/>
+                </a:solidFill>
+                <a:latin typeface="Aptos" pitchFamily="34" charset="0"/>
+                <a:ea typeface="Aptos" pitchFamily="34" charset="-122"/>
+                <a:cs typeface="Aptos" pitchFamily="34" charset="-120"/>
+              </a:rPr>
+              <a:t>21</a:t>
+            </a:r>
+            <a:endParaRPr lang="en-US" sz="900" dirty="0"/>
+          </a:p>
+        </p:txBody>
+      </p:sp>
+      <p:sp>
+        <p:nvSpPr>
+          <p:cNvPr id="8" name="Text 6"/>
+          <p:cNvSpPr/>
+          <p:nvPr/>
+        </p:nvSpPr>
+        <p:spPr>
+          <a:xfrm>
             <a:off x="640080" y="658368"/>
-            <a:ext cx="10881360" cy="566928"/>
+            <a:ext cx="10881360" cy="713232"/>
           </a:xfrm>
           <a:prstGeom prst="rect">
             <a:avLst/>
@@ -10040,7 +10677,7 @@
               <a:buNone/>
             </a:pPr>
             <a:r>
-              <a:rPr lang="en-US" sz="2700" b="1" dirty="0">
+              <a:rPr lang="en-US" sz="3400" b="1" dirty="0">
                 <a:solidFill>
                   <a:srgbClr val="003A63"/>
                 </a:solidFill>
@@ -10050,20 +10687,20 @@
               </a:rPr>
               <a:t>References and Resources Continued</a:t>
             </a:r>
-            <a:endParaRPr lang="en-US" sz="2700" dirty="0"/>
-          </a:p>
-        </p:txBody>
-      </p:sp>
-      <p:sp>
-        <p:nvSpPr>
-          <p:cNvPr id="8" name="Text 6"/>
-          <p:cNvSpPr/>
-          <p:nvPr/>
-        </p:nvSpPr>
-        <p:spPr>
-          <a:xfrm>
-            <a:off x="868680" y="1417320"/>
-            <a:ext cx="6675120" cy="4434840"/>
+            <a:endParaRPr lang="en-US" sz="3400" dirty="0"/>
+          </a:p>
+        </p:txBody>
+      </p:sp>
+      <p:sp>
+        <p:nvSpPr>
+          <p:cNvPr id="9" name="Text 7"/>
+          <p:cNvSpPr/>
+          <p:nvPr/>
+        </p:nvSpPr>
+        <p:spPr>
+          <a:xfrm>
+            <a:off x="868680" y="1508760"/>
+            <a:ext cx="6537960" cy="4160520"/>
           </a:xfrm>
           <a:prstGeom prst="rect">
             <a:avLst/>
@@ -10078,7 +10715,7 @@
           <a:lstStyle/>
           <a:p>
             <a:r>
-              <a:rPr lang="en-US" sz="1700" dirty="0">
+              <a:rPr lang="en-US" sz="2100" dirty="0">
                 <a:solidFill>
                   <a:srgbClr val="17364A"/>
                 </a:solidFill>
@@ -10086,13 +10723,13 @@
                 <a:ea typeface="Aptos" pitchFamily="34" charset="-122"/>
                 <a:cs typeface="Aptos" pitchFamily="34" charset="-120"/>
               </a:rPr>
-              <a:t>OMB Memorandum M-24-10 on federal AI governance, risk management, and innovation, where relevant to public-sector governance.</a:t>
-            </a:r>
-            <a:endParaRPr lang="en-US" sz="1700" dirty="0"/>
-          </a:p>
-          <a:p>
-            <a:r>
-              <a:rPr lang="en-US" sz="1700" dirty="0">
+              <a:t>OMB Memorandum M-24-10 on federal AI governance, risk management, and innovation, where relevant to.</a:t>
+            </a:r>
+            <a:endParaRPr lang="en-US" sz="2100" dirty="0"/>
+          </a:p>
+          <a:p>
+            <a:r>
+              <a:rPr lang="en-US" sz="2100" dirty="0">
                 <a:solidFill>
                   <a:srgbClr val="17364A"/>
                 </a:solidFill>
@@ -10100,15 +10737,15 @@
                 <a:ea typeface="Aptos" pitchFamily="34" charset="-122"/>
                 <a:cs typeface="Aptos" pitchFamily="34" charset="-120"/>
               </a:rPr>
-              <a:t>Agency strategic plans, procurement policies, privacy policies, cybersecurity policies, records policies, and equity plans</a:t>
-            </a:r>
-            <a:endParaRPr lang="en-US" sz="1700" dirty="0"/>
-          </a:p>
-        </p:txBody>
-      </p:sp>
-      <p:sp>
-        <p:nvSpPr>
-          <p:cNvPr id="9" name="Shape 7"/>
+              <a:t>Agency strategic plans, procurement policies, privacy policies, cybersecurity policies, records.</a:t>
+            </a:r>
+            <a:endParaRPr lang="en-US" sz="2100" dirty="0"/>
+          </a:p>
+        </p:txBody>
+      </p:sp>
+      <p:sp>
+        <p:nvSpPr>
+          <p:cNvPr id="10" name="Shape 8"/>
           <p:cNvSpPr/>
           <p:nvPr/>
         </p:nvSpPr>
@@ -10135,14 +10772,14 @@
       </p:sp>
       <p:sp>
         <p:nvSpPr>
-          <p:cNvPr id="10" name="Text 8"/>
+          <p:cNvPr id="11" name="Text 9"/>
           <p:cNvSpPr/>
           <p:nvPr/>
         </p:nvSpPr>
         <p:spPr>
           <a:xfrm>
             <a:off x="8074152" y="1563624"/>
-            <a:ext cx="2825496" cy="201168"/>
+            <a:ext cx="2825496" cy="256032"/>
           </a:xfrm>
           <a:prstGeom prst="rect">
             <a:avLst/>
@@ -10158,7 +10795,7 @@
               <a:buNone/>
             </a:pPr>
             <a:r>
-              <a:rPr lang="en-US" sz="950" b="1" dirty="0">
+              <a:rPr lang="en-US" sz="1300" b="1" dirty="0">
                 <a:solidFill>
                   <a:srgbClr val="0068B7"/>
                 </a:solidFill>
@@ -10168,20 +10805,20 @@
               </a:rPr>
               <a:t>Key idea</a:t>
             </a:r>
-            <a:endParaRPr lang="en-US" sz="950" dirty="0"/>
-          </a:p>
-        </p:txBody>
-      </p:sp>
-      <p:sp>
-        <p:nvSpPr>
-          <p:cNvPr id="11" name="Text 9"/>
-          <p:cNvSpPr/>
-          <p:nvPr/>
-        </p:nvSpPr>
-        <p:spPr>
-          <a:xfrm>
-            <a:off x="8074152" y="1856232"/>
-            <a:ext cx="2825496" cy="1261872"/>
+            <a:endParaRPr lang="en-US" sz="1300" dirty="0"/>
+          </a:p>
+        </p:txBody>
+      </p:sp>
+      <p:sp>
+        <p:nvSpPr>
+          <p:cNvPr id="12" name="Text 10"/>
+          <p:cNvSpPr/>
+          <p:nvPr/>
+        </p:nvSpPr>
+        <p:spPr>
+          <a:xfrm>
+            <a:off x="8074152" y="1920240"/>
+            <a:ext cx="2825496" cy="1188720"/>
           </a:xfrm>
           <a:prstGeom prst="rect">
             <a:avLst/>
@@ -10199,7 +10836,7 @@
               <a:buNone/>
             </a:pPr>
             <a:r>
-              <a:rPr lang="en-US" sz="1250" dirty="0">
+              <a:rPr lang="en-US" sz="1550" dirty="0">
                 <a:solidFill>
                   <a:srgbClr val="17364A"/>
                 </a:solidFill>
@@ -10207,15 +10844,15 @@
                 <a:ea typeface="Aptos" pitchFamily="34" charset="-122"/>
                 <a:cs typeface="Aptos" pitchFamily="34" charset="-120"/>
               </a:rPr>
-              <a:t>OMB Memorandum M-24-10 on federal AI governance, risk management, and innovation, where relevant to public-sector governance.</a:t>
-            </a:r>
-            <a:endParaRPr lang="en-US" sz="1250" dirty="0"/>
-          </a:p>
-        </p:txBody>
-      </p:sp>
-      <p:sp>
-        <p:nvSpPr>
-          <p:cNvPr id="12" name="Shape 10"/>
+              <a:t>OMB Memorandum M-24-10 on federal AI governance, risk management, and innovation, where relevant to.</a:t>
+            </a:r>
+            <a:endParaRPr lang="en-US" sz="1550" dirty="0"/>
+          </a:p>
+        </p:txBody>
+      </p:sp>
+      <p:sp>
+        <p:nvSpPr>
+          <p:cNvPr id="13" name="Shape 11"/>
           <p:cNvSpPr/>
           <p:nvPr/>
         </p:nvSpPr>
@@ -10242,14 +10879,14 @@
       </p:sp>
       <p:sp>
         <p:nvSpPr>
-          <p:cNvPr id="13" name="Text 11"/>
+          <p:cNvPr id="14" name="Text 12"/>
           <p:cNvSpPr/>
           <p:nvPr/>
         </p:nvSpPr>
         <p:spPr>
           <a:xfrm>
             <a:off x="8074152" y="3666744"/>
-            <a:ext cx="2825496" cy="201168"/>
+            <a:ext cx="2825496" cy="256032"/>
           </a:xfrm>
           <a:prstGeom prst="rect">
             <a:avLst/>
@@ -10265,7 +10902,7 @@
               <a:buNone/>
             </a:pPr>
             <a:r>
-              <a:rPr lang="en-US" sz="950" b="1" dirty="0">
+              <a:rPr lang="en-US" sz="1300" b="1" dirty="0">
                 <a:solidFill>
                   <a:srgbClr val="0068B7"/>
                 </a:solidFill>
@@ -10275,20 +10912,20 @@
               </a:rPr>
               <a:t>Use this for</a:t>
             </a:r>
-            <a:endParaRPr lang="en-US" sz="950" dirty="0"/>
-          </a:p>
-        </p:txBody>
-      </p:sp>
-      <p:sp>
-        <p:nvSpPr>
-          <p:cNvPr id="14" name="Text 12"/>
-          <p:cNvSpPr/>
-          <p:nvPr/>
-        </p:nvSpPr>
-        <p:spPr>
-          <a:xfrm>
-            <a:off x="8074152" y="3959352"/>
-            <a:ext cx="2825496" cy="1170432"/>
+            <a:endParaRPr lang="en-US" sz="1300" dirty="0"/>
+          </a:p>
+        </p:txBody>
+      </p:sp>
+      <p:sp>
+        <p:nvSpPr>
+          <p:cNvPr id="15" name="Text 13"/>
+          <p:cNvSpPr/>
+          <p:nvPr/>
+        </p:nvSpPr>
+        <p:spPr>
+          <a:xfrm>
+            <a:off x="8074152" y="4023360"/>
+            <a:ext cx="2825496" cy="1097280"/>
           </a:xfrm>
           <a:prstGeom prst="rect">
             <a:avLst/>
@@ -10306,7 +10943,7 @@
               <a:buNone/>
             </a:pPr>
             <a:r>
-              <a:rPr lang="en-US" sz="1250" dirty="0">
+              <a:rPr lang="en-US" sz="1550" dirty="0">
                 <a:solidFill>
                   <a:srgbClr val="17364A"/>
                 </a:solidFill>
@@ -10316,7 +10953,7 @@
               </a:rPr>
               <a:t>Connect the concept to public health decisions, safeguards, documentation, or implementation work.</a:t>
             </a:r>
-            <a:endParaRPr lang="en-US" sz="1250" dirty="0"/>
+            <a:endParaRPr lang="en-US" sz="1550" dirty="0"/>
           </a:p>
         </p:txBody>
       </p:sp>
@@ -10513,7 +11150,7 @@
                 <a:ea typeface="Aptos" pitchFamily="34" charset="-122"/>
                 <a:cs typeface="Aptos" pitchFamily="34" charset="-120"/>
               </a:rPr>
-              <a:t>© Paula Soper</a:t>
+              <a:t>Â© Paula Soper</a:t>
             </a:r>
             <a:endParaRPr lang="en-US" sz="800" dirty="0"/>
           </a:p>
@@ -10527,8 +11164,47 @@
         </p:nvSpPr>
         <p:spPr>
           <a:xfrm>
+            <a:off x="11137392" y="6510528"/>
+            <a:ext cx="411480" cy="201168"/>
+          </a:xfrm>
+          <a:prstGeom prst="rect">
+            <a:avLst/>
+          </a:prstGeom>
+          <a:noFill/>
+          <a:ln/>
+        </p:spPr>
+        <p:txBody>
+          <a:bodyPr wrap="square" lIns="0" tIns="0" rIns="0" bIns="0" rtlCol="0" anchor="ctr"/>
+          <a:lstStyle/>
+          <a:p>
+            <a:pPr algn="r" indent="0" marL="0">
+              <a:buNone/>
+            </a:pPr>
+            <a:r>
+              <a:rPr lang="en-US" sz="900" dirty="0">
+                <a:solidFill>
+                  <a:srgbClr val="5F7181"/>
+                </a:solidFill>
+                <a:latin typeface="Aptos" pitchFamily="34" charset="0"/>
+                <a:ea typeface="Aptos" pitchFamily="34" charset="-122"/>
+                <a:cs typeface="Aptos" pitchFamily="34" charset="-120"/>
+              </a:rPr>
+              <a:t>3</a:t>
+            </a:r>
+            <a:endParaRPr lang="en-US" sz="900" dirty="0"/>
+          </a:p>
+        </p:txBody>
+      </p:sp>
+      <p:sp>
+        <p:nvSpPr>
+          <p:cNvPr id="8" name="Text 6"/>
+          <p:cNvSpPr/>
+          <p:nvPr/>
+        </p:nvSpPr>
+        <p:spPr>
+          <a:xfrm>
             <a:off x="640080" y="658368"/>
-            <a:ext cx="10881360" cy="566928"/>
+            <a:ext cx="10881360" cy="713232"/>
           </a:xfrm>
           <a:prstGeom prst="rect">
             <a:avLst/>
@@ -10546,7 +11222,7 @@
               <a:buNone/>
             </a:pPr>
             <a:r>
-              <a:rPr lang="en-US" sz="2700" b="1" dirty="0">
+              <a:rPr lang="en-US" sz="3400" b="1" dirty="0">
                 <a:solidFill>
                   <a:srgbClr val="003A63"/>
                 </a:solidFill>
@@ -10556,20 +11232,20 @@
               </a:rPr>
               <a:t>How this module connects to the playbook</a:t>
             </a:r>
-            <a:endParaRPr lang="en-US" sz="2700" dirty="0"/>
-          </a:p>
-        </p:txBody>
-      </p:sp>
-      <p:sp>
-        <p:nvSpPr>
-          <p:cNvPr id="8" name="Text 6"/>
-          <p:cNvSpPr/>
-          <p:nvPr/>
-        </p:nvSpPr>
-        <p:spPr>
-          <a:xfrm>
-            <a:off x="868680" y="1417320"/>
-            <a:ext cx="6903720" cy="4480560"/>
+            <a:endParaRPr lang="en-US" sz="3400" dirty="0"/>
+          </a:p>
+        </p:txBody>
+      </p:sp>
+      <p:sp>
+        <p:nvSpPr>
+          <p:cNvPr id="9" name="Text 7"/>
+          <p:cNvSpPr/>
+          <p:nvPr/>
+        </p:nvSpPr>
+        <p:spPr>
+          <a:xfrm>
+            <a:off x="868680" y="1508760"/>
+            <a:ext cx="6812280" cy="3977640"/>
           </a:xfrm>
           <a:prstGeom prst="rect">
             <a:avLst/>
@@ -10584,7 +11260,7 @@
           <a:lstStyle/>
           <a:p>
             <a:r>
-              <a:rPr lang="en-US" sz="1540" dirty="0">
+              <a:rPr lang="en-US" sz="1900" dirty="0">
                 <a:solidFill>
                   <a:srgbClr val="17364A"/>
                 </a:solidFill>
@@ -10592,13 +11268,13 @@
                 <a:ea typeface="Aptos" pitchFamily="34" charset="-122"/>
                 <a:cs typeface="Aptos" pitchFamily="34" charset="-120"/>
               </a:rPr>
-              <a:t>Play 11: Build and Deploy AI Solutions - This lesson informs Play 11 by helping learners connect the lesson topic to build and deploy.</a:t>
-            </a:r>
-            <a:endParaRPr lang="en-US" sz="1540" dirty="0"/>
-          </a:p>
-          <a:p>
-            <a:r>
-              <a:rPr lang="en-US" sz="1540" dirty="0">
+              <a:t>Play 11: Build and Deploy AI Solutions - This lesson informs Play 11 by helping learners connect the lesson.</a:t>
+            </a:r>
+            <a:endParaRPr lang="en-US" sz="1900" dirty="0"/>
+          </a:p>
+          <a:p>
+            <a:r>
+              <a:rPr lang="en-US" sz="1900" dirty="0">
                 <a:solidFill>
                   <a:srgbClr val="17364A"/>
                 </a:solidFill>
@@ -10606,13 +11282,13 @@
                 <a:ea typeface="Aptos" pitchFamily="34" charset="-122"/>
                 <a:cs typeface="Aptos" pitchFamily="34" charset="-120"/>
               </a:rPr>
-              <a:t>Play 2: Readiness Assessment - This lesson informs Play 2 by helping learners connect the lesson topic to readiness assessment work.</a:t>
-            </a:r>
-            <a:endParaRPr lang="en-US" sz="1540" dirty="0"/>
-          </a:p>
-          <a:p>
-            <a:r>
-              <a:rPr lang="en-US" sz="1540" dirty="0">
+              <a:t>Play 2: Readiness Assessment - This lesson informs Play 2 by helping learners connect the lesson topic to.</a:t>
+            </a:r>
+            <a:endParaRPr lang="en-US" sz="1900" dirty="0"/>
+          </a:p>
+          <a:p>
+            <a:r>
+              <a:rPr lang="en-US" sz="1900" dirty="0">
                 <a:solidFill>
                   <a:srgbClr val="17364A"/>
                 </a:solidFill>
@@ -10620,13 +11296,13 @@
                 <a:ea typeface="Aptos" pitchFamily="34" charset="-122"/>
                 <a:cs typeface="Aptos" pitchFamily="34" charset="-120"/>
               </a:rPr>
-              <a:t>Play 3: Establish AI Governance - This lesson informs Play 3 by helping learners connect the lesson topic to establish ai governance.</a:t>
-            </a:r>
-            <a:endParaRPr lang="en-US" sz="1540" dirty="0"/>
-          </a:p>
-          <a:p>
-            <a:r>
-              <a:rPr lang="en-US" sz="1540" dirty="0">
+              <a:t>Play 3: Establish AI Governance - This lesson informs Play 3 by helping learners connect the lesson topic to.</a:t>
+            </a:r>
+            <a:endParaRPr lang="en-US" sz="1900" dirty="0"/>
+          </a:p>
+          <a:p>
+            <a:r>
+              <a:rPr lang="en-US" sz="1900" dirty="0">
                 <a:solidFill>
                   <a:srgbClr val="17364A"/>
                 </a:solidFill>
@@ -10634,15 +11310,15 @@
                 <a:ea typeface="Aptos" pitchFamily="34" charset="-122"/>
                 <a:cs typeface="Aptos" pitchFamily="34" charset="-120"/>
               </a:rPr>
-              <a:t>Play 7: Prioritize Use Cases - This lesson informs Play 7 by helping learners connect the lesson topic to prioritize use cases work.</a:t>
-            </a:r>
-            <a:endParaRPr lang="en-US" sz="1540" dirty="0"/>
-          </a:p>
-        </p:txBody>
-      </p:sp>
-      <p:sp>
-        <p:nvSpPr>
-          <p:cNvPr id="9" name="Shape 7"/>
+              <a:t>Play 7: Prioritize Use Cases - This lesson informs Play 7 by helping learners connect the lesson topic to.</a:t>
+            </a:r>
+            <a:endParaRPr lang="en-US" sz="1900" dirty="0"/>
+          </a:p>
+        </p:txBody>
+      </p:sp>
+      <p:sp>
+        <p:nvSpPr>
+          <p:cNvPr id="10" name="Shape 8"/>
           <p:cNvSpPr/>
           <p:nvPr/>
         </p:nvSpPr>
@@ -10669,14 +11345,14 @@
       </p:sp>
       <p:sp>
         <p:nvSpPr>
-          <p:cNvPr id="10" name="Text 8"/>
+          <p:cNvPr id="11" name="Text 9"/>
           <p:cNvSpPr/>
           <p:nvPr/>
         </p:nvSpPr>
         <p:spPr>
           <a:xfrm>
             <a:off x="8211312" y="1563624"/>
-            <a:ext cx="2734056" cy="201168"/>
+            <a:ext cx="2734056" cy="256032"/>
           </a:xfrm>
           <a:prstGeom prst="rect">
             <a:avLst/>
@@ -10692,7 +11368,7 @@
               <a:buNone/>
             </a:pPr>
             <a:r>
-              <a:rPr lang="en-US" sz="950" b="1" dirty="0">
+              <a:rPr lang="en-US" sz="1300" b="1" dirty="0">
                 <a:solidFill>
                   <a:srgbClr val="0068B7"/>
                 </a:solidFill>
@@ -10702,20 +11378,20 @@
               </a:rPr>
               <a:t>Apply the lesson</a:t>
             </a:r>
-            <a:endParaRPr lang="en-US" sz="950" dirty="0"/>
-          </a:p>
-        </p:txBody>
-      </p:sp>
-      <p:sp>
-        <p:nvSpPr>
-          <p:cNvPr id="11" name="Text 9"/>
-          <p:cNvSpPr/>
-          <p:nvPr/>
-        </p:nvSpPr>
-        <p:spPr>
-          <a:xfrm>
-            <a:off x="8211312" y="1856232"/>
-            <a:ext cx="2734056" cy="1536192"/>
+            <a:endParaRPr lang="en-US" sz="1300" dirty="0"/>
+          </a:p>
+        </p:txBody>
+      </p:sp>
+      <p:sp>
+        <p:nvSpPr>
+          <p:cNvPr id="12" name="Text 10"/>
+          <p:cNvSpPr/>
+          <p:nvPr/>
+        </p:nvSpPr>
+        <p:spPr>
+          <a:xfrm>
+            <a:off x="8211312" y="1920240"/>
+            <a:ext cx="2734056" cy="1463040"/>
           </a:xfrm>
           <a:prstGeom prst="rect">
             <a:avLst/>
@@ -10733,7 +11409,7 @@
               <a:buNone/>
             </a:pPr>
             <a:r>
-              <a:rPr lang="en-US" sz="1250" dirty="0">
+              <a:rPr lang="en-US" sz="1550" dirty="0">
                 <a:solidFill>
                   <a:srgbClr val="17364A"/>
                 </a:solidFill>
@@ -10743,32 +11419,32 @@
               </a:rPr>
               <a:t>Use the related plays to identify decisions, participants, timing, approvals, and documentation needed for responsible implementation.</a:t>
             </a:r>
-            <a:endParaRPr lang="en-US" sz="1250" dirty="0"/>
-          </a:p>
-        </p:txBody>
-      </p:sp>
-      <p:sp>
-        <p:nvSpPr>
-          <p:cNvPr id="12" name="Shape 10"/>
-          <p:cNvSpPr/>
-          <p:nvPr/>
-        </p:nvSpPr>
-        <p:spPr>
-          <a:xfrm>
-            <a:off x="8046720" y="3794760"/>
-            <a:ext cx="3063240" cy="1508760"/>
+            <a:endParaRPr lang="en-US" sz="1550" dirty="0"/>
+          </a:p>
+        </p:txBody>
+      </p:sp>
+      <p:sp>
+        <p:nvSpPr>
+          <p:cNvPr id="13" name="Shape 11"/>
+          <p:cNvSpPr/>
+          <p:nvPr/>
+        </p:nvSpPr>
+        <p:spPr>
+          <a:xfrm>
+            <a:off x="7818120" y="3977640"/>
+            <a:ext cx="972312" cy="749808"/>
           </a:xfrm>
           <a:prstGeom prst="roundRect">
             <a:avLst>
-              <a:gd name="adj" fmla="val 7273"/>
+              <a:gd name="adj" fmla="val 14634"/>
             </a:avLst>
           </a:prstGeom>
           <a:solidFill>
-            <a:srgbClr val="FFF4D9"/>
+            <a:srgbClr val="0068B7"/>
           </a:solidFill>
           <a:ln w="12700">
             <a:solidFill>
-              <a:srgbClr val="B9D7E6"/>
+              <a:srgbClr val="0068B7"/>
             </a:solidFill>
             <a:prstDash val="solid"/>
           </a:ln>
@@ -10776,81 +11452,256 @@
       </p:sp>
       <p:sp>
         <p:nvSpPr>
-          <p:cNvPr id="13" name="Text 11"/>
-          <p:cNvSpPr/>
-          <p:nvPr/>
-        </p:nvSpPr>
-        <p:spPr>
-          <a:xfrm>
-            <a:off x="8211312" y="3941064"/>
-            <a:ext cx="2734056" cy="201168"/>
-          </a:xfrm>
-          <a:prstGeom prst="rect">
-            <a:avLst/>
-          </a:prstGeom>
-          <a:noFill/>
-          <a:ln/>
-        </p:spPr>
-        <p:txBody>
-          <a:bodyPr wrap="square" lIns="0" tIns="0" rIns="0" bIns="0" rtlCol="0" anchor="ctr"/>
-          <a:lstStyle/>
-          <a:p>
-            <a:pPr indent="0" marL="0">
-              <a:buNone/>
-            </a:pPr>
-            <a:r>
-              <a:rPr lang="en-US" sz="950" b="1" dirty="0">
-                <a:solidFill>
-                  <a:srgbClr val="0068B7"/>
-                </a:solidFill>
-                <a:latin typeface="Aptos" pitchFamily="34" charset="0"/>
-                <a:ea typeface="Aptos" pitchFamily="34" charset="-122"/>
-                <a:cs typeface="Aptos" pitchFamily="34" charset="-120"/>
-              </a:rPr>
-              <a:t>Keep in mind</a:t>
-            </a:r>
-            <a:endParaRPr lang="en-US" sz="950" dirty="0"/>
-          </a:p>
-        </p:txBody>
-      </p:sp>
-      <p:sp>
-        <p:nvSpPr>
           <p:cNvPr id="14" name="Text 12"/>
           <p:cNvSpPr/>
           <p:nvPr/>
         </p:nvSpPr>
         <p:spPr>
           <a:xfrm>
-            <a:off x="8211312" y="4233672"/>
-            <a:ext cx="2734056" cy="941832"/>
-          </a:xfrm>
-          <a:prstGeom prst="rect">
-            <a:avLst/>
-          </a:prstGeom>
-          <a:noFill/>
-          <a:ln/>
-        </p:spPr>
-        <p:txBody>
-          <a:bodyPr wrap="square" lIns="0" tIns="0" rIns="0" bIns="0" rtlCol="0" anchor="t">
+            <a:off x="7891272" y="4169664"/>
+            <a:ext cx="826008" cy="310896"/>
+          </a:xfrm>
+          <a:prstGeom prst="rect">
+            <a:avLst/>
+          </a:prstGeom>
+          <a:noFill/>
+          <a:ln/>
+        </p:spPr>
+        <p:txBody>
+          <a:bodyPr wrap="square" lIns="0" tIns="0" rIns="0" bIns="0" rtlCol="0" anchor="ctr">
             <a:normAutofit/>
           </a:bodyPr>
           <a:lstStyle/>
           <a:p>
-            <a:pPr indent="0" marL="0">
-              <a:buNone/>
-            </a:pPr>
-            <a:r>
-              <a:rPr lang="en-US" sz="1250" dirty="0">
-                <a:solidFill>
-                  <a:srgbClr val="17364A"/>
-                </a:solidFill>
-                <a:latin typeface="Aptos" pitchFamily="34" charset="0"/>
-                <a:ea typeface="Aptos" pitchFamily="34" charset="-122"/>
-                <a:cs typeface="Aptos" pitchFamily="34" charset="-120"/>
-              </a:rPr>
-              <a:t>The playbook connection helps turn training into agency work, not just individual knowledge.</a:t>
-            </a:r>
-            <a:endParaRPr lang="en-US" sz="1250" dirty="0"/>
+            <a:pPr algn="ctr" indent="0" marL="0">
+              <a:buNone/>
+            </a:pPr>
+            <a:r>
+              <a:rPr lang="en-US" sz="1500" b="1" dirty="0">
+                <a:solidFill>
+                  <a:srgbClr val="FFFFFF"/>
+                </a:solidFill>
+                <a:latin typeface="Aptos" pitchFamily="34" charset="0"/>
+                <a:ea typeface="Aptos" pitchFamily="34" charset="-122"/>
+                <a:cs typeface="Aptos" pitchFamily="34" charset="-120"/>
+              </a:rPr>
+              <a:t>Lesson</a:t>
+            </a:r>
+            <a:endParaRPr lang="en-US" sz="1500" dirty="0"/>
+          </a:p>
+        </p:txBody>
+      </p:sp>
+      <p:sp>
+        <p:nvSpPr>
+          <p:cNvPr id="15" name="Text 13"/>
+          <p:cNvSpPr/>
+          <p:nvPr/>
+        </p:nvSpPr>
+        <p:spPr>
+          <a:xfrm>
+            <a:off x="8817864" y="4187952"/>
+            <a:ext cx="201168" cy="256032"/>
+          </a:xfrm>
+          <a:prstGeom prst="rect">
+            <a:avLst/>
+          </a:prstGeom>
+          <a:noFill/>
+          <a:ln/>
+        </p:spPr>
+        <p:txBody>
+          <a:bodyPr wrap="square" lIns="0" tIns="0" rIns="0" bIns="0" rtlCol="0" anchor="ctr"/>
+          <a:lstStyle/>
+          <a:p>
+            <a:pPr algn="ctr" indent="0" marL="0">
+              <a:buNone/>
+            </a:pPr>
+            <a:r>
+              <a:rPr lang="en-US" sz="1800" b="1" dirty="0">
+                <a:solidFill>
+                  <a:srgbClr val="0068B7"/>
+                </a:solidFill>
+                <a:latin typeface="Aptos" pitchFamily="34" charset="0"/>
+                <a:ea typeface="Aptos" pitchFamily="34" charset="-122"/>
+                <a:cs typeface="Aptos" pitchFamily="34" charset="-120"/>
+              </a:rPr>
+              <a:t>â†’</a:t>
+            </a:r>
+            <a:endParaRPr lang="en-US" sz="1800" dirty="0"/>
+          </a:p>
+        </p:txBody>
+      </p:sp>
+      <p:sp>
+        <p:nvSpPr>
+          <p:cNvPr id="16" name="Shape 14"/>
+          <p:cNvSpPr/>
+          <p:nvPr/>
+        </p:nvSpPr>
+        <p:spPr>
+          <a:xfrm>
+            <a:off x="9046464" y="3977640"/>
+            <a:ext cx="972312" cy="749808"/>
+          </a:xfrm>
+          <a:prstGeom prst="roundRect">
+            <a:avLst>
+              <a:gd name="adj" fmla="val 14634"/>
+            </a:avLst>
+          </a:prstGeom>
+          <a:solidFill>
+            <a:srgbClr val="2F8A28"/>
+          </a:solidFill>
+          <a:ln w="12700">
+            <a:solidFill>
+              <a:srgbClr val="2F8A28"/>
+            </a:solidFill>
+            <a:prstDash val="solid"/>
+          </a:ln>
+        </p:spPr>
+      </p:sp>
+      <p:sp>
+        <p:nvSpPr>
+          <p:cNvPr id="17" name="Text 15"/>
+          <p:cNvSpPr/>
+          <p:nvPr/>
+        </p:nvSpPr>
+        <p:spPr>
+          <a:xfrm>
+            <a:off x="9119616" y="4169664"/>
+            <a:ext cx="826008" cy="310896"/>
+          </a:xfrm>
+          <a:prstGeom prst="rect">
+            <a:avLst/>
+          </a:prstGeom>
+          <a:noFill/>
+          <a:ln/>
+        </p:spPr>
+        <p:txBody>
+          <a:bodyPr wrap="square" lIns="0" tIns="0" rIns="0" bIns="0" rtlCol="0" anchor="ctr">
+            <a:normAutofit/>
+          </a:bodyPr>
+          <a:lstStyle/>
+          <a:p>
+            <a:pPr algn="ctr" indent="0" marL="0">
+              <a:buNone/>
+            </a:pPr>
+            <a:r>
+              <a:rPr lang="en-US" sz="1500" b="1" dirty="0">
+                <a:solidFill>
+                  <a:srgbClr val="FFFFFF"/>
+                </a:solidFill>
+                <a:latin typeface="Aptos" pitchFamily="34" charset="0"/>
+                <a:ea typeface="Aptos" pitchFamily="34" charset="-122"/>
+                <a:cs typeface="Aptos" pitchFamily="34" charset="-120"/>
+              </a:rPr>
+              <a:t>Plays</a:t>
+            </a:r>
+            <a:endParaRPr lang="en-US" sz="1500" dirty="0"/>
+          </a:p>
+        </p:txBody>
+      </p:sp>
+      <p:sp>
+        <p:nvSpPr>
+          <p:cNvPr id="18" name="Text 16"/>
+          <p:cNvSpPr/>
+          <p:nvPr/>
+        </p:nvSpPr>
+        <p:spPr>
+          <a:xfrm>
+            <a:off x="10046208" y="4187952"/>
+            <a:ext cx="201168" cy="256032"/>
+          </a:xfrm>
+          <a:prstGeom prst="rect">
+            <a:avLst/>
+          </a:prstGeom>
+          <a:noFill/>
+          <a:ln/>
+        </p:spPr>
+        <p:txBody>
+          <a:bodyPr wrap="square" lIns="0" tIns="0" rIns="0" bIns="0" rtlCol="0" anchor="ctr"/>
+          <a:lstStyle/>
+          <a:p>
+            <a:pPr algn="ctr" indent="0" marL="0">
+              <a:buNone/>
+            </a:pPr>
+            <a:r>
+              <a:rPr lang="en-US" sz="1800" b="1" dirty="0">
+                <a:solidFill>
+                  <a:srgbClr val="0068B7"/>
+                </a:solidFill>
+                <a:latin typeface="Aptos" pitchFamily="34" charset="0"/>
+                <a:ea typeface="Aptos" pitchFamily="34" charset="-122"/>
+                <a:cs typeface="Aptos" pitchFamily="34" charset="-120"/>
+              </a:rPr>
+              <a:t>â†’</a:t>
+            </a:r>
+            <a:endParaRPr lang="en-US" sz="1800" dirty="0"/>
+          </a:p>
+        </p:txBody>
+      </p:sp>
+      <p:sp>
+        <p:nvSpPr>
+          <p:cNvPr id="19" name="Shape 17"/>
+          <p:cNvSpPr/>
+          <p:nvPr/>
+        </p:nvSpPr>
+        <p:spPr>
+          <a:xfrm>
+            <a:off x="10274808" y="3977640"/>
+            <a:ext cx="972312" cy="749808"/>
+          </a:xfrm>
+          <a:prstGeom prst="roundRect">
+            <a:avLst>
+              <a:gd name="adj" fmla="val 14634"/>
+            </a:avLst>
+          </a:prstGeom>
+          <a:solidFill>
+            <a:srgbClr val="6A4CA3"/>
+          </a:solidFill>
+          <a:ln w="12700">
+            <a:solidFill>
+              <a:srgbClr val="6A4CA3"/>
+            </a:solidFill>
+            <a:prstDash val="solid"/>
+          </a:ln>
+        </p:spPr>
+      </p:sp>
+      <p:sp>
+        <p:nvSpPr>
+          <p:cNvPr id="20" name="Text 18"/>
+          <p:cNvSpPr/>
+          <p:nvPr/>
+        </p:nvSpPr>
+        <p:spPr>
+          <a:xfrm>
+            <a:off x="10347960" y="4169664"/>
+            <a:ext cx="826008" cy="310896"/>
+          </a:xfrm>
+          <a:prstGeom prst="rect">
+            <a:avLst/>
+          </a:prstGeom>
+          <a:noFill/>
+          <a:ln/>
+        </p:spPr>
+        <p:txBody>
+          <a:bodyPr wrap="square" lIns="0" tIns="0" rIns="0" bIns="0" rtlCol="0" anchor="ctr">
+            <a:normAutofit/>
+          </a:bodyPr>
+          <a:lstStyle/>
+          <a:p>
+            <a:pPr algn="ctr" indent="0" marL="0">
+              <a:buNone/>
+            </a:pPr>
+            <a:r>
+              <a:rPr lang="en-US" sz="1500" b="1" dirty="0">
+                <a:solidFill>
+                  <a:srgbClr val="FFFFFF"/>
+                </a:solidFill>
+                <a:latin typeface="Aptos" pitchFamily="34" charset="0"/>
+                <a:ea typeface="Aptos" pitchFamily="34" charset="-122"/>
+                <a:cs typeface="Aptos" pitchFamily="34" charset="-120"/>
+              </a:rPr>
+              <a:t>Action</a:t>
+            </a:r>
+            <a:endParaRPr lang="en-US" sz="1500" dirty="0"/>
           </a:p>
         </p:txBody>
       </p:sp>
@@ -11047,7 +11898,7 @@
                 <a:ea typeface="Aptos" pitchFamily="34" charset="-122"/>
                 <a:cs typeface="Aptos" pitchFamily="34" charset="-120"/>
               </a:rPr>
-              <a:t>© Paula Soper</a:t>
+              <a:t>Â© Paula Soper</a:t>
             </a:r>
             <a:endParaRPr lang="en-US" sz="800" dirty="0"/>
           </a:p>
@@ -11061,8 +11912,47 @@
         </p:nvSpPr>
         <p:spPr>
           <a:xfrm>
+            <a:off x="11137392" y="6510528"/>
+            <a:ext cx="411480" cy="201168"/>
+          </a:xfrm>
+          <a:prstGeom prst="rect">
+            <a:avLst/>
+          </a:prstGeom>
+          <a:noFill/>
+          <a:ln/>
+        </p:spPr>
+        <p:txBody>
+          <a:bodyPr wrap="square" lIns="0" tIns="0" rIns="0" bIns="0" rtlCol="0" anchor="ctr"/>
+          <a:lstStyle/>
+          <a:p>
+            <a:pPr algn="r" indent="0" marL="0">
+              <a:buNone/>
+            </a:pPr>
+            <a:r>
+              <a:rPr lang="en-US" sz="900" dirty="0">
+                <a:solidFill>
+                  <a:srgbClr val="5F7181"/>
+                </a:solidFill>
+                <a:latin typeface="Aptos" pitchFamily="34" charset="0"/>
+                <a:ea typeface="Aptos" pitchFamily="34" charset="-122"/>
+                <a:cs typeface="Aptos" pitchFamily="34" charset="-120"/>
+              </a:rPr>
+              <a:t>4</a:t>
+            </a:r>
+            <a:endParaRPr lang="en-US" sz="900" dirty="0"/>
+          </a:p>
+        </p:txBody>
+      </p:sp>
+      <p:sp>
+        <p:nvSpPr>
+          <p:cNvPr id="8" name="Text 6"/>
+          <p:cNvSpPr/>
+          <p:nvPr/>
+        </p:nvSpPr>
+        <p:spPr>
+          <a:xfrm>
             <a:off x="640080" y="658368"/>
-            <a:ext cx="10881360" cy="566928"/>
+            <a:ext cx="10881360" cy="713232"/>
           </a:xfrm>
           <a:prstGeom prst="rect">
             <a:avLst/>
@@ -11080,7 +11970,7 @@
               <a:buNone/>
             </a:pPr>
             <a:r>
-              <a:rPr lang="en-US" sz="2700" b="1" dirty="0">
+              <a:rPr lang="en-US" sz="3400" b="1" dirty="0">
                 <a:solidFill>
                   <a:srgbClr val="003A63"/>
                 </a:solidFill>
@@ -11090,20 +11980,20 @@
               </a:rPr>
               <a:t>Related toolkit resources</a:t>
             </a:r>
-            <a:endParaRPr lang="en-US" sz="2700" dirty="0"/>
-          </a:p>
-        </p:txBody>
-      </p:sp>
-      <p:sp>
-        <p:nvSpPr>
-          <p:cNvPr id="8" name="Text 6"/>
-          <p:cNvSpPr/>
-          <p:nvPr/>
-        </p:nvSpPr>
-        <p:spPr>
-          <a:xfrm>
-            <a:off x="868680" y="1417320"/>
-            <a:ext cx="6903720" cy="4480560"/>
+            <a:endParaRPr lang="en-US" sz="3400" dirty="0"/>
+          </a:p>
+        </p:txBody>
+      </p:sp>
+      <p:sp>
+        <p:nvSpPr>
+          <p:cNvPr id="9" name="Text 7"/>
+          <p:cNvSpPr/>
+          <p:nvPr/>
+        </p:nvSpPr>
+        <p:spPr>
+          <a:xfrm>
+            <a:off x="868680" y="1508760"/>
+            <a:ext cx="6812280" cy="3977640"/>
           </a:xfrm>
           <a:prstGeom prst="rect">
             <a:avLst/>
@@ -11118,7 +12008,7 @@
           <a:lstStyle/>
           <a:p>
             <a:r>
-              <a:rPr lang="en-US" sz="1460" dirty="0">
+              <a:rPr lang="en-US" sz="1850" dirty="0">
                 <a:solidFill>
                   <a:srgbClr val="17364A"/>
                 </a:solidFill>
@@ -11126,13 +12016,13 @@
                 <a:ea typeface="Aptos" pitchFamily="34" charset="-122"/>
                 <a:cs typeface="Aptos" pitchFamily="34" charset="-120"/>
               </a:rPr>
-              <a:t>Tool 4: AI Policy Landscape Scan (Worksheet) - Use AI Policy Landscape Scan to translate this lesson into a documented public health.</a:t>
-            </a:r>
-            <a:endParaRPr lang="en-US" sz="1460" dirty="0"/>
-          </a:p>
-          <a:p>
-            <a:r>
-              <a:rPr lang="en-US" sz="1460" dirty="0">
+              <a:t>Tool 4: AI Policy Landscape Scan (Worksheet) - Use AI Policy Landscape Scan to translate this lesson into a.</a:t>
+            </a:r>
+            <a:endParaRPr lang="en-US" sz="1850" dirty="0"/>
+          </a:p>
+          <a:p>
+            <a:r>
+              <a:rPr lang="en-US" sz="1850" dirty="0">
                 <a:solidFill>
                   <a:srgbClr val="17364A"/>
                 </a:solidFill>
@@ -11140,13 +12030,13 @@
                 <a:ea typeface="Aptos" pitchFamily="34" charset="-122"/>
                 <a:cs typeface="Aptos" pitchFamily="34" charset="-120"/>
               </a:rPr>
-              <a:t>Tool 5: AI Environmental and Resource Impact Review (Checklist) - Use AI Environmental and Resource Impact Review to translate this.</a:t>
-            </a:r>
-            <a:endParaRPr lang="en-US" sz="1460" dirty="0"/>
-          </a:p>
-          <a:p>
-            <a:r>
-              <a:rPr lang="en-US" sz="1460" dirty="0">
+              <a:t>Tool 5: AI Environmental and Resource Impact Review (Checklist) - Use AI Environmental and Resource Impact.</a:t>
+            </a:r>
+            <a:endParaRPr lang="en-US" sz="1850" dirty="0"/>
+          </a:p>
+          <a:p>
+            <a:r>
+              <a:rPr lang="en-US" sz="1850" dirty="0">
                 <a:solidFill>
                   <a:srgbClr val="17364A"/>
                 </a:solidFill>
@@ -11154,13 +12044,13 @@
                 <a:ea typeface="Aptos" pitchFamily="34" charset="-122"/>
                 <a:cs typeface="Aptos" pitchFamily="34" charset="-120"/>
               </a:rPr>
-              <a:t>Tool 6: Human-Centered AI Decision Rule Checklist (Checklist) - Use Human-Centered AI Decision Rule Checklist to translate this.</a:t>
-            </a:r>
-            <a:endParaRPr lang="en-US" sz="1460" dirty="0"/>
-          </a:p>
-          <a:p>
-            <a:r>
-              <a:rPr lang="en-US" sz="1460" dirty="0">
+              <a:t>Tool 6: Human-Centered AI Decision Rule Checklist (Checklist) - Use Human-Centered AI Decision Rule.</a:t>
+            </a:r>
+            <a:endParaRPr lang="en-US" sz="1850" dirty="0"/>
+          </a:p>
+          <a:p>
+            <a:r>
+              <a:rPr lang="en-US" sz="1850" dirty="0">
                 <a:solidFill>
                   <a:srgbClr val="17364A"/>
                 </a:solidFill>
@@ -11168,29 +12058,15 @@
                 <a:ea typeface="Aptos" pitchFamily="34" charset="-122"/>
                 <a:cs typeface="Aptos" pitchFamily="34" charset="-120"/>
               </a:rPr>
-              <a:t>Tool 8: AI Project Charter (Planning) - Use AI Project Charter to translate this lesson into a documented public health AI planning,.</a:t>
-            </a:r>
-            <a:endParaRPr lang="en-US" sz="1460" dirty="0"/>
-          </a:p>
-          <a:p>
-            <a:r>
-              <a:rPr lang="en-US" sz="1460" dirty="0">
-                <a:solidFill>
-                  <a:srgbClr val="17364A"/>
-                </a:solidFill>
-                <a:latin typeface="Aptos" pitchFamily="34" charset="0"/>
-                <a:ea typeface="Aptos" pitchFamily="34" charset="-122"/>
-                <a:cs typeface="Aptos" pitchFamily="34" charset="-120"/>
-              </a:rPr>
-              <a:t>Tool 9: Data Quality Assessment Checklist (Checklist) - Use this tool to complete or strengthen the practical exercise for the module.</a:t>
-            </a:r>
-            <a:endParaRPr lang="en-US" sz="1460" dirty="0"/>
-          </a:p>
-        </p:txBody>
-      </p:sp>
-      <p:sp>
-        <p:nvSpPr>
-          <p:cNvPr id="9" name="Shape 7"/>
+              <a:t>Tool 8: AI Project Charter (Planning) - Use AI Project Charter to translate this lesson into a documented.</a:t>
+            </a:r>
+            <a:endParaRPr lang="en-US" sz="1850" dirty="0"/>
+          </a:p>
+        </p:txBody>
+      </p:sp>
+      <p:sp>
+        <p:nvSpPr>
+          <p:cNvPr id="10" name="Shape 8"/>
           <p:cNvSpPr/>
           <p:nvPr/>
         </p:nvSpPr>
@@ -11217,14 +12093,14 @@
       </p:sp>
       <p:sp>
         <p:nvSpPr>
-          <p:cNvPr id="10" name="Text 8"/>
+          <p:cNvPr id="11" name="Text 9"/>
           <p:cNvSpPr/>
           <p:nvPr/>
         </p:nvSpPr>
         <p:spPr>
           <a:xfrm>
             <a:off x="8211312" y="1563624"/>
-            <a:ext cx="2734056" cy="201168"/>
+            <a:ext cx="2734056" cy="256032"/>
           </a:xfrm>
           <a:prstGeom prst="rect">
             <a:avLst/>
@@ -11240,7 +12116,7 @@
               <a:buNone/>
             </a:pPr>
             <a:r>
-              <a:rPr lang="en-US" sz="950" b="1" dirty="0">
+              <a:rPr lang="en-US" sz="1300" b="1" dirty="0">
                 <a:solidFill>
                   <a:srgbClr val="0068B7"/>
                 </a:solidFill>
@@ -11250,20 +12126,20 @@
               </a:rPr>
               <a:t>Use the tools</a:t>
             </a:r>
-            <a:endParaRPr lang="en-US" sz="950" dirty="0"/>
-          </a:p>
-        </p:txBody>
-      </p:sp>
-      <p:sp>
-        <p:nvSpPr>
-          <p:cNvPr id="11" name="Text 9"/>
-          <p:cNvSpPr/>
-          <p:nvPr/>
-        </p:nvSpPr>
-        <p:spPr>
-          <a:xfrm>
-            <a:off x="8211312" y="1856232"/>
-            <a:ext cx="2734056" cy="1536192"/>
+            <a:endParaRPr lang="en-US" sz="1300" dirty="0"/>
+          </a:p>
+        </p:txBody>
+      </p:sp>
+      <p:sp>
+        <p:nvSpPr>
+          <p:cNvPr id="12" name="Text 10"/>
+          <p:cNvSpPr/>
+          <p:nvPr/>
+        </p:nvSpPr>
+        <p:spPr>
+          <a:xfrm>
+            <a:off x="8211312" y="1920240"/>
+            <a:ext cx="2734056" cy="1463040"/>
           </a:xfrm>
           <a:prstGeom prst="rect">
             <a:avLst/>
@@ -11281,7 +12157,7 @@
               <a:buNone/>
             </a:pPr>
             <a:r>
-              <a:rPr lang="en-US" sz="1250" dirty="0">
+              <a:rPr lang="en-US" sz="1550" dirty="0">
                 <a:solidFill>
                   <a:srgbClr val="17364A"/>
                 </a:solidFill>
@@ -11291,32 +12167,32 @@
               </a:rPr>
               <a:t>Use linked tools when your department needs a structured worksheet, template, checklist, review process, or documentation artifact.</a:t>
             </a:r>
-            <a:endParaRPr lang="en-US" sz="1250" dirty="0"/>
-          </a:p>
-        </p:txBody>
-      </p:sp>
-      <p:sp>
-        <p:nvSpPr>
-          <p:cNvPr id="12" name="Shape 10"/>
-          <p:cNvSpPr/>
-          <p:nvPr/>
-        </p:nvSpPr>
-        <p:spPr>
-          <a:xfrm>
-            <a:off x="8046720" y="3794760"/>
-            <a:ext cx="3063240" cy="1508760"/>
+            <a:endParaRPr lang="en-US" sz="1550" dirty="0"/>
+          </a:p>
+        </p:txBody>
+      </p:sp>
+      <p:sp>
+        <p:nvSpPr>
+          <p:cNvPr id="13" name="Shape 11"/>
+          <p:cNvSpPr/>
+          <p:nvPr/>
+        </p:nvSpPr>
+        <p:spPr>
+          <a:xfrm>
+            <a:off x="7818120" y="3977640"/>
+            <a:ext cx="972312" cy="749808"/>
           </a:xfrm>
           <a:prstGeom prst="roundRect">
             <a:avLst>
-              <a:gd name="adj" fmla="val 7273"/>
+              <a:gd name="adj" fmla="val 14634"/>
             </a:avLst>
           </a:prstGeom>
           <a:solidFill>
-            <a:srgbClr val="EEF8ED"/>
+            <a:srgbClr val="0068B7"/>
           </a:solidFill>
           <a:ln w="12700">
             <a:solidFill>
-              <a:srgbClr val="B9D7E6"/>
+              <a:srgbClr val="0068B7"/>
             </a:solidFill>
             <a:prstDash val="solid"/>
           </a:ln>
@@ -11324,81 +12200,256 @@
       </p:sp>
       <p:sp>
         <p:nvSpPr>
-          <p:cNvPr id="13" name="Text 11"/>
-          <p:cNvSpPr/>
-          <p:nvPr/>
-        </p:nvSpPr>
-        <p:spPr>
-          <a:xfrm>
-            <a:off x="8211312" y="3941064"/>
-            <a:ext cx="2734056" cy="201168"/>
-          </a:xfrm>
-          <a:prstGeom prst="rect">
-            <a:avLst/>
-          </a:prstGeom>
-          <a:noFill/>
-          <a:ln/>
-        </p:spPr>
-        <p:txBody>
-          <a:bodyPr wrap="square" lIns="0" tIns="0" rIns="0" bIns="0" rtlCol="0" anchor="ctr"/>
-          <a:lstStyle/>
-          <a:p>
-            <a:pPr indent="0" marL="0">
-              <a:buNone/>
-            </a:pPr>
-            <a:r>
-              <a:rPr lang="en-US" sz="950" b="1" dirty="0">
-                <a:solidFill>
-                  <a:srgbClr val="0068B7"/>
-                </a:solidFill>
-                <a:latin typeface="Aptos" pitchFamily="34" charset="0"/>
-                <a:ea typeface="Aptos" pitchFamily="34" charset="-122"/>
-                <a:cs typeface="Aptos" pitchFamily="34" charset="-120"/>
-              </a:rPr>
-              <a:t>Avoid duplication</a:t>
-            </a:r>
-            <a:endParaRPr lang="en-US" sz="950" dirty="0"/>
-          </a:p>
-        </p:txBody>
-      </p:sp>
-      <p:sp>
-        <p:nvSpPr>
           <p:cNvPr id="14" name="Text 12"/>
           <p:cNvSpPr/>
           <p:nvPr/>
         </p:nvSpPr>
         <p:spPr>
           <a:xfrm>
-            <a:off x="8211312" y="4233672"/>
-            <a:ext cx="2734056" cy="941832"/>
-          </a:xfrm>
-          <a:prstGeom prst="rect">
-            <a:avLst/>
-          </a:prstGeom>
-          <a:noFill/>
-          <a:ln/>
-        </p:spPr>
-        <p:txBody>
-          <a:bodyPr wrap="square" lIns="0" tIns="0" rIns="0" bIns="0" rtlCol="0" anchor="t">
+            <a:off x="7891272" y="4169664"/>
+            <a:ext cx="826008" cy="310896"/>
+          </a:xfrm>
+          <a:prstGeom prst="rect">
+            <a:avLst/>
+          </a:prstGeom>
+          <a:noFill/>
+          <a:ln/>
+        </p:spPr>
+        <p:txBody>
+          <a:bodyPr wrap="square" lIns="0" tIns="0" rIns="0" bIns="0" rtlCol="0" anchor="ctr">
             <a:normAutofit/>
           </a:bodyPr>
           <a:lstStyle/>
           <a:p>
-            <a:pPr indent="0" marL="0">
-              <a:buNone/>
-            </a:pPr>
-            <a:r>
-              <a:rPr lang="en-US" sz="1250" dirty="0">
-                <a:solidFill>
-                  <a:srgbClr val="17364A"/>
-                </a:solidFill>
-                <a:latin typeface="Aptos" pitchFamily="34" charset="0"/>
-                <a:ea typeface="Aptos" pitchFamily="34" charset="-122"/>
-                <a:cs typeface="Aptos" pitchFamily="34" charset="-120"/>
-              </a:rPr>
-              <a:t>If your department already has a strong equivalent tool, adapt or use the existing process instead of recreating it.</a:t>
-            </a:r>
-            <a:endParaRPr lang="en-US" sz="1250" dirty="0"/>
+            <a:pPr algn="ctr" indent="0" marL="0">
+              <a:buNone/>
+            </a:pPr>
+            <a:r>
+              <a:rPr lang="en-US" sz="1500" b="1" dirty="0">
+                <a:solidFill>
+                  <a:srgbClr val="FFFFFF"/>
+                </a:solidFill>
+                <a:latin typeface="Aptos" pitchFamily="34" charset="0"/>
+                <a:ea typeface="Aptos" pitchFamily="34" charset="-122"/>
+                <a:cs typeface="Aptos" pitchFamily="34" charset="-120"/>
+              </a:rPr>
+              <a:t>Concept</a:t>
+            </a:r>
+            <a:endParaRPr lang="en-US" sz="1500" dirty="0"/>
+          </a:p>
+        </p:txBody>
+      </p:sp>
+      <p:sp>
+        <p:nvSpPr>
+          <p:cNvPr id="15" name="Text 13"/>
+          <p:cNvSpPr/>
+          <p:nvPr/>
+        </p:nvSpPr>
+        <p:spPr>
+          <a:xfrm>
+            <a:off x="8817864" y="4187952"/>
+            <a:ext cx="201168" cy="256032"/>
+          </a:xfrm>
+          <a:prstGeom prst="rect">
+            <a:avLst/>
+          </a:prstGeom>
+          <a:noFill/>
+          <a:ln/>
+        </p:spPr>
+        <p:txBody>
+          <a:bodyPr wrap="square" lIns="0" tIns="0" rIns="0" bIns="0" rtlCol="0" anchor="ctr"/>
+          <a:lstStyle/>
+          <a:p>
+            <a:pPr algn="ctr" indent="0" marL="0">
+              <a:buNone/>
+            </a:pPr>
+            <a:r>
+              <a:rPr lang="en-US" sz="1800" b="1" dirty="0">
+                <a:solidFill>
+                  <a:srgbClr val="0068B7"/>
+                </a:solidFill>
+                <a:latin typeface="Aptos" pitchFamily="34" charset="0"/>
+                <a:ea typeface="Aptos" pitchFamily="34" charset="-122"/>
+                <a:cs typeface="Aptos" pitchFamily="34" charset="-120"/>
+              </a:rPr>
+              <a:t>â†’</a:t>
+            </a:r>
+            <a:endParaRPr lang="en-US" sz="1800" dirty="0"/>
+          </a:p>
+        </p:txBody>
+      </p:sp>
+      <p:sp>
+        <p:nvSpPr>
+          <p:cNvPr id="16" name="Shape 14"/>
+          <p:cNvSpPr/>
+          <p:nvPr/>
+        </p:nvSpPr>
+        <p:spPr>
+          <a:xfrm>
+            <a:off x="9046464" y="3977640"/>
+            <a:ext cx="972312" cy="749808"/>
+          </a:xfrm>
+          <a:prstGeom prst="roundRect">
+            <a:avLst>
+              <a:gd name="adj" fmla="val 14634"/>
+            </a:avLst>
+          </a:prstGeom>
+          <a:solidFill>
+            <a:srgbClr val="2F8A28"/>
+          </a:solidFill>
+          <a:ln w="12700">
+            <a:solidFill>
+              <a:srgbClr val="2F8A28"/>
+            </a:solidFill>
+            <a:prstDash val="solid"/>
+          </a:ln>
+        </p:spPr>
+      </p:sp>
+      <p:sp>
+        <p:nvSpPr>
+          <p:cNvPr id="17" name="Text 15"/>
+          <p:cNvSpPr/>
+          <p:nvPr/>
+        </p:nvSpPr>
+        <p:spPr>
+          <a:xfrm>
+            <a:off x="9119616" y="4169664"/>
+            <a:ext cx="826008" cy="310896"/>
+          </a:xfrm>
+          <a:prstGeom prst="rect">
+            <a:avLst/>
+          </a:prstGeom>
+          <a:noFill/>
+          <a:ln/>
+        </p:spPr>
+        <p:txBody>
+          <a:bodyPr wrap="square" lIns="0" tIns="0" rIns="0" bIns="0" rtlCol="0" anchor="ctr">
+            <a:normAutofit/>
+          </a:bodyPr>
+          <a:lstStyle/>
+          <a:p>
+            <a:pPr algn="ctr" indent="0" marL="0">
+              <a:buNone/>
+            </a:pPr>
+            <a:r>
+              <a:rPr lang="en-US" sz="1500" b="1" dirty="0">
+                <a:solidFill>
+                  <a:srgbClr val="FFFFFF"/>
+                </a:solidFill>
+                <a:latin typeface="Aptos" pitchFamily="34" charset="0"/>
+                <a:ea typeface="Aptos" pitchFamily="34" charset="-122"/>
+                <a:cs typeface="Aptos" pitchFamily="34" charset="-120"/>
+              </a:rPr>
+              <a:t>Tool</a:t>
+            </a:r>
+            <a:endParaRPr lang="en-US" sz="1500" dirty="0"/>
+          </a:p>
+        </p:txBody>
+      </p:sp>
+      <p:sp>
+        <p:nvSpPr>
+          <p:cNvPr id="18" name="Text 16"/>
+          <p:cNvSpPr/>
+          <p:nvPr/>
+        </p:nvSpPr>
+        <p:spPr>
+          <a:xfrm>
+            <a:off x="10046208" y="4187952"/>
+            <a:ext cx="201168" cy="256032"/>
+          </a:xfrm>
+          <a:prstGeom prst="rect">
+            <a:avLst/>
+          </a:prstGeom>
+          <a:noFill/>
+          <a:ln/>
+        </p:spPr>
+        <p:txBody>
+          <a:bodyPr wrap="square" lIns="0" tIns="0" rIns="0" bIns="0" rtlCol="0" anchor="ctr"/>
+          <a:lstStyle/>
+          <a:p>
+            <a:pPr algn="ctr" indent="0" marL="0">
+              <a:buNone/>
+            </a:pPr>
+            <a:r>
+              <a:rPr lang="en-US" sz="1800" b="1" dirty="0">
+                <a:solidFill>
+                  <a:srgbClr val="0068B7"/>
+                </a:solidFill>
+                <a:latin typeface="Aptos" pitchFamily="34" charset="0"/>
+                <a:ea typeface="Aptos" pitchFamily="34" charset="-122"/>
+                <a:cs typeface="Aptos" pitchFamily="34" charset="-120"/>
+              </a:rPr>
+              <a:t>â†’</a:t>
+            </a:r>
+            <a:endParaRPr lang="en-US" sz="1800" dirty="0"/>
+          </a:p>
+        </p:txBody>
+      </p:sp>
+      <p:sp>
+        <p:nvSpPr>
+          <p:cNvPr id="19" name="Shape 17"/>
+          <p:cNvSpPr/>
+          <p:nvPr/>
+        </p:nvSpPr>
+        <p:spPr>
+          <a:xfrm>
+            <a:off x="10274808" y="3977640"/>
+            <a:ext cx="972312" cy="749808"/>
+          </a:xfrm>
+          <a:prstGeom prst="roundRect">
+            <a:avLst>
+              <a:gd name="adj" fmla="val 14634"/>
+            </a:avLst>
+          </a:prstGeom>
+          <a:solidFill>
+            <a:srgbClr val="D69A2D"/>
+          </a:solidFill>
+          <a:ln w="12700">
+            <a:solidFill>
+              <a:srgbClr val="D69A2D"/>
+            </a:solidFill>
+            <a:prstDash val="solid"/>
+          </a:ln>
+        </p:spPr>
+      </p:sp>
+      <p:sp>
+        <p:nvSpPr>
+          <p:cNvPr id="20" name="Text 18"/>
+          <p:cNvSpPr/>
+          <p:nvPr/>
+        </p:nvSpPr>
+        <p:spPr>
+          <a:xfrm>
+            <a:off x="10347960" y="4169664"/>
+            <a:ext cx="826008" cy="310896"/>
+          </a:xfrm>
+          <a:prstGeom prst="rect">
+            <a:avLst/>
+          </a:prstGeom>
+          <a:noFill/>
+          <a:ln/>
+        </p:spPr>
+        <p:txBody>
+          <a:bodyPr wrap="square" lIns="0" tIns="0" rIns="0" bIns="0" rtlCol="0" anchor="ctr">
+            <a:normAutofit/>
+          </a:bodyPr>
+          <a:lstStyle/>
+          <a:p>
+            <a:pPr algn="ctr" indent="0" marL="0">
+              <a:buNone/>
+            </a:pPr>
+            <a:r>
+              <a:rPr lang="en-US" sz="1500" b="1" dirty="0">
+                <a:solidFill>
+                  <a:srgbClr val="FFFFFF"/>
+                </a:solidFill>
+                <a:latin typeface="Aptos" pitchFamily="34" charset="0"/>
+                <a:ea typeface="Aptos" pitchFamily="34" charset="-122"/>
+                <a:cs typeface="Aptos" pitchFamily="34" charset="-120"/>
+              </a:rPr>
+              <a:t>Artifact</a:t>
+            </a:r>
+            <a:endParaRPr lang="en-US" sz="1500" dirty="0"/>
           </a:p>
         </p:txBody>
       </p:sp>
@@ -11595,7 +12646,7 @@
                 <a:ea typeface="Aptos" pitchFamily="34" charset="-122"/>
                 <a:cs typeface="Aptos" pitchFamily="34" charset="-120"/>
               </a:rPr>
-              <a:t>© Paula Soper</a:t>
+              <a:t>Â© Paula Soper</a:t>
             </a:r>
             <a:endParaRPr lang="en-US" sz="800" dirty="0"/>
           </a:p>
@@ -11603,7 +12654,46 @@
       </p:sp>
       <p:sp>
         <p:nvSpPr>
-          <p:cNvPr id="7" name="Shape 5"/>
+          <p:cNvPr id="7" name="Text 5"/>
+          <p:cNvSpPr/>
+          <p:nvPr/>
+        </p:nvSpPr>
+        <p:spPr>
+          <a:xfrm>
+            <a:off x="11137392" y="6510528"/>
+            <a:ext cx="411480" cy="201168"/>
+          </a:xfrm>
+          <a:prstGeom prst="rect">
+            <a:avLst/>
+          </a:prstGeom>
+          <a:noFill/>
+          <a:ln/>
+        </p:spPr>
+        <p:txBody>
+          <a:bodyPr wrap="square" lIns="0" tIns="0" rIns="0" bIns="0" rtlCol="0" anchor="ctr"/>
+          <a:lstStyle/>
+          <a:p>
+            <a:pPr algn="r" indent="0" marL="0">
+              <a:buNone/>
+            </a:pPr>
+            <a:r>
+              <a:rPr lang="en-US" sz="900" dirty="0">
+                <a:solidFill>
+                  <a:srgbClr val="5F7181"/>
+                </a:solidFill>
+                <a:latin typeface="Aptos" pitchFamily="34" charset="0"/>
+                <a:ea typeface="Aptos" pitchFamily="34" charset="-122"/>
+                <a:cs typeface="Aptos" pitchFamily="34" charset="-120"/>
+              </a:rPr>
+              <a:t>5</a:t>
+            </a:r>
+            <a:endParaRPr lang="en-US" sz="900" dirty="0"/>
+          </a:p>
+        </p:txBody>
+      </p:sp>
+      <p:sp>
+        <p:nvSpPr>
+          <p:cNvPr id="8" name="Shape 6"/>
           <p:cNvSpPr/>
           <p:nvPr/>
         </p:nvSpPr>
@@ -11628,7 +12718,7 @@
       </p:sp>
       <p:sp>
         <p:nvSpPr>
-          <p:cNvPr id="8" name="Text 6"/>
+          <p:cNvPr id="9" name="Text 7"/>
           <p:cNvSpPr/>
           <p:nvPr/>
         </p:nvSpPr>
@@ -11667,14 +12757,14 @@
       </p:sp>
       <p:sp>
         <p:nvSpPr>
-          <p:cNvPr id="9" name="Text 7"/>
+          <p:cNvPr id="10" name="Text 8"/>
           <p:cNvSpPr/>
           <p:nvPr/>
         </p:nvSpPr>
         <p:spPr>
           <a:xfrm>
             <a:off x="640080" y="621792"/>
-            <a:ext cx="10881360" cy="566928"/>
+            <a:ext cx="10881360" cy="713232"/>
           </a:xfrm>
           <a:prstGeom prst="rect">
             <a:avLst/>
@@ -11692,7 +12782,7 @@
               <a:buNone/>
             </a:pPr>
             <a:r>
-              <a:rPr lang="en-US" sz="2700" b="1" dirty="0">
+              <a:rPr lang="en-US" sz="3400" b="1" dirty="0">
                 <a:solidFill>
                   <a:srgbClr val="003A63"/>
                 </a:solidFill>
@@ -11702,20 +12792,20 @@
               </a:rPr>
               <a:t>Learning Objectives</a:t>
             </a:r>
-            <a:endParaRPr lang="en-US" sz="2700" dirty="0"/>
-          </a:p>
-        </p:txBody>
-      </p:sp>
-      <p:sp>
-        <p:nvSpPr>
-          <p:cNvPr id="10" name="Text 8"/>
-          <p:cNvSpPr/>
-          <p:nvPr/>
-        </p:nvSpPr>
-        <p:spPr>
-          <a:xfrm>
-            <a:off x="868680" y="1417320"/>
-            <a:ext cx="6675120" cy="4434840"/>
+            <a:endParaRPr lang="en-US" sz="3400" dirty="0"/>
+          </a:p>
+        </p:txBody>
+      </p:sp>
+      <p:sp>
+        <p:nvSpPr>
+          <p:cNvPr id="11" name="Text 9"/>
+          <p:cNvSpPr/>
+          <p:nvPr/>
+        </p:nvSpPr>
+        <p:spPr>
+          <a:xfrm>
+            <a:off x="868680" y="1508760"/>
+            <a:ext cx="6537960" cy="4160520"/>
           </a:xfrm>
           <a:prstGeom prst="rect">
             <a:avLst/>
@@ -11730,7 +12820,7 @@
           <a:lstStyle/>
           <a:p>
             <a:r>
-              <a:rPr lang="en-US" sz="1700" dirty="0">
+              <a:rPr lang="en-US" sz="2100" dirty="0">
                 <a:solidFill>
                   <a:srgbClr val="17364A"/>
                 </a:solidFill>
@@ -11740,11 +12830,11 @@
               </a:rPr>
               <a:t>Define the purpose and minimum contents of an AI governance charter.</a:t>
             </a:r>
-            <a:endParaRPr lang="en-US" sz="1700" dirty="0"/>
-          </a:p>
-          <a:p>
-            <a:r>
-              <a:rPr lang="en-US" sz="1700" dirty="0">
+            <a:endParaRPr lang="en-US" sz="2100" dirty="0"/>
+          </a:p>
+          <a:p>
+            <a:r>
+              <a:rPr lang="en-US" sz="2100" dirty="0">
                 <a:solidFill>
                   <a:srgbClr val="17364A"/>
                 </a:solidFill>
@@ -11752,13 +12842,13 @@
                 <a:ea typeface="Aptos" pitchFamily="34" charset="-122"/>
                 <a:cs typeface="Aptos" pitchFamily="34" charset="-120"/>
               </a:rPr>
-              <a:t>Distinguish between a governance committee, technical review group, executive sponsor, and implementation team.</a:t>
-            </a:r>
-            <a:endParaRPr lang="en-US" sz="1700" dirty="0"/>
-          </a:p>
-          <a:p>
-            <a:r>
-              <a:rPr lang="en-US" sz="1700" dirty="0">
+              <a:t>Distinguish between a governance committee, technical review group, executive sponsor, and.</a:t>
+            </a:r>
+            <a:endParaRPr lang="en-US" sz="2100" dirty="0"/>
+          </a:p>
+          <a:p>
+            <a:r>
+              <a:rPr lang="en-US" sz="2100" dirty="0">
                 <a:solidFill>
                   <a:srgbClr val="17364A"/>
                 </a:solidFill>
@@ -11768,27 +12858,13 @@
               </a:rPr>
               <a:t>Identify which agency functions should participate in AI governance and when their review is required.</a:t>
             </a:r>
-            <a:endParaRPr lang="en-US" sz="1700" dirty="0"/>
-          </a:p>
-          <a:p>
-            <a:r>
-              <a:rPr lang="en-US" sz="1700" dirty="0">
-                <a:solidFill>
-                  <a:srgbClr val="17364A"/>
-                </a:solidFill>
-                <a:latin typeface="Aptos" pitchFamily="34" charset="0"/>
-                <a:ea typeface="Aptos" pitchFamily="34" charset="-122"/>
-                <a:cs typeface="Aptos" pitchFamily="34" charset="-120"/>
-              </a:rPr>
-              <a:t>Develop operating procedures for intake, review, approval, monitoring, exceptions, escalation, and retirement of AI use cases.</a:t>
-            </a:r>
-            <a:endParaRPr lang="en-US" sz="1700" dirty="0"/>
-          </a:p>
-        </p:txBody>
-      </p:sp>
-      <p:sp>
-        <p:nvSpPr>
-          <p:cNvPr id="11" name="Shape 9"/>
+            <a:endParaRPr lang="en-US" sz="2100" dirty="0"/>
+          </a:p>
+        </p:txBody>
+      </p:sp>
+      <p:sp>
+        <p:nvSpPr>
+          <p:cNvPr id="12" name="Shape 10"/>
           <p:cNvSpPr/>
           <p:nvPr/>
         </p:nvSpPr>
@@ -11815,14 +12891,14 @@
       </p:sp>
       <p:sp>
         <p:nvSpPr>
-          <p:cNvPr id="12" name="Text 10"/>
+          <p:cNvPr id="13" name="Text 11"/>
           <p:cNvSpPr/>
           <p:nvPr/>
         </p:nvSpPr>
         <p:spPr>
           <a:xfrm>
             <a:off x="8074152" y="1563624"/>
-            <a:ext cx="2825496" cy="201168"/>
+            <a:ext cx="2825496" cy="256032"/>
           </a:xfrm>
           <a:prstGeom prst="rect">
             <a:avLst/>
@@ -11838,7 +12914,7 @@
               <a:buNone/>
             </a:pPr>
             <a:r>
-              <a:rPr lang="en-US" sz="950" b="1" dirty="0">
+              <a:rPr lang="en-US" sz="1300" b="1" dirty="0">
                 <a:solidFill>
                   <a:srgbClr val="0068B7"/>
                 </a:solidFill>
@@ -11848,20 +12924,20 @@
               </a:rPr>
               <a:t>Key idea</a:t>
             </a:r>
-            <a:endParaRPr lang="en-US" sz="950" dirty="0"/>
-          </a:p>
-        </p:txBody>
-      </p:sp>
-      <p:sp>
-        <p:nvSpPr>
-          <p:cNvPr id="13" name="Text 11"/>
-          <p:cNvSpPr/>
-          <p:nvPr/>
-        </p:nvSpPr>
-        <p:spPr>
-          <a:xfrm>
-            <a:off x="8074152" y="1856232"/>
-            <a:ext cx="2825496" cy="1261872"/>
+            <a:endParaRPr lang="en-US" sz="1300" dirty="0"/>
+          </a:p>
+        </p:txBody>
+      </p:sp>
+      <p:sp>
+        <p:nvSpPr>
+          <p:cNvPr id="14" name="Text 12"/>
+          <p:cNvSpPr/>
+          <p:nvPr/>
+        </p:nvSpPr>
+        <p:spPr>
+          <a:xfrm>
+            <a:off x="8074152" y="1920240"/>
+            <a:ext cx="2825496" cy="1188720"/>
           </a:xfrm>
           <a:prstGeom prst="rect">
             <a:avLst/>
@@ -11879,7 +12955,7 @@
               <a:buNone/>
             </a:pPr>
             <a:r>
-              <a:rPr lang="en-US" sz="1250" dirty="0">
+              <a:rPr lang="en-US" sz="1550" dirty="0">
                 <a:solidFill>
                   <a:srgbClr val="17364A"/>
                 </a:solidFill>
@@ -11889,13 +12965,13 @@
               </a:rPr>
               <a:t>Define the purpose and minimum contents of an AI governance charter.</a:t>
             </a:r>
-            <a:endParaRPr lang="en-US" sz="1250" dirty="0"/>
-          </a:p>
-        </p:txBody>
-      </p:sp>
-      <p:sp>
-        <p:nvSpPr>
-          <p:cNvPr id="14" name="Shape 12"/>
+            <a:endParaRPr lang="en-US" sz="1550" dirty="0"/>
+          </a:p>
+        </p:txBody>
+      </p:sp>
+      <p:sp>
+        <p:nvSpPr>
+          <p:cNvPr id="15" name="Shape 13"/>
           <p:cNvSpPr/>
           <p:nvPr/>
         </p:nvSpPr>
@@ -11922,14 +12998,14 @@
       </p:sp>
       <p:sp>
         <p:nvSpPr>
-          <p:cNvPr id="15" name="Text 13"/>
+          <p:cNvPr id="16" name="Text 14"/>
           <p:cNvSpPr/>
           <p:nvPr/>
         </p:nvSpPr>
         <p:spPr>
           <a:xfrm>
             <a:off x="8074152" y="3666744"/>
-            <a:ext cx="2825496" cy="201168"/>
+            <a:ext cx="2825496" cy="256032"/>
           </a:xfrm>
           <a:prstGeom prst="rect">
             <a:avLst/>
@@ -11945,7 +13021,7 @@
               <a:buNone/>
             </a:pPr>
             <a:r>
-              <a:rPr lang="en-US" sz="950" b="1" dirty="0">
+              <a:rPr lang="en-US" sz="1300" b="1" dirty="0">
                 <a:solidFill>
                   <a:srgbClr val="0068B7"/>
                 </a:solidFill>
@@ -11955,20 +13031,20 @@
               </a:rPr>
               <a:t>Use this for</a:t>
             </a:r>
-            <a:endParaRPr lang="en-US" sz="950" dirty="0"/>
-          </a:p>
-        </p:txBody>
-      </p:sp>
-      <p:sp>
-        <p:nvSpPr>
-          <p:cNvPr id="16" name="Text 14"/>
-          <p:cNvSpPr/>
-          <p:nvPr/>
-        </p:nvSpPr>
-        <p:spPr>
-          <a:xfrm>
-            <a:off x="8074152" y="3959352"/>
-            <a:ext cx="2825496" cy="1170432"/>
+            <a:endParaRPr lang="en-US" sz="1300" dirty="0"/>
+          </a:p>
+        </p:txBody>
+      </p:sp>
+      <p:sp>
+        <p:nvSpPr>
+          <p:cNvPr id="17" name="Text 15"/>
+          <p:cNvSpPr/>
+          <p:nvPr/>
+        </p:nvSpPr>
+        <p:spPr>
+          <a:xfrm>
+            <a:off x="8074152" y="4023360"/>
+            <a:ext cx="2825496" cy="1097280"/>
           </a:xfrm>
           <a:prstGeom prst="rect">
             <a:avLst/>
@@ -11986,7 +13062,7 @@
               <a:buNone/>
             </a:pPr>
             <a:r>
-              <a:rPr lang="en-US" sz="1250" dirty="0">
+              <a:rPr lang="en-US" sz="1550" dirty="0">
                 <a:solidFill>
                   <a:srgbClr val="17364A"/>
                 </a:solidFill>
@@ -11996,7 +13072,7 @@
               </a:rPr>
               <a:t>Connect the concept to public health decisions, safeguards, documentation, or implementation work.</a:t>
             </a:r>
-            <a:endParaRPr lang="en-US" sz="1250" dirty="0"/>
+            <a:endParaRPr lang="en-US" sz="1550" dirty="0"/>
           </a:p>
         </p:txBody>
       </p:sp>
@@ -12193,7 +13269,7 @@
                 <a:ea typeface="Aptos" pitchFamily="34" charset="-122"/>
                 <a:cs typeface="Aptos" pitchFamily="34" charset="-120"/>
               </a:rPr>
-              <a:t>© Paula Soper</a:t>
+              <a:t>Â© Paula Soper</a:t>
             </a:r>
             <a:endParaRPr lang="en-US" sz="800" dirty="0"/>
           </a:p>
@@ -12201,7 +13277,46 @@
       </p:sp>
       <p:sp>
         <p:nvSpPr>
-          <p:cNvPr id="7" name="Shape 5"/>
+          <p:cNvPr id="7" name="Text 5"/>
+          <p:cNvSpPr/>
+          <p:nvPr/>
+        </p:nvSpPr>
+        <p:spPr>
+          <a:xfrm>
+            <a:off x="11137392" y="6510528"/>
+            <a:ext cx="411480" cy="201168"/>
+          </a:xfrm>
+          <a:prstGeom prst="rect">
+            <a:avLst/>
+          </a:prstGeom>
+          <a:noFill/>
+          <a:ln/>
+        </p:spPr>
+        <p:txBody>
+          <a:bodyPr wrap="square" lIns="0" tIns="0" rIns="0" bIns="0" rtlCol="0" anchor="ctr"/>
+          <a:lstStyle/>
+          <a:p>
+            <a:pPr algn="r" indent="0" marL="0">
+              <a:buNone/>
+            </a:pPr>
+            <a:r>
+              <a:rPr lang="en-US" sz="900" dirty="0">
+                <a:solidFill>
+                  <a:srgbClr val="5F7181"/>
+                </a:solidFill>
+                <a:latin typeface="Aptos" pitchFamily="34" charset="0"/>
+                <a:ea typeface="Aptos" pitchFamily="34" charset="-122"/>
+                <a:cs typeface="Aptos" pitchFamily="34" charset="-120"/>
+              </a:rPr>
+              <a:t>6</a:t>
+            </a:r>
+            <a:endParaRPr lang="en-US" sz="900" dirty="0"/>
+          </a:p>
+        </p:txBody>
+      </p:sp>
+      <p:sp>
+        <p:nvSpPr>
+          <p:cNvPr id="8" name="Shape 6"/>
           <p:cNvSpPr/>
           <p:nvPr/>
         </p:nvSpPr>
@@ -12226,7 +13341,7 @@
       </p:sp>
       <p:sp>
         <p:nvSpPr>
-          <p:cNvPr id="8" name="Text 6"/>
+          <p:cNvPr id="9" name="Text 7"/>
           <p:cNvSpPr/>
           <p:nvPr/>
         </p:nvSpPr>
@@ -12265,14 +13380,14 @@
       </p:sp>
       <p:sp>
         <p:nvSpPr>
-          <p:cNvPr id="9" name="Text 7"/>
+          <p:cNvPr id="10" name="Text 8"/>
           <p:cNvSpPr/>
           <p:nvPr/>
         </p:nvSpPr>
         <p:spPr>
           <a:xfrm>
             <a:off x="640080" y="621792"/>
-            <a:ext cx="10881360" cy="566928"/>
+            <a:ext cx="10881360" cy="713232"/>
           </a:xfrm>
           <a:prstGeom prst="rect">
             <a:avLst/>
@@ -12290,7 +13405,7 @@
               <a:buNone/>
             </a:pPr>
             <a:r>
-              <a:rPr lang="en-US" sz="2700" b="1" dirty="0">
+              <a:rPr lang="en-US" sz="3400" b="1" dirty="0">
                 <a:solidFill>
                   <a:srgbClr val="003A63"/>
                 </a:solidFill>
@@ -12300,20 +13415,20 @@
               </a:rPr>
               <a:t>Module Overview</a:t>
             </a:r>
-            <a:endParaRPr lang="en-US" sz="2700" dirty="0"/>
-          </a:p>
-        </p:txBody>
-      </p:sp>
-      <p:sp>
-        <p:nvSpPr>
-          <p:cNvPr id="10" name="Text 8"/>
-          <p:cNvSpPr/>
-          <p:nvPr/>
-        </p:nvSpPr>
-        <p:spPr>
-          <a:xfrm>
-            <a:off x="868680" y="1417320"/>
-            <a:ext cx="6675120" cy="4434840"/>
+            <a:endParaRPr lang="en-US" sz="3400" dirty="0"/>
+          </a:p>
+        </p:txBody>
+      </p:sp>
+      <p:sp>
+        <p:nvSpPr>
+          <p:cNvPr id="11" name="Text 9"/>
+          <p:cNvSpPr/>
+          <p:nvPr/>
+        </p:nvSpPr>
+        <p:spPr>
+          <a:xfrm>
+            <a:off x="868680" y="1508760"/>
+            <a:ext cx="6537960" cy="4160520"/>
           </a:xfrm>
           <a:prstGeom prst="rect">
             <a:avLst/>
@@ -12328,7 +13443,7 @@
           <a:lstStyle/>
           <a:p>
             <a:r>
-              <a:rPr lang="en-US" sz="1700" dirty="0">
+              <a:rPr lang="en-US" sz="2100" dirty="0">
                 <a:solidFill>
                   <a:srgbClr val="17364A"/>
                 </a:solidFill>
@@ -12336,13 +13451,13 @@
                 <a:ea typeface="Aptos" pitchFamily="34" charset="-122"/>
                 <a:cs typeface="Aptos" pitchFamily="34" charset="-120"/>
               </a:rPr>
-              <a:t>AI governance needs a formal home before an agency begins approving tools, pilots, vendor products, or workflow automation.</a:t>
-            </a:r>
-            <a:endParaRPr lang="en-US" sz="1700" dirty="0"/>
-          </a:p>
-          <a:p>
-            <a:r>
-              <a:rPr lang="en-US" sz="1700" dirty="0">
+              <a:t>AI governance needs a formal home before an agency begins approving tools, pilots, vendor products, or.</a:t>
+            </a:r>
+            <a:endParaRPr lang="en-US" sz="2100" dirty="0"/>
+          </a:p>
+          <a:p>
+            <a:r>
+              <a:rPr lang="en-US" sz="2100" dirty="0">
                 <a:solidFill>
                   <a:srgbClr val="17364A"/>
                 </a:solidFill>
@@ -12350,13 +13465,13 @@
                 <a:ea typeface="Aptos" pitchFamily="34" charset="-122"/>
                 <a:cs typeface="Aptos" pitchFamily="34" charset="-120"/>
               </a:rPr>
-              <a:t>A governance charter defines the purpose, scope, authority, membership, cadence, decision rules, and documentation.</a:t>
-            </a:r>
-            <a:endParaRPr lang="en-US" sz="1700" dirty="0"/>
-          </a:p>
-          <a:p>
-            <a:r>
-              <a:rPr lang="en-US" sz="1700" dirty="0">
+              <a:t>A governance charter defines the purpose, scope, authority, membership, cadence, decision rules, and.</a:t>
+            </a:r>
+            <a:endParaRPr lang="en-US" sz="2100" dirty="0"/>
+          </a:p>
+          <a:p>
+            <a:r>
+              <a:rPr lang="en-US" sz="2100" dirty="0">
                 <a:solidFill>
                   <a:srgbClr val="17364A"/>
                 </a:solidFill>
@@ -12364,29 +13479,15 @@
                 <a:ea typeface="Aptos" pitchFamily="34" charset="-122"/>
                 <a:cs typeface="Aptos" pitchFamily="34" charset="-120"/>
               </a:rPr>
-              <a:t>Without a charter, AI decisions often become scattered across IT, program areas, legal, privacy, procurement, and.</a:t>
-            </a:r>
-            <a:endParaRPr lang="en-US" sz="1700" dirty="0"/>
-          </a:p>
-          <a:p>
-            <a:r>
-              <a:rPr lang="en-US" sz="1700" dirty="0">
-                <a:solidFill>
-                  <a:srgbClr val="17364A"/>
-                </a:solidFill>
-                <a:latin typeface="Aptos" pitchFamily="34" charset="0"/>
-                <a:ea typeface="Aptos" pitchFamily="34" charset="-122"/>
-                <a:cs typeface="Aptos" pitchFamily="34" charset="-120"/>
-              </a:rPr>
-              <a:t>This module helps leaders design an AI governance operating model that is practical for a public health agency.</a:t>
-            </a:r>
-            <a:endParaRPr lang="en-US" sz="1700" dirty="0"/>
-          </a:p>
-        </p:txBody>
-      </p:sp>
-      <p:sp>
-        <p:nvSpPr>
-          <p:cNvPr id="11" name="Shape 9"/>
+              <a:t>Without a charter, AI decisions often become scattered across IT, program areas, legal, privacy,.</a:t>
+            </a:r>
+            <a:endParaRPr lang="en-US" sz="2100" dirty="0"/>
+          </a:p>
+        </p:txBody>
+      </p:sp>
+      <p:sp>
+        <p:nvSpPr>
+          <p:cNvPr id="12" name="Shape 10"/>
           <p:cNvSpPr/>
           <p:nvPr/>
         </p:nvSpPr>
@@ -12413,14 +13514,14 @@
       </p:sp>
       <p:sp>
         <p:nvSpPr>
-          <p:cNvPr id="12" name="Text 10"/>
+          <p:cNvPr id="13" name="Text 11"/>
           <p:cNvSpPr/>
           <p:nvPr/>
         </p:nvSpPr>
         <p:spPr>
           <a:xfrm>
             <a:off x="8074152" y="1563624"/>
-            <a:ext cx="2825496" cy="201168"/>
+            <a:ext cx="2825496" cy="256032"/>
           </a:xfrm>
           <a:prstGeom prst="rect">
             <a:avLst/>
@@ -12436,7 +13537,7 @@
               <a:buNone/>
             </a:pPr>
             <a:r>
-              <a:rPr lang="en-US" sz="950" b="1" dirty="0">
+              <a:rPr lang="en-US" sz="1300" b="1" dirty="0">
                 <a:solidFill>
                   <a:srgbClr val="0068B7"/>
                 </a:solidFill>
@@ -12446,20 +13547,20 @@
               </a:rPr>
               <a:t>Key idea</a:t>
             </a:r>
-            <a:endParaRPr lang="en-US" sz="950" dirty="0"/>
-          </a:p>
-        </p:txBody>
-      </p:sp>
-      <p:sp>
-        <p:nvSpPr>
-          <p:cNvPr id="13" name="Text 11"/>
-          <p:cNvSpPr/>
-          <p:nvPr/>
-        </p:nvSpPr>
-        <p:spPr>
-          <a:xfrm>
-            <a:off x="8074152" y="1856232"/>
-            <a:ext cx="2825496" cy="1261872"/>
+            <a:endParaRPr lang="en-US" sz="1300" dirty="0"/>
+          </a:p>
+        </p:txBody>
+      </p:sp>
+      <p:sp>
+        <p:nvSpPr>
+          <p:cNvPr id="14" name="Text 12"/>
+          <p:cNvSpPr/>
+          <p:nvPr/>
+        </p:nvSpPr>
+        <p:spPr>
+          <a:xfrm>
+            <a:off x="8074152" y="1920240"/>
+            <a:ext cx="2825496" cy="1188720"/>
           </a:xfrm>
           <a:prstGeom prst="rect">
             <a:avLst/>
@@ -12477,7 +13578,7 @@
               <a:buNone/>
             </a:pPr>
             <a:r>
-              <a:rPr lang="en-US" sz="1250" dirty="0">
+              <a:rPr lang="en-US" sz="1550" dirty="0">
                 <a:solidFill>
                   <a:srgbClr val="17364A"/>
                 </a:solidFill>
@@ -12485,15 +13586,15 @@
                 <a:ea typeface="Aptos" pitchFamily="34" charset="-122"/>
                 <a:cs typeface="Aptos" pitchFamily="34" charset="-120"/>
               </a:rPr>
-              <a:t>AI governance needs a formal home before an agency begins approving tools, pilots, vendor products, or workflow automation.</a:t>
-            </a:r>
-            <a:endParaRPr lang="en-US" sz="1250" dirty="0"/>
-          </a:p>
-        </p:txBody>
-      </p:sp>
-      <p:sp>
-        <p:nvSpPr>
-          <p:cNvPr id="14" name="Shape 12"/>
+              <a:t>AI governance needs a formal home before an agency begins approving tools, pilots, vendor products, or.</a:t>
+            </a:r>
+            <a:endParaRPr lang="en-US" sz="1550" dirty="0"/>
+          </a:p>
+        </p:txBody>
+      </p:sp>
+      <p:sp>
+        <p:nvSpPr>
+          <p:cNvPr id="15" name="Shape 13"/>
           <p:cNvSpPr/>
           <p:nvPr/>
         </p:nvSpPr>
@@ -12520,14 +13621,14 @@
       </p:sp>
       <p:sp>
         <p:nvSpPr>
-          <p:cNvPr id="15" name="Text 13"/>
+          <p:cNvPr id="16" name="Text 14"/>
           <p:cNvSpPr/>
           <p:nvPr/>
         </p:nvSpPr>
         <p:spPr>
           <a:xfrm>
             <a:off x="8074152" y="3666744"/>
-            <a:ext cx="2825496" cy="201168"/>
+            <a:ext cx="2825496" cy="256032"/>
           </a:xfrm>
           <a:prstGeom prst="rect">
             <a:avLst/>
@@ -12543,7 +13644,7 @@
               <a:buNone/>
             </a:pPr>
             <a:r>
-              <a:rPr lang="en-US" sz="950" b="1" dirty="0">
+              <a:rPr lang="en-US" sz="1300" b="1" dirty="0">
                 <a:solidFill>
                   <a:srgbClr val="0068B7"/>
                 </a:solidFill>
@@ -12553,20 +13654,20 @@
               </a:rPr>
               <a:t>Use this for</a:t>
             </a:r>
-            <a:endParaRPr lang="en-US" sz="950" dirty="0"/>
-          </a:p>
-        </p:txBody>
-      </p:sp>
-      <p:sp>
-        <p:nvSpPr>
-          <p:cNvPr id="16" name="Text 14"/>
-          <p:cNvSpPr/>
-          <p:nvPr/>
-        </p:nvSpPr>
-        <p:spPr>
-          <a:xfrm>
-            <a:off x="8074152" y="3959352"/>
-            <a:ext cx="2825496" cy="1170432"/>
+            <a:endParaRPr lang="en-US" sz="1300" dirty="0"/>
+          </a:p>
+        </p:txBody>
+      </p:sp>
+      <p:sp>
+        <p:nvSpPr>
+          <p:cNvPr id="17" name="Text 15"/>
+          <p:cNvSpPr/>
+          <p:nvPr/>
+        </p:nvSpPr>
+        <p:spPr>
+          <a:xfrm>
+            <a:off x="8074152" y="4023360"/>
+            <a:ext cx="2825496" cy="1097280"/>
           </a:xfrm>
           <a:prstGeom prst="rect">
             <a:avLst/>
@@ -12584,7 +13685,7 @@
               <a:buNone/>
             </a:pPr>
             <a:r>
-              <a:rPr lang="en-US" sz="1250" dirty="0">
+              <a:rPr lang="en-US" sz="1550" dirty="0">
                 <a:solidFill>
                   <a:srgbClr val="17364A"/>
                 </a:solidFill>
@@ -12594,7 +13695,7 @@
               </a:rPr>
               <a:t>Connect the concept to public health decisions, safeguards, documentation, or implementation work.</a:t>
             </a:r>
-            <a:endParaRPr lang="en-US" sz="1250" dirty="0"/>
+            <a:endParaRPr lang="en-US" sz="1550" dirty="0"/>
           </a:p>
         </p:txBody>
       </p:sp>
@@ -12791,7 +13892,7 @@
                 <a:ea typeface="Aptos" pitchFamily="34" charset="-122"/>
                 <a:cs typeface="Aptos" pitchFamily="34" charset="-120"/>
               </a:rPr>
-              <a:t>© Paula Soper</a:t>
+              <a:t>Â© Paula Soper</a:t>
             </a:r>
             <a:endParaRPr lang="en-US" sz="800" dirty="0"/>
           </a:p>
@@ -12799,7 +13900,46 @@
       </p:sp>
       <p:sp>
         <p:nvSpPr>
-          <p:cNvPr id="7" name="Shape 5"/>
+          <p:cNvPr id="7" name="Text 5"/>
+          <p:cNvSpPr/>
+          <p:nvPr/>
+        </p:nvSpPr>
+        <p:spPr>
+          <a:xfrm>
+            <a:off x="11137392" y="6510528"/>
+            <a:ext cx="411480" cy="201168"/>
+          </a:xfrm>
+          <a:prstGeom prst="rect">
+            <a:avLst/>
+          </a:prstGeom>
+          <a:noFill/>
+          <a:ln/>
+        </p:spPr>
+        <p:txBody>
+          <a:bodyPr wrap="square" lIns="0" tIns="0" rIns="0" bIns="0" rtlCol="0" anchor="ctr"/>
+          <a:lstStyle/>
+          <a:p>
+            <a:pPr algn="r" indent="0" marL="0">
+              <a:buNone/>
+            </a:pPr>
+            <a:r>
+              <a:rPr lang="en-US" sz="900" dirty="0">
+                <a:solidFill>
+                  <a:srgbClr val="5F7181"/>
+                </a:solidFill>
+                <a:latin typeface="Aptos" pitchFamily="34" charset="0"/>
+                <a:ea typeface="Aptos" pitchFamily="34" charset="-122"/>
+                <a:cs typeface="Aptos" pitchFamily="34" charset="-120"/>
+              </a:rPr>
+              <a:t>7</a:t>
+            </a:r>
+            <a:endParaRPr lang="en-US" sz="900" dirty="0"/>
+          </a:p>
+        </p:txBody>
+      </p:sp>
+      <p:sp>
+        <p:nvSpPr>
+          <p:cNvPr id="8" name="Shape 6"/>
           <p:cNvSpPr/>
           <p:nvPr/>
         </p:nvSpPr>
@@ -12824,7 +13964,7 @@
       </p:sp>
       <p:sp>
         <p:nvSpPr>
-          <p:cNvPr id="8" name="Text 6"/>
+          <p:cNvPr id="9" name="Text 7"/>
           <p:cNvSpPr/>
           <p:nvPr/>
         </p:nvSpPr>
@@ -12863,14 +14003,14 @@
       </p:sp>
       <p:sp>
         <p:nvSpPr>
-          <p:cNvPr id="9" name="Text 7"/>
+          <p:cNvPr id="10" name="Text 8"/>
           <p:cNvSpPr/>
           <p:nvPr/>
         </p:nvSpPr>
         <p:spPr>
           <a:xfrm>
             <a:off x="640080" y="621792"/>
-            <a:ext cx="10881360" cy="566928"/>
+            <a:ext cx="10881360" cy="713232"/>
           </a:xfrm>
           <a:prstGeom prst="rect">
             <a:avLst/>
@@ -12888,7 +14028,7 @@
               <a:buNone/>
             </a:pPr>
             <a:r>
-              <a:rPr lang="en-US" sz="2700" b="1" dirty="0">
+              <a:rPr lang="en-US" sz="3400" b="1" dirty="0">
                 <a:solidFill>
                   <a:srgbClr val="003A63"/>
                 </a:solidFill>
@@ -12898,20 +14038,20 @@
               </a:rPr>
               <a:t>Jurisdiction and Agency Policy Note</a:t>
             </a:r>
-            <a:endParaRPr lang="en-US" sz="2700" dirty="0"/>
-          </a:p>
-        </p:txBody>
-      </p:sp>
-      <p:sp>
-        <p:nvSpPr>
-          <p:cNvPr id="10" name="Text 8"/>
-          <p:cNvSpPr/>
-          <p:nvPr/>
-        </p:nvSpPr>
-        <p:spPr>
-          <a:xfrm>
-            <a:off x="868680" y="1417320"/>
-            <a:ext cx="6675120" cy="4434840"/>
+            <a:endParaRPr lang="en-US" sz="3400" dirty="0"/>
+          </a:p>
+        </p:txBody>
+      </p:sp>
+      <p:sp>
+        <p:nvSpPr>
+          <p:cNvPr id="11" name="Text 9"/>
+          <p:cNvSpPr/>
+          <p:nvPr/>
+        </p:nvSpPr>
+        <p:spPr>
+          <a:xfrm>
+            <a:off x="868680" y="1508760"/>
+            <a:ext cx="6537960" cy="4160520"/>
           </a:xfrm>
           <a:prstGeom prst="rect">
             <a:avLst/>
@@ -12926,7 +14066,7 @@
           <a:lstStyle/>
           <a:p>
             <a:r>
-              <a:rPr lang="en-US" sz="1700" dirty="0">
+              <a:rPr lang="en-US" sz="2100" dirty="0">
                 <a:solidFill>
                   <a:srgbClr val="17364A"/>
                 </a:solidFill>
@@ -12936,11 +14076,11 @@
               </a:rPr>
               <a:t>This module provides national-level training guidance for public health agencies and partners.</a:t>
             </a:r>
-            <a:endParaRPr lang="en-US" sz="1700" dirty="0"/>
-          </a:p>
-          <a:p>
-            <a:r>
-              <a:rPr lang="en-US" sz="1700" dirty="0">
+            <a:endParaRPr lang="en-US" sz="2100" dirty="0"/>
+          </a:p>
+          <a:p>
+            <a:r>
+              <a:rPr lang="en-US" sz="2100" dirty="0">
                 <a:solidFill>
                   <a:srgbClr val="17364A"/>
                 </a:solidFill>
@@ -12948,13 +14088,13 @@
                 <a:ea typeface="Aptos" pitchFamily="34" charset="-122"/>
                 <a:cs typeface="Aptos" pitchFamily="34" charset="-120"/>
               </a:rPr>
-              <a:t>It is not legal advice and does not replace review by agency legal counsel, privacy officers, procurement officials, civil.</a:t>
-            </a:r>
-            <a:endParaRPr lang="en-US" sz="1700" dirty="0"/>
-          </a:p>
-          <a:p>
-            <a:r>
-              <a:rPr lang="en-US" sz="1700" dirty="0">
+              <a:t>It is not legal advice and does not replace review by agency legal counsel, privacy officers,.</a:t>
+            </a:r>
+            <a:endParaRPr lang="en-US" sz="2100" dirty="0"/>
+          </a:p>
+          <a:p>
+            <a:r>
+              <a:rPr lang="en-US" sz="2100" dirty="0">
                 <a:solidFill>
                   <a:srgbClr val="17364A"/>
                 </a:solidFill>
@@ -12962,29 +14102,15 @@
                 <a:ea typeface="Aptos" pitchFamily="34" charset="-122"/>
                 <a:cs typeface="Aptos" pitchFamily="34" charset="-120"/>
               </a:rPr>
-              <a:t>Requirements may vary by state, locality, territory, Tribe, agency, funding source, data-sharing agreement, emergency.</a:t>
-            </a:r>
-            <a:endParaRPr lang="en-US" sz="1700" dirty="0"/>
-          </a:p>
-          <a:p>
-            <a:r>
-              <a:rPr lang="en-US" sz="1700" dirty="0">
-                <a:solidFill>
-                  <a:srgbClr val="17364A"/>
-                </a:solidFill>
-                <a:latin typeface="Aptos" pitchFamily="34" charset="0"/>
-                <a:ea typeface="Aptos" pitchFamily="34" charset="-122"/>
-                <a:cs typeface="Aptos" pitchFamily="34" charset="-120"/>
-              </a:rPr>
-              <a:t>Learners should use this module to identify the issues that require review and should confirm applicable requirements.</a:t>
-            </a:r>
-            <a:endParaRPr lang="en-US" sz="1700" dirty="0"/>
-          </a:p>
-        </p:txBody>
-      </p:sp>
-      <p:sp>
-        <p:nvSpPr>
-          <p:cNvPr id="11" name="Shape 9"/>
+              <a:t>Requirements may vary by state, locality, territory, Tribe, agency, funding source, data-sharing.</a:t>
+            </a:r>
+            <a:endParaRPr lang="en-US" sz="2100" dirty="0"/>
+          </a:p>
+        </p:txBody>
+      </p:sp>
+      <p:sp>
+        <p:nvSpPr>
+          <p:cNvPr id="12" name="Shape 10"/>
           <p:cNvSpPr/>
           <p:nvPr/>
         </p:nvSpPr>
@@ -13011,14 +14137,14 @@
       </p:sp>
       <p:sp>
         <p:nvSpPr>
-          <p:cNvPr id="12" name="Text 10"/>
+          <p:cNvPr id="13" name="Text 11"/>
           <p:cNvSpPr/>
           <p:nvPr/>
         </p:nvSpPr>
         <p:spPr>
           <a:xfrm>
             <a:off x="8074152" y="1563624"/>
-            <a:ext cx="2825496" cy="201168"/>
+            <a:ext cx="2825496" cy="256032"/>
           </a:xfrm>
           <a:prstGeom prst="rect">
             <a:avLst/>
@@ -13034,7 +14160,7 @@
               <a:buNone/>
             </a:pPr>
             <a:r>
-              <a:rPr lang="en-US" sz="950" b="1" dirty="0">
+              <a:rPr lang="en-US" sz="1300" b="1" dirty="0">
                 <a:solidFill>
                   <a:srgbClr val="0068B7"/>
                 </a:solidFill>
@@ -13044,20 +14170,20 @@
               </a:rPr>
               <a:t>Key idea</a:t>
             </a:r>
-            <a:endParaRPr lang="en-US" sz="950" dirty="0"/>
-          </a:p>
-        </p:txBody>
-      </p:sp>
-      <p:sp>
-        <p:nvSpPr>
-          <p:cNvPr id="13" name="Text 11"/>
-          <p:cNvSpPr/>
-          <p:nvPr/>
-        </p:nvSpPr>
-        <p:spPr>
-          <a:xfrm>
-            <a:off x="8074152" y="1856232"/>
-            <a:ext cx="2825496" cy="1261872"/>
+            <a:endParaRPr lang="en-US" sz="1300" dirty="0"/>
+          </a:p>
+        </p:txBody>
+      </p:sp>
+      <p:sp>
+        <p:nvSpPr>
+          <p:cNvPr id="14" name="Text 12"/>
+          <p:cNvSpPr/>
+          <p:nvPr/>
+        </p:nvSpPr>
+        <p:spPr>
+          <a:xfrm>
+            <a:off x="8074152" y="1920240"/>
+            <a:ext cx="2825496" cy="1188720"/>
           </a:xfrm>
           <a:prstGeom prst="rect">
             <a:avLst/>
@@ -13075,7 +14201,7 @@
               <a:buNone/>
             </a:pPr>
             <a:r>
-              <a:rPr lang="en-US" sz="1250" dirty="0">
+              <a:rPr lang="en-US" sz="1550" dirty="0">
                 <a:solidFill>
                   <a:srgbClr val="17364A"/>
                 </a:solidFill>
@@ -13085,13 +14211,13 @@
               </a:rPr>
               <a:t>This module provides national-level training guidance for public health agencies and partners.</a:t>
             </a:r>
-            <a:endParaRPr lang="en-US" sz="1250" dirty="0"/>
-          </a:p>
-        </p:txBody>
-      </p:sp>
-      <p:sp>
-        <p:nvSpPr>
-          <p:cNvPr id="14" name="Shape 12"/>
+            <a:endParaRPr lang="en-US" sz="1550" dirty="0"/>
+          </a:p>
+        </p:txBody>
+      </p:sp>
+      <p:sp>
+        <p:nvSpPr>
+          <p:cNvPr id="15" name="Shape 13"/>
           <p:cNvSpPr/>
           <p:nvPr/>
         </p:nvSpPr>
@@ -13118,14 +14244,14 @@
       </p:sp>
       <p:sp>
         <p:nvSpPr>
-          <p:cNvPr id="15" name="Text 13"/>
+          <p:cNvPr id="16" name="Text 14"/>
           <p:cNvSpPr/>
           <p:nvPr/>
         </p:nvSpPr>
         <p:spPr>
           <a:xfrm>
             <a:off x="8074152" y="3666744"/>
-            <a:ext cx="2825496" cy="201168"/>
+            <a:ext cx="2825496" cy="256032"/>
           </a:xfrm>
           <a:prstGeom prst="rect">
             <a:avLst/>
@@ -13141,7 +14267,7 @@
               <a:buNone/>
             </a:pPr>
             <a:r>
-              <a:rPr lang="en-US" sz="950" b="1" dirty="0">
+              <a:rPr lang="en-US" sz="1300" b="1" dirty="0">
                 <a:solidFill>
                   <a:srgbClr val="0068B7"/>
                 </a:solidFill>
@@ -13151,20 +14277,20 @@
               </a:rPr>
               <a:t>Use this for</a:t>
             </a:r>
-            <a:endParaRPr lang="en-US" sz="950" dirty="0"/>
-          </a:p>
-        </p:txBody>
-      </p:sp>
-      <p:sp>
-        <p:nvSpPr>
-          <p:cNvPr id="16" name="Text 14"/>
-          <p:cNvSpPr/>
-          <p:nvPr/>
-        </p:nvSpPr>
-        <p:spPr>
-          <a:xfrm>
-            <a:off x="8074152" y="3959352"/>
-            <a:ext cx="2825496" cy="1170432"/>
+            <a:endParaRPr lang="en-US" sz="1300" dirty="0"/>
+          </a:p>
+        </p:txBody>
+      </p:sp>
+      <p:sp>
+        <p:nvSpPr>
+          <p:cNvPr id="17" name="Text 15"/>
+          <p:cNvSpPr/>
+          <p:nvPr/>
+        </p:nvSpPr>
+        <p:spPr>
+          <a:xfrm>
+            <a:off x="8074152" y="4023360"/>
+            <a:ext cx="2825496" cy="1097280"/>
           </a:xfrm>
           <a:prstGeom prst="rect">
             <a:avLst/>
@@ -13182,7 +14308,7 @@
               <a:buNone/>
             </a:pPr>
             <a:r>
-              <a:rPr lang="en-US" sz="1250" dirty="0">
+              <a:rPr lang="en-US" sz="1550" dirty="0">
                 <a:solidFill>
                   <a:srgbClr val="17364A"/>
                 </a:solidFill>
@@ -13192,7 +14318,7 @@
               </a:rPr>
               <a:t>Connect the concept to public health decisions, safeguards, documentation, or implementation work.</a:t>
             </a:r>
-            <a:endParaRPr lang="en-US" sz="1250" dirty="0"/>
+            <a:endParaRPr lang="en-US" sz="1550" dirty="0"/>
           </a:p>
         </p:txBody>
       </p:sp>
@@ -13389,7 +14515,7 @@
                 <a:ea typeface="Aptos" pitchFamily="34" charset="-122"/>
                 <a:cs typeface="Aptos" pitchFamily="34" charset="-120"/>
               </a:rPr>
-              <a:t>© Paula Soper</a:t>
+              <a:t>Â© Paula Soper</a:t>
             </a:r>
             <a:endParaRPr lang="en-US" sz="800" dirty="0"/>
           </a:p>
@@ -13397,7 +14523,46 @@
       </p:sp>
       <p:sp>
         <p:nvSpPr>
-          <p:cNvPr id="7" name="Shape 5"/>
+          <p:cNvPr id="7" name="Text 5"/>
+          <p:cNvSpPr/>
+          <p:nvPr/>
+        </p:nvSpPr>
+        <p:spPr>
+          <a:xfrm>
+            <a:off x="11137392" y="6510528"/>
+            <a:ext cx="411480" cy="201168"/>
+          </a:xfrm>
+          <a:prstGeom prst="rect">
+            <a:avLst/>
+          </a:prstGeom>
+          <a:noFill/>
+          <a:ln/>
+        </p:spPr>
+        <p:txBody>
+          <a:bodyPr wrap="square" lIns="0" tIns="0" rIns="0" bIns="0" rtlCol="0" anchor="ctr"/>
+          <a:lstStyle/>
+          <a:p>
+            <a:pPr algn="r" indent="0" marL="0">
+              <a:buNone/>
+            </a:pPr>
+            <a:r>
+              <a:rPr lang="en-US" sz="900" dirty="0">
+                <a:solidFill>
+                  <a:srgbClr val="5F7181"/>
+                </a:solidFill>
+                <a:latin typeface="Aptos" pitchFamily="34" charset="0"/>
+                <a:ea typeface="Aptos" pitchFamily="34" charset="-122"/>
+                <a:cs typeface="Aptos" pitchFamily="34" charset="-120"/>
+              </a:rPr>
+              <a:t>8</a:t>
+            </a:r>
+            <a:endParaRPr lang="en-US" sz="900" dirty="0"/>
+          </a:p>
+        </p:txBody>
+      </p:sp>
+      <p:sp>
+        <p:nvSpPr>
+          <p:cNvPr id="8" name="Shape 6"/>
           <p:cNvSpPr/>
           <p:nvPr/>
         </p:nvSpPr>
@@ -13422,7 +14587,7 @@
       </p:sp>
       <p:sp>
         <p:nvSpPr>
-          <p:cNvPr id="8" name="Text 6"/>
+          <p:cNvPr id="9" name="Text 7"/>
           <p:cNvSpPr/>
           <p:nvPr/>
         </p:nvSpPr>
@@ -13461,14 +14626,14 @@
       </p:sp>
       <p:sp>
         <p:nvSpPr>
-          <p:cNvPr id="9" name="Text 7"/>
+          <p:cNvPr id="10" name="Text 8"/>
           <p:cNvSpPr/>
           <p:nvPr/>
         </p:nvSpPr>
         <p:spPr>
           <a:xfrm>
             <a:off x="640080" y="621792"/>
-            <a:ext cx="10881360" cy="566928"/>
+            <a:ext cx="10881360" cy="713232"/>
           </a:xfrm>
           <a:prstGeom prst="rect">
             <a:avLst/>
@@ -13486,7 +14651,7 @@
               <a:buNone/>
             </a:pPr>
             <a:r>
-              <a:rPr lang="en-US" sz="2700" b="1" dirty="0">
+              <a:rPr lang="en-US" sz="3400" b="1" dirty="0">
                 <a:solidFill>
                   <a:srgbClr val="003A63"/>
                 </a:solidFill>
@@ -13496,20 +14661,20 @@
               </a:rPr>
               <a:t>Why This Topic Matters for Public Health AI</a:t>
             </a:r>
-            <a:endParaRPr lang="en-US" sz="2700" dirty="0"/>
-          </a:p>
-        </p:txBody>
-      </p:sp>
-      <p:sp>
-        <p:nvSpPr>
-          <p:cNvPr id="10" name="Text 8"/>
-          <p:cNvSpPr/>
-          <p:nvPr/>
-        </p:nvSpPr>
-        <p:spPr>
-          <a:xfrm>
-            <a:off x="868680" y="1417320"/>
-            <a:ext cx="6675120" cy="4434840"/>
+            <a:endParaRPr lang="en-US" sz="3400" dirty="0"/>
+          </a:p>
+        </p:txBody>
+      </p:sp>
+      <p:sp>
+        <p:nvSpPr>
+          <p:cNvPr id="11" name="Text 9"/>
+          <p:cNvSpPr/>
+          <p:nvPr/>
+        </p:nvSpPr>
+        <p:spPr>
+          <a:xfrm>
+            <a:off x="868680" y="1508760"/>
+            <a:ext cx="6537960" cy="4160520"/>
           </a:xfrm>
           <a:prstGeom prst="rect">
             <a:avLst/>
@@ -13524,7 +14689,7 @@
           <a:lstStyle/>
           <a:p>
             <a:r>
-              <a:rPr lang="en-US" sz="1700" dirty="0">
+              <a:rPr lang="en-US" sz="2100" dirty="0">
                 <a:solidFill>
                   <a:srgbClr val="17364A"/>
                 </a:solidFill>
@@ -13532,13 +14697,13 @@
                 <a:ea typeface="Aptos" pitchFamily="34" charset="-122"/>
                 <a:cs typeface="Aptos" pitchFamily="34" charset="-120"/>
               </a:rPr>
-              <a:t>Public health agencies operate under legal authorities, public accountability obligations, data-sharing agreements, privacy.</a:t>
-            </a:r>
-            <a:endParaRPr lang="en-US" sz="1700" dirty="0"/>
-          </a:p>
-          <a:p>
-            <a:r>
-              <a:rPr lang="en-US" sz="1700" dirty="0">
+              <a:t>Public health agencies operate under legal authorities, public accountability obligations, data-sharing.</a:t>
+            </a:r>
+            <a:endParaRPr lang="en-US" sz="2100" dirty="0"/>
+          </a:p>
+          <a:p>
+            <a:r>
+              <a:rPr lang="en-US" sz="2100" dirty="0">
                 <a:solidFill>
                   <a:srgbClr val="17364A"/>
                 </a:solidFill>
@@ -13548,11 +14713,11 @@
               </a:rPr>
               <a:t>AI governance must therefore be more than a technology review process.</a:t>
             </a:r>
-            <a:endParaRPr lang="en-US" sz="1700" dirty="0"/>
-          </a:p>
-          <a:p>
-            <a:r>
-              <a:rPr lang="en-US" sz="1700" dirty="0">
+            <a:endParaRPr lang="en-US" sz="2100" dirty="0"/>
+          </a:p>
+          <a:p>
+            <a:r>
+              <a:rPr lang="en-US" sz="2100" dirty="0">
                 <a:solidFill>
                   <a:srgbClr val="17364A"/>
                 </a:solidFill>
@@ -13560,29 +14725,15 @@
                 <a:ea typeface="Aptos" pitchFamily="34" charset="-122"/>
                 <a:cs typeface="Aptos" pitchFamily="34" charset="-120"/>
               </a:rPr>
-              <a:t>It must define how the agency decides which AI uses are acceptable, which safeguards are required, who has authority to.</a:t>
-            </a:r>
-            <a:endParaRPr lang="en-US" sz="1700" dirty="0"/>
-          </a:p>
-          <a:p>
-            <a:r>
-              <a:rPr lang="en-US" sz="1700" dirty="0">
-                <a:solidFill>
-                  <a:srgbClr val="17364A"/>
-                </a:solidFill>
-                <a:latin typeface="Aptos" pitchFamily="34" charset="0"/>
-                <a:ea typeface="Aptos" pitchFamily="34" charset="-122"/>
-                <a:cs typeface="Aptos" pitchFamily="34" charset="-120"/>
-              </a:rPr>
-              <a:t>A governance operating model also helps avoid the problem of uneven adoption.</a:t>
-            </a:r>
-            <a:endParaRPr lang="en-US" sz="1700" dirty="0"/>
-          </a:p>
-        </p:txBody>
-      </p:sp>
-      <p:sp>
-        <p:nvSpPr>
-          <p:cNvPr id="11" name="Shape 9"/>
+              <a:t>It must define how the agency decides which AI uses are acceptable, which safeguards are required, who.</a:t>
+            </a:r>
+            <a:endParaRPr lang="en-US" sz="2100" dirty="0"/>
+          </a:p>
+        </p:txBody>
+      </p:sp>
+      <p:sp>
+        <p:nvSpPr>
+          <p:cNvPr id="12" name="Shape 10"/>
           <p:cNvSpPr/>
           <p:nvPr/>
         </p:nvSpPr>
@@ -13609,14 +14760,14 @@
       </p:sp>
       <p:sp>
         <p:nvSpPr>
-          <p:cNvPr id="12" name="Text 10"/>
+          <p:cNvPr id="13" name="Text 11"/>
           <p:cNvSpPr/>
           <p:nvPr/>
         </p:nvSpPr>
         <p:spPr>
           <a:xfrm>
             <a:off x="8074152" y="1563624"/>
-            <a:ext cx="2825496" cy="201168"/>
+            <a:ext cx="2825496" cy="256032"/>
           </a:xfrm>
           <a:prstGeom prst="rect">
             <a:avLst/>
@@ -13632,7 +14783,7 @@
               <a:buNone/>
             </a:pPr>
             <a:r>
-              <a:rPr lang="en-US" sz="950" b="1" dirty="0">
+              <a:rPr lang="en-US" sz="1300" b="1" dirty="0">
                 <a:solidFill>
                   <a:srgbClr val="0068B7"/>
                 </a:solidFill>
@@ -13642,20 +14793,20 @@
               </a:rPr>
               <a:t>Key idea</a:t>
             </a:r>
-            <a:endParaRPr lang="en-US" sz="950" dirty="0"/>
-          </a:p>
-        </p:txBody>
-      </p:sp>
-      <p:sp>
-        <p:nvSpPr>
-          <p:cNvPr id="13" name="Text 11"/>
-          <p:cNvSpPr/>
-          <p:nvPr/>
-        </p:nvSpPr>
-        <p:spPr>
-          <a:xfrm>
-            <a:off x="8074152" y="1856232"/>
-            <a:ext cx="2825496" cy="1261872"/>
+            <a:endParaRPr lang="en-US" sz="1300" dirty="0"/>
+          </a:p>
+        </p:txBody>
+      </p:sp>
+      <p:sp>
+        <p:nvSpPr>
+          <p:cNvPr id="14" name="Text 12"/>
+          <p:cNvSpPr/>
+          <p:nvPr/>
+        </p:nvSpPr>
+        <p:spPr>
+          <a:xfrm>
+            <a:off x="8074152" y="1920240"/>
+            <a:ext cx="2825496" cy="1188720"/>
           </a:xfrm>
           <a:prstGeom prst="rect">
             <a:avLst/>
@@ -13673,7 +14824,7 @@
               <a:buNone/>
             </a:pPr>
             <a:r>
-              <a:rPr lang="en-US" sz="1250" dirty="0">
+              <a:rPr lang="en-US" sz="1550" dirty="0">
                 <a:solidFill>
                   <a:srgbClr val="17364A"/>
                 </a:solidFill>
@@ -13681,15 +14832,15 @@
                 <a:ea typeface="Aptos" pitchFamily="34" charset="-122"/>
                 <a:cs typeface="Aptos" pitchFamily="34" charset="-120"/>
               </a:rPr>
-              <a:t>Public health agencies operate under legal authorities, public accountability obligations, data-sharing agreements, privacy.</a:t>
-            </a:r>
-            <a:endParaRPr lang="en-US" sz="1250" dirty="0"/>
-          </a:p>
-        </p:txBody>
-      </p:sp>
-      <p:sp>
-        <p:nvSpPr>
-          <p:cNvPr id="14" name="Shape 12"/>
+              <a:t>Public health agencies operate under legal authorities, public accountability obligations, data-sharing.</a:t>
+            </a:r>
+            <a:endParaRPr lang="en-US" sz="1550" dirty="0"/>
+          </a:p>
+        </p:txBody>
+      </p:sp>
+      <p:sp>
+        <p:nvSpPr>
+          <p:cNvPr id="15" name="Shape 13"/>
           <p:cNvSpPr/>
           <p:nvPr/>
         </p:nvSpPr>
@@ -13716,14 +14867,14 @@
       </p:sp>
       <p:sp>
         <p:nvSpPr>
-          <p:cNvPr id="15" name="Text 13"/>
+          <p:cNvPr id="16" name="Text 14"/>
           <p:cNvSpPr/>
           <p:nvPr/>
         </p:nvSpPr>
         <p:spPr>
           <a:xfrm>
             <a:off x="8074152" y="3666744"/>
-            <a:ext cx="2825496" cy="201168"/>
+            <a:ext cx="2825496" cy="256032"/>
           </a:xfrm>
           <a:prstGeom prst="rect">
             <a:avLst/>
@@ -13739,7 +14890,7 @@
               <a:buNone/>
             </a:pPr>
             <a:r>
-              <a:rPr lang="en-US" sz="950" b="1" dirty="0">
+              <a:rPr lang="en-US" sz="1300" b="1" dirty="0">
                 <a:solidFill>
                   <a:srgbClr val="0068B7"/>
                 </a:solidFill>
@@ -13749,20 +14900,20 @@
               </a:rPr>
               <a:t>Use this for</a:t>
             </a:r>
-            <a:endParaRPr lang="en-US" sz="950" dirty="0"/>
-          </a:p>
-        </p:txBody>
-      </p:sp>
-      <p:sp>
-        <p:nvSpPr>
-          <p:cNvPr id="16" name="Text 14"/>
-          <p:cNvSpPr/>
-          <p:nvPr/>
-        </p:nvSpPr>
-        <p:spPr>
-          <a:xfrm>
-            <a:off x="8074152" y="3959352"/>
-            <a:ext cx="2825496" cy="1170432"/>
+            <a:endParaRPr lang="en-US" sz="1300" dirty="0"/>
+          </a:p>
+        </p:txBody>
+      </p:sp>
+      <p:sp>
+        <p:nvSpPr>
+          <p:cNvPr id="17" name="Text 15"/>
+          <p:cNvSpPr/>
+          <p:nvPr/>
+        </p:nvSpPr>
+        <p:spPr>
+          <a:xfrm>
+            <a:off x="8074152" y="4023360"/>
+            <a:ext cx="2825496" cy="1097280"/>
           </a:xfrm>
           <a:prstGeom prst="rect">
             <a:avLst/>
@@ -13780,7 +14931,7 @@
               <a:buNone/>
             </a:pPr>
             <a:r>
-              <a:rPr lang="en-US" sz="1250" dirty="0">
+              <a:rPr lang="en-US" sz="1550" dirty="0">
                 <a:solidFill>
                   <a:srgbClr val="17364A"/>
                 </a:solidFill>
@@ -13790,7 +14941,7 @@
               </a:rPr>
               <a:t>Connect the concept to public health decisions, safeguards, documentation, or implementation work.</a:t>
             </a:r>
-            <a:endParaRPr lang="en-US" sz="1250" dirty="0"/>
+            <a:endParaRPr lang="en-US" sz="1550" dirty="0"/>
           </a:p>
         </p:txBody>
       </p:sp>
@@ -13987,7 +15138,7 @@
                 <a:ea typeface="Aptos" pitchFamily="34" charset="-122"/>
                 <a:cs typeface="Aptos" pitchFamily="34" charset="-120"/>
               </a:rPr>
-              <a:t>© Paula Soper</a:t>
+              <a:t>Â© Paula Soper</a:t>
             </a:r>
             <a:endParaRPr lang="en-US" sz="800" dirty="0"/>
           </a:p>
@@ -13995,7 +15146,46 @@
       </p:sp>
       <p:sp>
         <p:nvSpPr>
-          <p:cNvPr id="7" name="Shape 5"/>
+          <p:cNvPr id="7" name="Text 5"/>
+          <p:cNvSpPr/>
+          <p:nvPr/>
+        </p:nvSpPr>
+        <p:spPr>
+          <a:xfrm>
+            <a:off x="11137392" y="6510528"/>
+            <a:ext cx="411480" cy="201168"/>
+          </a:xfrm>
+          <a:prstGeom prst="rect">
+            <a:avLst/>
+          </a:prstGeom>
+          <a:noFill/>
+          <a:ln/>
+        </p:spPr>
+        <p:txBody>
+          <a:bodyPr wrap="square" lIns="0" tIns="0" rIns="0" bIns="0" rtlCol="0" anchor="ctr"/>
+          <a:lstStyle/>
+          <a:p>
+            <a:pPr algn="r" indent="0" marL="0">
+              <a:buNone/>
+            </a:pPr>
+            <a:r>
+              <a:rPr lang="en-US" sz="900" dirty="0">
+                <a:solidFill>
+                  <a:srgbClr val="5F7181"/>
+                </a:solidFill>
+                <a:latin typeface="Aptos" pitchFamily="34" charset="0"/>
+                <a:ea typeface="Aptos" pitchFamily="34" charset="-122"/>
+                <a:cs typeface="Aptos" pitchFamily="34" charset="-120"/>
+              </a:rPr>
+              <a:t>9</a:t>
+            </a:r>
+            <a:endParaRPr lang="en-US" sz="900" dirty="0"/>
+          </a:p>
+        </p:txBody>
+      </p:sp>
+      <p:sp>
+        <p:nvSpPr>
+          <p:cNvPr id="8" name="Shape 6"/>
           <p:cNvSpPr/>
           <p:nvPr/>
         </p:nvSpPr>
@@ -14020,7 +15210,7 @@
       </p:sp>
       <p:sp>
         <p:nvSpPr>
-          <p:cNvPr id="8" name="Text 6"/>
+          <p:cNvPr id="9" name="Text 7"/>
           <p:cNvSpPr/>
           <p:nvPr/>
         </p:nvSpPr>
@@ -14059,14 +15249,14 @@
       </p:sp>
       <p:sp>
         <p:nvSpPr>
-          <p:cNvPr id="9" name="Text 7"/>
+          <p:cNvPr id="10" name="Text 8"/>
           <p:cNvSpPr/>
           <p:nvPr/>
         </p:nvSpPr>
         <p:spPr>
           <a:xfrm>
             <a:off x="640080" y="621792"/>
-            <a:ext cx="10881360" cy="566928"/>
+            <a:ext cx="10881360" cy="713232"/>
           </a:xfrm>
           <a:prstGeom prst="rect">
             <a:avLst/>
@@ -14084,7 +15274,7 @@
               <a:buNone/>
             </a:pPr>
             <a:r>
-              <a:rPr lang="en-US" sz="2700" b="1" dirty="0">
+              <a:rPr lang="en-US" sz="3400" b="1" dirty="0">
                 <a:solidFill>
                   <a:srgbClr val="003A63"/>
                 </a:solidFill>
@@ -14094,20 +15284,20 @@
               </a:rPr>
               <a:t>Public Health Example</a:t>
             </a:r>
-            <a:endParaRPr lang="en-US" sz="2700" dirty="0"/>
-          </a:p>
-        </p:txBody>
-      </p:sp>
-      <p:sp>
-        <p:nvSpPr>
-          <p:cNvPr id="10" name="Text 8"/>
-          <p:cNvSpPr/>
-          <p:nvPr/>
-        </p:nvSpPr>
-        <p:spPr>
-          <a:xfrm>
-            <a:off x="868680" y="1417320"/>
-            <a:ext cx="6675120" cy="4434840"/>
+            <a:endParaRPr lang="en-US" sz="3400" dirty="0"/>
+          </a:p>
+        </p:txBody>
+      </p:sp>
+      <p:sp>
+        <p:nvSpPr>
+          <p:cNvPr id="11" name="Text 9"/>
+          <p:cNvSpPr/>
+          <p:nvPr/>
+        </p:nvSpPr>
+        <p:spPr>
+          <a:xfrm>
+            <a:off x="868680" y="1508760"/>
+            <a:ext cx="6537960" cy="4160520"/>
           </a:xfrm>
           <a:prstGeom prst="rect">
             <a:avLst/>
@@ -14122,7 +15312,7 @@
           <a:lstStyle/>
           <a:p>
             <a:r>
-              <a:rPr lang="en-US" sz="1700" dirty="0">
+              <a:rPr lang="en-US" sz="2100" dirty="0">
                 <a:solidFill>
                   <a:srgbClr val="17364A"/>
                 </a:solidFill>
@@ -14130,13 +15320,13 @@
                 <a:ea typeface="Aptos" pitchFamily="34" charset="-122"/>
                 <a:cs typeface="Aptos" pitchFamily="34" charset="-120"/>
               </a:rPr>
-              <a:t>A state health department wants to allow staff to use AI tools for program support, document review, code assistance, case.</a:t>
-            </a:r>
-            <a:endParaRPr lang="en-US" sz="1700" dirty="0"/>
-          </a:p>
-          <a:p>
-            <a:r>
-              <a:rPr lang="en-US" sz="1700" dirty="0">
+              <a:t>A state health department wants to allow staff to use AI tools for program support, document review,.</a:t>
+            </a:r>
+            <a:endParaRPr lang="en-US" sz="2100" dirty="0"/>
+          </a:p>
+          <a:p>
+            <a:r>
+              <a:rPr lang="en-US" sz="2100" dirty="0">
                 <a:solidFill>
                   <a:srgbClr val="17364A"/>
                 </a:solidFill>
@@ -14146,11 +15336,11 @@
               </a:rPr>
               <a:t>Without a governance charter, each program may develop its own rules.</a:t>
             </a:r>
-            <a:endParaRPr lang="en-US" sz="1700" dirty="0"/>
-          </a:p>
-          <a:p>
-            <a:r>
-              <a:rPr lang="en-US" sz="1700" dirty="0">
+            <a:endParaRPr lang="en-US" sz="2100" dirty="0"/>
+          </a:p>
+          <a:p>
+            <a:r>
+              <a:rPr lang="en-US" sz="2100" dirty="0">
                 <a:solidFill>
                   <a:srgbClr val="17364A"/>
                 </a:solidFill>
@@ -14158,29 +15348,15 @@
                 <a:ea typeface="Aptos" pitchFamily="34" charset="-122"/>
                 <a:cs typeface="Aptos" pitchFamily="34" charset="-120"/>
               </a:rPr>
-              <a:t>The communications office may require human review, the surveillance program may prohibit sensitive data entry, IT may.</a:t>
-            </a:r>
-            <a:endParaRPr lang="en-US" sz="1700" dirty="0"/>
-          </a:p>
-          <a:p>
-            <a:r>
-              <a:rPr lang="en-US" sz="1700" dirty="0">
-                <a:solidFill>
-                  <a:srgbClr val="17364A"/>
-                </a:solidFill>
-                <a:latin typeface="Aptos" pitchFamily="34" charset="0"/>
-                <a:ea typeface="Aptos" pitchFamily="34" charset="-122"/>
-                <a:cs typeface="Aptos" pitchFamily="34" charset="-120"/>
-              </a:rPr>
-              <a:t>A governance operating model brings these decisions into one structured process.</a:t>
-            </a:r>
-            <a:endParaRPr lang="en-US" sz="1700" dirty="0"/>
-          </a:p>
-        </p:txBody>
-      </p:sp>
-      <p:sp>
-        <p:nvSpPr>
-          <p:cNvPr id="11" name="Shape 9"/>
+              <a:t>The communications office may require human review, the surveillance program may prohibit sensitive.</a:t>
+            </a:r>
+            <a:endParaRPr lang="en-US" sz="2100" dirty="0"/>
+          </a:p>
+        </p:txBody>
+      </p:sp>
+      <p:sp>
+        <p:nvSpPr>
+          <p:cNvPr id="12" name="Shape 10"/>
           <p:cNvSpPr/>
           <p:nvPr/>
         </p:nvSpPr>
@@ -14207,14 +15383,14 @@
       </p:sp>
       <p:sp>
         <p:nvSpPr>
-          <p:cNvPr id="12" name="Text 10"/>
+          <p:cNvPr id="13" name="Text 11"/>
           <p:cNvSpPr/>
           <p:nvPr/>
         </p:nvSpPr>
         <p:spPr>
           <a:xfrm>
             <a:off x="8074152" y="1563624"/>
-            <a:ext cx="2825496" cy="201168"/>
+            <a:ext cx="2825496" cy="256032"/>
           </a:xfrm>
           <a:prstGeom prst="rect">
             <a:avLst/>
@@ -14230,7 +15406,7 @@
               <a:buNone/>
             </a:pPr>
             <a:r>
-              <a:rPr lang="en-US" sz="950" b="1" dirty="0">
+              <a:rPr lang="en-US" sz="1300" b="1" dirty="0">
                 <a:solidFill>
                   <a:srgbClr val="0068B7"/>
                 </a:solidFill>
@@ -14240,20 +15416,20 @@
               </a:rPr>
               <a:t>Key idea</a:t>
             </a:r>
-            <a:endParaRPr lang="en-US" sz="950" dirty="0"/>
-          </a:p>
-        </p:txBody>
-      </p:sp>
-      <p:sp>
-        <p:nvSpPr>
-          <p:cNvPr id="13" name="Text 11"/>
-          <p:cNvSpPr/>
-          <p:nvPr/>
-        </p:nvSpPr>
-        <p:spPr>
-          <a:xfrm>
-            <a:off x="8074152" y="1856232"/>
-            <a:ext cx="2825496" cy="1261872"/>
+            <a:endParaRPr lang="en-US" sz="1300" dirty="0"/>
+          </a:p>
+        </p:txBody>
+      </p:sp>
+      <p:sp>
+        <p:nvSpPr>
+          <p:cNvPr id="14" name="Text 12"/>
+          <p:cNvSpPr/>
+          <p:nvPr/>
+        </p:nvSpPr>
+        <p:spPr>
+          <a:xfrm>
+            <a:off x="8074152" y="1920240"/>
+            <a:ext cx="2825496" cy="1188720"/>
           </a:xfrm>
           <a:prstGeom prst="rect">
             <a:avLst/>
@@ -14271,7 +15447,7 @@
               <a:buNone/>
             </a:pPr>
             <a:r>
-              <a:rPr lang="en-US" sz="1250" dirty="0">
+              <a:rPr lang="en-US" sz="1550" dirty="0">
                 <a:solidFill>
                   <a:srgbClr val="17364A"/>
                 </a:solidFill>
@@ -14279,15 +15455,15 @@
                 <a:ea typeface="Aptos" pitchFamily="34" charset="-122"/>
                 <a:cs typeface="Aptos" pitchFamily="34" charset="-120"/>
               </a:rPr>
-              <a:t>A state health department wants to allow staff to use AI tools for program support, document review, code assistance, case.</a:t>
-            </a:r>
-            <a:endParaRPr lang="en-US" sz="1250" dirty="0"/>
-          </a:p>
-        </p:txBody>
-      </p:sp>
-      <p:sp>
-        <p:nvSpPr>
-          <p:cNvPr id="14" name="Shape 12"/>
+              <a:t>A state health department wants to allow staff to use AI tools for program support, document review,.</a:t>
+            </a:r>
+            <a:endParaRPr lang="en-US" sz="1550" dirty="0"/>
+          </a:p>
+        </p:txBody>
+      </p:sp>
+      <p:sp>
+        <p:nvSpPr>
+          <p:cNvPr id="15" name="Shape 13"/>
           <p:cNvSpPr/>
           <p:nvPr/>
         </p:nvSpPr>
@@ -14314,14 +15490,14 @@
       </p:sp>
       <p:sp>
         <p:nvSpPr>
-          <p:cNvPr id="15" name="Text 13"/>
+          <p:cNvPr id="16" name="Text 14"/>
           <p:cNvSpPr/>
           <p:nvPr/>
         </p:nvSpPr>
         <p:spPr>
           <a:xfrm>
             <a:off x="8074152" y="3666744"/>
-            <a:ext cx="2825496" cy="201168"/>
+            <a:ext cx="2825496" cy="256032"/>
           </a:xfrm>
           <a:prstGeom prst="rect">
             <a:avLst/>
@@ -14337,7 +15513,7 @@
               <a:buNone/>
             </a:pPr>
             <a:r>
-              <a:rPr lang="en-US" sz="950" b="1" dirty="0">
+              <a:rPr lang="en-US" sz="1300" b="1" dirty="0">
                 <a:solidFill>
                   <a:srgbClr val="0068B7"/>
                 </a:solidFill>
@@ -14347,20 +15523,20 @@
               </a:rPr>
               <a:t>Use this for</a:t>
             </a:r>
-            <a:endParaRPr lang="en-US" sz="950" dirty="0"/>
-          </a:p>
-        </p:txBody>
-      </p:sp>
-      <p:sp>
-        <p:nvSpPr>
-          <p:cNvPr id="16" name="Text 14"/>
-          <p:cNvSpPr/>
-          <p:nvPr/>
-        </p:nvSpPr>
-        <p:spPr>
-          <a:xfrm>
-            <a:off x="8074152" y="3959352"/>
-            <a:ext cx="2825496" cy="1170432"/>
+            <a:endParaRPr lang="en-US" sz="1300" dirty="0"/>
+          </a:p>
+        </p:txBody>
+      </p:sp>
+      <p:sp>
+        <p:nvSpPr>
+          <p:cNvPr id="17" name="Text 15"/>
+          <p:cNvSpPr/>
+          <p:nvPr/>
+        </p:nvSpPr>
+        <p:spPr>
+          <a:xfrm>
+            <a:off x="8074152" y="4023360"/>
+            <a:ext cx="2825496" cy="1097280"/>
           </a:xfrm>
           <a:prstGeom prst="rect">
             <a:avLst/>
@@ -14378,7 +15554,7 @@
               <a:buNone/>
             </a:pPr>
             <a:r>
-              <a:rPr lang="en-US" sz="1250" dirty="0">
+              <a:rPr lang="en-US" sz="1550" dirty="0">
                 <a:solidFill>
                   <a:srgbClr val="17364A"/>
                 </a:solidFill>
@@ -14388,7 +15564,7 @@
               </a:rPr>
               <a:t>Connect the concept to public health decisions, safeguards, documentation, or implementation work.</a:t>
             </a:r>
-            <a:endParaRPr lang="en-US" sz="1250" dirty="0"/>
+            <a:endParaRPr lang="en-US" sz="1550" dirty="0"/>
           </a:p>
         </p:txBody>
       </p:sp>
